--- a/docs/Technology_Explanation_Slides.pptx
+++ b/docs/Technology_Explanation_Slides.pptx
@@ -6561,7 +6561,7 @@
                 </a:solidFill>
                 <a:latin typeface="Calibri"/>
               </a:rPr>
-              <a:t>Multi-Agent Architecture</a:t>
+              <a:t>Multi-Agent Architecture: 12 Specialty Agents (PoC)</a:t>
             </a:r>
           </a:p>
         </p:txBody>
@@ -6575,7 +6575,7 @@
         <p:spPr>
           <a:xfrm>
             <a:off x="457200" y="841248"/>
-            <a:ext cx="3950208" cy="36576"/>
+            <a:ext cx="8394192" cy="36576"/>
           </a:xfrm>
           <a:prstGeom prst="rect">
             <a:avLst/>
@@ -6622,7 +6622,7 @@
           </a:xfrm>
           <a:prstGeom prst="roundRect">
             <a:avLst>
-              <a:gd name="adj" fmla="val 5000"/>
+              <a:gd name="adj" fmla="val 6000"/>
             </a:avLst>
           </a:prstGeom>
           <a:solidFill>
@@ -6671,6 +6671,121 @@
             <a:avLst/>
           </a:prstGeom>
           <a:solidFill>
+            <a:srgbClr val="CC4F1F"/>
+          </a:solidFill>
+          <a:ln>
+            <a:noFill/>
+          </a:ln>
+        </p:spPr>
+        <p:style>
+          <a:lnRef idx="1">
+            <a:schemeClr val="accent1"/>
+          </a:lnRef>
+          <a:fillRef idx="3">
+            <a:schemeClr val="accent1"/>
+          </a:fillRef>
+          <a:effectRef idx="2">
+            <a:schemeClr val="accent1"/>
+          </a:effectRef>
+          <a:fontRef idx="minor">
+            <a:schemeClr val="lt1"/>
+          </a:fontRef>
+        </p:style>
+        <p:txBody>
+          <a:bodyPr rtlCol="0" anchor="ctr"/>
+          <a:lstStyle/>
+          <a:p>
+            <a:pPr algn="ctr"/>
+          </a:p>
+        </p:txBody>
+      </p:sp>
+      <p:sp>
+        <p:nvSpPr>
+          <p:cNvPr id="9" name="TextBox 8"/>
+          <p:cNvSpPr txBox="1"/>
+          <p:nvPr/>
+        </p:nvSpPr>
+        <p:spPr>
+          <a:xfrm>
+            <a:off x="457200" y="1005840"/>
+            <a:ext cx="5303520" cy="457200"/>
+          </a:xfrm>
+          <a:prstGeom prst="rect">
+            <a:avLst/>
+          </a:prstGeom>
+          <a:noFill/>
+        </p:spPr>
+        <p:txBody>
+          <a:bodyPr wrap="none" anchor="ctr">
+            <a:spAutoFit/>
+          </a:bodyPr>
+          <a:lstStyle/>
+          <a:p>
+            <a:pPr algn="ctr"/>
+            <a:r>
+              <a:rPr sz="1300" b="1">
+                <a:solidFill>
+                  <a:srgbClr val="FFFFFF"/>
+                </a:solidFill>
+                <a:latin typeface="Calibri"/>
+              </a:rPr>
+              <a:t>How It Works</a:t>
+            </a:r>
+          </a:p>
+        </p:txBody>
+      </p:sp>
+      <p:sp>
+        <p:nvSpPr>
+          <p:cNvPr id="10" name="TextBox 9"/>
+          <p:cNvSpPr txBox="1"/>
+          <p:nvPr/>
+        </p:nvSpPr>
+        <p:spPr>
+          <a:xfrm>
+            <a:off x="640080" y="1572768"/>
+            <a:ext cx="4937760" cy="502920"/>
+          </a:xfrm>
+          <a:prstGeom prst="rect">
+            <a:avLst/>
+          </a:prstGeom>
+          <a:noFill/>
+        </p:spPr>
+        <p:txBody>
+          <a:bodyPr wrap="square">
+            <a:spAutoFit/>
+          </a:bodyPr>
+          <a:lstStyle/>
+          <a:p>
+            <a:pPr algn="l"/>
+            <a:r>
+              <a:rPr sz="1100" b="0" i="0">
+                <a:solidFill>
+                  <a:srgbClr val="2C3E50"/>
+                </a:solidFill>
+                <a:latin typeface="Calibri"/>
+              </a:rPr>
+              <a:t>Each department is a specialized agent: its own system prompt, clinical scope, and model. The router picks the right one.</a:t>
+            </a:r>
+          </a:p>
+        </p:txBody>
+      </p:sp>
+      <p:sp>
+        <p:nvSpPr>
+          <p:cNvPr id="11" name="Rounded Rectangle 10"/>
+          <p:cNvSpPr/>
+          <p:nvPr/>
+        </p:nvSpPr>
+        <p:spPr>
+          <a:xfrm>
+            <a:off x="640080" y="2176272"/>
+            <a:ext cx="4754880" cy="347472"/>
+          </a:xfrm>
+          <a:prstGeom prst="roundRect">
+            <a:avLst>
+              <a:gd name="adj" fmla="val 15000"/>
+            </a:avLst>
+          </a:prstGeom>
+          <a:solidFill>
             <a:srgbClr val="FF6B35"/>
           </a:solidFill>
           <a:ln>
@@ -6701,14 +6816,14 @@
       </p:sp>
       <p:sp>
         <p:nvSpPr>
-          <p:cNvPr id="9" name="TextBox 8"/>
-          <p:cNvSpPr txBox="1"/>
-          <p:nvPr/>
-        </p:nvSpPr>
-        <p:spPr>
-          <a:xfrm>
-            <a:off x="457200" y="1005840"/>
-            <a:ext cx="5303520" cy="457200"/>
+          <p:cNvPr id="12" name="TextBox 11"/>
+          <p:cNvSpPr txBox="1"/>
+          <p:nvPr/>
+        </p:nvSpPr>
+        <p:spPr>
+          <a:xfrm>
+            <a:off x="640080" y="2176272"/>
+            <a:ext cx="4754880" cy="347472"/>
           </a:xfrm>
           <a:prstGeom prst="rect">
             <a:avLst/>
@@ -6723,66 +6838,269 @@
           <a:p>
             <a:pPr algn="ctr"/>
             <a:r>
-              <a:rPr sz="1300" b="1">
+              <a:rPr sz="950" b="1">
                 <a:solidFill>
                   <a:srgbClr val="FFFFFF"/>
                 </a:solidFill>
                 <a:latin typeface="Calibri"/>
               </a:rPr>
-              <a:t>Why Multiple Agents?</a:t>
-            </a:r>
-          </a:p>
-        </p:txBody>
-      </p:sp>
-      <p:sp>
-        <p:nvSpPr>
-          <p:cNvPr id="10" name="TextBox 9"/>
-          <p:cNvSpPr txBox="1"/>
-          <p:nvPr/>
-        </p:nvSpPr>
-        <p:spPr>
-          <a:xfrm>
-            <a:off x="640080" y="1572768"/>
-            <a:ext cx="4937760" cy="914400"/>
-          </a:xfrm>
-          <a:prstGeom prst="rect">
-            <a:avLst/>
-          </a:prstGeom>
-          <a:noFill/>
-        </p:spPr>
-        <p:txBody>
-          <a:bodyPr wrap="square">
-            <a:spAutoFit/>
-          </a:bodyPr>
-          <a:lstStyle/>
-          <a:p>
-            <a:pPr algn="l"/>
-            <a:r>
-              <a:rPr sz="1100" b="0" i="0">
-                <a:solidFill>
-                  <a:srgbClr val="2C3E50"/>
-                </a:solidFill>
-                <a:latin typeface="Calibri"/>
-              </a:rPr>
-              <a:t>A single general AI gives generic answers. Specialty agents are trained with department-specific context, terminology, and protocols. A router agent classifies the question and dispatches to the right specialist.</a:t>
-            </a:r>
-          </a:p>
-        </p:txBody>
-      </p:sp>
-      <p:sp>
-        <p:nvSpPr>
-          <p:cNvPr id="11" name="Rounded Rectangle 10"/>
+              <a:t>Doctors question</a:t>
+            </a:r>
+          </a:p>
+        </p:txBody>
+      </p:sp>
+      <p:sp>
+        <p:nvSpPr>
+          <p:cNvPr id="13" name="Rounded Rectangle 12"/>
           <p:cNvSpPr/>
           <p:nvPr/>
         </p:nvSpPr>
         <p:spPr>
           <a:xfrm>
-            <a:off x="1828800" y="2651760"/>
-            <a:ext cx="1828800" cy="502920"/>
+            <a:off x="640080" y="2596896"/>
+            <a:ext cx="4754880" cy="347472"/>
           </a:xfrm>
           <a:prstGeom prst="roundRect">
             <a:avLst>
-              <a:gd name="adj" fmla="val 10000"/>
+              <a:gd name="adj" fmla="val 15000"/>
+            </a:avLst>
+          </a:prstGeom>
+          <a:solidFill>
+            <a:srgbClr val="FF6B35"/>
+          </a:solidFill>
+          <a:ln>
+            <a:noFill/>
+          </a:ln>
+        </p:spPr>
+        <p:style>
+          <a:lnRef idx="1">
+            <a:schemeClr val="accent1"/>
+          </a:lnRef>
+          <a:fillRef idx="3">
+            <a:schemeClr val="accent1"/>
+          </a:fillRef>
+          <a:effectRef idx="2">
+            <a:schemeClr val="accent1"/>
+          </a:effectRef>
+          <a:fontRef idx="minor">
+            <a:schemeClr val="lt1"/>
+          </a:fontRef>
+        </p:style>
+        <p:txBody>
+          <a:bodyPr rtlCol="0" anchor="ctr"/>
+          <a:lstStyle/>
+          <a:p>
+            <a:pPr algn="ctr"/>
+          </a:p>
+        </p:txBody>
+      </p:sp>
+      <p:sp>
+        <p:nvSpPr>
+          <p:cNvPr id="14" name="TextBox 13"/>
+          <p:cNvSpPr txBox="1"/>
+          <p:nvPr/>
+        </p:nvSpPr>
+        <p:spPr>
+          <a:xfrm>
+            <a:off x="640080" y="2596896"/>
+            <a:ext cx="4754880" cy="347472"/>
+          </a:xfrm>
+          <a:prstGeom prst="rect">
+            <a:avLst/>
+          </a:prstGeom>
+          <a:noFill/>
+        </p:spPr>
+        <p:txBody>
+          <a:bodyPr wrap="none" anchor="ctr">
+            <a:spAutoFit/>
+          </a:bodyPr>
+          <a:lstStyle/>
+          <a:p>
+            <a:pPr algn="ctr"/>
+            <a:r>
+              <a:rPr sz="950" b="1">
+                <a:solidFill>
+                  <a:srgbClr val="FFFFFF"/>
+                </a:solidFill>
+                <a:latin typeface="Calibri"/>
+              </a:rPr>
+              <a:t>PHI mask + cache check</a:t>
+            </a:r>
+          </a:p>
+        </p:txBody>
+      </p:sp>
+      <p:sp>
+        <p:nvSpPr>
+          <p:cNvPr id="15" name="Diamond 14"/>
+          <p:cNvSpPr/>
+          <p:nvPr/>
+        </p:nvSpPr>
+        <p:spPr>
+          <a:xfrm>
+            <a:off x="640080" y="3017520"/>
+            <a:ext cx="4754880" cy="347472"/>
+          </a:xfrm>
+          <a:prstGeom prst="diamond">
+            <a:avLst/>
+          </a:prstGeom>
+          <a:solidFill>
+            <a:srgbClr val="C0392B"/>
+          </a:solidFill>
+          <a:ln>
+            <a:noFill/>
+          </a:ln>
+        </p:spPr>
+        <p:style>
+          <a:lnRef idx="1">
+            <a:schemeClr val="accent1"/>
+          </a:lnRef>
+          <a:fillRef idx="3">
+            <a:schemeClr val="accent1"/>
+          </a:fillRef>
+          <a:effectRef idx="2">
+            <a:schemeClr val="accent1"/>
+          </a:effectRef>
+          <a:fontRef idx="minor">
+            <a:schemeClr val="lt1"/>
+          </a:fontRef>
+        </p:style>
+        <p:txBody>
+          <a:bodyPr rtlCol="0" anchor="ctr"/>
+          <a:lstStyle/>
+          <a:p>
+            <a:pPr algn="ctr"/>
+          </a:p>
+        </p:txBody>
+      </p:sp>
+      <p:sp>
+        <p:nvSpPr>
+          <p:cNvPr id="16" name="TextBox 15"/>
+          <p:cNvSpPr txBox="1"/>
+          <p:nvPr/>
+        </p:nvSpPr>
+        <p:spPr>
+          <a:xfrm>
+            <a:off x="640080" y="3017520"/>
+            <a:ext cx="4754880" cy="347472"/>
+          </a:xfrm>
+          <a:prstGeom prst="rect">
+            <a:avLst/>
+          </a:prstGeom>
+          <a:noFill/>
+        </p:spPr>
+        <p:txBody>
+          <a:bodyPr wrap="none" anchor="ctr">
+            <a:spAutoFit/>
+          </a:bodyPr>
+          <a:lstStyle/>
+          <a:p>
+            <a:pPr algn="ctr"/>
+            <a:r>
+              <a:rPr sz="950" b="1">
+                <a:solidFill>
+                  <a:srgbClr val="FFFFFF"/>
+                </a:solidFill>
+                <a:latin typeface="Calibri"/>
+              </a:rPr>
+              <a:t>Emergency toggle ON?</a:t>
+            </a:r>
+          </a:p>
+        </p:txBody>
+      </p:sp>
+      <p:sp>
+        <p:nvSpPr>
+          <p:cNvPr id="17" name="Rounded Rectangle 16"/>
+          <p:cNvSpPr/>
+          <p:nvPr/>
+        </p:nvSpPr>
+        <p:spPr>
+          <a:xfrm>
+            <a:off x="640080" y="3438144"/>
+            <a:ext cx="4754880" cy="347472"/>
+          </a:xfrm>
+          <a:prstGeom prst="roundRect">
+            <a:avLst>
+              <a:gd name="adj" fmla="val 15000"/>
+            </a:avLst>
+          </a:prstGeom>
+          <a:solidFill>
+            <a:srgbClr val="C0392B"/>
+          </a:solidFill>
+          <a:ln>
+            <a:noFill/>
+          </a:ln>
+        </p:spPr>
+        <p:style>
+          <a:lnRef idx="1">
+            <a:schemeClr val="accent1"/>
+          </a:lnRef>
+          <a:fillRef idx="3">
+            <a:schemeClr val="accent1"/>
+          </a:fillRef>
+          <a:effectRef idx="2">
+            <a:schemeClr val="accent1"/>
+          </a:effectRef>
+          <a:fontRef idx="minor">
+            <a:schemeClr val="lt1"/>
+          </a:fontRef>
+        </p:style>
+        <p:txBody>
+          <a:bodyPr rtlCol="0" anchor="ctr"/>
+          <a:lstStyle/>
+          <a:p>
+            <a:pPr algn="ctr"/>
+          </a:p>
+        </p:txBody>
+      </p:sp>
+      <p:sp>
+        <p:nvSpPr>
+          <p:cNvPr id="18" name="TextBox 17"/>
+          <p:cNvSpPr txBox="1"/>
+          <p:nvPr/>
+        </p:nvSpPr>
+        <p:spPr>
+          <a:xfrm>
+            <a:off x="640080" y="3438144"/>
+            <a:ext cx="4754880" cy="347472"/>
+          </a:xfrm>
+          <a:prstGeom prst="rect">
+            <a:avLst/>
+          </a:prstGeom>
+          <a:noFill/>
+        </p:spPr>
+        <p:txBody>
+          <a:bodyPr wrap="none" anchor="ctr">
+            <a:spAutoFit/>
+          </a:bodyPr>
+          <a:lstStyle/>
+          <a:p>
+            <a:pPr algn="ctr"/>
+            <a:r>
+              <a:rPr sz="950" b="1">
+                <a:solidFill>
+                  <a:srgbClr val="FFFFFF"/>
+                </a:solidFill>
+                <a:latin typeface="Calibri"/>
+              </a:rPr>
+              <a:t>YES: Emergency agent (Haiku 4.5)</a:t>
+            </a:r>
+          </a:p>
+        </p:txBody>
+      </p:sp>
+      <p:sp>
+        <p:nvSpPr>
+          <p:cNvPr id="19" name="Rounded Rectangle 18"/>
+          <p:cNvSpPr/>
+          <p:nvPr/>
+        </p:nvSpPr>
+        <p:spPr>
+          <a:xfrm>
+            <a:off x="640080" y="3858768"/>
+            <a:ext cx="4754880" cy="347472"/>
+          </a:xfrm>
+          <a:prstGeom prst="roundRect">
+            <a:avLst>
+              <a:gd name="adj" fmla="val 15000"/>
             </a:avLst>
           </a:prstGeom>
           <a:solidFill>
@@ -6816,14 +7134,14 @@
       </p:sp>
       <p:sp>
         <p:nvSpPr>
-          <p:cNvPr id="12" name="TextBox 11"/>
-          <p:cNvSpPr txBox="1"/>
-          <p:nvPr/>
-        </p:nvSpPr>
-        <p:spPr>
-          <a:xfrm>
-            <a:off x="1828800" y="2651760"/>
-            <a:ext cx="1828800" cy="502920"/>
+          <p:cNvPr id="20" name="TextBox 19"/>
+          <p:cNvSpPr txBox="1"/>
+          <p:nvPr/>
+        </p:nvSpPr>
+        <p:spPr>
+          <a:xfrm>
+            <a:off x="640080" y="3858768"/>
+            <a:ext cx="4754880" cy="347472"/>
           </a:xfrm>
           <a:prstGeom prst="rect">
             <a:avLst/>
@@ -6838,32 +7156,31 @@
           <a:p>
             <a:pPr algn="ctr"/>
             <a:r>
-              <a:rPr sz="900" b="1">
+              <a:rPr sz="950" b="1">
                 <a:solidFill>
                   <a:srgbClr val="FFFFFF"/>
                 </a:solidFill>
                 <a:latin typeface="Calibri"/>
               </a:rPr>
-              <a:t>Router Agent
-(Nova Micro / Qwen Flash)</a:t>
-            </a:r>
-          </a:p>
-        </p:txBody>
-      </p:sp>
-      <p:sp>
-        <p:nvSpPr>
-          <p:cNvPr id="13" name="Rounded Rectangle 12"/>
+              <a:t>NO: Router (Nova Micro, JSON mode)</a:t>
+            </a:r>
+          </a:p>
+        </p:txBody>
+      </p:sp>
+      <p:sp>
+        <p:nvSpPr>
+          <p:cNvPr id="21" name="Rounded Rectangle 20"/>
           <p:cNvSpPr/>
           <p:nvPr/>
         </p:nvSpPr>
         <p:spPr>
           <a:xfrm>
-            <a:off x="548640" y="3749039"/>
-            <a:ext cx="868680" cy="594360"/>
+            <a:off x="640080" y="4279392"/>
+            <a:ext cx="4754880" cy="347472"/>
           </a:xfrm>
           <a:prstGeom prst="roundRect">
             <a:avLst>
-              <a:gd name="adj" fmla="val 10000"/>
+              <a:gd name="adj" fmla="val 15000"/>
             </a:avLst>
           </a:prstGeom>
           <a:solidFill>
@@ -6897,14 +7214,14 @@
       </p:sp>
       <p:sp>
         <p:nvSpPr>
-          <p:cNvPr id="14" name="TextBox 13"/>
-          <p:cNvSpPr txBox="1"/>
-          <p:nvPr/>
-        </p:nvSpPr>
-        <p:spPr>
-          <a:xfrm>
-            <a:off x="548640" y="3749039"/>
-            <a:ext cx="868680" cy="594360"/>
+          <p:cNvPr id="22" name="TextBox 21"/>
+          <p:cNvSpPr txBox="1"/>
+          <p:nvPr/>
+        </p:nvSpPr>
+        <p:spPr>
+          <a:xfrm>
+            <a:off x="640080" y="4279392"/>
+            <a:ext cx="4754880" cy="347472"/>
           </a:xfrm>
           <a:prstGeom prst="rect">
             <a:avLst/>
@@ -6919,33 +7236,237 @@
           <a:p>
             <a:pPr algn="ctr"/>
             <a:r>
-              <a:rPr sz="800" b="1">
+              <a:rPr sz="950" b="1">
                 <a:solidFill>
                   <a:srgbClr val="FFFFFF"/>
                 </a:solidFill>
                 <a:latin typeface="Calibri"/>
               </a:rPr>
-              <a:t>Emergency
-Haiku 4.5</a:t>
-            </a:r>
-          </a:p>
-        </p:txBody>
-      </p:sp>
-      <p:sp>
-        <p:nvSpPr>
-          <p:cNvPr id="15" name="Rounded Rectangle 14"/>
+              <a:t>Routes to 1 of 12 specialty agents</a:t>
+            </a:r>
+          </a:p>
+        </p:txBody>
+      </p:sp>
+      <p:sp>
+        <p:nvSpPr>
+          <p:cNvPr id="23" name="Rounded Rectangle 22"/>
           <p:cNvSpPr/>
           <p:nvPr/>
         </p:nvSpPr>
         <p:spPr>
           <a:xfrm>
-            <a:off x="1554480" y="3749039"/>
-            <a:ext cx="868680" cy="594360"/>
+            <a:off x="640080" y="4700016"/>
+            <a:ext cx="4754880" cy="347472"/>
           </a:xfrm>
           <a:prstGeom prst="roundRect">
             <a:avLst>
-              <a:gd name="adj" fmla="val 10000"/>
+              <a:gd name="adj" fmla="val 15000"/>
             </a:avLst>
+          </a:prstGeom>
+          <a:solidFill>
+            <a:srgbClr val="CC4F1F"/>
+          </a:solidFill>
+          <a:ln>
+            <a:noFill/>
+          </a:ln>
+        </p:spPr>
+        <p:style>
+          <a:lnRef idx="1">
+            <a:schemeClr val="accent1"/>
+          </a:lnRef>
+          <a:fillRef idx="3">
+            <a:schemeClr val="accent1"/>
+          </a:fillRef>
+          <a:effectRef idx="2">
+            <a:schemeClr val="accent1"/>
+          </a:effectRef>
+          <a:fontRef idx="minor">
+            <a:schemeClr val="lt1"/>
+          </a:fontRef>
+        </p:style>
+        <p:txBody>
+          <a:bodyPr rtlCol="0" anchor="ctr"/>
+          <a:lstStyle/>
+          <a:p>
+            <a:pPr algn="ctr"/>
+          </a:p>
+        </p:txBody>
+      </p:sp>
+      <p:sp>
+        <p:nvSpPr>
+          <p:cNvPr id="24" name="TextBox 23"/>
+          <p:cNvSpPr txBox="1"/>
+          <p:nvPr/>
+        </p:nvSpPr>
+        <p:spPr>
+          <a:xfrm>
+            <a:off x="640080" y="4700016"/>
+            <a:ext cx="4754880" cy="347472"/>
+          </a:xfrm>
+          <a:prstGeom prst="rect">
+            <a:avLst/>
+          </a:prstGeom>
+          <a:noFill/>
+        </p:spPr>
+        <p:txBody>
+          <a:bodyPr wrap="none" anchor="ctr">
+            <a:spAutoFit/>
+          </a:bodyPr>
+          <a:lstStyle/>
+          <a:p>
+            <a:pPr algn="ctr"/>
+            <a:r>
+              <a:rPr sz="950" b="1">
+                <a:solidFill>
+                  <a:srgbClr val="FFFFFF"/>
+                </a:solidFill>
+                <a:latin typeface="Calibri"/>
+              </a:rPr>
+              <a:t>Specialty agent (Sonnet 4.5) generates answer</a:t>
+            </a:r>
+          </a:p>
+        </p:txBody>
+      </p:sp>
+      <p:sp>
+        <p:nvSpPr>
+          <p:cNvPr id="25" name="Rounded Rectangle 24"/>
+          <p:cNvSpPr/>
+          <p:nvPr/>
+        </p:nvSpPr>
+        <p:spPr>
+          <a:xfrm>
+            <a:off x="640080" y="5120640"/>
+            <a:ext cx="4754880" cy="347472"/>
+          </a:xfrm>
+          <a:prstGeom prst="roundRect">
+            <a:avLst>
+              <a:gd name="adj" fmla="val 15000"/>
+            </a:avLst>
+          </a:prstGeom>
+          <a:solidFill>
+            <a:srgbClr val="27AE60"/>
+          </a:solidFill>
+          <a:ln>
+            <a:noFill/>
+          </a:ln>
+        </p:spPr>
+        <p:style>
+          <a:lnRef idx="1">
+            <a:schemeClr val="accent1"/>
+          </a:lnRef>
+          <a:fillRef idx="3">
+            <a:schemeClr val="accent1"/>
+          </a:fillRef>
+          <a:effectRef idx="2">
+            <a:schemeClr val="accent1"/>
+          </a:effectRef>
+          <a:fontRef idx="minor">
+            <a:schemeClr val="lt1"/>
+          </a:fontRef>
+        </p:style>
+        <p:txBody>
+          <a:bodyPr rtlCol="0" anchor="ctr"/>
+          <a:lstStyle/>
+          <a:p>
+            <a:pPr algn="ctr"/>
+          </a:p>
+        </p:txBody>
+      </p:sp>
+      <p:sp>
+        <p:nvSpPr>
+          <p:cNvPr id="26" name="TextBox 25"/>
+          <p:cNvSpPr txBox="1"/>
+          <p:nvPr/>
+        </p:nvSpPr>
+        <p:spPr>
+          <a:xfrm>
+            <a:off x="640080" y="5120640"/>
+            <a:ext cx="4754880" cy="347472"/>
+          </a:xfrm>
+          <a:prstGeom prst="rect">
+            <a:avLst/>
+          </a:prstGeom>
+          <a:noFill/>
+        </p:spPr>
+        <p:txBody>
+          <a:bodyPr wrap="none" anchor="ctr">
+            <a:spAutoFit/>
+          </a:bodyPr>
+          <a:lstStyle/>
+          <a:p>
+            <a:pPr algn="ctr"/>
+            <a:r>
+              <a:rPr sz="950" b="1">
+                <a:solidFill>
+                  <a:srgbClr val="FFFFFF"/>
+                </a:solidFill>
+                <a:latin typeface="Calibri"/>
+              </a:rPr>
+              <a:t>Citations validated + streamed to browser</a:t>
+            </a:r>
+          </a:p>
+        </p:txBody>
+      </p:sp>
+      <p:sp>
+        <p:nvSpPr>
+          <p:cNvPr id="27" name="Rounded Rectangle 26"/>
+          <p:cNvSpPr/>
+          <p:nvPr/>
+        </p:nvSpPr>
+        <p:spPr>
+          <a:xfrm>
+            <a:off x="6035040" y="1005840"/>
+            <a:ext cx="5669280" cy="5029200"/>
+          </a:xfrm>
+          <a:prstGeom prst="roundRect">
+            <a:avLst>
+              <a:gd name="adj" fmla="val 6000"/>
+            </a:avLst>
+          </a:prstGeom>
+          <a:solidFill>
+            <a:srgbClr val="FFFFFF"/>
+          </a:solidFill>
+          <a:ln w="19050">
+            <a:solidFill>
+              <a:srgbClr val="FF6B35"/>
+            </a:solidFill>
+          </a:ln>
+        </p:spPr>
+        <p:style>
+          <a:lnRef idx="1">
+            <a:schemeClr val="accent1"/>
+          </a:lnRef>
+          <a:fillRef idx="3">
+            <a:schemeClr val="accent1"/>
+          </a:fillRef>
+          <a:effectRef idx="2">
+            <a:schemeClr val="accent1"/>
+          </a:effectRef>
+          <a:fontRef idx="minor">
+            <a:schemeClr val="lt1"/>
+          </a:fontRef>
+        </p:style>
+        <p:txBody>
+          <a:bodyPr rtlCol="0" anchor="ctr"/>
+          <a:lstStyle/>
+          <a:p>
+            <a:pPr algn="ctr"/>
+          </a:p>
+        </p:txBody>
+      </p:sp>
+      <p:sp>
+        <p:nvSpPr>
+          <p:cNvPr id="28" name="Rectangle 27"/>
+          <p:cNvSpPr/>
+          <p:nvPr/>
+        </p:nvSpPr>
+        <p:spPr>
+          <a:xfrm>
+            <a:off x="6035040" y="1005840"/>
+            <a:ext cx="5669280" cy="457200"/>
+          </a:xfrm>
+          <a:prstGeom prst="rect">
+            <a:avLst/>
           </a:prstGeom>
           <a:solidFill>
             <a:srgbClr val="FF6B35"/>
@@ -6978,14 +7499,14 @@
       </p:sp>
       <p:sp>
         <p:nvSpPr>
-          <p:cNvPr id="16" name="TextBox 15"/>
-          <p:cNvSpPr txBox="1"/>
-          <p:nvPr/>
-        </p:nvSpPr>
-        <p:spPr>
-          <a:xfrm>
-            <a:off x="1554480" y="3749039"/>
-            <a:ext cx="868680" cy="594360"/>
+          <p:cNvPr id="29" name="TextBox 28"/>
+          <p:cNvSpPr txBox="1"/>
+          <p:nvPr/>
+        </p:nvSpPr>
+        <p:spPr>
+          <a:xfrm>
+            <a:off x="6035040" y="1005840"/>
+            <a:ext cx="5669280" cy="457200"/>
           </a:xfrm>
           <a:prstGeom prst="rect">
             <a:avLst/>
@@ -7000,32 +7521,1435 @@
           <a:p>
             <a:pPr algn="ctr"/>
             <a:r>
-              <a:rPr sz="800" b="1">
+              <a:rPr sz="1300" b="1">
                 <a:solidFill>
                   <a:srgbClr val="FFFFFF"/>
                 </a:solidFill>
                 <a:latin typeface="Calibri"/>
               </a:rPr>
-              <a:t>Cardiology
-Sonnet 4.5</a:t>
-            </a:r>
-          </a:p>
-        </p:txBody>
-      </p:sp>
-      <p:sp>
-        <p:nvSpPr>
-          <p:cNvPr id="17" name="Rounded Rectangle 16"/>
+              <a:t>12 Deployed Department Agents (PoC)</a:t>
+            </a:r>
+          </a:p>
+        </p:txBody>
+      </p:sp>
+      <p:sp>
+        <p:nvSpPr>
+          <p:cNvPr id="30" name="Rounded Rectangle 29"/>
           <p:cNvSpPr/>
           <p:nvPr/>
         </p:nvSpPr>
         <p:spPr>
           <a:xfrm>
-            <a:off x="2560320" y="3749039"/>
-            <a:ext cx="868680" cy="594360"/>
+            <a:off x="6126480" y="1572768"/>
+            <a:ext cx="1737360" cy="658368"/>
           </a:xfrm>
           <a:prstGeom prst="roundRect">
             <a:avLst>
               <a:gd name="adj" fmla="val 10000"/>
+            </a:avLst>
+          </a:prstGeom>
+          <a:solidFill>
+            <a:srgbClr val="FFE8DA"/>
+          </a:solidFill>
+          <a:ln w="19050">
+            <a:solidFill>
+              <a:srgbClr val="C0392B"/>
+            </a:solidFill>
+          </a:ln>
+        </p:spPr>
+        <p:style>
+          <a:lnRef idx="1">
+            <a:schemeClr val="accent1"/>
+          </a:lnRef>
+          <a:fillRef idx="3">
+            <a:schemeClr val="accent1"/>
+          </a:fillRef>
+          <a:effectRef idx="2">
+            <a:schemeClr val="accent1"/>
+          </a:effectRef>
+          <a:fontRef idx="minor">
+            <a:schemeClr val="lt1"/>
+          </a:fontRef>
+        </p:style>
+        <p:txBody>
+          <a:bodyPr rtlCol="0" anchor="ctr"/>
+          <a:lstStyle/>
+          <a:p>
+            <a:pPr algn="ctr"/>
+          </a:p>
+        </p:txBody>
+      </p:sp>
+      <p:sp>
+        <p:nvSpPr>
+          <p:cNvPr id="31" name="TextBox 30"/>
+          <p:cNvSpPr txBox="1"/>
+          <p:nvPr/>
+        </p:nvSpPr>
+        <p:spPr>
+          <a:xfrm>
+            <a:off x="6199632" y="1645920"/>
+            <a:ext cx="1591056" cy="320040"/>
+          </a:xfrm>
+          <a:prstGeom prst="rect">
+            <a:avLst/>
+          </a:prstGeom>
+          <a:noFill/>
+        </p:spPr>
+        <p:txBody>
+          <a:bodyPr wrap="square">
+            <a:spAutoFit/>
+          </a:bodyPr>
+          <a:lstStyle/>
+          <a:p>
+            <a:pPr algn="l"/>
+            <a:r>
+              <a:rPr sz="1000" b="1" i="0">
+                <a:solidFill>
+                  <a:srgbClr val="C0392B"/>
+                </a:solidFill>
+                <a:latin typeface="Calibri"/>
+              </a:rPr>
+              <a:t>Emergency</a:t>
+            </a:r>
+          </a:p>
+        </p:txBody>
+      </p:sp>
+      <p:sp>
+        <p:nvSpPr>
+          <p:cNvPr id="32" name="TextBox 31"/>
+          <p:cNvSpPr txBox="1"/>
+          <p:nvPr/>
+        </p:nvSpPr>
+        <p:spPr>
+          <a:xfrm>
+            <a:off x="6199632" y="1956816"/>
+            <a:ext cx="1591056" cy="228600"/>
+          </a:xfrm>
+          <a:prstGeom prst="rect">
+            <a:avLst/>
+          </a:prstGeom>
+          <a:noFill/>
+        </p:spPr>
+        <p:txBody>
+          <a:bodyPr wrap="square">
+            <a:spAutoFit/>
+          </a:bodyPr>
+          <a:lstStyle/>
+          <a:p>
+            <a:pPr algn="l"/>
+            <a:r>
+              <a:rPr sz="850" b="0" i="1">
+                <a:solidFill>
+                  <a:srgbClr val="646464"/>
+                </a:solidFill>
+                <a:latin typeface="Calibri"/>
+              </a:rPr>
+              <a:t>Haiku 4.5</a:t>
+            </a:r>
+          </a:p>
+        </p:txBody>
+      </p:sp>
+      <p:sp>
+        <p:nvSpPr>
+          <p:cNvPr id="33" name="Rounded Rectangle 32"/>
+          <p:cNvSpPr/>
+          <p:nvPr/>
+        </p:nvSpPr>
+        <p:spPr>
+          <a:xfrm>
+            <a:off x="7955280" y="1572768"/>
+            <a:ext cx="1737360" cy="658368"/>
+          </a:xfrm>
+          <a:prstGeom prst="roundRect">
+            <a:avLst>
+              <a:gd name="adj" fmla="val 10000"/>
+            </a:avLst>
+          </a:prstGeom>
+          <a:solidFill>
+            <a:srgbClr val="FFFFFF"/>
+          </a:solidFill>
+          <a:ln w="19050">
+            <a:solidFill>
+              <a:srgbClr val="CC4F1F"/>
+            </a:solidFill>
+          </a:ln>
+        </p:spPr>
+        <p:style>
+          <a:lnRef idx="1">
+            <a:schemeClr val="accent1"/>
+          </a:lnRef>
+          <a:fillRef idx="3">
+            <a:schemeClr val="accent1"/>
+          </a:fillRef>
+          <a:effectRef idx="2">
+            <a:schemeClr val="accent1"/>
+          </a:effectRef>
+          <a:fontRef idx="minor">
+            <a:schemeClr val="lt1"/>
+          </a:fontRef>
+        </p:style>
+        <p:txBody>
+          <a:bodyPr rtlCol="0" anchor="ctr"/>
+          <a:lstStyle/>
+          <a:p>
+            <a:pPr algn="ctr"/>
+          </a:p>
+        </p:txBody>
+      </p:sp>
+      <p:sp>
+        <p:nvSpPr>
+          <p:cNvPr id="34" name="TextBox 33"/>
+          <p:cNvSpPr txBox="1"/>
+          <p:nvPr/>
+        </p:nvSpPr>
+        <p:spPr>
+          <a:xfrm>
+            <a:off x="8028432" y="1645920"/>
+            <a:ext cx="1591056" cy="320040"/>
+          </a:xfrm>
+          <a:prstGeom prst="rect">
+            <a:avLst/>
+          </a:prstGeom>
+          <a:noFill/>
+        </p:spPr>
+        <p:txBody>
+          <a:bodyPr wrap="square">
+            <a:spAutoFit/>
+          </a:bodyPr>
+          <a:lstStyle/>
+          <a:p>
+            <a:pPr algn="l"/>
+            <a:r>
+              <a:rPr sz="1000" b="1" i="0">
+                <a:solidFill>
+                  <a:srgbClr val="CC4F1F"/>
+                </a:solidFill>
+                <a:latin typeface="Calibri"/>
+              </a:rPr>
+              <a:t>Cardiology</a:t>
+            </a:r>
+          </a:p>
+        </p:txBody>
+      </p:sp>
+      <p:sp>
+        <p:nvSpPr>
+          <p:cNvPr id="35" name="TextBox 34"/>
+          <p:cNvSpPr txBox="1"/>
+          <p:nvPr/>
+        </p:nvSpPr>
+        <p:spPr>
+          <a:xfrm>
+            <a:off x="8028432" y="1956816"/>
+            <a:ext cx="1591056" cy="228600"/>
+          </a:xfrm>
+          <a:prstGeom prst="rect">
+            <a:avLst/>
+          </a:prstGeom>
+          <a:noFill/>
+        </p:spPr>
+        <p:txBody>
+          <a:bodyPr wrap="square">
+            <a:spAutoFit/>
+          </a:bodyPr>
+          <a:lstStyle/>
+          <a:p>
+            <a:pPr algn="l"/>
+            <a:r>
+              <a:rPr sz="850" b="0" i="1">
+                <a:solidFill>
+                  <a:srgbClr val="646464"/>
+                </a:solidFill>
+                <a:latin typeface="Calibri"/>
+              </a:rPr>
+              <a:t>Sonnet 4.5</a:t>
+            </a:r>
+          </a:p>
+        </p:txBody>
+      </p:sp>
+      <p:sp>
+        <p:nvSpPr>
+          <p:cNvPr id="36" name="Rounded Rectangle 35"/>
+          <p:cNvSpPr/>
+          <p:nvPr/>
+        </p:nvSpPr>
+        <p:spPr>
+          <a:xfrm>
+            <a:off x="9784080" y="1572768"/>
+            <a:ext cx="1737360" cy="658368"/>
+          </a:xfrm>
+          <a:prstGeom prst="roundRect">
+            <a:avLst>
+              <a:gd name="adj" fmla="val 10000"/>
+            </a:avLst>
+          </a:prstGeom>
+          <a:solidFill>
+            <a:srgbClr val="FFE8DA"/>
+          </a:solidFill>
+          <a:ln w="19050">
+            <a:solidFill>
+              <a:srgbClr val="CC4F1F"/>
+            </a:solidFill>
+          </a:ln>
+        </p:spPr>
+        <p:style>
+          <a:lnRef idx="1">
+            <a:schemeClr val="accent1"/>
+          </a:lnRef>
+          <a:fillRef idx="3">
+            <a:schemeClr val="accent1"/>
+          </a:fillRef>
+          <a:effectRef idx="2">
+            <a:schemeClr val="accent1"/>
+          </a:effectRef>
+          <a:fontRef idx="minor">
+            <a:schemeClr val="lt1"/>
+          </a:fontRef>
+        </p:style>
+        <p:txBody>
+          <a:bodyPr rtlCol="0" anchor="ctr"/>
+          <a:lstStyle/>
+          <a:p>
+            <a:pPr algn="ctr"/>
+          </a:p>
+        </p:txBody>
+      </p:sp>
+      <p:sp>
+        <p:nvSpPr>
+          <p:cNvPr id="37" name="TextBox 36"/>
+          <p:cNvSpPr txBox="1"/>
+          <p:nvPr/>
+        </p:nvSpPr>
+        <p:spPr>
+          <a:xfrm>
+            <a:off x="9857232" y="1645920"/>
+            <a:ext cx="1591056" cy="320040"/>
+          </a:xfrm>
+          <a:prstGeom prst="rect">
+            <a:avLst/>
+          </a:prstGeom>
+          <a:noFill/>
+        </p:spPr>
+        <p:txBody>
+          <a:bodyPr wrap="square">
+            <a:spAutoFit/>
+          </a:bodyPr>
+          <a:lstStyle/>
+          <a:p>
+            <a:pPr algn="l"/>
+            <a:r>
+              <a:rPr sz="1000" b="1" i="0">
+                <a:solidFill>
+                  <a:srgbClr val="CC4F1F"/>
+                </a:solidFill>
+                <a:latin typeface="Calibri"/>
+              </a:rPr>
+              <a:t>Pulmonology</a:t>
+            </a:r>
+          </a:p>
+        </p:txBody>
+      </p:sp>
+      <p:sp>
+        <p:nvSpPr>
+          <p:cNvPr id="38" name="TextBox 37"/>
+          <p:cNvSpPr txBox="1"/>
+          <p:nvPr/>
+        </p:nvSpPr>
+        <p:spPr>
+          <a:xfrm>
+            <a:off x="9857232" y="1956816"/>
+            <a:ext cx="1591056" cy="228600"/>
+          </a:xfrm>
+          <a:prstGeom prst="rect">
+            <a:avLst/>
+          </a:prstGeom>
+          <a:noFill/>
+        </p:spPr>
+        <p:txBody>
+          <a:bodyPr wrap="square">
+            <a:spAutoFit/>
+          </a:bodyPr>
+          <a:lstStyle/>
+          <a:p>
+            <a:pPr algn="l"/>
+            <a:r>
+              <a:rPr sz="850" b="0" i="1">
+                <a:solidFill>
+                  <a:srgbClr val="646464"/>
+                </a:solidFill>
+                <a:latin typeface="Calibri"/>
+              </a:rPr>
+              <a:t>Sonnet 4.5</a:t>
+            </a:r>
+          </a:p>
+        </p:txBody>
+      </p:sp>
+      <p:sp>
+        <p:nvSpPr>
+          <p:cNvPr id="39" name="Rounded Rectangle 38"/>
+          <p:cNvSpPr/>
+          <p:nvPr/>
+        </p:nvSpPr>
+        <p:spPr>
+          <a:xfrm>
+            <a:off x="6126480" y="2322576"/>
+            <a:ext cx="1737360" cy="658368"/>
+          </a:xfrm>
+          <a:prstGeom prst="roundRect">
+            <a:avLst>
+              <a:gd name="adj" fmla="val 10000"/>
+            </a:avLst>
+          </a:prstGeom>
+          <a:solidFill>
+            <a:srgbClr val="FFFFFF"/>
+          </a:solidFill>
+          <a:ln w="19050">
+            <a:solidFill>
+              <a:srgbClr val="CC4F1F"/>
+            </a:solidFill>
+          </a:ln>
+        </p:spPr>
+        <p:style>
+          <a:lnRef idx="1">
+            <a:schemeClr val="accent1"/>
+          </a:lnRef>
+          <a:fillRef idx="3">
+            <a:schemeClr val="accent1"/>
+          </a:fillRef>
+          <a:effectRef idx="2">
+            <a:schemeClr val="accent1"/>
+          </a:effectRef>
+          <a:fontRef idx="minor">
+            <a:schemeClr val="lt1"/>
+          </a:fontRef>
+        </p:style>
+        <p:txBody>
+          <a:bodyPr rtlCol="0" anchor="ctr"/>
+          <a:lstStyle/>
+          <a:p>
+            <a:pPr algn="ctr"/>
+          </a:p>
+        </p:txBody>
+      </p:sp>
+      <p:sp>
+        <p:nvSpPr>
+          <p:cNvPr id="40" name="TextBox 39"/>
+          <p:cNvSpPr txBox="1"/>
+          <p:nvPr/>
+        </p:nvSpPr>
+        <p:spPr>
+          <a:xfrm>
+            <a:off x="6199632" y="2395728"/>
+            <a:ext cx="1591056" cy="320040"/>
+          </a:xfrm>
+          <a:prstGeom prst="rect">
+            <a:avLst/>
+          </a:prstGeom>
+          <a:noFill/>
+        </p:spPr>
+        <p:txBody>
+          <a:bodyPr wrap="square">
+            <a:spAutoFit/>
+          </a:bodyPr>
+          <a:lstStyle/>
+          <a:p>
+            <a:pPr algn="l"/>
+            <a:r>
+              <a:rPr sz="1000" b="1" i="0">
+                <a:solidFill>
+                  <a:srgbClr val="CC4F1F"/>
+                </a:solidFill>
+                <a:latin typeface="Calibri"/>
+              </a:rPr>
+              <a:t>Gastroenterology</a:t>
+            </a:r>
+          </a:p>
+        </p:txBody>
+      </p:sp>
+      <p:sp>
+        <p:nvSpPr>
+          <p:cNvPr id="41" name="TextBox 40"/>
+          <p:cNvSpPr txBox="1"/>
+          <p:nvPr/>
+        </p:nvSpPr>
+        <p:spPr>
+          <a:xfrm>
+            <a:off x="6199632" y="2706624"/>
+            <a:ext cx="1591056" cy="228600"/>
+          </a:xfrm>
+          <a:prstGeom prst="rect">
+            <a:avLst/>
+          </a:prstGeom>
+          <a:noFill/>
+        </p:spPr>
+        <p:txBody>
+          <a:bodyPr wrap="square">
+            <a:spAutoFit/>
+          </a:bodyPr>
+          <a:lstStyle/>
+          <a:p>
+            <a:pPr algn="l"/>
+            <a:r>
+              <a:rPr sz="850" b="0" i="1">
+                <a:solidFill>
+                  <a:srgbClr val="646464"/>
+                </a:solidFill>
+                <a:latin typeface="Calibri"/>
+              </a:rPr>
+              <a:t>Sonnet 4.5</a:t>
+            </a:r>
+          </a:p>
+        </p:txBody>
+      </p:sp>
+      <p:sp>
+        <p:nvSpPr>
+          <p:cNvPr id="42" name="Rounded Rectangle 41"/>
+          <p:cNvSpPr/>
+          <p:nvPr/>
+        </p:nvSpPr>
+        <p:spPr>
+          <a:xfrm>
+            <a:off x="7955280" y="2322576"/>
+            <a:ext cx="1737360" cy="658368"/>
+          </a:xfrm>
+          <a:prstGeom prst="roundRect">
+            <a:avLst>
+              <a:gd name="adj" fmla="val 10000"/>
+            </a:avLst>
+          </a:prstGeom>
+          <a:solidFill>
+            <a:srgbClr val="FFE8DA"/>
+          </a:solidFill>
+          <a:ln w="19050">
+            <a:solidFill>
+              <a:srgbClr val="CC4F1F"/>
+            </a:solidFill>
+          </a:ln>
+        </p:spPr>
+        <p:style>
+          <a:lnRef idx="1">
+            <a:schemeClr val="accent1"/>
+          </a:lnRef>
+          <a:fillRef idx="3">
+            <a:schemeClr val="accent1"/>
+          </a:fillRef>
+          <a:effectRef idx="2">
+            <a:schemeClr val="accent1"/>
+          </a:effectRef>
+          <a:fontRef idx="minor">
+            <a:schemeClr val="lt1"/>
+          </a:fontRef>
+        </p:style>
+        <p:txBody>
+          <a:bodyPr rtlCol="0" anchor="ctr"/>
+          <a:lstStyle/>
+          <a:p>
+            <a:pPr algn="ctr"/>
+          </a:p>
+        </p:txBody>
+      </p:sp>
+      <p:sp>
+        <p:nvSpPr>
+          <p:cNvPr id="43" name="TextBox 42"/>
+          <p:cNvSpPr txBox="1"/>
+          <p:nvPr/>
+        </p:nvSpPr>
+        <p:spPr>
+          <a:xfrm>
+            <a:off x="8028432" y="2395728"/>
+            <a:ext cx="1591056" cy="320040"/>
+          </a:xfrm>
+          <a:prstGeom prst="rect">
+            <a:avLst/>
+          </a:prstGeom>
+          <a:noFill/>
+        </p:spPr>
+        <p:txBody>
+          <a:bodyPr wrap="square">
+            <a:spAutoFit/>
+          </a:bodyPr>
+          <a:lstStyle/>
+          <a:p>
+            <a:pPr algn="l"/>
+            <a:r>
+              <a:rPr sz="1000" b="1" i="0">
+                <a:solidFill>
+                  <a:srgbClr val="CC4F1F"/>
+                </a:solidFill>
+                <a:latin typeface="Calibri"/>
+              </a:rPr>
+              <a:t>Nephrology</a:t>
+            </a:r>
+          </a:p>
+        </p:txBody>
+      </p:sp>
+      <p:sp>
+        <p:nvSpPr>
+          <p:cNvPr id="44" name="TextBox 43"/>
+          <p:cNvSpPr txBox="1"/>
+          <p:nvPr/>
+        </p:nvSpPr>
+        <p:spPr>
+          <a:xfrm>
+            <a:off x="8028432" y="2706624"/>
+            <a:ext cx="1591056" cy="228600"/>
+          </a:xfrm>
+          <a:prstGeom prst="rect">
+            <a:avLst/>
+          </a:prstGeom>
+          <a:noFill/>
+        </p:spPr>
+        <p:txBody>
+          <a:bodyPr wrap="square">
+            <a:spAutoFit/>
+          </a:bodyPr>
+          <a:lstStyle/>
+          <a:p>
+            <a:pPr algn="l"/>
+            <a:r>
+              <a:rPr sz="850" b="0" i="1">
+                <a:solidFill>
+                  <a:srgbClr val="646464"/>
+                </a:solidFill>
+                <a:latin typeface="Calibri"/>
+              </a:rPr>
+              <a:t>Sonnet 4.5</a:t>
+            </a:r>
+          </a:p>
+        </p:txBody>
+      </p:sp>
+      <p:sp>
+        <p:nvSpPr>
+          <p:cNvPr id="45" name="Rounded Rectangle 44"/>
+          <p:cNvSpPr/>
+          <p:nvPr/>
+        </p:nvSpPr>
+        <p:spPr>
+          <a:xfrm>
+            <a:off x="9784080" y="2322576"/>
+            <a:ext cx="1737360" cy="658368"/>
+          </a:xfrm>
+          <a:prstGeom prst="roundRect">
+            <a:avLst>
+              <a:gd name="adj" fmla="val 10000"/>
+            </a:avLst>
+          </a:prstGeom>
+          <a:solidFill>
+            <a:srgbClr val="FFFFFF"/>
+          </a:solidFill>
+          <a:ln w="19050">
+            <a:solidFill>
+              <a:srgbClr val="CC4F1F"/>
+            </a:solidFill>
+          </a:ln>
+        </p:spPr>
+        <p:style>
+          <a:lnRef idx="1">
+            <a:schemeClr val="accent1"/>
+          </a:lnRef>
+          <a:fillRef idx="3">
+            <a:schemeClr val="accent1"/>
+          </a:fillRef>
+          <a:effectRef idx="2">
+            <a:schemeClr val="accent1"/>
+          </a:effectRef>
+          <a:fontRef idx="minor">
+            <a:schemeClr val="lt1"/>
+          </a:fontRef>
+        </p:style>
+        <p:txBody>
+          <a:bodyPr rtlCol="0" anchor="ctr"/>
+          <a:lstStyle/>
+          <a:p>
+            <a:pPr algn="ctr"/>
+          </a:p>
+        </p:txBody>
+      </p:sp>
+      <p:sp>
+        <p:nvSpPr>
+          <p:cNvPr id="46" name="TextBox 45"/>
+          <p:cNvSpPr txBox="1"/>
+          <p:nvPr/>
+        </p:nvSpPr>
+        <p:spPr>
+          <a:xfrm>
+            <a:off x="9857232" y="2395728"/>
+            <a:ext cx="1591056" cy="320040"/>
+          </a:xfrm>
+          <a:prstGeom prst="rect">
+            <a:avLst/>
+          </a:prstGeom>
+          <a:noFill/>
+        </p:spPr>
+        <p:txBody>
+          <a:bodyPr wrap="square">
+            <a:spAutoFit/>
+          </a:bodyPr>
+          <a:lstStyle/>
+          <a:p>
+            <a:pPr algn="l"/>
+            <a:r>
+              <a:rPr sz="1000" b="1" i="0">
+                <a:solidFill>
+                  <a:srgbClr val="CC4F1F"/>
+                </a:solidFill>
+                <a:latin typeface="Calibri"/>
+              </a:rPr>
+              <a:t>Endocrinology</a:t>
+            </a:r>
+          </a:p>
+        </p:txBody>
+      </p:sp>
+      <p:sp>
+        <p:nvSpPr>
+          <p:cNvPr id="47" name="TextBox 46"/>
+          <p:cNvSpPr txBox="1"/>
+          <p:nvPr/>
+        </p:nvSpPr>
+        <p:spPr>
+          <a:xfrm>
+            <a:off x="9857232" y="2706624"/>
+            <a:ext cx="1591056" cy="228600"/>
+          </a:xfrm>
+          <a:prstGeom prst="rect">
+            <a:avLst/>
+          </a:prstGeom>
+          <a:noFill/>
+        </p:spPr>
+        <p:txBody>
+          <a:bodyPr wrap="square">
+            <a:spAutoFit/>
+          </a:bodyPr>
+          <a:lstStyle/>
+          <a:p>
+            <a:pPr algn="l"/>
+            <a:r>
+              <a:rPr sz="850" b="0" i="1">
+                <a:solidFill>
+                  <a:srgbClr val="646464"/>
+                </a:solidFill>
+                <a:latin typeface="Calibri"/>
+              </a:rPr>
+              <a:t>Sonnet 4.5</a:t>
+            </a:r>
+          </a:p>
+        </p:txBody>
+      </p:sp>
+      <p:sp>
+        <p:nvSpPr>
+          <p:cNvPr id="48" name="Rounded Rectangle 47"/>
+          <p:cNvSpPr/>
+          <p:nvPr/>
+        </p:nvSpPr>
+        <p:spPr>
+          <a:xfrm>
+            <a:off x="6126480" y="3072384"/>
+            <a:ext cx="1737360" cy="658368"/>
+          </a:xfrm>
+          <a:prstGeom prst="roundRect">
+            <a:avLst>
+              <a:gd name="adj" fmla="val 10000"/>
+            </a:avLst>
+          </a:prstGeom>
+          <a:solidFill>
+            <a:srgbClr val="FFE8DA"/>
+          </a:solidFill>
+          <a:ln w="19050">
+            <a:solidFill>
+              <a:srgbClr val="CC4F1F"/>
+            </a:solidFill>
+          </a:ln>
+        </p:spPr>
+        <p:style>
+          <a:lnRef idx="1">
+            <a:schemeClr val="accent1"/>
+          </a:lnRef>
+          <a:fillRef idx="3">
+            <a:schemeClr val="accent1"/>
+          </a:fillRef>
+          <a:effectRef idx="2">
+            <a:schemeClr val="accent1"/>
+          </a:effectRef>
+          <a:fontRef idx="minor">
+            <a:schemeClr val="lt1"/>
+          </a:fontRef>
+        </p:style>
+        <p:txBody>
+          <a:bodyPr rtlCol="0" anchor="ctr"/>
+          <a:lstStyle/>
+          <a:p>
+            <a:pPr algn="ctr"/>
+          </a:p>
+        </p:txBody>
+      </p:sp>
+      <p:sp>
+        <p:nvSpPr>
+          <p:cNvPr id="49" name="TextBox 48"/>
+          <p:cNvSpPr txBox="1"/>
+          <p:nvPr/>
+        </p:nvSpPr>
+        <p:spPr>
+          <a:xfrm>
+            <a:off x="6199632" y="3145536"/>
+            <a:ext cx="1591056" cy="320040"/>
+          </a:xfrm>
+          <a:prstGeom prst="rect">
+            <a:avLst/>
+          </a:prstGeom>
+          <a:noFill/>
+        </p:spPr>
+        <p:txBody>
+          <a:bodyPr wrap="square">
+            <a:spAutoFit/>
+          </a:bodyPr>
+          <a:lstStyle/>
+          <a:p>
+            <a:pPr algn="l"/>
+            <a:r>
+              <a:rPr sz="1000" b="1" i="0">
+                <a:solidFill>
+                  <a:srgbClr val="CC4F1F"/>
+                </a:solidFill>
+                <a:latin typeface="Calibri"/>
+              </a:rPr>
+              <a:t>Neurology</a:t>
+            </a:r>
+          </a:p>
+        </p:txBody>
+      </p:sp>
+      <p:sp>
+        <p:nvSpPr>
+          <p:cNvPr id="50" name="TextBox 49"/>
+          <p:cNvSpPr txBox="1"/>
+          <p:nvPr/>
+        </p:nvSpPr>
+        <p:spPr>
+          <a:xfrm>
+            <a:off x="6199632" y="3456432"/>
+            <a:ext cx="1591056" cy="228600"/>
+          </a:xfrm>
+          <a:prstGeom prst="rect">
+            <a:avLst/>
+          </a:prstGeom>
+          <a:noFill/>
+        </p:spPr>
+        <p:txBody>
+          <a:bodyPr wrap="square">
+            <a:spAutoFit/>
+          </a:bodyPr>
+          <a:lstStyle/>
+          <a:p>
+            <a:pPr algn="l"/>
+            <a:r>
+              <a:rPr sz="850" b="0" i="1">
+                <a:solidFill>
+                  <a:srgbClr val="646464"/>
+                </a:solidFill>
+                <a:latin typeface="Calibri"/>
+              </a:rPr>
+              <a:t>Sonnet 4.5</a:t>
+            </a:r>
+          </a:p>
+        </p:txBody>
+      </p:sp>
+      <p:sp>
+        <p:nvSpPr>
+          <p:cNvPr id="51" name="Rounded Rectangle 50"/>
+          <p:cNvSpPr/>
+          <p:nvPr/>
+        </p:nvSpPr>
+        <p:spPr>
+          <a:xfrm>
+            <a:off x="7955280" y="3072384"/>
+            <a:ext cx="1737360" cy="658368"/>
+          </a:xfrm>
+          <a:prstGeom prst="roundRect">
+            <a:avLst>
+              <a:gd name="adj" fmla="val 10000"/>
+            </a:avLst>
+          </a:prstGeom>
+          <a:solidFill>
+            <a:srgbClr val="FFFFFF"/>
+          </a:solidFill>
+          <a:ln w="19050">
+            <a:solidFill>
+              <a:srgbClr val="CC4F1F"/>
+            </a:solidFill>
+          </a:ln>
+        </p:spPr>
+        <p:style>
+          <a:lnRef idx="1">
+            <a:schemeClr val="accent1"/>
+          </a:lnRef>
+          <a:fillRef idx="3">
+            <a:schemeClr val="accent1"/>
+          </a:fillRef>
+          <a:effectRef idx="2">
+            <a:schemeClr val="accent1"/>
+          </a:effectRef>
+          <a:fontRef idx="minor">
+            <a:schemeClr val="lt1"/>
+          </a:fontRef>
+        </p:style>
+        <p:txBody>
+          <a:bodyPr rtlCol="0" anchor="ctr"/>
+          <a:lstStyle/>
+          <a:p>
+            <a:pPr algn="ctr"/>
+          </a:p>
+        </p:txBody>
+      </p:sp>
+      <p:sp>
+        <p:nvSpPr>
+          <p:cNvPr id="52" name="TextBox 51"/>
+          <p:cNvSpPr txBox="1"/>
+          <p:nvPr/>
+        </p:nvSpPr>
+        <p:spPr>
+          <a:xfrm>
+            <a:off x="8028432" y="3145536"/>
+            <a:ext cx="1591056" cy="320040"/>
+          </a:xfrm>
+          <a:prstGeom prst="rect">
+            <a:avLst/>
+          </a:prstGeom>
+          <a:noFill/>
+        </p:spPr>
+        <p:txBody>
+          <a:bodyPr wrap="square">
+            <a:spAutoFit/>
+          </a:bodyPr>
+          <a:lstStyle/>
+          <a:p>
+            <a:pPr algn="l"/>
+            <a:r>
+              <a:rPr sz="1000" b="1" i="0">
+                <a:solidFill>
+                  <a:srgbClr val="CC4F1F"/>
+                </a:solidFill>
+                <a:latin typeface="Calibri"/>
+              </a:rPr>
+              <a:t>Infectious Disease</a:t>
+            </a:r>
+          </a:p>
+        </p:txBody>
+      </p:sp>
+      <p:sp>
+        <p:nvSpPr>
+          <p:cNvPr id="53" name="TextBox 52"/>
+          <p:cNvSpPr txBox="1"/>
+          <p:nvPr/>
+        </p:nvSpPr>
+        <p:spPr>
+          <a:xfrm>
+            <a:off x="8028432" y="3456432"/>
+            <a:ext cx="1591056" cy="228600"/>
+          </a:xfrm>
+          <a:prstGeom prst="rect">
+            <a:avLst/>
+          </a:prstGeom>
+          <a:noFill/>
+        </p:spPr>
+        <p:txBody>
+          <a:bodyPr wrap="square">
+            <a:spAutoFit/>
+          </a:bodyPr>
+          <a:lstStyle/>
+          <a:p>
+            <a:pPr algn="l"/>
+            <a:r>
+              <a:rPr sz="850" b="0" i="1">
+                <a:solidFill>
+                  <a:srgbClr val="646464"/>
+                </a:solidFill>
+                <a:latin typeface="Calibri"/>
+              </a:rPr>
+              <a:t>Sonnet 4.5</a:t>
+            </a:r>
+          </a:p>
+        </p:txBody>
+      </p:sp>
+      <p:sp>
+        <p:nvSpPr>
+          <p:cNvPr id="54" name="Rounded Rectangle 53"/>
+          <p:cNvSpPr/>
+          <p:nvPr/>
+        </p:nvSpPr>
+        <p:spPr>
+          <a:xfrm>
+            <a:off x="9784080" y="3072384"/>
+            <a:ext cx="1737360" cy="658368"/>
+          </a:xfrm>
+          <a:prstGeom prst="roundRect">
+            <a:avLst>
+              <a:gd name="adj" fmla="val 10000"/>
+            </a:avLst>
+          </a:prstGeom>
+          <a:solidFill>
+            <a:srgbClr val="FFE8DA"/>
+          </a:solidFill>
+          <a:ln w="19050">
+            <a:solidFill>
+              <a:srgbClr val="CC4F1F"/>
+            </a:solidFill>
+          </a:ln>
+        </p:spPr>
+        <p:style>
+          <a:lnRef idx="1">
+            <a:schemeClr val="accent1"/>
+          </a:lnRef>
+          <a:fillRef idx="3">
+            <a:schemeClr val="accent1"/>
+          </a:fillRef>
+          <a:effectRef idx="2">
+            <a:schemeClr val="accent1"/>
+          </a:effectRef>
+          <a:fontRef idx="minor">
+            <a:schemeClr val="lt1"/>
+          </a:fontRef>
+        </p:style>
+        <p:txBody>
+          <a:bodyPr rtlCol="0" anchor="ctr"/>
+          <a:lstStyle/>
+          <a:p>
+            <a:pPr algn="ctr"/>
+          </a:p>
+        </p:txBody>
+      </p:sp>
+      <p:sp>
+        <p:nvSpPr>
+          <p:cNvPr id="55" name="TextBox 54"/>
+          <p:cNvSpPr txBox="1"/>
+          <p:nvPr/>
+        </p:nvSpPr>
+        <p:spPr>
+          <a:xfrm>
+            <a:off x="9857232" y="3145536"/>
+            <a:ext cx="1591056" cy="320040"/>
+          </a:xfrm>
+          <a:prstGeom prst="rect">
+            <a:avLst/>
+          </a:prstGeom>
+          <a:noFill/>
+        </p:spPr>
+        <p:txBody>
+          <a:bodyPr wrap="square">
+            <a:spAutoFit/>
+          </a:bodyPr>
+          <a:lstStyle/>
+          <a:p>
+            <a:pPr algn="l"/>
+            <a:r>
+              <a:rPr sz="1000" b="1" i="0">
+                <a:solidFill>
+                  <a:srgbClr val="CC4F1F"/>
+                </a:solidFill>
+                <a:latin typeface="Calibri"/>
+              </a:rPr>
+              <a:t>Oncology</a:t>
+            </a:r>
+          </a:p>
+        </p:txBody>
+      </p:sp>
+      <p:sp>
+        <p:nvSpPr>
+          <p:cNvPr id="56" name="TextBox 55"/>
+          <p:cNvSpPr txBox="1"/>
+          <p:nvPr/>
+        </p:nvSpPr>
+        <p:spPr>
+          <a:xfrm>
+            <a:off x="9857232" y="3456432"/>
+            <a:ext cx="1591056" cy="228600"/>
+          </a:xfrm>
+          <a:prstGeom prst="rect">
+            <a:avLst/>
+          </a:prstGeom>
+          <a:noFill/>
+        </p:spPr>
+        <p:txBody>
+          <a:bodyPr wrap="square">
+            <a:spAutoFit/>
+          </a:bodyPr>
+          <a:lstStyle/>
+          <a:p>
+            <a:pPr algn="l"/>
+            <a:r>
+              <a:rPr sz="850" b="0" i="1">
+                <a:solidFill>
+                  <a:srgbClr val="646464"/>
+                </a:solidFill>
+                <a:latin typeface="Calibri"/>
+              </a:rPr>
+              <a:t>Sonnet 4.5</a:t>
+            </a:r>
+          </a:p>
+        </p:txBody>
+      </p:sp>
+      <p:sp>
+        <p:nvSpPr>
+          <p:cNvPr id="57" name="Rounded Rectangle 56"/>
+          <p:cNvSpPr/>
+          <p:nvPr/>
+        </p:nvSpPr>
+        <p:spPr>
+          <a:xfrm>
+            <a:off x="6126480" y="3822192"/>
+            <a:ext cx="1737360" cy="658368"/>
+          </a:xfrm>
+          <a:prstGeom prst="roundRect">
+            <a:avLst>
+              <a:gd name="adj" fmla="val 10000"/>
+            </a:avLst>
+          </a:prstGeom>
+          <a:solidFill>
+            <a:srgbClr val="FFFFFF"/>
+          </a:solidFill>
+          <a:ln w="19050">
+            <a:solidFill>
+              <a:srgbClr val="CC4F1F"/>
+            </a:solidFill>
+          </a:ln>
+        </p:spPr>
+        <p:style>
+          <a:lnRef idx="1">
+            <a:schemeClr val="accent1"/>
+          </a:lnRef>
+          <a:fillRef idx="3">
+            <a:schemeClr val="accent1"/>
+          </a:fillRef>
+          <a:effectRef idx="2">
+            <a:schemeClr val="accent1"/>
+          </a:effectRef>
+          <a:fontRef idx="minor">
+            <a:schemeClr val="lt1"/>
+          </a:fontRef>
+        </p:style>
+        <p:txBody>
+          <a:bodyPr rtlCol="0" anchor="ctr"/>
+          <a:lstStyle/>
+          <a:p>
+            <a:pPr algn="ctr"/>
+          </a:p>
+        </p:txBody>
+      </p:sp>
+      <p:sp>
+        <p:nvSpPr>
+          <p:cNvPr id="58" name="TextBox 57"/>
+          <p:cNvSpPr txBox="1"/>
+          <p:nvPr/>
+        </p:nvSpPr>
+        <p:spPr>
+          <a:xfrm>
+            <a:off x="6199632" y="3895344"/>
+            <a:ext cx="1591056" cy="320040"/>
+          </a:xfrm>
+          <a:prstGeom prst="rect">
+            <a:avLst/>
+          </a:prstGeom>
+          <a:noFill/>
+        </p:spPr>
+        <p:txBody>
+          <a:bodyPr wrap="square">
+            <a:spAutoFit/>
+          </a:bodyPr>
+          <a:lstStyle/>
+          <a:p>
+            <a:pPr algn="l"/>
+            <a:r>
+              <a:rPr sz="1000" b="1" i="0">
+                <a:solidFill>
+                  <a:srgbClr val="CC4F1F"/>
+                </a:solidFill>
+                <a:latin typeface="Calibri"/>
+              </a:rPr>
+              <a:t>Obstetrics &amp; Gyn</a:t>
+            </a:r>
+          </a:p>
+        </p:txBody>
+      </p:sp>
+      <p:sp>
+        <p:nvSpPr>
+          <p:cNvPr id="59" name="TextBox 58"/>
+          <p:cNvSpPr txBox="1"/>
+          <p:nvPr/>
+        </p:nvSpPr>
+        <p:spPr>
+          <a:xfrm>
+            <a:off x="6199632" y="4206240"/>
+            <a:ext cx="1591056" cy="228600"/>
+          </a:xfrm>
+          <a:prstGeom prst="rect">
+            <a:avLst/>
+          </a:prstGeom>
+          <a:noFill/>
+        </p:spPr>
+        <p:txBody>
+          <a:bodyPr wrap="square">
+            <a:spAutoFit/>
+          </a:bodyPr>
+          <a:lstStyle/>
+          <a:p>
+            <a:pPr algn="l"/>
+            <a:r>
+              <a:rPr sz="850" b="0" i="1">
+                <a:solidFill>
+                  <a:srgbClr val="646464"/>
+                </a:solidFill>
+                <a:latin typeface="Calibri"/>
+              </a:rPr>
+              <a:t>Sonnet 4.5</a:t>
+            </a:r>
+          </a:p>
+        </p:txBody>
+      </p:sp>
+      <p:sp>
+        <p:nvSpPr>
+          <p:cNvPr id="60" name="Rounded Rectangle 59"/>
+          <p:cNvSpPr/>
+          <p:nvPr/>
+        </p:nvSpPr>
+        <p:spPr>
+          <a:xfrm>
+            <a:off x="7955280" y="3822192"/>
+            <a:ext cx="1737360" cy="658368"/>
+          </a:xfrm>
+          <a:prstGeom prst="roundRect">
+            <a:avLst>
+              <a:gd name="adj" fmla="val 10000"/>
+            </a:avLst>
+          </a:prstGeom>
+          <a:solidFill>
+            <a:srgbClr val="FFE8DA"/>
+          </a:solidFill>
+          <a:ln w="19050">
+            <a:solidFill>
+              <a:srgbClr val="CC4F1F"/>
+            </a:solidFill>
+          </a:ln>
+        </p:spPr>
+        <p:style>
+          <a:lnRef idx="1">
+            <a:schemeClr val="accent1"/>
+          </a:lnRef>
+          <a:fillRef idx="3">
+            <a:schemeClr val="accent1"/>
+          </a:fillRef>
+          <a:effectRef idx="2">
+            <a:schemeClr val="accent1"/>
+          </a:effectRef>
+          <a:fontRef idx="minor">
+            <a:schemeClr val="lt1"/>
+          </a:fontRef>
+        </p:style>
+        <p:txBody>
+          <a:bodyPr rtlCol="0" anchor="ctr"/>
+          <a:lstStyle/>
+          <a:p>
+            <a:pPr algn="ctr"/>
+          </a:p>
+        </p:txBody>
+      </p:sp>
+      <p:sp>
+        <p:nvSpPr>
+          <p:cNvPr id="61" name="TextBox 60"/>
+          <p:cNvSpPr txBox="1"/>
+          <p:nvPr/>
+        </p:nvSpPr>
+        <p:spPr>
+          <a:xfrm>
+            <a:off x="8028432" y="3895344"/>
+            <a:ext cx="1591056" cy="320040"/>
+          </a:xfrm>
+          <a:prstGeom prst="rect">
+            <a:avLst/>
+          </a:prstGeom>
+          <a:noFill/>
+        </p:spPr>
+        <p:txBody>
+          <a:bodyPr wrap="square">
+            <a:spAutoFit/>
+          </a:bodyPr>
+          <a:lstStyle/>
+          <a:p>
+            <a:pPr algn="l"/>
+            <a:r>
+              <a:rPr sz="1000" b="1" i="0">
+                <a:solidFill>
+                  <a:srgbClr val="CC4F1F"/>
+                </a:solidFill>
+                <a:latin typeface="Calibri"/>
+              </a:rPr>
+              <a:t>Pediatrics</a:t>
+            </a:r>
+          </a:p>
+        </p:txBody>
+      </p:sp>
+      <p:sp>
+        <p:nvSpPr>
+          <p:cNvPr id="62" name="TextBox 61"/>
+          <p:cNvSpPr txBox="1"/>
+          <p:nvPr/>
+        </p:nvSpPr>
+        <p:spPr>
+          <a:xfrm>
+            <a:off x="8028432" y="4206240"/>
+            <a:ext cx="1591056" cy="228600"/>
+          </a:xfrm>
+          <a:prstGeom prst="rect">
+            <a:avLst/>
+          </a:prstGeom>
+          <a:noFill/>
+        </p:spPr>
+        <p:txBody>
+          <a:bodyPr wrap="square">
+            <a:spAutoFit/>
+          </a:bodyPr>
+          <a:lstStyle/>
+          <a:p>
+            <a:pPr algn="l"/>
+            <a:r>
+              <a:rPr sz="850" b="0" i="1">
+                <a:solidFill>
+                  <a:srgbClr val="646464"/>
+                </a:solidFill>
+                <a:latin typeface="Calibri"/>
+              </a:rPr>
+              <a:t>Sonnet 4.5</a:t>
+            </a:r>
+          </a:p>
+        </p:txBody>
+      </p:sp>
+      <p:sp>
+        <p:nvSpPr>
+          <p:cNvPr id="63" name="Rounded Rectangle 62"/>
+          <p:cNvSpPr/>
+          <p:nvPr/>
+        </p:nvSpPr>
+        <p:spPr>
+          <a:xfrm>
+            <a:off x="9784080" y="3822192"/>
+            <a:ext cx="1737360" cy="658368"/>
+          </a:xfrm>
+          <a:prstGeom prst="roundRect">
+            <a:avLst>
+              <a:gd name="adj" fmla="val 10000"/>
+            </a:avLst>
+          </a:prstGeom>
+          <a:solidFill>
+            <a:srgbClr val="FFFFFF"/>
+          </a:solidFill>
+          <a:ln w="19050">
+            <a:solidFill>
+              <a:srgbClr val="FF6B35"/>
+            </a:solidFill>
+          </a:ln>
+        </p:spPr>
+        <p:style>
+          <a:lnRef idx="1">
+            <a:schemeClr val="accent1"/>
+          </a:lnRef>
+          <a:fillRef idx="3">
+            <a:schemeClr val="accent1"/>
+          </a:fillRef>
+          <a:effectRef idx="2">
+            <a:schemeClr val="accent1"/>
+          </a:effectRef>
+          <a:fontRef idx="minor">
+            <a:schemeClr val="lt1"/>
+          </a:fontRef>
+        </p:style>
+        <p:txBody>
+          <a:bodyPr rtlCol="0" anchor="ctr"/>
+          <a:lstStyle/>
+          <a:p>
+            <a:pPr algn="ctr"/>
+          </a:p>
+        </p:txBody>
+      </p:sp>
+      <p:sp>
+        <p:nvSpPr>
+          <p:cNvPr id="64" name="TextBox 63"/>
+          <p:cNvSpPr txBox="1"/>
+          <p:nvPr/>
+        </p:nvSpPr>
+        <p:spPr>
+          <a:xfrm>
+            <a:off x="9857232" y="3895344"/>
+            <a:ext cx="1591056" cy="320040"/>
+          </a:xfrm>
+          <a:prstGeom prst="rect">
+            <a:avLst/>
+          </a:prstGeom>
+          <a:noFill/>
+        </p:spPr>
+        <p:txBody>
+          <a:bodyPr wrap="square">
+            <a:spAutoFit/>
+          </a:bodyPr>
+          <a:lstStyle/>
+          <a:p>
+            <a:pPr algn="l"/>
+            <a:r>
+              <a:rPr sz="1000" b="1" i="0">
+                <a:solidFill>
+                  <a:srgbClr val="FF6B35"/>
+                </a:solidFill>
+                <a:latin typeface="Calibri"/>
+              </a:rPr>
+              <a:t>Radiology</a:t>
+            </a:r>
+          </a:p>
+        </p:txBody>
+      </p:sp>
+      <p:sp>
+        <p:nvSpPr>
+          <p:cNvPr id="65" name="TextBox 64"/>
+          <p:cNvSpPr txBox="1"/>
+          <p:nvPr/>
+        </p:nvSpPr>
+        <p:spPr>
+          <a:xfrm>
+            <a:off x="9857232" y="4206240"/>
+            <a:ext cx="1591056" cy="228600"/>
+          </a:xfrm>
+          <a:prstGeom prst="rect">
+            <a:avLst/>
+          </a:prstGeom>
+          <a:noFill/>
+        </p:spPr>
+        <p:txBody>
+          <a:bodyPr wrap="square">
+            <a:spAutoFit/>
+          </a:bodyPr>
+          <a:lstStyle/>
+          <a:p>
+            <a:pPr algn="l"/>
+            <a:r>
+              <a:rPr sz="850" b="0" i="1">
+                <a:solidFill>
+                  <a:srgbClr val="646464"/>
+                </a:solidFill>
+                <a:latin typeface="Calibri"/>
+              </a:rPr>
+              <a:t>Sonnet 4.5 + Vision</a:t>
+            </a:r>
+          </a:p>
+        </p:txBody>
+      </p:sp>
+      <p:sp>
+        <p:nvSpPr>
+          <p:cNvPr id="66" name="Rounded Rectangle 65"/>
+          <p:cNvSpPr/>
+          <p:nvPr/>
+        </p:nvSpPr>
+        <p:spPr>
+          <a:xfrm>
+            <a:off x="457200" y="5989320"/>
+            <a:ext cx="11247120" cy="384048"/>
+          </a:xfrm>
+          <a:prstGeom prst="roundRect">
+            <a:avLst>
+              <a:gd name="adj" fmla="val 20000"/>
             </a:avLst>
           </a:prstGeom>
           <a:solidFill>
@@ -7059,1084 +8983,35 @@
       </p:sp>
       <p:sp>
         <p:nvSpPr>
-          <p:cNvPr id="18" name="TextBox 17"/>
-          <p:cNvSpPr txBox="1"/>
-          <p:nvPr/>
-        </p:nvSpPr>
-        <p:spPr>
-          <a:xfrm>
-            <a:off x="2560320" y="3749039"/>
-            <a:ext cx="868680" cy="594360"/>
-          </a:xfrm>
-          <a:prstGeom prst="rect">
-            <a:avLst/>
-          </a:prstGeom>
-          <a:noFill/>
-        </p:spPr>
-        <p:txBody>
-          <a:bodyPr wrap="none" anchor="ctr">
-            <a:spAutoFit/>
-          </a:bodyPr>
-          <a:lstStyle/>
-          <a:p>
-            <a:pPr algn="ctr"/>
-            <a:r>
-              <a:rPr sz="800" b="1">
+          <p:cNvPr id="67" name="TextBox 66"/>
+          <p:cNvSpPr txBox="1"/>
+          <p:nvPr/>
+        </p:nvSpPr>
+        <p:spPr>
+          <a:xfrm>
+            <a:off x="640080" y="6044184"/>
+            <a:ext cx="10881360" cy="292608"/>
+          </a:xfrm>
+          <a:prstGeom prst="rect">
+            <a:avLst/>
+          </a:prstGeom>
+          <a:noFill/>
+        </p:spPr>
+        <p:txBody>
+          <a:bodyPr wrap="square">
+            <a:spAutoFit/>
+          </a:bodyPr>
+          <a:lstStyle/>
+          <a:p>
+            <a:pPr algn="ctr"/>
+            <a:r>
+              <a:rPr sz="1100" b="1" i="0">
                 <a:solidFill>
                   <a:srgbClr val="FFFFFF"/>
                 </a:solidFill>
                 <a:latin typeface="Calibri"/>
               </a:rPr>
-              <a:t>Infectious
-Disease</a:t>
-            </a:r>
-          </a:p>
-        </p:txBody>
-      </p:sp>
-      <p:sp>
-        <p:nvSpPr>
-          <p:cNvPr id="19" name="Rounded Rectangle 18"/>
-          <p:cNvSpPr/>
-          <p:nvPr/>
-        </p:nvSpPr>
-        <p:spPr>
-          <a:xfrm>
-            <a:off x="3566160" y="3749039"/>
-            <a:ext cx="868680" cy="594360"/>
-          </a:xfrm>
-          <a:prstGeom prst="roundRect">
-            <a:avLst>
-              <a:gd name="adj" fmla="val 10000"/>
-            </a:avLst>
-          </a:prstGeom>
-          <a:solidFill>
-            <a:srgbClr val="FF6B35"/>
-          </a:solidFill>
-          <a:ln>
-            <a:noFill/>
-          </a:ln>
-        </p:spPr>
-        <p:style>
-          <a:lnRef idx="1">
-            <a:schemeClr val="accent1"/>
-          </a:lnRef>
-          <a:fillRef idx="3">
-            <a:schemeClr val="accent1"/>
-          </a:fillRef>
-          <a:effectRef idx="2">
-            <a:schemeClr val="accent1"/>
-          </a:effectRef>
-          <a:fontRef idx="minor">
-            <a:schemeClr val="lt1"/>
-          </a:fontRef>
-        </p:style>
-        <p:txBody>
-          <a:bodyPr rtlCol="0" anchor="ctr"/>
-          <a:lstStyle/>
-          <a:p>
-            <a:pPr algn="ctr"/>
-          </a:p>
-        </p:txBody>
-      </p:sp>
-      <p:sp>
-        <p:nvSpPr>
-          <p:cNvPr id="20" name="TextBox 19"/>
-          <p:cNvSpPr txBox="1"/>
-          <p:nvPr/>
-        </p:nvSpPr>
-        <p:spPr>
-          <a:xfrm>
-            <a:off x="3566160" y="3749039"/>
-            <a:ext cx="868680" cy="594360"/>
-          </a:xfrm>
-          <a:prstGeom prst="rect">
-            <a:avLst/>
-          </a:prstGeom>
-          <a:noFill/>
-        </p:spPr>
-        <p:txBody>
-          <a:bodyPr wrap="none" anchor="ctr">
-            <a:spAutoFit/>
-          </a:bodyPr>
-          <a:lstStyle/>
-          <a:p>
-            <a:pPr algn="ctr"/>
-            <a:r>
-              <a:rPr sz="800" b="1">
-                <a:solidFill>
-                  <a:srgbClr val="FFFFFF"/>
-                </a:solidFill>
-                <a:latin typeface="Calibri"/>
-              </a:rPr>
-              <a:t>Oncology</a:t>
-            </a:r>
-          </a:p>
-        </p:txBody>
-      </p:sp>
-      <p:sp>
-        <p:nvSpPr>
-          <p:cNvPr id="21" name="Rounded Rectangle 20"/>
-          <p:cNvSpPr/>
-          <p:nvPr/>
-        </p:nvSpPr>
-        <p:spPr>
-          <a:xfrm>
-            <a:off x="4572000" y="3749039"/>
-            <a:ext cx="868680" cy="594360"/>
-          </a:xfrm>
-          <a:prstGeom prst="roundRect">
-            <a:avLst>
-              <a:gd name="adj" fmla="val 10000"/>
-            </a:avLst>
-          </a:prstGeom>
-          <a:solidFill>
-            <a:srgbClr val="FF6B35"/>
-          </a:solidFill>
-          <a:ln>
-            <a:noFill/>
-          </a:ln>
-        </p:spPr>
-        <p:style>
-          <a:lnRef idx="1">
-            <a:schemeClr val="accent1"/>
-          </a:lnRef>
-          <a:fillRef idx="3">
-            <a:schemeClr val="accent1"/>
-          </a:fillRef>
-          <a:effectRef idx="2">
-            <a:schemeClr val="accent1"/>
-          </a:effectRef>
-          <a:fontRef idx="minor">
-            <a:schemeClr val="lt1"/>
-          </a:fontRef>
-        </p:style>
-        <p:txBody>
-          <a:bodyPr rtlCol="0" anchor="ctr"/>
-          <a:lstStyle/>
-          <a:p>
-            <a:pPr algn="ctr"/>
-          </a:p>
-        </p:txBody>
-      </p:sp>
-      <p:sp>
-        <p:nvSpPr>
-          <p:cNvPr id="22" name="TextBox 21"/>
-          <p:cNvSpPr txBox="1"/>
-          <p:nvPr/>
-        </p:nvSpPr>
-        <p:spPr>
-          <a:xfrm>
-            <a:off x="4572000" y="3749039"/>
-            <a:ext cx="868680" cy="594360"/>
-          </a:xfrm>
-          <a:prstGeom prst="rect">
-            <a:avLst/>
-          </a:prstGeom>
-          <a:noFill/>
-        </p:spPr>
-        <p:txBody>
-          <a:bodyPr wrap="none" anchor="ctr">
-            <a:spAutoFit/>
-          </a:bodyPr>
-          <a:lstStyle/>
-          <a:p>
-            <a:pPr algn="ctr"/>
-            <a:r>
-              <a:rPr sz="800" b="1">
-                <a:solidFill>
-                  <a:srgbClr val="FFFFFF"/>
-                </a:solidFill>
-                <a:latin typeface="Calibri"/>
-              </a:rPr>
-              <a:t>+36 more
-specialties</a:t>
-            </a:r>
-          </a:p>
-        </p:txBody>
-      </p:sp>
-      <p:sp>
-        <p:nvSpPr>
-          <p:cNvPr id="23" name="TextBox 22"/>
-          <p:cNvSpPr txBox="1"/>
-          <p:nvPr/>
-        </p:nvSpPr>
-        <p:spPr>
-          <a:xfrm>
-            <a:off x="640080" y="4572000"/>
-            <a:ext cx="4937760" cy="320040"/>
-          </a:xfrm>
-          <a:prstGeom prst="rect">
-            <a:avLst/>
-          </a:prstGeom>
-          <a:noFill/>
-        </p:spPr>
-        <p:txBody>
-          <a:bodyPr wrap="square">
-            <a:spAutoFit/>
-          </a:bodyPr>
-          <a:lstStyle/>
-          <a:p>
-            <a:pPr algn="l"/>
-            <a:r>
-              <a:rPr sz="1000" b="1" i="0">
-                <a:solidFill>
-                  <a:srgbClr val="CC4F1F"/>
-                </a:solidFill>
-                <a:latin typeface="Calibri"/>
-              </a:rPr>
-              <a:t>Side-channel agents (auto-invoked):</a:t>
-            </a:r>
-          </a:p>
-        </p:txBody>
-      </p:sp>
-      <p:sp>
-        <p:nvSpPr>
-          <p:cNvPr id="24" name="TextBox 23"/>
-          <p:cNvSpPr txBox="1"/>
-          <p:nvPr/>
-        </p:nvSpPr>
-        <p:spPr>
-          <a:xfrm>
-            <a:off x="640080" y="4919472"/>
-            <a:ext cx="4937760" cy="256032"/>
-          </a:xfrm>
-          <a:prstGeom prst="rect">
-            <a:avLst/>
-          </a:prstGeom>
-          <a:noFill/>
-        </p:spPr>
-        <p:txBody>
-          <a:bodyPr wrap="square">
-            <a:spAutoFit/>
-          </a:bodyPr>
-          <a:lstStyle/>
-          <a:p>
-            <a:r>
-              <a:rPr sz="1000" b="1">
-                <a:solidFill>
-                  <a:srgbClr val="FF6B35"/>
-                </a:solidFill>
-                <a:latin typeface="Calibri"/>
-              </a:rPr>
-              <a:t>▸ </a:t>
-            </a:r>
-            <a:r>
-              <a:rPr sz="1000">
-                <a:solidFill>
-                  <a:srgbClr val="2C3E50"/>
-                </a:solidFill>
-                <a:latin typeface="Calibri"/>
-              </a:rPr>
-              <a:t>Clinical Pharmacy (on any prescribing question)</a:t>
-            </a:r>
-          </a:p>
-        </p:txBody>
-      </p:sp>
-      <p:sp>
-        <p:nvSpPr>
-          <p:cNvPr id="25" name="TextBox 24"/>
-          <p:cNvSpPr txBox="1"/>
-          <p:nvPr/>
-        </p:nvSpPr>
-        <p:spPr>
-          <a:xfrm>
-            <a:off x="640080" y="5175504"/>
-            <a:ext cx="4937760" cy="256032"/>
-          </a:xfrm>
-          <a:prstGeom prst="rect">
-            <a:avLst/>
-          </a:prstGeom>
-          <a:noFill/>
-        </p:spPr>
-        <p:txBody>
-          <a:bodyPr wrap="square">
-            <a:spAutoFit/>
-          </a:bodyPr>
-          <a:lstStyle/>
-          <a:p>
-            <a:r>
-              <a:rPr sz="1000" b="1">
-                <a:solidFill>
-                  <a:srgbClr val="FF6B35"/>
-                </a:solidFill>
-                <a:latin typeface="Calibri"/>
-              </a:rPr>
-              <a:t>▸ </a:t>
-            </a:r>
-            <a:r>
-              <a:rPr sz="1000">
-                <a:solidFill>
-                  <a:srgbClr val="2C3E50"/>
-                </a:solidFill>
-                <a:latin typeface="Calibri"/>
-              </a:rPr>
-              <a:t>Radiology (when image attached)</a:t>
-            </a:r>
-          </a:p>
-        </p:txBody>
-      </p:sp>
-      <p:sp>
-        <p:nvSpPr>
-          <p:cNvPr id="26" name="Rounded Rectangle 25"/>
-          <p:cNvSpPr/>
-          <p:nvPr/>
-        </p:nvSpPr>
-        <p:spPr>
-          <a:xfrm>
-            <a:off x="6035040" y="1005840"/>
-            <a:ext cx="5669280" cy="2286000"/>
-          </a:xfrm>
-          <a:prstGeom prst="roundRect">
-            <a:avLst>
-              <a:gd name="adj" fmla="val 5000"/>
-            </a:avLst>
-          </a:prstGeom>
-          <a:solidFill>
-            <a:srgbClr val="FFE8DA"/>
-          </a:solidFill>
-          <a:ln w="19050">
-            <a:solidFill>
-              <a:srgbClr val="FF6B35"/>
-            </a:solidFill>
-          </a:ln>
-        </p:spPr>
-        <p:style>
-          <a:lnRef idx="1">
-            <a:schemeClr val="accent1"/>
-          </a:lnRef>
-          <a:fillRef idx="3">
-            <a:schemeClr val="accent1"/>
-          </a:fillRef>
-          <a:effectRef idx="2">
-            <a:schemeClr val="accent1"/>
-          </a:effectRef>
-          <a:fontRef idx="minor">
-            <a:schemeClr val="lt1"/>
-          </a:fontRef>
-        </p:style>
-        <p:txBody>
-          <a:bodyPr rtlCol="0" anchor="ctr"/>
-          <a:lstStyle/>
-          <a:p>
-            <a:pPr algn="ctr"/>
-          </a:p>
-        </p:txBody>
-      </p:sp>
-      <p:sp>
-        <p:nvSpPr>
-          <p:cNvPr id="27" name="Rectangle 26"/>
-          <p:cNvSpPr/>
-          <p:nvPr/>
-        </p:nvSpPr>
-        <p:spPr>
-          <a:xfrm>
-            <a:off x="6035040" y="1005840"/>
-            <a:ext cx="5669280" cy="457200"/>
-          </a:xfrm>
-          <a:prstGeom prst="rect">
-            <a:avLst/>
-          </a:prstGeom>
-          <a:solidFill>
-            <a:srgbClr val="FF6B35"/>
-          </a:solidFill>
-          <a:ln>
-            <a:noFill/>
-          </a:ln>
-        </p:spPr>
-        <p:style>
-          <a:lnRef idx="1">
-            <a:schemeClr val="accent1"/>
-          </a:lnRef>
-          <a:fillRef idx="3">
-            <a:schemeClr val="accent1"/>
-          </a:fillRef>
-          <a:effectRef idx="2">
-            <a:schemeClr val="accent1"/>
-          </a:effectRef>
-          <a:fontRef idx="minor">
-            <a:schemeClr val="lt1"/>
-          </a:fontRef>
-        </p:style>
-        <p:txBody>
-          <a:bodyPr rtlCol="0" anchor="ctr"/>
-          <a:lstStyle/>
-          <a:p>
-            <a:pPr algn="ctr"/>
-          </a:p>
-        </p:txBody>
-      </p:sp>
-      <p:sp>
-        <p:nvSpPr>
-          <p:cNvPr id="28" name="TextBox 27"/>
-          <p:cNvSpPr txBox="1"/>
-          <p:nvPr/>
-        </p:nvSpPr>
-        <p:spPr>
-          <a:xfrm>
-            <a:off x="6035040" y="1005840"/>
-            <a:ext cx="5669280" cy="457200"/>
-          </a:xfrm>
-          <a:prstGeom prst="rect">
-            <a:avLst/>
-          </a:prstGeom>
-          <a:noFill/>
-        </p:spPr>
-        <p:txBody>
-          <a:bodyPr wrap="none" anchor="ctr">
-            <a:spAutoFit/>
-          </a:bodyPr>
-          <a:lstStyle/>
-          <a:p>
-            <a:pPr algn="ctr"/>
-            <a:r>
-              <a:rPr sz="1300" b="1">
-                <a:solidFill>
-                  <a:srgbClr val="FFFFFF"/>
-                </a:solidFill>
-                <a:latin typeface="Calibri"/>
-              </a:rPr>
-              <a:t>AWS with Claude</a:t>
-            </a:r>
-          </a:p>
-        </p:txBody>
-      </p:sp>
-      <p:sp>
-        <p:nvSpPr>
-          <p:cNvPr id="29" name="TextBox 28"/>
-          <p:cNvSpPr txBox="1"/>
-          <p:nvPr/>
-        </p:nvSpPr>
-        <p:spPr>
-          <a:xfrm>
-            <a:off x="6217920" y="1572768"/>
-            <a:ext cx="5303520" cy="292608"/>
-          </a:xfrm>
-          <a:prstGeom prst="rect">
-            <a:avLst/>
-          </a:prstGeom>
-          <a:noFill/>
-        </p:spPr>
-        <p:txBody>
-          <a:bodyPr wrap="square">
-            <a:spAutoFit/>
-          </a:bodyPr>
-          <a:lstStyle/>
-          <a:p>
-            <a:r>
-              <a:rPr sz="1050" b="1">
-                <a:solidFill>
-                  <a:srgbClr val="FF6B35"/>
-                </a:solidFill>
-                <a:latin typeface="Calibri"/>
-              </a:rPr>
-              <a:t>▸ </a:t>
-            </a:r>
-            <a:r>
-              <a:rPr sz="1050">
-                <a:solidFill>
-                  <a:srgbClr val="2C3E50"/>
-                </a:solidFill>
-                <a:latin typeface="Calibri"/>
-              </a:rPr>
-              <a:t>Bedrock Agents: managed tool-calling runtime</a:t>
-            </a:r>
-          </a:p>
-        </p:txBody>
-      </p:sp>
-      <p:sp>
-        <p:nvSpPr>
-          <p:cNvPr id="30" name="TextBox 29"/>
-          <p:cNvSpPr txBox="1"/>
-          <p:nvPr/>
-        </p:nvSpPr>
-        <p:spPr>
-          <a:xfrm>
-            <a:off x="6217920" y="1865376"/>
-            <a:ext cx="5303520" cy="292608"/>
-          </a:xfrm>
-          <a:prstGeom prst="rect">
-            <a:avLst/>
-          </a:prstGeom>
-          <a:noFill/>
-        </p:spPr>
-        <p:txBody>
-          <a:bodyPr wrap="square">
-            <a:spAutoFit/>
-          </a:bodyPr>
-          <a:lstStyle/>
-          <a:p>
-            <a:r>
-              <a:rPr sz="1050" b="1">
-                <a:solidFill>
-                  <a:srgbClr val="FF6B35"/>
-                </a:solidFill>
-                <a:latin typeface="Calibri"/>
-              </a:rPr>
-              <a:t>▸ </a:t>
-            </a:r>
-            <a:r>
-              <a:rPr sz="1050">
-                <a:solidFill>
-                  <a:srgbClr val="2C3E50"/>
-                </a:solidFill>
-                <a:latin typeface="Calibri"/>
-              </a:rPr>
-              <a:t>40 specialty agents + 1 emergency + 1 router</a:t>
-            </a:r>
-          </a:p>
-        </p:txBody>
-      </p:sp>
-      <p:sp>
-        <p:nvSpPr>
-          <p:cNvPr id="31" name="TextBox 30"/>
-          <p:cNvSpPr txBox="1"/>
-          <p:nvPr/>
-        </p:nvSpPr>
-        <p:spPr>
-          <a:xfrm>
-            <a:off x="6217920" y="2157984"/>
-            <a:ext cx="5303520" cy="292608"/>
-          </a:xfrm>
-          <a:prstGeom prst="rect">
-            <a:avLst/>
-          </a:prstGeom>
-          <a:noFill/>
-        </p:spPr>
-        <p:txBody>
-          <a:bodyPr wrap="square">
-            <a:spAutoFit/>
-          </a:bodyPr>
-          <a:lstStyle/>
-          <a:p>
-            <a:r>
-              <a:rPr sz="1050" b="1">
-                <a:solidFill>
-                  <a:srgbClr val="FF6B35"/>
-                </a:solidFill>
-                <a:latin typeface="Calibri"/>
-              </a:rPr>
-              <a:t>▸ </a:t>
-            </a:r>
-            <a:r>
-              <a:rPr sz="1050">
-                <a:solidFill>
-                  <a:srgbClr val="2C3E50"/>
-                </a:solidFill>
-                <a:latin typeface="Calibri"/>
-              </a:rPr>
-              <a:t>Router: Nova Micro (JSON mode, 150-200ms)</a:t>
-            </a:r>
-          </a:p>
-        </p:txBody>
-      </p:sp>
-      <p:sp>
-        <p:nvSpPr>
-          <p:cNvPr id="32" name="TextBox 31"/>
-          <p:cNvSpPr txBox="1"/>
-          <p:nvPr/>
-        </p:nvSpPr>
-        <p:spPr>
-          <a:xfrm>
-            <a:off x="6217920" y="2450592"/>
-            <a:ext cx="5303520" cy="292608"/>
-          </a:xfrm>
-          <a:prstGeom prst="rect">
-            <a:avLst/>
-          </a:prstGeom>
-          <a:noFill/>
-        </p:spPr>
-        <p:txBody>
-          <a:bodyPr wrap="square">
-            <a:spAutoFit/>
-          </a:bodyPr>
-          <a:lstStyle/>
-          <a:p>
-            <a:r>
-              <a:rPr sz="1050" b="1">
-                <a:solidFill>
-                  <a:srgbClr val="FF6B35"/>
-                </a:solidFill>
-                <a:latin typeface="Calibri"/>
-              </a:rPr>
-              <a:t>▸ </a:t>
-            </a:r>
-            <a:r>
-              <a:rPr sz="1050">
-                <a:solidFill>
-                  <a:srgbClr val="2C3E50"/>
-                </a:solidFill>
-                <a:latin typeface="Calibri"/>
-              </a:rPr>
-              <a:t>Emergency: Claude Haiku 4.5 (direct, no router)</a:t>
-            </a:r>
-          </a:p>
-        </p:txBody>
-      </p:sp>
-      <p:sp>
-        <p:nvSpPr>
-          <p:cNvPr id="33" name="TextBox 32"/>
-          <p:cNvSpPr txBox="1"/>
-          <p:nvPr/>
-        </p:nvSpPr>
-        <p:spPr>
-          <a:xfrm>
-            <a:off x="6217920" y="2743200"/>
-            <a:ext cx="5303520" cy="292608"/>
-          </a:xfrm>
-          <a:prstGeom prst="rect">
-            <a:avLst/>
-          </a:prstGeom>
-          <a:noFill/>
-        </p:spPr>
-        <p:txBody>
-          <a:bodyPr wrap="square">
-            <a:spAutoFit/>
-          </a:bodyPr>
-          <a:lstStyle/>
-          <a:p>
-            <a:r>
-              <a:rPr sz="1050" b="1">
-                <a:solidFill>
-                  <a:srgbClr val="FF6B35"/>
-                </a:solidFill>
-                <a:latin typeface="Calibri"/>
-              </a:rPr>
-              <a:t>▸ </a:t>
-            </a:r>
-            <a:r>
-              <a:rPr sz="1050">
-                <a:solidFill>
-                  <a:srgbClr val="2C3E50"/>
-                </a:solidFill>
-                <a:latin typeface="Calibri"/>
-              </a:rPr>
-              <a:t>Complex: Claude Sonnet 4.5 per specialty</a:t>
-            </a:r>
-          </a:p>
-        </p:txBody>
-      </p:sp>
-      <p:sp>
-        <p:nvSpPr>
-          <p:cNvPr id="34" name="TextBox 33"/>
-          <p:cNvSpPr txBox="1"/>
-          <p:nvPr/>
-        </p:nvSpPr>
-        <p:spPr>
-          <a:xfrm>
-            <a:off x="6217920" y="3035808"/>
-            <a:ext cx="5303520" cy="292608"/>
-          </a:xfrm>
-          <a:prstGeom prst="rect">
-            <a:avLst/>
-          </a:prstGeom>
-          <a:noFill/>
-        </p:spPr>
-        <p:txBody>
-          <a:bodyPr wrap="square">
-            <a:spAutoFit/>
-          </a:bodyPr>
-          <a:lstStyle/>
-          <a:p>
-            <a:r>
-              <a:rPr sz="1050" b="1">
-                <a:solidFill>
-                  <a:srgbClr val="FF6B35"/>
-                </a:solidFill>
-                <a:latin typeface="Calibri"/>
-              </a:rPr>
-              <a:t>▸ </a:t>
-            </a:r>
-            <a:r>
-              <a:rPr sz="1050">
-                <a:solidFill>
-                  <a:srgbClr val="2C3E50"/>
-                </a:solidFill>
-                <a:latin typeface="Calibri"/>
-              </a:rPr>
-              <a:t>Vision: Sonnet 4.5 (Radiology, image input)</a:t>
-            </a:r>
-          </a:p>
-        </p:txBody>
-      </p:sp>
-      <p:sp>
-        <p:nvSpPr>
-          <p:cNvPr id="35" name="Rounded Rectangle 34"/>
-          <p:cNvSpPr/>
-          <p:nvPr/>
-        </p:nvSpPr>
-        <p:spPr>
-          <a:xfrm>
-            <a:off x="6035040" y="3429000"/>
-            <a:ext cx="5669280" cy="2606040"/>
-          </a:xfrm>
-          <a:prstGeom prst="roundRect">
-            <a:avLst>
-              <a:gd name="adj" fmla="val 5000"/>
-            </a:avLst>
-          </a:prstGeom>
-          <a:solidFill>
-            <a:srgbClr val="F3E5F5"/>
-          </a:solidFill>
-          <a:ln w="19050">
-            <a:solidFill>
-              <a:srgbClr val="7B1FA2"/>
-            </a:solidFill>
-          </a:ln>
-        </p:spPr>
-        <p:style>
-          <a:lnRef idx="1">
-            <a:schemeClr val="accent1"/>
-          </a:lnRef>
-          <a:fillRef idx="3">
-            <a:schemeClr val="accent1"/>
-          </a:fillRef>
-          <a:effectRef idx="2">
-            <a:schemeClr val="accent1"/>
-          </a:effectRef>
-          <a:fontRef idx="minor">
-            <a:schemeClr val="lt1"/>
-          </a:fontRef>
-        </p:style>
-        <p:txBody>
-          <a:bodyPr rtlCol="0" anchor="ctr"/>
-          <a:lstStyle/>
-          <a:p>
-            <a:pPr algn="ctr"/>
-          </a:p>
-        </p:txBody>
-      </p:sp>
-      <p:sp>
-        <p:nvSpPr>
-          <p:cNvPr id="36" name="Rectangle 35"/>
-          <p:cNvSpPr/>
-          <p:nvPr/>
-        </p:nvSpPr>
-        <p:spPr>
-          <a:xfrm>
-            <a:off x="6035040" y="3429000"/>
-            <a:ext cx="5669280" cy="457200"/>
-          </a:xfrm>
-          <a:prstGeom prst="rect">
-            <a:avLst/>
-          </a:prstGeom>
-          <a:solidFill>
-            <a:srgbClr val="7B1FA2"/>
-          </a:solidFill>
-          <a:ln>
-            <a:noFill/>
-          </a:ln>
-        </p:spPr>
-        <p:style>
-          <a:lnRef idx="1">
-            <a:schemeClr val="accent1"/>
-          </a:lnRef>
-          <a:fillRef idx="3">
-            <a:schemeClr val="accent1"/>
-          </a:fillRef>
-          <a:effectRef idx="2">
-            <a:schemeClr val="accent1"/>
-          </a:effectRef>
-          <a:fontRef idx="minor">
-            <a:schemeClr val="lt1"/>
-          </a:fontRef>
-        </p:style>
-        <p:txBody>
-          <a:bodyPr rtlCol="0" anchor="ctr"/>
-          <a:lstStyle/>
-          <a:p>
-            <a:pPr algn="ctr"/>
-          </a:p>
-        </p:txBody>
-      </p:sp>
-      <p:sp>
-        <p:nvSpPr>
-          <p:cNvPr id="37" name="TextBox 36"/>
-          <p:cNvSpPr txBox="1"/>
-          <p:nvPr/>
-        </p:nvSpPr>
-        <p:spPr>
-          <a:xfrm>
-            <a:off x="6035040" y="3429000"/>
-            <a:ext cx="5669280" cy="457200"/>
-          </a:xfrm>
-          <a:prstGeom prst="rect">
-            <a:avLst/>
-          </a:prstGeom>
-          <a:noFill/>
-        </p:spPr>
-        <p:txBody>
-          <a:bodyPr wrap="none" anchor="ctr">
-            <a:spAutoFit/>
-          </a:bodyPr>
-          <a:lstStyle/>
-          <a:p>
-            <a:pPr algn="ctr"/>
-            <a:r>
-              <a:rPr sz="1300" b="1">
-                <a:solidFill>
-                  <a:srgbClr val="FFFFFF"/>
-                </a:solidFill>
-                <a:latin typeface="Calibri"/>
-              </a:rPr>
-              <a:t>Alibaba Cloud</a:t>
-            </a:r>
-          </a:p>
-        </p:txBody>
-      </p:sp>
-      <p:sp>
-        <p:nvSpPr>
-          <p:cNvPr id="38" name="TextBox 37"/>
-          <p:cNvSpPr txBox="1"/>
-          <p:nvPr/>
-        </p:nvSpPr>
-        <p:spPr>
-          <a:xfrm>
-            <a:off x="6217920" y="3995928"/>
-            <a:ext cx="5303520" cy="292608"/>
-          </a:xfrm>
-          <a:prstGeom prst="rect">
-            <a:avLst/>
-          </a:prstGeom>
-          <a:noFill/>
-        </p:spPr>
-        <p:txBody>
-          <a:bodyPr wrap="square">
-            <a:spAutoFit/>
-          </a:bodyPr>
-          <a:lstStyle/>
-          <a:p>
-            <a:r>
-              <a:rPr sz="1050" b="1">
-                <a:solidFill>
-                  <a:srgbClr val="7B1FA2"/>
-                </a:solidFill>
-                <a:latin typeface="Calibri"/>
-              </a:rPr>
-              <a:t>▸ </a:t>
-            </a:r>
-            <a:r>
-              <a:rPr sz="1050">
-                <a:solidFill>
-                  <a:srgbClr val="2C3E50"/>
-                </a:solidFill>
-                <a:latin typeface="Calibri"/>
-              </a:rPr>
-              <a:t>Model Studio Agent Applications (per department)</a:t>
-            </a:r>
-          </a:p>
-        </p:txBody>
-      </p:sp>
-      <p:sp>
-        <p:nvSpPr>
-          <p:cNvPr id="39" name="TextBox 38"/>
-          <p:cNvSpPr txBox="1"/>
-          <p:nvPr/>
-        </p:nvSpPr>
-        <p:spPr>
-          <a:xfrm>
-            <a:off x="6217920" y="4288536"/>
-            <a:ext cx="5303520" cy="292608"/>
-          </a:xfrm>
-          <a:prstGeom prst="rect">
-            <a:avLst/>
-          </a:prstGeom>
-          <a:noFill/>
-        </p:spPr>
-        <p:txBody>
-          <a:bodyPr wrap="square">
-            <a:spAutoFit/>
-          </a:bodyPr>
-          <a:lstStyle/>
-          <a:p>
-            <a:r>
-              <a:rPr sz="1050" b="1">
-                <a:solidFill>
-                  <a:srgbClr val="7B1FA2"/>
-                </a:solidFill>
-                <a:latin typeface="Calibri"/>
-              </a:rPr>
-              <a:t>▸ </a:t>
-            </a:r>
-            <a:r>
-              <a:rPr sz="1050">
-                <a:solidFill>
-                  <a:srgbClr val="2C3E50"/>
-                </a:solidFill>
-                <a:latin typeface="Calibri"/>
-              </a:rPr>
-              <a:t>40 Agent apps + 1 emergency Workflow Application</a:t>
-            </a:r>
-          </a:p>
-        </p:txBody>
-      </p:sp>
-      <p:sp>
-        <p:nvSpPr>
-          <p:cNvPr id="40" name="TextBox 39"/>
-          <p:cNvSpPr txBox="1"/>
-          <p:nvPr/>
-        </p:nvSpPr>
-        <p:spPr>
-          <a:xfrm>
-            <a:off x="6217920" y="4581144"/>
-            <a:ext cx="5303520" cy="292608"/>
-          </a:xfrm>
-          <a:prstGeom prst="rect">
-            <a:avLst/>
-          </a:prstGeom>
-          <a:noFill/>
-        </p:spPr>
-        <p:txBody>
-          <a:bodyPr wrap="square">
-            <a:spAutoFit/>
-          </a:bodyPr>
-          <a:lstStyle/>
-          <a:p>
-            <a:r>
-              <a:rPr sz="1050" b="1">
-                <a:solidFill>
-                  <a:srgbClr val="7B1FA2"/>
-                </a:solidFill>
-                <a:latin typeface="Calibri"/>
-              </a:rPr>
-              <a:t>▸ </a:t>
-            </a:r>
-            <a:r>
-              <a:rPr sz="1050">
-                <a:solidFill>
-                  <a:srgbClr val="2C3E50"/>
-                </a:solidFill>
-                <a:latin typeface="Calibri"/>
-              </a:rPr>
-              <a:t>Router: Qwen3.5-Flash JSON mode (150-200ms)</a:t>
-            </a:r>
-          </a:p>
-        </p:txBody>
-      </p:sp>
-      <p:sp>
-        <p:nvSpPr>
-          <p:cNvPr id="41" name="TextBox 40"/>
-          <p:cNvSpPr txBox="1"/>
-          <p:nvPr/>
-        </p:nvSpPr>
-        <p:spPr>
-          <a:xfrm>
-            <a:off x="6217920" y="4873752"/>
-            <a:ext cx="5303520" cy="292608"/>
-          </a:xfrm>
-          <a:prstGeom prst="rect">
-            <a:avLst/>
-          </a:prstGeom>
-          <a:noFill/>
-        </p:spPr>
-        <p:txBody>
-          <a:bodyPr wrap="square">
-            <a:spAutoFit/>
-          </a:bodyPr>
-          <a:lstStyle/>
-          <a:p>
-            <a:r>
-              <a:rPr sz="1050" b="1">
-                <a:solidFill>
-                  <a:srgbClr val="7B1FA2"/>
-                </a:solidFill>
-                <a:latin typeface="Calibri"/>
-              </a:rPr>
-              <a:t>▸ </a:t>
-            </a:r>
-            <a:r>
-              <a:rPr sz="1050">
-                <a:solidFill>
-                  <a:srgbClr val="2C3E50"/>
-                </a:solidFill>
-                <a:latin typeface="Calibri"/>
-              </a:rPr>
-              <a:t>Emergency: Qwen3.5-Flash (deterministic DAG)</a:t>
-            </a:r>
-          </a:p>
-        </p:txBody>
-      </p:sp>
-      <p:sp>
-        <p:nvSpPr>
-          <p:cNvPr id="42" name="TextBox 41"/>
-          <p:cNvSpPr txBox="1"/>
-          <p:nvPr/>
-        </p:nvSpPr>
-        <p:spPr>
-          <a:xfrm>
-            <a:off x="6217920" y="5166360"/>
-            <a:ext cx="5303520" cy="292608"/>
-          </a:xfrm>
-          <a:prstGeom prst="rect">
-            <a:avLst/>
-          </a:prstGeom>
-          <a:noFill/>
-        </p:spPr>
-        <p:txBody>
-          <a:bodyPr wrap="square">
-            <a:spAutoFit/>
-          </a:bodyPr>
-          <a:lstStyle/>
-          <a:p>
-            <a:r>
-              <a:rPr sz="1050" b="1">
-                <a:solidFill>
-                  <a:srgbClr val="7B1FA2"/>
-                </a:solidFill>
-                <a:latin typeface="Calibri"/>
-              </a:rPr>
-              <a:t>▸ </a:t>
-            </a:r>
-            <a:r>
-              <a:rPr sz="1050">
-                <a:solidFill>
-                  <a:srgbClr val="2C3E50"/>
-                </a:solidFill>
-                <a:latin typeface="Calibri"/>
-              </a:rPr>
-              <a:t>Complex: 60% Qwen3-8B student / 40% Qwen3.5-Plus</a:t>
-            </a:r>
-          </a:p>
-        </p:txBody>
-      </p:sp>
-      <p:sp>
-        <p:nvSpPr>
-          <p:cNvPr id="43" name="TextBox 42"/>
-          <p:cNvSpPr txBox="1"/>
-          <p:nvPr/>
-        </p:nvSpPr>
-        <p:spPr>
-          <a:xfrm>
-            <a:off x="6217920" y="5458968"/>
-            <a:ext cx="5303520" cy="292608"/>
-          </a:xfrm>
-          <a:prstGeom prst="rect">
-            <a:avLst/>
-          </a:prstGeom>
-          <a:noFill/>
-        </p:spPr>
-        <p:txBody>
-          <a:bodyPr wrap="square">
-            <a:spAutoFit/>
-          </a:bodyPr>
-          <a:lstStyle/>
-          <a:p>
-            <a:r>
-              <a:rPr sz="1050" b="1">
-                <a:solidFill>
-                  <a:srgbClr val="7B1FA2"/>
-                </a:solidFill>
-                <a:latin typeface="Calibri"/>
-              </a:rPr>
-              <a:t>▸ </a:t>
-            </a:r>
-            <a:r>
-              <a:rPr sz="1050">
-                <a:solidFill>
-                  <a:srgbClr val="2C3E50"/>
-                </a:solidFill>
-                <a:latin typeface="Calibri"/>
-              </a:rPr>
-              <a:t>Vision: Qwen3-VL-Plus (Radiology, forced on image)</a:t>
+              <a:t>PoC: 12 departments, system prompt per agent, bedrock.converse() directly.  Production: 40 sub-specialties, Bedrock Agents service with tool calling.</a:t>
             </a:r>
           </a:p>
         </p:txBody>
@@ -8310,7 +9185,7 @@
                 </a:solidFill>
                 <a:latin typeface="Calibri"/>
               </a:rPr>
-              <a:t>Agentic RAG: Tools + Retrieval in a Loop</a:t>
+              <a:t>Agentic RAG: PoC vs Production Architecture</a:t>
             </a:r>
           </a:p>
         </p:txBody>
@@ -8324,7 +9199,7 @@
         <p:spPr>
           <a:xfrm>
             <a:off x="457200" y="841248"/>
-            <a:ext cx="6583679" cy="36576"/>
+            <a:ext cx="7077455" cy="36576"/>
           </a:xfrm>
           <a:prstGeom prst="rect">
             <a:avLst/>
@@ -8371,15 +9246,15 @@
           </a:xfrm>
           <a:prstGeom prst="roundRect">
             <a:avLst>
-              <a:gd name="adj" fmla="val 5000"/>
+              <a:gd name="adj" fmla="val 6000"/>
             </a:avLst>
           </a:prstGeom>
           <a:solidFill>
-            <a:srgbClr val="FFE8DA"/>
+            <a:srgbClr val="E8F5E9"/>
           </a:solidFill>
-          <a:ln w="19050">
+          <a:ln w="25400">
             <a:solidFill>
-              <a:srgbClr val="FF6B35"/>
+              <a:srgbClr val="27AE60"/>
             </a:solidFill>
           </a:ln>
         </p:spPr>
@@ -8418,6 +9293,2199 @@
           </a:xfrm>
           <a:prstGeom prst="rect">
             <a:avLst/>
+          </a:prstGeom>
+          <a:solidFill>
+            <a:srgbClr val="27AE60"/>
+          </a:solidFill>
+          <a:ln>
+            <a:noFill/>
+          </a:ln>
+        </p:spPr>
+        <p:style>
+          <a:lnRef idx="1">
+            <a:schemeClr val="accent1"/>
+          </a:lnRef>
+          <a:fillRef idx="3">
+            <a:schemeClr val="accent1"/>
+          </a:fillRef>
+          <a:effectRef idx="2">
+            <a:schemeClr val="accent1"/>
+          </a:effectRef>
+          <a:fontRef idx="minor">
+            <a:schemeClr val="lt1"/>
+          </a:fontRef>
+        </p:style>
+        <p:txBody>
+          <a:bodyPr rtlCol="0" anchor="ctr"/>
+          <a:lstStyle/>
+          <a:p>
+            <a:pPr algn="ctr"/>
+          </a:p>
+        </p:txBody>
+      </p:sp>
+      <p:sp>
+        <p:nvSpPr>
+          <p:cNvPr id="9" name="TextBox 8"/>
+          <p:cNvSpPr txBox="1"/>
+          <p:nvPr/>
+        </p:nvSpPr>
+        <p:spPr>
+          <a:xfrm>
+            <a:off x="457200" y="1005840"/>
+            <a:ext cx="5303520" cy="457200"/>
+          </a:xfrm>
+          <a:prstGeom prst="rect">
+            <a:avLst/>
+          </a:prstGeom>
+          <a:noFill/>
+        </p:spPr>
+        <p:txBody>
+          <a:bodyPr wrap="square">
+            <a:spAutoFit/>
+          </a:bodyPr>
+          <a:lstStyle/>
+          <a:p>
+            <a:pPr algn="ctr"/>
+            <a:r>
+              <a:rPr sz="1400" b="1" i="0">
+                <a:solidFill>
+                  <a:srgbClr val="FFFFFF"/>
+                </a:solidFill>
+                <a:latin typeface="Calibri"/>
+              </a:rPr>
+              <a:t>PoC (Deployed Today)</a:t>
+            </a:r>
+          </a:p>
+        </p:txBody>
+      </p:sp>
+      <p:sp>
+        <p:nvSpPr>
+          <p:cNvPr id="10" name="TextBox 9"/>
+          <p:cNvSpPr txBox="1"/>
+          <p:nvPr/>
+        </p:nvSpPr>
+        <p:spPr>
+          <a:xfrm>
+            <a:off x="640080" y="1572768"/>
+            <a:ext cx="4937760" cy="411480"/>
+          </a:xfrm>
+          <a:prstGeom prst="rect">
+            <a:avLst/>
+          </a:prstGeom>
+          <a:noFill/>
+        </p:spPr>
+        <p:txBody>
+          <a:bodyPr wrap="square">
+            <a:spAutoFit/>
+          </a:bodyPr>
+          <a:lstStyle/>
+          <a:p>
+            <a:pPr algn="l"/>
+            <a:r>
+              <a:rPr sz="1100" b="1" i="0">
+                <a:solidFill>
+                  <a:srgbClr val="27AE60"/>
+                </a:solidFill>
+                <a:latin typeface="Calibri"/>
+              </a:rPr>
+              <a:t>Fixed pipeline - NO Bedrock Agents, NO tool calling</a:t>
+            </a:r>
+          </a:p>
+        </p:txBody>
+      </p:sp>
+      <p:sp>
+        <p:nvSpPr>
+          <p:cNvPr id="11" name="Oval 10"/>
+          <p:cNvSpPr/>
+          <p:nvPr/>
+        </p:nvSpPr>
+        <p:spPr>
+          <a:xfrm>
+            <a:off x="640080" y="2057400"/>
+            <a:ext cx="329184" cy="329184"/>
+          </a:xfrm>
+          <a:prstGeom prst="ellipse">
+            <a:avLst/>
+          </a:prstGeom>
+          <a:solidFill>
+            <a:srgbClr val="27AE60"/>
+          </a:solidFill>
+          <a:ln>
+            <a:noFill/>
+          </a:ln>
+        </p:spPr>
+        <p:style>
+          <a:lnRef idx="1">
+            <a:schemeClr val="accent1"/>
+          </a:lnRef>
+          <a:fillRef idx="3">
+            <a:schemeClr val="accent1"/>
+          </a:fillRef>
+          <a:effectRef idx="2">
+            <a:schemeClr val="accent1"/>
+          </a:effectRef>
+          <a:fontRef idx="minor">
+            <a:schemeClr val="lt1"/>
+          </a:fontRef>
+        </p:style>
+        <p:txBody>
+          <a:bodyPr rtlCol="0" anchor="ctr"/>
+          <a:lstStyle/>
+          <a:p>
+            <a:pPr algn="ctr"/>
+          </a:p>
+        </p:txBody>
+      </p:sp>
+      <p:sp>
+        <p:nvSpPr>
+          <p:cNvPr id="12" name="TextBox 11"/>
+          <p:cNvSpPr txBox="1"/>
+          <p:nvPr/>
+        </p:nvSpPr>
+        <p:spPr>
+          <a:xfrm>
+            <a:off x="640080" y="2057400"/>
+            <a:ext cx="329184" cy="329184"/>
+          </a:xfrm>
+          <a:prstGeom prst="rect">
+            <a:avLst/>
+          </a:prstGeom>
+          <a:noFill/>
+        </p:spPr>
+        <p:txBody>
+          <a:bodyPr wrap="none" anchor="ctr">
+            <a:spAutoFit/>
+          </a:bodyPr>
+          <a:lstStyle/>
+          <a:p>
+            <a:pPr algn="ctr"/>
+            <a:r>
+              <a:rPr sz="1000" b="1">
+                <a:solidFill>
+                  <a:srgbClr val="FFFFFF"/>
+                </a:solidFill>
+                <a:latin typeface="Calibri"/>
+              </a:rPr>
+              <a:t>1</a:t>
+            </a:r>
+          </a:p>
+        </p:txBody>
+      </p:sp>
+      <p:sp>
+        <p:nvSpPr>
+          <p:cNvPr id="13" name="TextBox 12"/>
+          <p:cNvSpPr txBox="1"/>
+          <p:nvPr/>
+        </p:nvSpPr>
+        <p:spPr>
+          <a:xfrm>
+            <a:off x="1078992" y="2093976"/>
+            <a:ext cx="4480560" cy="347472"/>
+          </a:xfrm>
+          <a:prstGeom prst="rect">
+            <a:avLst/>
+          </a:prstGeom>
+          <a:noFill/>
+        </p:spPr>
+        <p:txBody>
+          <a:bodyPr wrap="square">
+            <a:spAutoFit/>
+          </a:bodyPr>
+          <a:lstStyle/>
+          <a:p>
+            <a:pPr algn="l"/>
+            <a:r>
+              <a:rPr sz="1050" b="0" i="0">
+                <a:solidFill>
+                  <a:srgbClr val="2C3E50"/>
+                </a:solidFill>
+                <a:latin typeface="Calibri"/>
+              </a:rPr>
+              <a:t>PHI mask (regex)</a:t>
+            </a:r>
+          </a:p>
+        </p:txBody>
+      </p:sp>
+      <p:sp>
+        <p:nvSpPr>
+          <p:cNvPr id="14" name="Oval 13"/>
+          <p:cNvSpPr/>
+          <p:nvPr/>
+        </p:nvSpPr>
+        <p:spPr>
+          <a:xfrm>
+            <a:off x="640080" y="2532888"/>
+            <a:ext cx="329184" cy="329184"/>
+          </a:xfrm>
+          <a:prstGeom prst="ellipse">
+            <a:avLst/>
+          </a:prstGeom>
+          <a:solidFill>
+            <a:srgbClr val="27AE60"/>
+          </a:solidFill>
+          <a:ln>
+            <a:noFill/>
+          </a:ln>
+        </p:spPr>
+        <p:style>
+          <a:lnRef idx="1">
+            <a:schemeClr val="accent1"/>
+          </a:lnRef>
+          <a:fillRef idx="3">
+            <a:schemeClr val="accent1"/>
+          </a:fillRef>
+          <a:effectRef idx="2">
+            <a:schemeClr val="accent1"/>
+          </a:effectRef>
+          <a:fontRef idx="minor">
+            <a:schemeClr val="lt1"/>
+          </a:fontRef>
+        </p:style>
+        <p:txBody>
+          <a:bodyPr rtlCol="0" anchor="ctr"/>
+          <a:lstStyle/>
+          <a:p>
+            <a:pPr algn="ctr"/>
+          </a:p>
+        </p:txBody>
+      </p:sp>
+      <p:sp>
+        <p:nvSpPr>
+          <p:cNvPr id="15" name="TextBox 14"/>
+          <p:cNvSpPr txBox="1"/>
+          <p:nvPr/>
+        </p:nvSpPr>
+        <p:spPr>
+          <a:xfrm>
+            <a:off x="640080" y="2532888"/>
+            <a:ext cx="329184" cy="329184"/>
+          </a:xfrm>
+          <a:prstGeom prst="rect">
+            <a:avLst/>
+          </a:prstGeom>
+          <a:noFill/>
+        </p:spPr>
+        <p:txBody>
+          <a:bodyPr wrap="none" anchor="ctr">
+            <a:spAutoFit/>
+          </a:bodyPr>
+          <a:lstStyle/>
+          <a:p>
+            <a:pPr algn="ctr"/>
+            <a:r>
+              <a:rPr sz="1000" b="1">
+                <a:solidFill>
+                  <a:srgbClr val="FFFFFF"/>
+                </a:solidFill>
+                <a:latin typeface="Calibri"/>
+              </a:rPr>
+              <a:t>2</a:t>
+            </a:r>
+          </a:p>
+        </p:txBody>
+      </p:sp>
+      <p:sp>
+        <p:nvSpPr>
+          <p:cNvPr id="16" name="TextBox 15"/>
+          <p:cNvSpPr txBox="1"/>
+          <p:nvPr/>
+        </p:nvSpPr>
+        <p:spPr>
+          <a:xfrm>
+            <a:off x="1078992" y="2569464"/>
+            <a:ext cx="4480560" cy="347472"/>
+          </a:xfrm>
+          <a:prstGeom prst="rect">
+            <a:avLst/>
+          </a:prstGeom>
+          <a:noFill/>
+        </p:spPr>
+        <p:txBody>
+          <a:bodyPr wrap="square">
+            <a:spAutoFit/>
+          </a:bodyPr>
+          <a:lstStyle/>
+          <a:p>
+            <a:pPr algn="l"/>
+            <a:r>
+              <a:rPr sz="1050" b="0" i="0">
+                <a:solidFill>
+                  <a:srgbClr val="2C3E50"/>
+                </a:solidFill>
+                <a:latin typeface="Calibri"/>
+              </a:rPr>
+              <a:t>Cache lookup (Redis)</a:t>
+            </a:r>
+          </a:p>
+        </p:txBody>
+      </p:sp>
+      <p:sp>
+        <p:nvSpPr>
+          <p:cNvPr id="17" name="Oval 16"/>
+          <p:cNvSpPr/>
+          <p:nvPr/>
+        </p:nvSpPr>
+        <p:spPr>
+          <a:xfrm>
+            <a:off x="640080" y="3008376"/>
+            <a:ext cx="329184" cy="329184"/>
+          </a:xfrm>
+          <a:prstGeom prst="ellipse">
+            <a:avLst/>
+          </a:prstGeom>
+          <a:solidFill>
+            <a:srgbClr val="27AE60"/>
+          </a:solidFill>
+          <a:ln>
+            <a:noFill/>
+          </a:ln>
+        </p:spPr>
+        <p:style>
+          <a:lnRef idx="1">
+            <a:schemeClr val="accent1"/>
+          </a:lnRef>
+          <a:fillRef idx="3">
+            <a:schemeClr val="accent1"/>
+          </a:fillRef>
+          <a:effectRef idx="2">
+            <a:schemeClr val="accent1"/>
+          </a:effectRef>
+          <a:fontRef idx="minor">
+            <a:schemeClr val="lt1"/>
+          </a:fontRef>
+        </p:style>
+        <p:txBody>
+          <a:bodyPr rtlCol="0" anchor="ctr"/>
+          <a:lstStyle/>
+          <a:p>
+            <a:pPr algn="ctr"/>
+          </a:p>
+        </p:txBody>
+      </p:sp>
+      <p:sp>
+        <p:nvSpPr>
+          <p:cNvPr id="18" name="TextBox 17"/>
+          <p:cNvSpPr txBox="1"/>
+          <p:nvPr/>
+        </p:nvSpPr>
+        <p:spPr>
+          <a:xfrm>
+            <a:off x="640080" y="3008376"/>
+            <a:ext cx="329184" cy="329184"/>
+          </a:xfrm>
+          <a:prstGeom prst="rect">
+            <a:avLst/>
+          </a:prstGeom>
+          <a:noFill/>
+        </p:spPr>
+        <p:txBody>
+          <a:bodyPr wrap="none" anchor="ctr">
+            <a:spAutoFit/>
+          </a:bodyPr>
+          <a:lstStyle/>
+          <a:p>
+            <a:pPr algn="ctr"/>
+            <a:r>
+              <a:rPr sz="1000" b="1">
+                <a:solidFill>
+                  <a:srgbClr val="FFFFFF"/>
+                </a:solidFill>
+                <a:latin typeface="Calibri"/>
+              </a:rPr>
+              <a:t>3</a:t>
+            </a:r>
+          </a:p>
+        </p:txBody>
+      </p:sp>
+      <p:sp>
+        <p:nvSpPr>
+          <p:cNvPr id="19" name="TextBox 18"/>
+          <p:cNvSpPr txBox="1"/>
+          <p:nvPr/>
+        </p:nvSpPr>
+        <p:spPr>
+          <a:xfrm>
+            <a:off x="1078992" y="3044952"/>
+            <a:ext cx="4480560" cy="347472"/>
+          </a:xfrm>
+          <a:prstGeom prst="rect">
+            <a:avLst/>
+          </a:prstGeom>
+          <a:noFill/>
+        </p:spPr>
+        <p:txBody>
+          <a:bodyPr wrap="square">
+            <a:spAutoFit/>
+          </a:bodyPr>
+          <a:lstStyle/>
+          <a:p>
+            <a:pPr algn="l"/>
+            <a:r>
+              <a:rPr sz="1050" b="0" i="0">
+                <a:solidFill>
+                  <a:srgbClr val="2C3E50"/>
+                </a:solidFill>
+                <a:latin typeface="Calibri"/>
+              </a:rPr>
+              <a:t>Lane: emergency or complex (if/else)</a:t>
+            </a:r>
+          </a:p>
+        </p:txBody>
+      </p:sp>
+      <p:sp>
+        <p:nvSpPr>
+          <p:cNvPr id="20" name="Oval 19"/>
+          <p:cNvSpPr/>
+          <p:nvPr/>
+        </p:nvSpPr>
+        <p:spPr>
+          <a:xfrm>
+            <a:off x="640080" y="3483864"/>
+            <a:ext cx="329184" cy="329184"/>
+          </a:xfrm>
+          <a:prstGeom prst="ellipse">
+            <a:avLst/>
+          </a:prstGeom>
+          <a:solidFill>
+            <a:srgbClr val="27AE60"/>
+          </a:solidFill>
+          <a:ln>
+            <a:noFill/>
+          </a:ln>
+        </p:spPr>
+        <p:style>
+          <a:lnRef idx="1">
+            <a:schemeClr val="accent1"/>
+          </a:lnRef>
+          <a:fillRef idx="3">
+            <a:schemeClr val="accent1"/>
+          </a:fillRef>
+          <a:effectRef idx="2">
+            <a:schemeClr val="accent1"/>
+          </a:effectRef>
+          <a:fontRef idx="minor">
+            <a:schemeClr val="lt1"/>
+          </a:fontRef>
+        </p:style>
+        <p:txBody>
+          <a:bodyPr rtlCol="0" anchor="ctr"/>
+          <a:lstStyle/>
+          <a:p>
+            <a:pPr algn="ctr"/>
+          </a:p>
+        </p:txBody>
+      </p:sp>
+      <p:sp>
+        <p:nvSpPr>
+          <p:cNvPr id="21" name="TextBox 20"/>
+          <p:cNvSpPr txBox="1"/>
+          <p:nvPr/>
+        </p:nvSpPr>
+        <p:spPr>
+          <a:xfrm>
+            <a:off x="640080" y="3483864"/>
+            <a:ext cx="329184" cy="329184"/>
+          </a:xfrm>
+          <a:prstGeom prst="rect">
+            <a:avLst/>
+          </a:prstGeom>
+          <a:noFill/>
+        </p:spPr>
+        <p:txBody>
+          <a:bodyPr wrap="none" anchor="ctr">
+            <a:spAutoFit/>
+          </a:bodyPr>
+          <a:lstStyle/>
+          <a:p>
+            <a:pPr algn="ctr"/>
+            <a:r>
+              <a:rPr sz="1000" b="1">
+                <a:solidFill>
+                  <a:srgbClr val="FFFFFF"/>
+                </a:solidFill>
+                <a:latin typeface="Calibri"/>
+              </a:rPr>
+              <a:t>4</a:t>
+            </a:r>
+          </a:p>
+        </p:txBody>
+      </p:sp>
+      <p:sp>
+        <p:nvSpPr>
+          <p:cNvPr id="22" name="TextBox 21"/>
+          <p:cNvSpPr txBox="1"/>
+          <p:nvPr/>
+        </p:nvSpPr>
+        <p:spPr>
+          <a:xfrm>
+            <a:off x="1078992" y="3520440"/>
+            <a:ext cx="4480560" cy="347472"/>
+          </a:xfrm>
+          <a:prstGeom prst="rect">
+            <a:avLst/>
+          </a:prstGeom>
+          <a:noFill/>
+        </p:spPr>
+        <p:txBody>
+          <a:bodyPr wrap="square">
+            <a:spAutoFit/>
+          </a:bodyPr>
+          <a:lstStyle/>
+          <a:p>
+            <a:pPr algn="l"/>
+            <a:r>
+              <a:rPr sz="1050" b="0" i="0">
+                <a:solidFill>
+                  <a:srgbClr val="2C3E50"/>
+                </a:solidFill>
+                <a:latin typeface="Calibri"/>
+              </a:rPr>
+              <a:t>Router: Nova Micro via bedrock.converse()</a:t>
+            </a:r>
+          </a:p>
+        </p:txBody>
+      </p:sp>
+      <p:sp>
+        <p:nvSpPr>
+          <p:cNvPr id="23" name="Oval 22"/>
+          <p:cNvSpPr/>
+          <p:nvPr/>
+        </p:nvSpPr>
+        <p:spPr>
+          <a:xfrm>
+            <a:off x="640080" y="3959352"/>
+            <a:ext cx="329184" cy="329184"/>
+          </a:xfrm>
+          <a:prstGeom prst="ellipse">
+            <a:avLst/>
+          </a:prstGeom>
+          <a:solidFill>
+            <a:srgbClr val="27AE60"/>
+          </a:solidFill>
+          <a:ln>
+            <a:noFill/>
+          </a:ln>
+        </p:spPr>
+        <p:style>
+          <a:lnRef idx="1">
+            <a:schemeClr val="accent1"/>
+          </a:lnRef>
+          <a:fillRef idx="3">
+            <a:schemeClr val="accent1"/>
+          </a:fillRef>
+          <a:effectRef idx="2">
+            <a:schemeClr val="accent1"/>
+          </a:effectRef>
+          <a:fontRef idx="minor">
+            <a:schemeClr val="lt1"/>
+          </a:fontRef>
+        </p:style>
+        <p:txBody>
+          <a:bodyPr rtlCol="0" anchor="ctr"/>
+          <a:lstStyle/>
+          <a:p>
+            <a:pPr algn="ctr"/>
+          </a:p>
+        </p:txBody>
+      </p:sp>
+      <p:sp>
+        <p:nvSpPr>
+          <p:cNvPr id="24" name="TextBox 23"/>
+          <p:cNvSpPr txBox="1"/>
+          <p:nvPr/>
+        </p:nvSpPr>
+        <p:spPr>
+          <a:xfrm>
+            <a:off x="640080" y="3959352"/>
+            <a:ext cx="329184" cy="329184"/>
+          </a:xfrm>
+          <a:prstGeom prst="rect">
+            <a:avLst/>
+          </a:prstGeom>
+          <a:noFill/>
+        </p:spPr>
+        <p:txBody>
+          <a:bodyPr wrap="none" anchor="ctr">
+            <a:spAutoFit/>
+          </a:bodyPr>
+          <a:lstStyle/>
+          <a:p>
+            <a:pPr algn="ctr"/>
+            <a:r>
+              <a:rPr sz="1000" b="1">
+                <a:solidFill>
+                  <a:srgbClr val="FFFFFF"/>
+                </a:solidFill>
+                <a:latin typeface="Calibri"/>
+              </a:rPr>
+              <a:t>5</a:t>
+            </a:r>
+          </a:p>
+        </p:txBody>
+      </p:sp>
+      <p:sp>
+        <p:nvSpPr>
+          <p:cNvPr id="25" name="TextBox 24"/>
+          <p:cNvSpPr txBox="1"/>
+          <p:nvPr/>
+        </p:nvSpPr>
+        <p:spPr>
+          <a:xfrm>
+            <a:off x="1078992" y="3995928"/>
+            <a:ext cx="4480560" cy="347472"/>
+          </a:xfrm>
+          <a:prstGeom prst="rect">
+            <a:avLst/>
+          </a:prstGeom>
+          <a:noFill/>
+        </p:spPr>
+        <p:txBody>
+          <a:bodyPr wrap="square">
+            <a:spAutoFit/>
+          </a:bodyPr>
+          <a:lstStyle/>
+          <a:p>
+            <a:pPr algn="l"/>
+            <a:r>
+              <a:rPr sz="1050" b="0" i="0">
+                <a:solidFill>
+                  <a:srgbClr val="2C3E50"/>
+                </a:solidFill>
+                <a:latin typeface="Calibri"/>
+              </a:rPr>
+              <a:t>Retrieve: Bedrock KB Retrieve API (direct call)</a:t>
+            </a:r>
+          </a:p>
+        </p:txBody>
+      </p:sp>
+      <p:sp>
+        <p:nvSpPr>
+          <p:cNvPr id="26" name="Oval 25"/>
+          <p:cNvSpPr/>
+          <p:nvPr/>
+        </p:nvSpPr>
+        <p:spPr>
+          <a:xfrm>
+            <a:off x="640080" y="4434840"/>
+            <a:ext cx="329184" cy="329184"/>
+          </a:xfrm>
+          <a:prstGeom prst="ellipse">
+            <a:avLst/>
+          </a:prstGeom>
+          <a:solidFill>
+            <a:srgbClr val="27AE60"/>
+          </a:solidFill>
+          <a:ln>
+            <a:noFill/>
+          </a:ln>
+        </p:spPr>
+        <p:style>
+          <a:lnRef idx="1">
+            <a:schemeClr val="accent1"/>
+          </a:lnRef>
+          <a:fillRef idx="3">
+            <a:schemeClr val="accent1"/>
+          </a:fillRef>
+          <a:effectRef idx="2">
+            <a:schemeClr val="accent1"/>
+          </a:effectRef>
+          <a:fontRef idx="minor">
+            <a:schemeClr val="lt1"/>
+          </a:fontRef>
+        </p:style>
+        <p:txBody>
+          <a:bodyPr rtlCol="0" anchor="ctr"/>
+          <a:lstStyle/>
+          <a:p>
+            <a:pPr algn="ctr"/>
+          </a:p>
+        </p:txBody>
+      </p:sp>
+      <p:sp>
+        <p:nvSpPr>
+          <p:cNvPr id="27" name="TextBox 26"/>
+          <p:cNvSpPr txBox="1"/>
+          <p:nvPr/>
+        </p:nvSpPr>
+        <p:spPr>
+          <a:xfrm>
+            <a:off x="640080" y="4434840"/>
+            <a:ext cx="329184" cy="329184"/>
+          </a:xfrm>
+          <a:prstGeom prst="rect">
+            <a:avLst/>
+          </a:prstGeom>
+          <a:noFill/>
+        </p:spPr>
+        <p:txBody>
+          <a:bodyPr wrap="none" anchor="ctr">
+            <a:spAutoFit/>
+          </a:bodyPr>
+          <a:lstStyle/>
+          <a:p>
+            <a:pPr algn="ctr"/>
+            <a:r>
+              <a:rPr sz="1000" b="1">
+                <a:solidFill>
+                  <a:srgbClr val="FFFFFF"/>
+                </a:solidFill>
+                <a:latin typeface="Calibri"/>
+              </a:rPr>
+              <a:t>6</a:t>
+            </a:r>
+          </a:p>
+        </p:txBody>
+      </p:sp>
+      <p:sp>
+        <p:nvSpPr>
+          <p:cNvPr id="28" name="TextBox 27"/>
+          <p:cNvSpPr txBox="1"/>
+          <p:nvPr/>
+        </p:nvSpPr>
+        <p:spPr>
+          <a:xfrm>
+            <a:off x="1078992" y="4471416"/>
+            <a:ext cx="4480560" cy="347472"/>
+          </a:xfrm>
+          <a:prstGeom prst="rect">
+            <a:avLst/>
+          </a:prstGeom>
+          <a:noFill/>
+        </p:spPr>
+        <p:txBody>
+          <a:bodyPr wrap="square">
+            <a:spAutoFit/>
+          </a:bodyPr>
+          <a:lstStyle/>
+          <a:p>
+            <a:pPr algn="l"/>
+            <a:r>
+              <a:rPr sz="1050" b="0" i="0">
+                <a:solidFill>
+                  <a:srgbClr val="2C3E50"/>
+                </a:solidFill>
+                <a:latin typeface="Calibri"/>
+              </a:rPr>
+              <a:t>GraphRAG: Bedrock KB Retrieve API (direct call)</a:t>
+            </a:r>
+          </a:p>
+        </p:txBody>
+      </p:sp>
+      <p:sp>
+        <p:nvSpPr>
+          <p:cNvPr id="29" name="Oval 28"/>
+          <p:cNvSpPr/>
+          <p:nvPr/>
+        </p:nvSpPr>
+        <p:spPr>
+          <a:xfrm>
+            <a:off x="640080" y="4910328"/>
+            <a:ext cx="329184" cy="329184"/>
+          </a:xfrm>
+          <a:prstGeom prst="ellipse">
+            <a:avLst/>
+          </a:prstGeom>
+          <a:solidFill>
+            <a:srgbClr val="27AE60"/>
+          </a:solidFill>
+          <a:ln>
+            <a:noFill/>
+          </a:ln>
+        </p:spPr>
+        <p:style>
+          <a:lnRef idx="1">
+            <a:schemeClr val="accent1"/>
+          </a:lnRef>
+          <a:fillRef idx="3">
+            <a:schemeClr val="accent1"/>
+          </a:fillRef>
+          <a:effectRef idx="2">
+            <a:schemeClr val="accent1"/>
+          </a:effectRef>
+          <a:fontRef idx="minor">
+            <a:schemeClr val="lt1"/>
+          </a:fontRef>
+        </p:style>
+        <p:txBody>
+          <a:bodyPr rtlCol="0" anchor="ctr"/>
+          <a:lstStyle/>
+          <a:p>
+            <a:pPr algn="ctr"/>
+          </a:p>
+        </p:txBody>
+      </p:sp>
+      <p:sp>
+        <p:nvSpPr>
+          <p:cNvPr id="30" name="TextBox 29"/>
+          <p:cNvSpPr txBox="1"/>
+          <p:nvPr/>
+        </p:nvSpPr>
+        <p:spPr>
+          <a:xfrm>
+            <a:off x="640080" y="4910328"/>
+            <a:ext cx="329184" cy="329184"/>
+          </a:xfrm>
+          <a:prstGeom prst="rect">
+            <a:avLst/>
+          </a:prstGeom>
+          <a:noFill/>
+        </p:spPr>
+        <p:txBody>
+          <a:bodyPr wrap="none" anchor="ctr">
+            <a:spAutoFit/>
+          </a:bodyPr>
+          <a:lstStyle/>
+          <a:p>
+            <a:pPr algn="ctr"/>
+            <a:r>
+              <a:rPr sz="1000" b="1">
+                <a:solidFill>
+                  <a:srgbClr val="FFFFFF"/>
+                </a:solidFill>
+                <a:latin typeface="Calibri"/>
+              </a:rPr>
+              <a:t>7</a:t>
+            </a:r>
+          </a:p>
+        </p:txBody>
+      </p:sp>
+      <p:sp>
+        <p:nvSpPr>
+          <p:cNvPr id="31" name="TextBox 30"/>
+          <p:cNvSpPr txBox="1"/>
+          <p:nvPr/>
+        </p:nvSpPr>
+        <p:spPr>
+          <a:xfrm>
+            <a:off x="1078992" y="4946904"/>
+            <a:ext cx="4480560" cy="347472"/>
+          </a:xfrm>
+          <a:prstGeom prst="rect">
+            <a:avLst/>
+          </a:prstGeom>
+          <a:noFill/>
+        </p:spPr>
+        <p:txBody>
+          <a:bodyPr wrap="square">
+            <a:spAutoFit/>
+          </a:bodyPr>
+          <a:lstStyle/>
+          <a:p>
+            <a:pPr algn="l"/>
+            <a:r>
+              <a:rPr sz="1050" b="0" i="0">
+                <a:solidFill>
+                  <a:srgbClr val="2C3E50"/>
+                </a:solidFill>
+                <a:latin typeface="Calibri"/>
+              </a:rPr>
+              <a:t>Generate: bedrock.converse_stream() directly</a:t>
+            </a:r>
+          </a:p>
+        </p:txBody>
+      </p:sp>
+      <p:sp>
+        <p:nvSpPr>
+          <p:cNvPr id="32" name="Oval 31"/>
+          <p:cNvSpPr/>
+          <p:nvPr/>
+        </p:nvSpPr>
+        <p:spPr>
+          <a:xfrm>
+            <a:off x="640080" y="5385816"/>
+            <a:ext cx="329184" cy="329184"/>
+          </a:xfrm>
+          <a:prstGeom prst="ellipse">
+            <a:avLst/>
+          </a:prstGeom>
+          <a:solidFill>
+            <a:srgbClr val="27AE60"/>
+          </a:solidFill>
+          <a:ln>
+            <a:noFill/>
+          </a:ln>
+        </p:spPr>
+        <p:style>
+          <a:lnRef idx="1">
+            <a:schemeClr val="accent1"/>
+          </a:lnRef>
+          <a:fillRef idx="3">
+            <a:schemeClr val="accent1"/>
+          </a:fillRef>
+          <a:effectRef idx="2">
+            <a:schemeClr val="accent1"/>
+          </a:effectRef>
+          <a:fontRef idx="minor">
+            <a:schemeClr val="lt1"/>
+          </a:fontRef>
+        </p:style>
+        <p:txBody>
+          <a:bodyPr rtlCol="0" anchor="ctr"/>
+          <a:lstStyle/>
+          <a:p>
+            <a:pPr algn="ctr"/>
+          </a:p>
+        </p:txBody>
+      </p:sp>
+      <p:sp>
+        <p:nvSpPr>
+          <p:cNvPr id="33" name="TextBox 32"/>
+          <p:cNvSpPr txBox="1"/>
+          <p:nvPr/>
+        </p:nvSpPr>
+        <p:spPr>
+          <a:xfrm>
+            <a:off x="640080" y="5385816"/>
+            <a:ext cx="329184" cy="329184"/>
+          </a:xfrm>
+          <a:prstGeom prst="rect">
+            <a:avLst/>
+          </a:prstGeom>
+          <a:noFill/>
+        </p:spPr>
+        <p:txBody>
+          <a:bodyPr wrap="none" anchor="ctr">
+            <a:spAutoFit/>
+          </a:bodyPr>
+          <a:lstStyle/>
+          <a:p>
+            <a:pPr algn="ctr"/>
+            <a:r>
+              <a:rPr sz="1000" b="1">
+                <a:solidFill>
+                  <a:srgbClr val="FFFFFF"/>
+                </a:solidFill>
+                <a:latin typeface="Calibri"/>
+              </a:rPr>
+              <a:t>8</a:t>
+            </a:r>
+          </a:p>
+        </p:txBody>
+      </p:sp>
+      <p:sp>
+        <p:nvSpPr>
+          <p:cNvPr id="34" name="TextBox 33"/>
+          <p:cNvSpPr txBox="1"/>
+          <p:nvPr/>
+        </p:nvSpPr>
+        <p:spPr>
+          <a:xfrm>
+            <a:off x="1078992" y="5422392"/>
+            <a:ext cx="4480560" cy="347472"/>
+          </a:xfrm>
+          <a:prstGeom prst="rect">
+            <a:avLst/>
+          </a:prstGeom>
+          <a:noFill/>
+        </p:spPr>
+        <p:txBody>
+          <a:bodyPr wrap="square">
+            <a:spAutoFit/>
+          </a:bodyPr>
+          <a:lstStyle/>
+          <a:p>
+            <a:pPr algn="l"/>
+            <a:r>
+              <a:rPr sz="1050" b="0" i="0">
+                <a:solidFill>
+                  <a:srgbClr val="2C3E50"/>
+                </a:solidFill>
+                <a:latin typeface="Calibri"/>
+              </a:rPr>
+              <a:t>Cache write + SSE stream to browser</a:t>
+            </a:r>
+          </a:p>
+        </p:txBody>
+      </p:sp>
+      <p:sp>
+        <p:nvSpPr>
+          <p:cNvPr id="35" name="TextBox 34"/>
+          <p:cNvSpPr txBox="1"/>
+          <p:nvPr/>
+        </p:nvSpPr>
+        <p:spPr>
+          <a:xfrm>
+            <a:off x="640080" y="5806440"/>
+            <a:ext cx="4937760" cy="228600"/>
+          </a:xfrm>
+          <a:prstGeom prst="rect">
+            <a:avLst/>
+          </a:prstGeom>
+          <a:noFill/>
+        </p:spPr>
+        <p:txBody>
+          <a:bodyPr wrap="square">
+            <a:spAutoFit/>
+          </a:bodyPr>
+          <a:lstStyle/>
+          <a:p>
+            <a:pPr algn="l"/>
+            <a:r>
+              <a:rPr sz="950" b="0" i="1">
+                <a:solidFill>
+                  <a:srgbClr val="646464"/>
+                </a:solidFill>
+                <a:latin typeface="Calibri"/>
+              </a:rPr>
+              <a:t>No icd11_lookup, no pubmed_search in PoC. PubMed = future feature.</a:t>
+            </a:r>
+          </a:p>
+        </p:txBody>
+      </p:sp>
+      <p:sp>
+        <p:nvSpPr>
+          <p:cNvPr id="36" name="Rounded Rectangle 35"/>
+          <p:cNvSpPr/>
+          <p:nvPr/>
+        </p:nvSpPr>
+        <p:spPr>
+          <a:xfrm>
+            <a:off x="6035040" y="1005840"/>
+            <a:ext cx="5669280" cy="5029200"/>
+          </a:xfrm>
+          <a:prstGeom prst="roundRect">
+            <a:avLst>
+              <a:gd name="adj" fmla="val 6000"/>
+            </a:avLst>
+          </a:prstGeom>
+          <a:solidFill>
+            <a:srgbClr val="FFF8E1"/>
+          </a:solidFill>
+          <a:ln w="25400">
+            <a:solidFill>
+              <a:srgbClr val="FF8F00"/>
+            </a:solidFill>
+          </a:ln>
+        </p:spPr>
+        <p:style>
+          <a:lnRef idx="1">
+            <a:schemeClr val="accent1"/>
+          </a:lnRef>
+          <a:fillRef idx="3">
+            <a:schemeClr val="accent1"/>
+          </a:fillRef>
+          <a:effectRef idx="2">
+            <a:schemeClr val="accent1"/>
+          </a:effectRef>
+          <a:fontRef idx="minor">
+            <a:schemeClr val="lt1"/>
+          </a:fontRef>
+        </p:style>
+        <p:txBody>
+          <a:bodyPr rtlCol="0" anchor="ctr"/>
+          <a:lstStyle/>
+          <a:p>
+            <a:pPr algn="ctr"/>
+          </a:p>
+        </p:txBody>
+      </p:sp>
+      <p:sp>
+        <p:nvSpPr>
+          <p:cNvPr id="37" name="Rectangle 36"/>
+          <p:cNvSpPr/>
+          <p:nvPr/>
+        </p:nvSpPr>
+        <p:spPr>
+          <a:xfrm>
+            <a:off x="6035040" y="1005840"/>
+            <a:ext cx="5669280" cy="457200"/>
+          </a:xfrm>
+          <a:prstGeom prst="rect">
+            <a:avLst/>
+          </a:prstGeom>
+          <a:solidFill>
+            <a:srgbClr val="FF8F00"/>
+          </a:solidFill>
+          <a:ln>
+            <a:noFill/>
+          </a:ln>
+        </p:spPr>
+        <p:style>
+          <a:lnRef idx="1">
+            <a:schemeClr val="accent1"/>
+          </a:lnRef>
+          <a:fillRef idx="3">
+            <a:schemeClr val="accent1"/>
+          </a:fillRef>
+          <a:effectRef idx="2">
+            <a:schemeClr val="accent1"/>
+          </a:effectRef>
+          <a:fontRef idx="minor">
+            <a:schemeClr val="lt1"/>
+          </a:fontRef>
+        </p:style>
+        <p:txBody>
+          <a:bodyPr rtlCol="0" anchor="ctr"/>
+          <a:lstStyle/>
+          <a:p>
+            <a:pPr algn="ctr"/>
+          </a:p>
+        </p:txBody>
+      </p:sp>
+      <p:sp>
+        <p:nvSpPr>
+          <p:cNvPr id="38" name="TextBox 37"/>
+          <p:cNvSpPr txBox="1"/>
+          <p:nvPr/>
+        </p:nvSpPr>
+        <p:spPr>
+          <a:xfrm>
+            <a:off x="6035040" y="1005840"/>
+            <a:ext cx="5669280" cy="457200"/>
+          </a:xfrm>
+          <a:prstGeom prst="rect">
+            <a:avLst/>
+          </a:prstGeom>
+          <a:noFill/>
+        </p:spPr>
+        <p:txBody>
+          <a:bodyPr wrap="square">
+            <a:spAutoFit/>
+          </a:bodyPr>
+          <a:lstStyle/>
+          <a:p>
+            <a:pPr algn="ctr"/>
+            <a:r>
+              <a:rPr sz="1400" b="1" i="0">
+                <a:solidFill>
+                  <a:srgbClr val="FFFFFF"/>
+                </a:solidFill>
+                <a:latin typeface="Calibri"/>
+              </a:rPr>
+              <a:t>Production Target (Bedrock Agents)</a:t>
+            </a:r>
+          </a:p>
+        </p:txBody>
+      </p:sp>
+      <p:sp>
+        <p:nvSpPr>
+          <p:cNvPr id="39" name="TextBox 38"/>
+          <p:cNvSpPr txBox="1"/>
+          <p:nvPr/>
+        </p:nvSpPr>
+        <p:spPr>
+          <a:xfrm>
+            <a:off x="6217920" y="1572768"/>
+            <a:ext cx="5303520" cy="411480"/>
+          </a:xfrm>
+          <a:prstGeom prst="rect">
+            <a:avLst/>
+          </a:prstGeom>
+          <a:noFill/>
+        </p:spPr>
+        <p:txBody>
+          <a:bodyPr wrap="square">
+            <a:spAutoFit/>
+          </a:bodyPr>
+          <a:lstStyle/>
+          <a:p>
+            <a:pPr algn="l"/>
+            <a:r>
+              <a:rPr sz="1100" b="1" i="0">
+                <a:solidFill>
+                  <a:srgbClr val="FF8F00"/>
+                </a:solidFill>
+                <a:latin typeface="Calibri"/>
+              </a:rPr>
+              <a:t>Agentic loop - LLM decides which tools to call</a:t>
+            </a:r>
+          </a:p>
+        </p:txBody>
+      </p:sp>
+      <p:sp>
+        <p:nvSpPr>
+          <p:cNvPr id="40" name="TextBox 39"/>
+          <p:cNvSpPr txBox="1"/>
+          <p:nvPr/>
+        </p:nvSpPr>
+        <p:spPr>
+          <a:xfrm>
+            <a:off x="6217920" y="2057400"/>
+            <a:ext cx="5303520" cy="320040"/>
+          </a:xfrm>
+          <a:prstGeom prst="rect">
+            <a:avLst/>
+          </a:prstGeom>
+          <a:noFill/>
+        </p:spPr>
+        <p:txBody>
+          <a:bodyPr wrap="square">
+            <a:spAutoFit/>
+          </a:bodyPr>
+          <a:lstStyle/>
+          <a:p>
+            <a:pPr algn="l"/>
+            <a:r>
+              <a:rPr sz="1100" b="1" i="0">
+                <a:solidFill>
+                  <a:srgbClr val="FF8F00"/>
+                </a:solidFill>
+                <a:latin typeface="Calibri"/>
+              </a:rPr>
+              <a:t>Agent tools (Bedrock action groups):</a:t>
+            </a:r>
+          </a:p>
+        </p:txBody>
+      </p:sp>
+      <p:sp>
+        <p:nvSpPr>
+          <p:cNvPr id="41" name="Rounded Rectangle 40"/>
+          <p:cNvSpPr/>
+          <p:nvPr/>
+        </p:nvSpPr>
+        <p:spPr>
+          <a:xfrm>
+            <a:off x="6217920" y="2423160"/>
+            <a:ext cx="5303520" cy="502920"/>
+          </a:xfrm>
+          <a:prstGeom prst="roundRect">
+            <a:avLst>
+              <a:gd name="adj" fmla="val 10000"/>
+            </a:avLst>
+          </a:prstGeom>
+          <a:solidFill>
+            <a:srgbClr val="FFFFFF"/>
+          </a:solidFill>
+          <a:ln w="15240">
+            <a:solidFill>
+              <a:srgbClr val="FF8F00"/>
+            </a:solidFill>
+          </a:ln>
+        </p:spPr>
+        <p:style>
+          <a:lnRef idx="1">
+            <a:schemeClr val="accent1"/>
+          </a:lnRef>
+          <a:fillRef idx="3">
+            <a:schemeClr val="accent1"/>
+          </a:fillRef>
+          <a:effectRef idx="2">
+            <a:schemeClr val="accent1"/>
+          </a:effectRef>
+          <a:fontRef idx="minor">
+            <a:schemeClr val="lt1"/>
+          </a:fontRef>
+        </p:style>
+        <p:txBody>
+          <a:bodyPr rtlCol="0" anchor="ctr"/>
+          <a:lstStyle/>
+          <a:p>
+            <a:pPr algn="ctr"/>
+          </a:p>
+        </p:txBody>
+      </p:sp>
+      <p:sp>
+        <p:nvSpPr>
+          <p:cNvPr id="42" name="Rectangle 41"/>
+          <p:cNvSpPr/>
+          <p:nvPr/>
+        </p:nvSpPr>
+        <p:spPr>
+          <a:xfrm>
+            <a:off x="6217920" y="2423160"/>
+            <a:ext cx="54864" cy="502920"/>
+          </a:xfrm>
+          <a:prstGeom prst="rect">
+            <a:avLst/>
+          </a:prstGeom>
+          <a:solidFill>
+            <a:srgbClr val="FF8F00"/>
+          </a:solidFill>
+          <a:ln>
+            <a:noFill/>
+          </a:ln>
+        </p:spPr>
+        <p:style>
+          <a:lnRef idx="1">
+            <a:schemeClr val="accent1"/>
+          </a:lnRef>
+          <a:fillRef idx="3">
+            <a:schemeClr val="accent1"/>
+          </a:fillRef>
+          <a:effectRef idx="2">
+            <a:schemeClr val="accent1"/>
+          </a:effectRef>
+          <a:fontRef idx="minor">
+            <a:schemeClr val="lt1"/>
+          </a:fontRef>
+        </p:style>
+        <p:txBody>
+          <a:bodyPr rtlCol="0" anchor="ctr"/>
+          <a:lstStyle/>
+          <a:p>
+            <a:pPr algn="ctr"/>
+          </a:p>
+        </p:txBody>
+      </p:sp>
+      <p:sp>
+        <p:nvSpPr>
+          <p:cNvPr id="43" name="TextBox 42"/>
+          <p:cNvSpPr txBox="1"/>
+          <p:nvPr/>
+        </p:nvSpPr>
+        <p:spPr>
+          <a:xfrm>
+            <a:off x="6400800" y="2459736"/>
+            <a:ext cx="1463040" cy="256032"/>
+          </a:xfrm>
+          <a:prstGeom prst="rect">
+            <a:avLst/>
+          </a:prstGeom>
+          <a:noFill/>
+        </p:spPr>
+        <p:txBody>
+          <a:bodyPr wrap="square">
+            <a:spAutoFit/>
+          </a:bodyPr>
+          <a:lstStyle/>
+          <a:p>
+            <a:pPr algn="l"/>
+            <a:r>
+              <a:rPr sz="1000" b="1" i="0">
+                <a:solidFill>
+                  <a:srgbClr val="FF8F00"/>
+                </a:solidFill>
+                <a:latin typeface="Calibri"/>
+              </a:rPr>
+              <a:t>kb_retrieve</a:t>
+            </a:r>
+          </a:p>
+        </p:txBody>
+      </p:sp>
+      <p:sp>
+        <p:nvSpPr>
+          <p:cNvPr id="44" name="TextBox 43"/>
+          <p:cNvSpPr txBox="1"/>
+          <p:nvPr/>
+        </p:nvSpPr>
+        <p:spPr>
+          <a:xfrm>
+            <a:off x="6400800" y="2697480"/>
+            <a:ext cx="1463040" cy="201168"/>
+          </a:xfrm>
+          <a:prstGeom prst="rect">
+            <a:avLst/>
+          </a:prstGeom>
+          <a:noFill/>
+        </p:spPr>
+        <p:txBody>
+          <a:bodyPr wrap="square">
+            <a:spAutoFit/>
+          </a:bodyPr>
+          <a:lstStyle/>
+          <a:p>
+            <a:pPr algn="l"/>
+            <a:r>
+              <a:rPr sz="900" b="0" i="1">
+                <a:solidFill>
+                  <a:srgbClr val="646464"/>
+                </a:solidFill>
+                <a:latin typeface="Calibri"/>
+              </a:rPr>
+              <a:t>Vector + GraphRAG KB</a:t>
+            </a:r>
+          </a:p>
+        </p:txBody>
+      </p:sp>
+      <p:sp>
+        <p:nvSpPr>
+          <p:cNvPr id="45" name="TextBox 44"/>
+          <p:cNvSpPr txBox="1"/>
+          <p:nvPr/>
+        </p:nvSpPr>
+        <p:spPr>
+          <a:xfrm>
+            <a:off x="7955279" y="2532888"/>
+            <a:ext cx="3474720" cy="320040"/>
+          </a:xfrm>
+          <a:prstGeom prst="rect">
+            <a:avLst/>
+          </a:prstGeom>
+          <a:noFill/>
+        </p:spPr>
+        <p:txBody>
+          <a:bodyPr wrap="square">
+            <a:spAutoFit/>
+          </a:bodyPr>
+          <a:lstStyle/>
+          <a:p>
+            <a:pPr algn="l"/>
+            <a:r>
+              <a:rPr sz="1000" b="0" i="0">
+                <a:solidFill>
+                  <a:srgbClr val="2C3E50"/>
+                </a:solidFill>
+                <a:latin typeface="Calibri"/>
+              </a:rPr>
+              <a:t>Semantic search on WHO, trials, protocols</a:t>
+            </a:r>
+          </a:p>
+        </p:txBody>
+      </p:sp>
+      <p:sp>
+        <p:nvSpPr>
+          <p:cNvPr id="46" name="Rounded Rectangle 45"/>
+          <p:cNvSpPr/>
+          <p:nvPr/>
+        </p:nvSpPr>
+        <p:spPr>
+          <a:xfrm>
+            <a:off x="6217920" y="2990088"/>
+            <a:ext cx="5303520" cy="502920"/>
+          </a:xfrm>
+          <a:prstGeom prst="roundRect">
+            <a:avLst>
+              <a:gd name="adj" fmla="val 10000"/>
+            </a:avLst>
+          </a:prstGeom>
+          <a:solidFill>
+            <a:srgbClr val="FFFFFF"/>
+          </a:solidFill>
+          <a:ln w="15240">
+            <a:solidFill>
+              <a:srgbClr val="FF8F00"/>
+            </a:solidFill>
+          </a:ln>
+        </p:spPr>
+        <p:style>
+          <a:lnRef idx="1">
+            <a:schemeClr val="accent1"/>
+          </a:lnRef>
+          <a:fillRef idx="3">
+            <a:schemeClr val="accent1"/>
+          </a:fillRef>
+          <a:effectRef idx="2">
+            <a:schemeClr val="accent1"/>
+          </a:effectRef>
+          <a:fontRef idx="minor">
+            <a:schemeClr val="lt1"/>
+          </a:fontRef>
+        </p:style>
+        <p:txBody>
+          <a:bodyPr rtlCol="0" anchor="ctr"/>
+          <a:lstStyle/>
+          <a:p>
+            <a:pPr algn="ctr"/>
+          </a:p>
+        </p:txBody>
+      </p:sp>
+      <p:sp>
+        <p:nvSpPr>
+          <p:cNvPr id="47" name="Rectangle 46"/>
+          <p:cNvSpPr/>
+          <p:nvPr/>
+        </p:nvSpPr>
+        <p:spPr>
+          <a:xfrm>
+            <a:off x="6217920" y="2990088"/>
+            <a:ext cx="54864" cy="502920"/>
+          </a:xfrm>
+          <a:prstGeom prst="rect">
+            <a:avLst/>
+          </a:prstGeom>
+          <a:solidFill>
+            <a:srgbClr val="FF8F00"/>
+          </a:solidFill>
+          <a:ln>
+            <a:noFill/>
+          </a:ln>
+        </p:spPr>
+        <p:style>
+          <a:lnRef idx="1">
+            <a:schemeClr val="accent1"/>
+          </a:lnRef>
+          <a:fillRef idx="3">
+            <a:schemeClr val="accent1"/>
+          </a:fillRef>
+          <a:effectRef idx="2">
+            <a:schemeClr val="accent1"/>
+          </a:effectRef>
+          <a:fontRef idx="minor">
+            <a:schemeClr val="lt1"/>
+          </a:fontRef>
+        </p:style>
+        <p:txBody>
+          <a:bodyPr rtlCol="0" anchor="ctr"/>
+          <a:lstStyle/>
+          <a:p>
+            <a:pPr algn="ctr"/>
+          </a:p>
+        </p:txBody>
+      </p:sp>
+      <p:sp>
+        <p:nvSpPr>
+          <p:cNvPr id="48" name="TextBox 47"/>
+          <p:cNvSpPr txBox="1"/>
+          <p:nvPr/>
+        </p:nvSpPr>
+        <p:spPr>
+          <a:xfrm>
+            <a:off x="6400800" y="3026664"/>
+            <a:ext cx="1463040" cy="256032"/>
+          </a:xfrm>
+          <a:prstGeom prst="rect">
+            <a:avLst/>
+          </a:prstGeom>
+          <a:noFill/>
+        </p:spPr>
+        <p:txBody>
+          <a:bodyPr wrap="square">
+            <a:spAutoFit/>
+          </a:bodyPr>
+          <a:lstStyle/>
+          <a:p>
+            <a:pPr algn="l"/>
+            <a:r>
+              <a:rPr sz="1000" b="1" i="0">
+                <a:solidFill>
+                  <a:srgbClr val="FF8F00"/>
+                </a:solidFill>
+                <a:latin typeface="Calibri"/>
+              </a:rPr>
+              <a:t>graph_retrieve</a:t>
+            </a:r>
+          </a:p>
+        </p:txBody>
+      </p:sp>
+      <p:sp>
+        <p:nvSpPr>
+          <p:cNvPr id="49" name="TextBox 48"/>
+          <p:cNvSpPr txBox="1"/>
+          <p:nvPr/>
+        </p:nvSpPr>
+        <p:spPr>
+          <a:xfrm>
+            <a:off x="6400800" y="3264408"/>
+            <a:ext cx="1463040" cy="201168"/>
+          </a:xfrm>
+          <a:prstGeom prst="rect">
+            <a:avLst/>
+          </a:prstGeom>
+          <a:noFill/>
+        </p:spPr>
+        <p:txBody>
+          <a:bodyPr wrap="square">
+            <a:spAutoFit/>
+          </a:bodyPr>
+          <a:lstStyle/>
+          <a:p>
+            <a:pPr algn="l"/>
+            <a:r>
+              <a:rPr sz="900" b="0" i="1">
+                <a:solidFill>
+                  <a:srgbClr val="646464"/>
+                </a:solidFill>
+                <a:latin typeface="Calibri"/>
+              </a:rPr>
+              <a:t>Neptune Analytics</a:t>
+            </a:r>
+          </a:p>
+        </p:txBody>
+      </p:sp>
+      <p:sp>
+        <p:nvSpPr>
+          <p:cNvPr id="50" name="TextBox 49"/>
+          <p:cNvSpPr txBox="1"/>
+          <p:nvPr/>
+        </p:nvSpPr>
+        <p:spPr>
+          <a:xfrm>
+            <a:off x="7955279" y="3099816"/>
+            <a:ext cx="3474720" cy="320040"/>
+          </a:xfrm>
+          <a:prstGeom prst="rect">
+            <a:avLst/>
+          </a:prstGeom>
+          <a:noFill/>
+        </p:spPr>
+        <p:txBody>
+          <a:bodyPr wrap="square">
+            <a:spAutoFit/>
+          </a:bodyPr>
+          <a:lstStyle/>
+          <a:p>
+            <a:pPr algn="l"/>
+            <a:r>
+              <a:rPr sz="1000" b="0" i="0">
+                <a:solidFill>
+                  <a:srgbClr val="2C3E50"/>
+                </a:solidFill>
+                <a:latin typeface="Calibri"/>
+              </a:rPr>
+              <a:t>Multi-hop entity traversal</a:t>
+            </a:r>
+          </a:p>
+        </p:txBody>
+      </p:sp>
+      <p:sp>
+        <p:nvSpPr>
+          <p:cNvPr id="51" name="Rounded Rectangle 50"/>
+          <p:cNvSpPr/>
+          <p:nvPr/>
+        </p:nvSpPr>
+        <p:spPr>
+          <a:xfrm>
+            <a:off x="6217920" y="3557015"/>
+            <a:ext cx="5303520" cy="502920"/>
+          </a:xfrm>
+          <a:prstGeom prst="roundRect">
+            <a:avLst>
+              <a:gd name="adj" fmla="val 10000"/>
+            </a:avLst>
+          </a:prstGeom>
+          <a:solidFill>
+            <a:srgbClr val="FFFFFF"/>
+          </a:solidFill>
+          <a:ln w="15240">
+            <a:solidFill>
+              <a:srgbClr val="FF8F00"/>
+            </a:solidFill>
+          </a:ln>
+        </p:spPr>
+        <p:style>
+          <a:lnRef idx="1">
+            <a:schemeClr val="accent1"/>
+          </a:lnRef>
+          <a:fillRef idx="3">
+            <a:schemeClr val="accent1"/>
+          </a:fillRef>
+          <a:effectRef idx="2">
+            <a:schemeClr val="accent1"/>
+          </a:effectRef>
+          <a:fontRef idx="minor">
+            <a:schemeClr val="lt1"/>
+          </a:fontRef>
+        </p:style>
+        <p:txBody>
+          <a:bodyPr rtlCol="0" anchor="ctr"/>
+          <a:lstStyle/>
+          <a:p>
+            <a:pPr algn="ctr"/>
+          </a:p>
+        </p:txBody>
+      </p:sp>
+      <p:sp>
+        <p:nvSpPr>
+          <p:cNvPr id="52" name="Rectangle 51"/>
+          <p:cNvSpPr/>
+          <p:nvPr/>
+        </p:nvSpPr>
+        <p:spPr>
+          <a:xfrm>
+            <a:off x="6217920" y="3557015"/>
+            <a:ext cx="54864" cy="502920"/>
+          </a:xfrm>
+          <a:prstGeom prst="rect">
+            <a:avLst/>
+          </a:prstGeom>
+          <a:solidFill>
+            <a:srgbClr val="FF8F00"/>
+          </a:solidFill>
+          <a:ln>
+            <a:noFill/>
+          </a:ln>
+        </p:spPr>
+        <p:style>
+          <a:lnRef idx="1">
+            <a:schemeClr val="accent1"/>
+          </a:lnRef>
+          <a:fillRef idx="3">
+            <a:schemeClr val="accent1"/>
+          </a:fillRef>
+          <a:effectRef idx="2">
+            <a:schemeClr val="accent1"/>
+          </a:effectRef>
+          <a:fontRef idx="minor">
+            <a:schemeClr val="lt1"/>
+          </a:fontRef>
+        </p:style>
+        <p:txBody>
+          <a:bodyPr rtlCol="0" anchor="ctr"/>
+          <a:lstStyle/>
+          <a:p>
+            <a:pPr algn="ctr"/>
+          </a:p>
+        </p:txBody>
+      </p:sp>
+      <p:sp>
+        <p:nvSpPr>
+          <p:cNvPr id="53" name="TextBox 52"/>
+          <p:cNvSpPr txBox="1"/>
+          <p:nvPr/>
+        </p:nvSpPr>
+        <p:spPr>
+          <a:xfrm>
+            <a:off x="6400800" y="3593591"/>
+            <a:ext cx="1463040" cy="256032"/>
+          </a:xfrm>
+          <a:prstGeom prst="rect">
+            <a:avLst/>
+          </a:prstGeom>
+          <a:noFill/>
+        </p:spPr>
+        <p:txBody>
+          <a:bodyPr wrap="square">
+            <a:spAutoFit/>
+          </a:bodyPr>
+          <a:lstStyle/>
+          <a:p>
+            <a:pPr algn="l"/>
+            <a:r>
+              <a:rPr sz="1000" b="1" i="0">
+                <a:solidFill>
+                  <a:srgbClr val="FF8F00"/>
+                </a:solidFill>
+                <a:latin typeface="Calibri"/>
+              </a:rPr>
+              <a:t>icd11_lookup</a:t>
+            </a:r>
+          </a:p>
+        </p:txBody>
+      </p:sp>
+      <p:sp>
+        <p:nvSpPr>
+          <p:cNvPr id="54" name="TextBox 53"/>
+          <p:cNvSpPr txBox="1"/>
+          <p:nvPr/>
+        </p:nvSpPr>
+        <p:spPr>
+          <a:xfrm>
+            <a:off x="6400800" y="3831335"/>
+            <a:ext cx="1463040" cy="201168"/>
+          </a:xfrm>
+          <a:prstGeom prst="rect">
+            <a:avLst/>
+          </a:prstGeom>
+          <a:noFill/>
+        </p:spPr>
+        <p:txBody>
+          <a:bodyPr wrap="square">
+            <a:spAutoFit/>
+          </a:bodyPr>
+          <a:lstStyle/>
+          <a:p>
+            <a:pPr algn="l"/>
+            <a:r>
+              <a:rPr sz="900" b="0" i="1">
+                <a:solidFill>
+                  <a:srgbClr val="646464"/>
+                </a:solidFill>
+                <a:latin typeface="Calibri"/>
+              </a:rPr>
+              <a:t>WHO ICD-11 API</a:t>
+            </a:r>
+          </a:p>
+        </p:txBody>
+      </p:sp>
+      <p:sp>
+        <p:nvSpPr>
+          <p:cNvPr id="55" name="TextBox 54"/>
+          <p:cNvSpPr txBox="1"/>
+          <p:nvPr/>
+        </p:nvSpPr>
+        <p:spPr>
+          <a:xfrm>
+            <a:off x="7955279" y="3666743"/>
+            <a:ext cx="3474720" cy="320040"/>
+          </a:xfrm>
+          <a:prstGeom prst="rect">
+            <a:avLst/>
+          </a:prstGeom>
+          <a:noFill/>
+        </p:spPr>
+        <p:txBody>
+          <a:bodyPr wrap="square">
+            <a:spAutoFit/>
+          </a:bodyPr>
+          <a:lstStyle/>
+          <a:p>
+            <a:pPr algn="l"/>
+            <a:r>
+              <a:rPr sz="1000" b="0" i="0">
+                <a:solidFill>
+                  <a:srgbClr val="2C3E50"/>
+                </a:solidFill>
+                <a:latin typeface="Calibri"/>
+              </a:rPr>
+              <a:t>Live disease classification + synonyms</a:t>
+            </a:r>
+          </a:p>
+        </p:txBody>
+      </p:sp>
+      <p:sp>
+        <p:nvSpPr>
+          <p:cNvPr id="56" name="Rounded Rectangle 55"/>
+          <p:cNvSpPr/>
+          <p:nvPr/>
+        </p:nvSpPr>
+        <p:spPr>
+          <a:xfrm>
+            <a:off x="6217920" y="4123944"/>
+            <a:ext cx="5303520" cy="502920"/>
+          </a:xfrm>
+          <a:prstGeom prst="roundRect">
+            <a:avLst>
+              <a:gd name="adj" fmla="val 10000"/>
+            </a:avLst>
+          </a:prstGeom>
+          <a:solidFill>
+            <a:srgbClr val="FFFFFF"/>
+          </a:solidFill>
+          <a:ln w="15240">
+            <a:solidFill>
+              <a:srgbClr val="FF8F00"/>
+            </a:solidFill>
+          </a:ln>
+        </p:spPr>
+        <p:style>
+          <a:lnRef idx="1">
+            <a:schemeClr val="accent1"/>
+          </a:lnRef>
+          <a:fillRef idx="3">
+            <a:schemeClr val="accent1"/>
+          </a:fillRef>
+          <a:effectRef idx="2">
+            <a:schemeClr val="accent1"/>
+          </a:effectRef>
+          <a:fontRef idx="minor">
+            <a:schemeClr val="lt1"/>
+          </a:fontRef>
+        </p:style>
+        <p:txBody>
+          <a:bodyPr rtlCol="0" anchor="ctr"/>
+          <a:lstStyle/>
+          <a:p>
+            <a:pPr algn="ctr"/>
+          </a:p>
+        </p:txBody>
+      </p:sp>
+      <p:sp>
+        <p:nvSpPr>
+          <p:cNvPr id="57" name="Rectangle 56"/>
+          <p:cNvSpPr/>
+          <p:nvPr/>
+        </p:nvSpPr>
+        <p:spPr>
+          <a:xfrm>
+            <a:off x="6217920" y="4123944"/>
+            <a:ext cx="54864" cy="502920"/>
+          </a:xfrm>
+          <a:prstGeom prst="rect">
+            <a:avLst/>
+          </a:prstGeom>
+          <a:solidFill>
+            <a:srgbClr val="FF8F00"/>
+          </a:solidFill>
+          <a:ln>
+            <a:noFill/>
+          </a:ln>
+        </p:spPr>
+        <p:style>
+          <a:lnRef idx="1">
+            <a:schemeClr val="accent1"/>
+          </a:lnRef>
+          <a:fillRef idx="3">
+            <a:schemeClr val="accent1"/>
+          </a:fillRef>
+          <a:effectRef idx="2">
+            <a:schemeClr val="accent1"/>
+          </a:effectRef>
+          <a:fontRef idx="minor">
+            <a:schemeClr val="lt1"/>
+          </a:fontRef>
+        </p:style>
+        <p:txBody>
+          <a:bodyPr rtlCol="0" anchor="ctr"/>
+          <a:lstStyle/>
+          <a:p>
+            <a:pPr algn="ctr"/>
+          </a:p>
+        </p:txBody>
+      </p:sp>
+      <p:sp>
+        <p:nvSpPr>
+          <p:cNvPr id="58" name="TextBox 57"/>
+          <p:cNvSpPr txBox="1"/>
+          <p:nvPr/>
+        </p:nvSpPr>
+        <p:spPr>
+          <a:xfrm>
+            <a:off x="6400800" y="4160520"/>
+            <a:ext cx="1463040" cy="256032"/>
+          </a:xfrm>
+          <a:prstGeom prst="rect">
+            <a:avLst/>
+          </a:prstGeom>
+          <a:noFill/>
+        </p:spPr>
+        <p:txBody>
+          <a:bodyPr wrap="square">
+            <a:spAutoFit/>
+          </a:bodyPr>
+          <a:lstStyle/>
+          <a:p>
+            <a:pPr algn="l"/>
+            <a:r>
+              <a:rPr sz="1000" b="1" i="0">
+                <a:solidFill>
+                  <a:srgbClr val="FF8F00"/>
+                </a:solidFill>
+                <a:latin typeface="Calibri"/>
+              </a:rPr>
+              <a:t>pubmed_search</a:t>
+            </a:r>
+          </a:p>
+        </p:txBody>
+      </p:sp>
+      <p:sp>
+        <p:nvSpPr>
+          <p:cNvPr id="59" name="TextBox 58"/>
+          <p:cNvSpPr txBox="1"/>
+          <p:nvPr/>
+        </p:nvSpPr>
+        <p:spPr>
+          <a:xfrm>
+            <a:off x="6400800" y="4398264"/>
+            <a:ext cx="1463040" cy="201168"/>
+          </a:xfrm>
+          <a:prstGeom prst="rect">
+            <a:avLst/>
+          </a:prstGeom>
+          <a:noFill/>
+        </p:spPr>
+        <p:txBody>
+          <a:bodyPr wrap="square">
+            <a:spAutoFit/>
+          </a:bodyPr>
+          <a:lstStyle/>
+          <a:p>
+            <a:pPr algn="l"/>
+            <a:r>
+              <a:rPr sz="900" b="0" i="1">
+                <a:solidFill>
+                  <a:srgbClr val="646464"/>
+                </a:solidFill>
+                <a:latin typeface="Calibri"/>
+              </a:rPr>
+              <a:t>NCBI E-utilities</a:t>
+            </a:r>
+          </a:p>
+        </p:txBody>
+      </p:sp>
+      <p:sp>
+        <p:nvSpPr>
+          <p:cNvPr id="60" name="TextBox 59"/>
+          <p:cNvSpPr txBox="1"/>
+          <p:nvPr/>
+        </p:nvSpPr>
+        <p:spPr>
+          <a:xfrm>
+            <a:off x="7955279" y="4233672"/>
+            <a:ext cx="3474720" cy="320040"/>
+          </a:xfrm>
+          <a:prstGeom prst="rect">
+            <a:avLst/>
+          </a:prstGeom>
+          <a:noFill/>
+        </p:spPr>
+        <p:txBody>
+          <a:bodyPr wrap="square">
+            <a:spAutoFit/>
+          </a:bodyPr>
+          <a:lstStyle/>
+          <a:p>
+            <a:pPr algn="l"/>
+            <a:r>
+              <a:rPr sz="1000" b="0" i="0">
+                <a:solidFill>
+                  <a:srgbClr val="2C3E50"/>
+                </a:solidFill>
+                <a:latin typeface="Calibri"/>
+              </a:rPr>
+              <a:t>Real-time research literature</a:t>
+            </a:r>
+          </a:p>
+        </p:txBody>
+      </p:sp>
+      <p:sp>
+        <p:nvSpPr>
+          <p:cNvPr id="61" name="TextBox 60"/>
+          <p:cNvSpPr txBox="1"/>
+          <p:nvPr/>
+        </p:nvSpPr>
+        <p:spPr>
+          <a:xfrm>
+            <a:off x="6217920" y="4754880"/>
+            <a:ext cx="5303520" cy="411480"/>
+          </a:xfrm>
+          <a:prstGeom prst="rect">
+            <a:avLst/>
+          </a:prstGeom>
+          <a:noFill/>
+        </p:spPr>
+        <p:txBody>
+          <a:bodyPr wrap="square">
+            <a:spAutoFit/>
+          </a:bodyPr>
+          <a:lstStyle/>
+          <a:p>
+            <a:pPr algn="l"/>
+            <a:r>
+              <a:rPr sz="1100" b="1" i="0">
+                <a:solidFill>
+                  <a:srgbClr val="FF8F00"/>
+                </a:solidFill>
+                <a:latin typeface="Calibri"/>
+              </a:rPr>
+              <a:t>Why not in PoC?</a:t>
+            </a:r>
+          </a:p>
+        </p:txBody>
+      </p:sp>
+      <p:sp>
+        <p:nvSpPr>
+          <p:cNvPr id="62" name="TextBox 61"/>
+          <p:cNvSpPr txBox="1"/>
+          <p:nvPr/>
+        </p:nvSpPr>
+        <p:spPr>
+          <a:xfrm>
+            <a:off x="6217920" y="5193792"/>
+            <a:ext cx="5303520" cy="256032"/>
+          </a:xfrm>
+          <a:prstGeom prst="rect">
+            <a:avLst/>
+          </a:prstGeom>
+          <a:noFill/>
+        </p:spPr>
+        <p:txBody>
+          <a:bodyPr wrap="square">
+            <a:spAutoFit/>
+          </a:bodyPr>
+          <a:lstStyle/>
+          <a:p>
+            <a:r>
+              <a:rPr sz="1000" b="1">
+                <a:solidFill>
+                  <a:srgbClr val="FF8F00"/>
+                </a:solidFill>
+                <a:latin typeface="Calibri"/>
+              </a:rPr>
+              <a:t>▸ </a:t>
+            </a:r>
+            <a:r>
+              <a:rPr sz="1000">
+                <a:solidFill>
+                  <a:srgbClr val="2C3E50"/>
+                </a:solidFill>
+                <a:latin typeface="Calibri"/>
+              </a:rPr>
+              <a:t>Bedrock Agent InvokeAgent blocked by IAM trust chain issue</a:t>
+            </a:r>
+          </a:p>
+        </p:txBody>
+      </p:sp>
+      <p:sp>
+        <p:nvSpPr>
+          <p:cNvPr id="63" name="TextBox 62"/>
+          <p:cNvSpPr txBox="1"/>
+          <p:nvPr/>
+        </p:nvSpPr>
+        <p:spPr>
+          <a:xfrm>
+            <a:off x="6217920" y="5449824"/>
+            <a:ext cx="5303520" cy="256032"/>
+          </a:xfrm>
+          <a:prstGeom prst="rect">
+            <a:avLst/>
+          </a:prstGeom>
+          <a:noFill/>
+        </p:spPr>
+        <p:txBody>
+          <a:bodyPr wrap="square">
+            <a:spAutoFit/>
+          </a:bodyPr>
+          <a:lstStyle/>
+          <a:p>
+            <a:r>
+              <a:rPr sz="1000" b="1">
+                <a:solidFill>
+                  <a:srgbClr val="FF8F00"/>
+                </a:solidFill>
+                <a:latin typeface="Calibri"/>
+              </a:rPr>
+              <a:t>▸ </a:t>
+            </a:r>
+            <a:r>
+              <a:rPr sz="1000">
+                <a:solidFill>
+                  <a:srgbClr val="2C3E50"/>
+                </a:solidFill>
+                <a:latin typeface="Calibri"/>
+              </a:rPr>
+              <a:t>converse_stream() used directly instead (works, faster to build)</a:t>
+            </a:r>
+          </a:p>
+        </p:txBody>
+      </p:sp>
+      <p:sp>
+        <p:nvSpPr>
+          <p:cNvPr id="64" name="TextBox 63"/>
+          <p:cNvSpPr txBox="1"/>
+          <p:nvPr/>
+        </p:nvSpPr>
+        <p:spPr>
+          <a:xfrm>
+            <a:off x="6217920" y="5705856"/>
+            <a:ext cx="5303520" cy="256032"/>
+          </a:xfrm>
+          <a:prstGeom prst="rect">
+            <a:avLst/>
+          </a:prstGeom>
+          <a:noFill/>
+        </p:spPr>
+        <p:txBody>
+          <a:bodyPr wrap="square">
+            <a:spAutoFit/>
+          </a:bodyPr>
+          <a:lstStyle/>
+          <a:p>
+            <a:r>
+              <a:rPr sz="1000" b="1">
+                <a:solidFill>
+                  <a:srgbClr val="FF8F00"/>
+                </a:solidFill>
+                <a:latin typeface="Calibri"/>
+              </a:rPr>
+              <a:t>▸ </a:t>
+            </a:r>
+            <a:r>
+              <a:rPr sz="1000">
+                <a:solidFill>
+                  <a:srgbClr val="2C3E50"/>
+                </a:solidFill>
+                <a:latin typeface="Calibri"/>
+              </a:rPr>
+              <a:t>Production: resolve IAM + enable full agentic loop</a:t>
+            </a:r>
+          </a:p>
+        </p:txBody>
+      </p:sp>
+      <p:sp>
+        <p:nvSpPr>
+          <p:cNvPr id="65" name="Rounded Rectangle 64"/>
+          <p:cNvSpPr/>
+          <p:nvPr/>
+        </p:nvSpPr>
+        <p:spPr>
+          <a:xfrm>
+            <a:off x="457200" y="6080760"/>
+            <a:ext cx="11247120" cy="347472"/>
+          </a:xfrm>
+          <a:prstGeom prst="roundRect">
+            <a:avLst>
+              <a:gd name="adj" fmla="val 20000"/>
+            </a:avLst>
           </a:prstGeom>
           <a:solidFill>
             <a:srgbClr val="FF6B35"/>
@@ -8450,1914 +11518,35 @@
       </p:sp>
       <p:sp>
         <p:nvSpPr>
-          <p:cNvPr id="9" name="TextBox 8"/>
-          <p:cNvSpPr txBox="1"/>
-          <p:nvPr/>
-        </p:nvSpPr>
-        <p:spPr>
-          <a:xfrm>
-            <a:off x="457200" y="1005840"/>
-            <a:ext cx="5303520" cy="457200"/>
-          </a:xfrm>
-          <a:prstGeom prst="rect">
-            <a:avLst/>
-          </a:prstGeom>
-          <a:noFill/>
-        </p:spPr>
-        <p:txBody>
-          <a:bodyPr wrap="none" anchor="ctr">
-            <a:spAutoFit/>
-          </a:bodyPr>
-          <a:lstStyle/>
-          <a:p>
-            <a:pPr algn="ctr"/>
-            <a:r>
-              <a:rPr sz="1300" b="1">
+          <p:cNvPr id="66" name="TextBox 65"/>
+          <p:cNvSpPr txBox="1"/>
+          <p:nvPr/>
+        </p:nvSpPr>
+        <p:spPr>
+          <a:xfrm>
+            <a:off x="640080" y="6117336"/>
+            <a:ext cx="10881360" cy="292608"/>
+          </a:xfrm>
+          <a:prstGeom prst="rect">
+            <a:avLst/>
+          </a:prstGeom>
+          <a:noFill/>
+        </p:spPr>
+        <p:txBody>
+          <a:bodyPr wrap="square">
+            <a:spAutoFit/>
+          </a:bodyPr>
+          <a:lstStyle/>
+          <a:p>
+            <a:pPr algn="ctr"/>
+            <a:r>
+              <a:rPr sz="1100" b="1" i="0">
                 <a:solidFill>
                   <a:srgbClr val="FFFFFF"/>
                 </a:solidFill>
                 <a:latin typeface="Calibri"/>
               </a:rPr>
-              <a:t>Standard RAG vs Agentic RAG</a:t>
-            </a:r>
-          </a:p>
-        </p:txBody>
-      </p:sp>
-      <p:sp>
-        <p:nvSpPr>
-          <p:cNvPr id="10" name="TextBox 9"/>
-          <p:cNvSpPr txBox="1"/>
-          <p:nvPr/>
-        </p:nvSpPr>
-        <p:spPr>
-          <a:xfrm>
-            <a:off x="640080" y="1572768"/>
-            <a:ext cx="4937760" cy="502920"/>
-          </a:xfrm>
-          <a:prstGeom prst="rect">
-            <a:avLst/>
-          </a:prstGeom>
-          <a:noFill/>
-        </p:spPr>
-        <p:txBody>
-          <a:bodyPr wrap="square">
-            <a:spAutoFit/>
-          </a:bodyPr>
-          <a:lstStyle/>
-          <a:p>
-            <a:pPr algn="l"/>
-            <a:r>
-              <a:rPr sz="1100" b="0" i="0">
-                <a:solidFill>
-                  <a:srgbClr val="2C3E50"/>
-                </a:solidFill>
-                <a:latin typeface="Calibri"/>
-              </a:rPr>
-              <a:t>Standard RAG: retrieve once, generate once. Fixed pipeline.</a:t>
-            </a:r>
-          </a:p>
-        </p:txBody>
-      </p:sp>
-      <p:sp>
-        <p:nvSpPr>
-          <p:cNvPr id="11" name="TextBox 10"/>
-          <p:cNvSpPr txBox="1"/>
-          <p:nvPr/>
-        </p:nvSpPr>
-        <p:spPr>
-          <a:xfrm>
-            <a:off x="640080" y="2121408"/>
-            <a:ext cx="4937760" cy="502920"/>
-          </a:xfrm>
-          <a:prstGeom prst="rect">
-            <a:avLst/>
-          </a:prstGeom>
-          <a:noFill/>
-        </p:spPr>
-        <p:txBody>
-          <a:bodyPr wrap="square">
-            <a:spAutoFit/>
-          </a:bodyPr>
-          <a:lstStyle/>
-          <a:p>
-            <a:pPr algn="l"/>
-            <a:r>
-              <a:rPr sz="1100" b="0" i="0">
-                <a:solidFill>
-                  <a:srgbClr val="2C3E50"/>
-                </a:solidFill>
-                <a:latin typeface="Calibri"/>
-              </a:rPr>
-              <a:t>Agentic RAG: LLM decides which tools to call, in what order, based on the question. Can call multiple sources, iterate.</a:t>
-            </a:r>
-          </a:p>
-        </p:txBody>
-      </p:sp>
-      <p:sp>
-        <p:nvSpPr>
-          <p:cNvPr id="12" name="Rounded Rectangle 11"/>
-          <p:cNvSpPr/>
-          <p:nvPr/>
-        </p:nvSpPr>
-        <p:spPr>
-          <a:xfrm>
-            <a:off x="640080" y="2743200"/>
-            <a:ext cx="4754880" cy="566928"/>
-          </a:xfrm>
-          <a:prstGeom prst="roundRect">
-            <a:avLst>
-              <a:gd name="adj" fmla="val 10000"/>
-            </a:avLst>
-          </a:prstGeom>
-          <a:solidFill>
-            <a:srgbClr val="FFFFFF"/>
-          </a:solidFill>
-          <a:ln w="19050">
-            <a:solidFill>
-              <a:srgbClr val="FF6B35"/>
-            </a:solidFill>
-          </a:ln>
-        </p:spPr>
-        <p:style>
-          <a:lnRef idx="1">
-            <a:schemeClr val="accent1"/>
-          </a:lnRef>
-          <a:fillRef idx="3">
-            <a:schemeClr val="accent1"/>
-          </a:fillRef>
-          <a:effectRef idx="2">
-            <a:schemeClr val="accent1"/>
-          </a:effectRef>
-          <a:fontRef idx="minor">
-            <a:schemeClr val="lt1"/>
-          </a:fontRef>
-        </p:style>
-        <p:txBody>
-          <a:bodyPr rtlCol="0" anchor="ctr"/>
-          <a:lstStyle/>
-          <a:p>
-            <a:pPr algn="ctr"/>
-          </a:p>
-        </p:txBody>
-      </p:sp>
-      <p:sp>
-        <p:nvSpPr>
-          <p:cNvPr id="13" name="Rectangle 12"/>
-          <p:cNvSpPr/>
-          <p:nvPr/>
-        </p:nvSpPr>
-        <p:spPr>
-          <a:xfrm>
-            <a:off x="640080" y="2743200"/>
-            <a:ext cx="64008" cy="566928"/>
-          </a:xfrm>
-          <a:prstGeom prst="rect">
-            <a:avLst/>
-          </a:prstGeom>
-          <a:solidFill>
-            <a:srgbClr val="FF6B35"/>
-          </a:solidFill>
-          <a:ln>
-            <a:noFill/>
-          </a:ln>
-        </p:spPr>
-        <p:style>
-          <a:lnRef idx="1">
-            <a:schemeClr val="accent1"/>
-          </a:lnRef>
-          <a:fillRef idx="3">
-            <a:schemeClr val="accent1"/>
-          </a:fillRef>
-          <a:effectRef idx="2">
-            <a:schemeClr val="accent1"/>
-          </a:effectRef>
-          <a:fontRef idx="minor">
-            <a:schemeClr val="lt1"/>
-          </a:fontRef>
-        </p:style>
-        <p:txBody>
-          <a:bodyPr rtlCol="0" anchor="ctr"/>
-          <a:lstStyle/>
-          <a:p>
-            <a:pPr algn="ctr"/>
-          </a:p>
-        </p:txBody>
-      </p:sp>
-      <p:sp>
-        <p:nvSpPr>
-          <p:cNvPr id="14" name="TextBox 13"/>
-          <p:cNvSpPr txBox="1"/>
-          <p:nvPr/>
-        </p:nvSpPr>
-        <p:spPr>
-          <a:xfrm>
-            <a:off x="822960" y="2788920"/>
-            <a:ext cx="1371600" cy="274320"/>
-          </a:xfrm>
-          <a:prstGeom prst="rect">
-            <a:avLst/>
-          </a:prstGeom>
-          <a:noFill/>
-        </p:spPr>
-        <p:txBody>
-          <a:bodyPr wrap="square">
-            <a:spAutoFit/>
-          </a:bodyPr>
-          <a:lstStyle/>
-          <a:p>
-            <a:pPr algn="l"/>
-            <a:r>
-              <a:rPr sz="1000" b="1" i="0">
-                <a:solidFill>
-                  <a:srgbClr val="FF6B35"/>
-                </a:solidFill>
-                <a:latin typeface="Calibri"/>
-              </a:rPr>
-              <a:t>kb_retrieve</a:t>
-            </a:r>
-          </a:p>
-        </p:txBody>
-      </p:sp>
-      <p:sp>
-        <p:nvSpPr>
-          <p:cNvPr id="15" name="TextBox 14"/>
-          <p:cNvSpPr txBox="1"/>
-          <p:nvPr/>
-        </p:nvSpPr>
-        <p:spPr>
-          <a:xfrm>
-            <a:off x="822960" y="3044952"/>
-            <a:ext cx="1371600" cy="228600"/>
-          </a:xfrm>
-          <a:prstGeom prst="rect">
-            <a:avLst/>
-          </a:prstGeom>
-          <a:noFill/>
-        </p:spPr>
-        <p:txBody>
-          <a:bodyPr wrap="square">
-            <a:spAutoFit/>
-          </a:bodyPr>
-          <a:lstStyle/>
-          <a:p>
-            <a:pPr algn="l"/>
-            <a:r>
-              <a:rPr sz="900" b="0" i="1">
-                <a:solidFill>
-                  <a:srgbClr val="646464"/>
-                </a:solidFill>
-                <a:latin typeface="Calibri"/>
-              </a:rPr>
-              <a:t>Vector + Graph KB</a:t>
-            </a:r>
-          </a:p>
-        </p:txBody>
-      </p:sp>
-      <p:sp>
-        <p:nvSpPr>
-          <p:cNvPr id="16" name="TextBox 15"/>
-          <p:cNvSpPr txBox="1"/>
-          <p:nvPr/>
-        </p:nvSpPr>
-        <p:spPr>
-          <a:xfrm>
-            <a:off x="2286000" y="2880360"/>
-            <a:ext cx="3017520" cy="320040"/>
-          </a:xfrm>
-          <a:prstGeom prst="rect">
-            <a:avLst/>
-          </a:prstGeom>
-          <a:noFill/>
-        </p:spPr>
-        <p:txBody>
-          <a:bodyPr wrap="square">
-            <a:spAutoFit/>
-          </a:bodyPr>
-          <a:lstStyle/>
-          <a:p>
-            <a:pPr algn="l"/>
-            <a:r>
-              <a:rPr sz="1000" b="0" i="0">
-                <a:solidFill>
-                  <a:srgbClr val="2C3E50"/>
-                </a:solidFill>
-                <a:latin typeface="Calibri"/>
-              </a:rPr>
-              <a:t>Semantic search on WHO, trials, protocols</a:t>
-            </a:r>
-          </a:p>
-        </p:txBody>
-      </p:sp>
-      <p:sp>
-        <p:nvSpPr>
-          <p:cNvPr id="17" name="Rounded Rectangle 16"/>
-          <p:cNvSpPr/>
-          <p:nvPr/>
-        </p:nvSpPr>
-        <p:spPr>
-          <a:xfrm>
-            <a:off x="640080" y="3401568"/>
-            <a:ext cx="4754880" cy="566928"/>
-          </a:xfrm>
-          <a:prstGeom prst="roundRect">
-            <a:avLst>
-              <a:gd name="adj" fmla="val 10000"/>
-            </a:avLst>
-          </a:prstGeom>
-          <a:solidFill>
-            <a:srgbClr val="FFFFFF"/>
-          </a:solidFill>
-          <a:ln w="19050">
-            <a:solidFill>
-              <a:srgbClr val="CC4F1F"/>
-            </a:solidFill>
-          </a:ln>
-        </p:spPr>
-        <p:style>
-          <a:lnRef idx="1">
-            <a:schemeClr val="accent1"/>
-          </a:lnRef>
-          <a:fillRef idx="3">
-            <a:schemeClr val="accent1"/>
-          </a:fillRef>
-          <a:effectRef idx="2">
-            <a:schemeClr val="accent1"/>
-          </a:effectRef>
-          <a:fontRef idx="minor">
-            <a:schemeClr val="lt1"/>
-          </a:fontRef>
-        </p:style>
-        <p:txBody>
-          <a:bodyPr rtlCol="0" anchor="ctr"/>
-          <a:lstStyle/>
-          <a:p>
-            <a:pPr algn="ctr"/>
-          </a:p>
-        </p:txBody>
-      </p:sp>
-      <p:sp>
-        <p:nvSpPr>
-          <p:cNvPr id="18" name="Rectangle 17"/>
-          <p:cNvSpPr/>
-          <p:nvPr/>
-        </p:nvSpPr>
-        <p:spPr>
-          <a:xfrm>
-            <a:off x="640080" y="3401568"/>
-            <a:ext cx="64008" cy="566928"/>
-          </a:xfrm>
-          <a:prstGeom prst="rect">
-            <a:avLst/>
-          </a:prstGeom>
-          <a:solidFill>
-            <a:srgbClr val="CC4F1F"/>
-          </a:solidFill>
-          <a:ln>
-            <a:noFill/>
-          </a:ln>
-        </p:spPr>
-        <p:style>
-          <a:lnRef idx="1">
-            <a:schemeClr val="accent1"/>
-          </a:lnRef>
-          <a:fillRef idx="3">
-            <a:schemeClr val="accent1"/>
-          </a:fillRef>
-          <a:effectRef idx="2">
-            <a:schemeClr val="accent1"/>
-          </a:effectRef>
-          <a:fontRef idx="minor">
-            <a:schemeClr val="lt1"/>
-          </a:fontRef>
-        </p:style>
-        <p:txBody>
-          <a:bodyPr rtlCol="0" anchor="ctr"/>
-          <a:lstStyle/>
-          <a:p>
-            <a:pPr algn="ctr"/>
-          </a:p>
-        </p:txBody>
-      </p:sp>
-      <p:sp>
-        <p:nvSpPr>
-          <p:cNvPr id="19" name="TextBox 18"/>
-          <p:cNvSpPr txBox="1"/>
-          <p:nvPr/>
-        </p:nvSpPr>
-        <p:spPr>
-          <a:xfrm>
-            <a:off x="822960" y="3447288"/>
-            <a:ext cx="1371600" cy="274320"/>
-          </a:xfrm>
-          <a:prstGeom prst="rect">
-            <a:avLst/>
-          </a:prstGeom>
-          <a:noFill/>
-        </p:spPr>
-        <p:txBody>
-          <a:bodyPr wrap="square">
-            <a:spAutoFit/>
-          </a:bodyPr>
-          <a:lstStyle/>
-          <a:p>
-            <a:pPr algn="l"/>
-            <a:r>
-              <a:rPr sz="1000" b="1" i="0">
-                <a:solidFill>
-                  <a:srgbClr val="CC4F1F"/>
-                </a:solidFill>
-                <a:latin typeface="Calibri"/>
-              </a:rPr>
-              <a:t>graph_retrieve</a:t>
-            </a:r>
-          </a:p>
-        </p:txBody>
-      </p:sp>
-      <p:sp>
-        <p:nvSpPr>
-          <p:cNvPr id="20" name="TextBox 19"/>
-          <p:cNvSpPr txBox="1"/>
-          <p:nvPr/>
-        </p:nvSpPr>
-        <p:spPr>
-          <a:xfrm>
-            <a:off x="822960" y="3703320"/>
-            <a:ext cx="1371600" cy="228600"/>
-          </a:xfrm>
-          <a:prstGeom prst="rect">
-            <a:avLst/>
-          </a:prstGeom>
-          <a:noFill/>
-        </p:spPr>
-        <p:txBody>
-          <a:bodyPr wrap="square">
-            <a:spAutoFit/>
-          </a:bodyPr>
-          <a:lstStyle/>
-          <a:p>
-            <a:pPr algn="l"/>
-            <a:r>
-              <a:rPr sz="900" b="0" i="1">
-                <a:solidFill>
-                  <a:srgbClr val="646464"/>
-                </a:solidFill>
-                <a:latin typeface="Calibri"/>
-              </a:rPr>
-              <a:t>Neptune / AnalyticDB</a:t>
-            </a:r>
-          </a:p>
-        </p:txBody>
-      </p:sp>
-      <p:sp>
-        <p:nvSpPr>
-          <p:cNvPr id="21" name="TextBox 20"/>
-          <p:cNvSpPr txBox="1"/>
-          <p:nvPr/>
-        </p:nvSpPr>
-        <p:spPr>
-          <a:xfrm>
-            <a:off x="2286000" y="3538728"/>
-            <a:ext cx="3017520" cy="320040"/>
-          </a:xfrm>
-          <a:prstGeom prst="rect">
-            <a:avLst/>
-          </a:prstGeom>
-          <a:noFill/>
-        </p:spPr>
-        <p:txBody>
-          <a:bodyPr wrap="square">
-            <a:spAutoFit/>
-          </a:bodyPr>
-          <a:lstStyle/>
-          <a:p>
-            <a:pPr algn="l"/>
-            <a:r>
-              <a:rPr sz="1000" b="0" i="0">
-                <a:solidFill>
-                  <a:srgbClr val="2C3E50"/>
-                </a:solidFill>
-                <a:latin typeface="Calibri"/>
-              </a:rPr>
-              <a:t>Multi-hop entity traversal</a:t>
-            </a:r>
-          </a:p>
-        </p:txBody>
-      </p:sp>
-      <p:sp>
-        <p:nvSpPr>
-          <p:cNvPr id="22" name="Rounded Rectangle 21"/>
-          <p:cNvSpPr/>
-          <p:nvPr/>
-        </p:nvSpPr>
-        <p:spPr>
-          <a:xfrm>
-            <a:off x="640080" y="4059935"/>
-            <a:ext cx="4754880" cy="566928"/>
-          </a:xfrm>
-          <a:prstGeom prst="roundRect">
-            <a:avLst>
-              <a:gd name="adj" fmla="val 10000"/>
-            </a:avLst>
-          </a:prstGeom>
-          <a:solidFill>
-            <a:srgbClr val="FFFFFF"/>
-          </a:solidFill>
-          <a:ln w="19050">
-            <a:solidFill>
-              <a:srgbClr val="FF6B35"/>
-            </a:solidFill>
-          </a:ln>
-        </p:spPr>
-        <p:style>
-          <a:lnRef idx="1">
-            <a:schemeClr val="accent1"/>
-          </a:lnRef>
-          <a:fillRef idx="3">
-            <a:schemeClr val="accent1"/>
-          </a:fillRef>
-          <a:effectRef idx="2">
-            <a:schemeClr val="accent1"/>
-          </a:effectRef>
-          <a:fontRef idx="minor">
-            <a:schemeClr val="lt1"/>
-          </a:fontRef>
-        </p:style>
-        <p:txBody>
-          <a:bodyPr rtlCol="0" anchor="ctr"/>
-          <a:lstStyle/>
-          <a:p>
-            <a:pPr algn="ctr"/>
-          </a:p>
-        </p:txBody>
-      </p:sp>
-      <p:sp>
-        <p:nvSpPr>
-          <p:cNvPr id="23" name="Rectangle 22"/>
-          <p:cNvSpPr/>
-          <p:nvPr/>
-        </p:nvSpPr>
-        <p:spPr>
-          <a:xfrm>
-            <a:off x="640080" y="4059935"/>
-            <a:ext cx="64008" cy="566928"/>
-          </a:xfrm>
-          <a:prstGeom prst="rect">
-            <a:avLst/>
-          </a:prstGeom>
-          <a:solidFill>
-            <a:srgbClr val="FF6B35"/>
-          </a:solidFill>
-          <a:ln>
-            <a:noFill/>
-          </a:ln>
-        </p:spPr>
-        <p:style>
-          <a:lnRef idx="1">
-            <a:schemeClr val="accent1"/>
-          </a:lnRef>
-          <a:fillRef idx="3">
-            <a:schemeClr val="accent1"/>
-          </a:fillRef>
-          <a:effectRef idx="2">
-            <a:schemeClr val="accent1"/>
-          </a:effectRef>
-          <a:fontRef idx="minor">
-            <a:schemeClr val="lt1"/>
-          </a:fontRef>
-        </p:style>
-        <p:txBody>
-          <a:bodyPr rtlCol="0" anchor="ctr"/>
-          <a:lstStyle/>
-          <a:p>
-            <a:pPr algn="ctr"/>
-          </a:p>
-        </p:txBody>
-      </p:sp>
-      <p:sp>
-        <p:nvSpPr>
-          <p:cNvPr id="24" name="TextBox 23"/>
-          <p:cNvSpPr txBox="1"/>
-          <p:nvPr/>
-        </p:nvSpPr>
-        <p:spPr>
-          <a:xfrm>
-            <a:off x="822960" y="4105655"/>
-            <a:ext cx="1371600" cy="274320"/>
-          </a:xfrm>
-          <a:prstGeom prst="rect">
-            <a:avLst/>
-          </a:prstGeom>
-          <a:noFill/>
-        </p:spPr>
-        <p:txBody>
-          <a:bodyPr wrap="square">
-            <a:spAutoFit/>
-          </a:bodyPr>
-          <a:lstStyle/>
-          <a:p>
-            <a:pPr algn="l"/>
-            <a:r>
-              <a:rPr sz="1000" b="1" i="0">
-                <a:solidFill>
-                  <a:srgbClr val="FF6B35"/>
-                </a:solidFill>
-                <a:latin typeface="Calibri"/>
-              </a:rPr>
-              <a:t>icd11_lookup</a:t>
-            </a:r>
-          </a:p>
-        </p:txBody>
-      </p:sp>
-      <p:sp>
-        <p:nvSpPr>
-          <p:cNvPr id="25" name="TextBox 24"/>
-          <p:cNvSpPr txBox="1"/>
-          <p:nvPr/>
-        </p:nvSpPr>
-        <p:spPr>
-          <a:xfrm>
-            <a:off x="822960" y="4361687"/>
-            <a:ext cx="1371600" cy="228600"/>
-          </a:xfrm>
-          <a:prstGeom prst="rect">
-            <a:avLst/>
-          </a:prstGeom>
-          <a:noFill/>
-        </p:spPr>
-        <p:txBody>
-          <a:bodyPr wrap="square">
-            <a:spAutoFit/>
-          </a:bodyPr>
-          <a:lstStyle/>
-          <a:p>
-            <a:pPr algn="l"/>
-            <a:r>
-              <a:rPr sz="900" b="0" i="1">
-                <a:solidFill>
-                  <a:srgbClr val="646464"/>
-                </a:solidFill>
-                <a:latin typeface="Calibri"/>
-              </a:rPr>
-              <a:t>WHO ICD-11 API</a:t>
-            </a:r>
-          </a:p>
-        </p:txBody>
-      </p:sp>
-      <p:sp>
-        <p:nvSpPr>
-          <p:cNvPr id="26" name="TextBox 25"/>
-          <p:cNvSpPr txBox="1"/>
-          <p:nvPr/>
-        </p:nvSpPr>
-        <p:spPr>
-          <a:xfrm>
-            <a:off x="2286000" y="4197095"/>
-            <a:ext cx="3017520" cy="320040"/>
-          </a:xfrm>
-          <a:prstGeom prst="rect">
-            <a:avLst/>
-          </a:prstGeom>
-          <a:noFill/>
-        </p:spPr>
-        <p:txBody>
-          <a:bodyPr wrap="square">
-            <a:spAutoFit/>
-          </a:bodyPr>
-          <a:lstStyle/>
-          <a:p>
-            <a:pPr algn="l"/>
-            <a:r>
-              <a:rPr sz="1000" b="0" i="0">
-                <a:solidFill>
-                  <a:srgbClr val="2C3E50"/>
-                </a:solidFill>
-                <a:latin typeface="Calibri"/>
-              </a:rPr>
-              <a:t>Live disease classification + synonyms</a:t>
-            </a:r>
-          </a:p>
-        </p:txBody>
-      </p:sp>
-      <p:sp>
-        <p:nvSpPr>
-          <p:cNvPr id="27" name="Rounded Rectangle 26"/>
-          <p:cNvSpPr/>
-          <p:nvPr/>
-        </p:nvSpPr>
-        <p:spPr>
-          <a:xfrm>
-            <a:off x="640080" y="4718304"/>
-            <a:ext cx="4754880" cy="566928"/>
-          </a:xfrm>
-          <a:prstGeom prst="roundRect">
-            <a:avLst>
-              <a:gd name="adj" fmla="val 10000"/>
-            </a:avLst>
-          </a:prstGeom>
-          <a:solidFill>
-            <a:srgbClr val="FFFFFF"/>
-          </a:solidFill>
-          <a:ln w="19050">
-            <a:solidFill>
-              <a:srgbClr val="CC4F1F"/>
-            </a:solidFill>
-          </a:ln>
-        </p:spPr>
-        <p:style>
-          <a:lnRef idx="1">
-            <a:schemeClr val="accent1"/>
-          </a:lnRef>
-          <a:fillRef idx="3">
-            <a:schemeClr val="accent1"/>
-          </a:fillRef>
-          <a:effectRef idx="2">
-            <a:schemeClr val="accent1"/>
-          </a:effectRef>
-          <a:fontRef idx="minor">
-            <a:schemeClr val="lt1"/>
-          </a:fontRef>
-        </p:style>
-        <p:txBody>
-          <a:bodyPr rtlCol="0" anchor="ctr"/>
-          <a:lstStyle/>
-          <a:p>
-            <a:pPr algn="ctr"/>
-          </a:p>
-        </p:txBody>
-      </p:sp>
-      <p:sp>
-        <p:nvSpPr>
-          <p:cNvPr id="28" name="Rectangle 27"/>
-          <p:cNvSpPr/>
-          <p:nvPr/>
-        </p:nvSpPr>
-        <p:spPr>
-          <a:xfrm>
-            <a:off x="640080" y="4718304"/>
-            <a:ext cx="64008" cy="566928"/>
-          </a:xfrm>
-          <a:prstGeom prst="rect">
-            <a:avLst/>
-          </a:prstGeom>
-          <a:solidFill>
-            <a:srgbClr val="CC4F1F"/>
-          </a:solidFill>
-          <a:ln>
-            <a:noFill/>
-          </a:ln>
-        </p:spPr>
-        <p:style>
-          <a:lnRef idx="1">
-            <a:schemeClr val="accent1"/>
-          </a:lnRef>
-          <a:fillRef idx="3">
-            <a:schemeClr val="accent1"/>
-          </a:fillRef>
-          <a:effectRef idx="2">
-            <a:schemeClr val="accent1"/>
-          </a:effectRef>
-          <a:fontRef idx="minor">
-            <a:schemeClr val="lt1"/>
-          </a:fontRef>
-        </p:style>
-        <p:txBody>
-          <a:bodyPr rtlCol="0" anchor="ctr"/>
-          <a:lstStyle/>
-          <a:p>
-            <a:pPr algn="ctr"/>
-          </a:p>
-        </p:txBody>
-      </p:sp>
-      <p:sp>
-        <p:nvSpPr>
-          <p:cNvPr id="29" name="TextBox 28"/>
-          <p:cNvSpPr txBox="1"/>
-          <p:nvPr/>
-        </p:nvSpPr>
-        <p:spPr>
-          <a:xfrm>
-            <a:off x="822960" y="4764024"/>
-            <a:ext cx="1371600" cy="274320"/>
-          </a:xfrm>
-          <a:prstGeom prst="rect">
-            <a:avLst/>
-          </a:prstGeom>
-          <a:noFill/>
-        </p:spPr>
-        <p:txBody>
-          <a:bodyPr wrap="square">
-            <a:spAutoFit/>
-          </a:bodyPr>
-          <a:lstStyle/>
-          <a:p>
-            <a:pPr algn="l"/>
-            <a:r>
-              <a:rPr sz="1000" b="1" i="0">
-                <a:solidFill>
-                  <a:srgbClr val="CC4F1F"/>
-                </a:solidFill>
-                <a:latin typeface="Calibri"/>
-              </a:rPr>
-              <a:t>pubmed_search</a:t>
-            </a:r>
-          </a:p>
-        </p:txBody>
-      </p:sp>
-      <p:sp>
-        <p:nvSpPr>
-          <p:cNvPr id="30" name="TextBox 29"/>
-          <p:cNvSpPr txBox="1"/>
-          <p:nvPr/>
-        </p:nvSpPr>
-        <p:spPr>
-          <a:xfrm>
-            <a:off x="822960" y="5020056"/>
-            <a:ext cx="1371600" cy="228600"/>
-          </a:xfrm>
-          <a:prstGeom prst="rect">
-            <a:avLst/>
-          </a:prstGeom>
-          <a:noFill/>
-        </p:spPr>
-        <p:txBody>
-          <a:bodyPr wrap="square">
-            <a:spAutoFit/>
-          </a:bodyPr>
-          <a:lstStyle/>
-          <a:p>
-            <a:pPr algn="l"/>
-            <a:r>
-              <a:rPr sz="900" b="0" i="1">
-                <a:solidFill>
-                  <a:srgbClr val="646464"/>
-                </a:solidFill>
-                <a:latin typeface="Calibri"/>
-              </a:rPr>
-              <a:t>NCBI E-utilities</a:t>
-            </a:r>
-          </a:p>
-        </p:txBody>
-      </p:sp>
-      <p:sp>
-        <p:nvSpPr>
-          <p:cNvPr id="31" name="TextBox 30"/>
-          <p:cNvSpPr txBox="1"/>
-          <p:nvPr/>
-        </p:nvSpPr>
-        <p:spPr>
-          <a:xfrm>
-            <a:off x="2286000" y="4855464"/>
-            <a:ext cx="3017520" cy="320040"/>
-          </a:xfrm>
-          <a:prstGeom prst="rect">
-            <a:avLst/>
-          </a:prstGeom>
-          <a:noFill/>
-        </p:spPr>
-        <p:txBody>
-          <a:bodyPr wrap="square">
-            <a:spAutoFit/>
-          </a:bodyPr>
-          <a:lstStyle/>
-          <a:p>
-            <a:pPr algn="l"/>
-            <a:r>
-              <a:rPr sz="1000" b="0" i="0">
-                <a:solidFill>
-                  <a:srgbClr val="2C3E50"/>
-                </a:solidFill>
-                <a:latin typeface="Calibri"/>
-              </a:rPr>
-              <a:t>Real-time research literature (query-time)</a:t>
-            </a:r>
-          </a:p>
-        </p:txBody>
-      </p:sp>
-      <p:sp>
-        <p:nvSpPr>
-          <p:cNvPr id="32" name="Rounded Rectangle 31"/>
-          <p:cNvSpPr/>
-          <p:nvPr/>
-        </p:nvSpPr>
-        <p:spPr>
-          <a:xfrm>
-            <a:off x="6035040" y="1005840"/>
-            <a:ext cx="5669280" cy="5029200"/>
-          </a:xfrm>
-          <a:prstGeom prst="roundRect">
-            <a:avLst>
-              <a:gd name="adj" fmla="val 5000"/>
-            </a:avLst>
-          </a:prstGeom>
-          <a:solidFill>
-            <a:srgbClr val="FFFFFF"/>
-          </a:solidFill>
-          <a:ln w="19050">
-            <a:solidFill>
-              <a:srgbClr val="FF6B35"/>
-            </a:solidFill>
-          </a:ln>
-        </p:spPr>
-        <p:style>
-          <a:lnRef idx="1">
-            <a:schemeClr val="accent1"/>
-          </a:lnRef>
-          <a:fillRef idx="3">
-            <a:schemeClr val="accent1"/>
-          </a:fillRef>
-          <a:effectRef idx="2">
-            <a:schemeClr val="accent1"/>
-          </a:effectRef>
-          <a:fontRef idx="minor">
-            <a:schemeClr val="lt1"/>
-          </a:fontRef>
-        </p:style>
-        <p:txBody>
-          <a:bodyPr rtlCol="0" anchor="ctr"/>
-          <a:lstStyle/>
-          <a:p>
-            <a:pPr algn="ctr"/>
-          </a:p>
-        </p:txBody>
-      </p:sp>
-      <p:sp>
-        <p:nvSpPr>
-          <p:cNvPr id="33" name="Rectangle 32"/>
-          <p:cNvSpPr/>
-          <p:nvPr/>
-        </p:nvSpPr>
-        <p:spPr>
-          <a:xfrm>
-            <a:off x="6035040" y="1005840"/>
-            <a:ext cx="5669280" cy="457200"/>
-          </a:xfrm>
-          <a:prstGeom prst="rect">
-            <a:avLst/>
-          </a:prstGeom>
-          <a:solidFill>
-            <a:srgbClr val="FF6B35"/>
-          </a:solidFill>
-          <a:ln>
-            <a:noFill/>
-          </a:ln>
-        </p:spPr>
-        <p:style>
-          <a:lnRef idx="1">
-            <a:schemeClr val="accent1"/>
-          </a:lnRef>
-          <a:fillRef idx="3">
-            <a:schemeClr val="accent1"/>
-          </a:fillRef>
-          <a:effectRef idx="2">
-            <a:schemeClr val="accent1"/>
-          </a:effectRef>
-          <a:fontRef idx="minor">
-            <a:schemeClr val="lt1"/>
-          </a:fontRef>
-        </p:style>
-        <p:txBody>
-          <a:bodyPr rtlCol="0" anchor="ctr"/>
-          <a:lstStyle/>
-          <a:p>
-            <a:pPr algn="ctr"/>
-          </a:p>
-        </p:txBody>
-      </p:sp>
-      <p:sp>
-        <p:nvSpPr>
-          <p:cNvPr id="34" name="TextBox 33"/>
-          <p:cNvSpPr txBox="1"/>
-          <p:nvPr/>
-        </p:nvSpPr>
-        <p:spPr>
-          <a:xfrm>
-            <a:off x="6035040" y="1005840"/>
-            <a:ext cx="5669280" cy="457200"/>
-          </a:xfrm>
-          <a:prstGeom prst="rect">
-            <a:avLst/>
-          </a:prstGeom>
-          <a:noFill/>
-        </p:spPr>
-        <p:txBody>
-          <a:bodyPr wrap="none" anchor="ctr">
-            <a:spAutoFit/>
-          </a:bodyPr>
-          <a:lstStyle/>
-          <a:p>
-            <a:pPr algn="ctr"/>
-            <a:r>
-              <a:rPr sz="1300" b="1">
-                <a:solidFill>
-                  <a:srgbClr val="FFFFFF"/>
-                </a:solidFill>
-                <a:latin typeface="Calibri"/>
-              </a:rPr>
-              <a:t>How Agentic RAG Works (Complex Lane)</a:t>
-            </a:r>
-          </a:p>
-        </p:txBody>
-      </p:sp>
-      <p:sp>
-        <p:nvSpPr>
-          <p:cNvPr id="35" name="Oval 34"/>
-          <p:cNvSpPr/>
-          <p:nvPr/>
-        </p:nvSpPr>
-        <p:spPr>
-          <a:xfrm>
-            <a:off x="6217920" y="1572768"/>
-            <a:ext cx="347472" cy="347472"/>
-          </a:xfrm>
-          <a:prstGeom prst="ellipse">
-            <a:avLst/>
-          </a:prstGeom>
-          <a:solidFill>
-            <a:srgbClr val="FF6B35"/>
-          </a:solidFill>
-          <a:ln>
-            <a:noFill/>
-          </a:ln>
-        </p:spPr>
-        <p:style>
-          <a:lnRef idx="1">
-            <a:schemeClr val="accent1"/>
-          </a:lnRef>
-          <a:fillRef idx="3">
-            <a:schemeClr val="accent1"/>
-          </a:fillRef>
-          <a:effectRef idx="2">
-            <a:schemeClr val="accent1"/>
-          </a:effectRef>
-          <a:fontRef idx="minor">
-            <a:schemeClr val="lt1"/>
-          </a:fontRef>
-        </p:style>
-        <p:txBody>
-          <a:bodyPr rtlCol="0" anchor="ctr"/>
-          <a:lstStyle/>
-          <a:p>
-            <a:pPr algn="ctr"/>
-          </a:p>
-        </p:txBody>
-      </p:sp>
-      <p:sp>
-        <p:nvSpPr>
-          <p:cNvPr id="36" name="TextBox 35"/>
-          <p:cNvSpPr txBox="1"/>
-          <p:nvPr/>
-        </p:nvSpPr>
-        <p:spPr>
-          <a:xfrm>
-            <a:off x="6217920" y="1572768"/>
-            <a:ext cx="347472" cy="347472"/>
-          </a:xfrm>
-          <a:prstGeom prst="rect">
-            <a:avLst/>
-          </a:prstGeom>
-          <a:noFill/>
-        </p:spPr>
-        <p:txBody>
-          <a:bodyPr wrap="none" anchor="ctr">
-            <a:spAutoFit/>
-          </a:bodyPr>
-          <a:lstStyle/>
-          <a:p>
-            <a:pPr algn="ctr"/>
-            <a:r>
-              <a:rPr sz="1000" b="1">
-                <a:solidFill>
-                  <a:srgbClr val="FFFFFF"/>
-                </a:solidFill>
-                <a:latin typeface="Calibri"/>
-              </a:rPr>
-              <a:t>1</a:t>
-            </a:r>
-          </a:p>
-        </p:txBody>
-      </p:sp>
-      <p:sp>
-        <p:nvSpPr>
-          <p:cNvPr id="37" name="TextBox 36"/>
-          <p:cNvSpPr txBox="1"/>
-          <p:nvPr/>
-        </p:nvSpPr>
-        <p:spPr>
-          <a:xfrm>
-            <a:off x="6675120" y="1609344"/>
-            <a:ext cx="4846320" cy="347472"/>
-          </a:xfrm>
-          <a:prstGeom prst="rect">
-            <a:avLst/>
-          </a:prstGeom>
-          <a:noFill/>
-        </p:spPr>
-        <p:txBody>
-          <a:bodyPr wrap="square">
-            <a:spAutoFit/>
-          </a:bodyPr>
-          <a:lstStyle/>
-          <a:p>
-            <a:pPr algn="l"/>
-            <a:r>
-              <a:rPr sz="1050" b="0" i="0">
-                <a:solidFill>
-                  <a:srgbClr val="2C3E50"/>
-                </a:solidFill>
-                <a:latin typeface="Calibri"/>
-              </a:rPr>
-              <a:t>Doctor asks complex question</a:t>
-            </a:r>
-          </a:p>
-        </p:txBody>
-      </p:sp>
-      <p:sp>
-        <p:nvSpPr>
-          <p:cNvPr id="38" name="Oval 37"/>
-          <p:cNvSpPr/>
-          <p:nvPr/>
-        </p:nvSpPr>
-        <p:spPr>
-          <a:xfrm>
-            <a:off x="6217920" y="2103120"/>
-            <a:ext cx="347472" cy="347472"/>
-          </a:xfrm>
-          <a:prstGeom prst="ellipse">
-            <a:avLst/>
-          </a:prstGeom>
-          <a:solidFill>
-            <a:srgbClr val="CC4F1F"/>
-          </a:solidFill>
-          <a:ln>
-            <a:noFill/>
-          </a:ln>
-        </p:spPr>
-        <p:style>
-          <a:lnRef idx="1">
-            <a:schemeClr val="accent1"/>
-          </a:lnRef>
-          <a:fillRef idx="3">
-            <a:schemeClr val="accent1"/>
-          </a:fillRef>
-          <a:effectRef idx="2">
-            <a:schemeClr val="accent1"/>
-          </a:effectRef>
-          <a:fontRef idx="minor">
-            <a:schemeClr val="lt1"/>
-          </a:fontRef>
-        </p:style>
-        <p:txBody>
-          <a:bodyPr rtlCol="0" anchor="ctr"/>
-          <a:lstStyle/>
-          <a:p>
-            <a:pPr algn="ctr"/>
-          </a:p>
-        </p:txBody>
-      </p:sp>
-      <p:sp>
-        <p:nvSpPr>
-          <p:cNvPr id="39" name="TextBox 38"/>
-          <p:cNvSpPr txBox="1"/>
-          <p:nvPr/>
-        </p:nvSpPr>
-        <p:spPr>
-          <a:xfrm>
-            <a:off x="6217920" y="2103120"/>
-            <a:ext cx="347472" cy="347472"/>
-          </a:xfrm>
-          <a:prstGeom prst="rect">
-            <a:avLst/>
-          </a:prstGeom>
-          <a:noFill/>
-        </p:spPr>
-        <p:txBody>
-          <a:bodyPr wrap="none" anchor="ctr">
-            <a:spAutoFit/>
-          </a:bodyPr>
-          <a:lstStyle/>
-          <a:p>
-            <a:pPr algn="ctr"/>
-            <a:r>
-              <a:rPr sz="1000" b="1">
-                <a:solidFill>
-                  <a:srgbClr val="FFFFFF"/>
-                </a:solidFill>
-                <a:latin typeface="Calibri"/>
-              </a:rPr>
-              <a:t>2</a:t>
-            </a:r>
-          </a:p>
-        </p:txBody>
-      </p:sp>
-      <p:sp>
-        <p:nvSpPr>
-          <p:cNvPr id="40" name="TextBox 39"/>
-          <p:cNvSpPr txBox="1"/>
-          <p:nvPr/>
-        </p:nvSpPr>
-        <p:spPr>
-          <a:xfrm>
-            <a:off x="6675120" y="2139696"/>
-            <a:ext cx="4846320" cy="347472"/>
-          </a:xfrm>
-          <a:prstGeom prst="rect">
-            <a:avLst/>
-          </a:prstGeom>
-          <a:noFill/>
-        </p:spPr>
-        <p:txBody>
-          <a:bodyPr wrap="square">
-            <a:spAutoFit/>
-          </a:bodyPr>
-          <a:lstStyle/>
-          <a:p>
-            <a:pPr algn="l"/>
-            <a:r>
-              <a:rPr sz="1050" b="0" i="0">
-                <a:solidFill>
-                  <a:srgbClr val="2C3E50"/>
-                </a:solidFill>
-                <a:latin typeface="Calibri"/>
-              </a:rPr>
-              <a:t>Router classifies department</a:t>
-            </a:r>
-          </a:p>
-        </p:txBody>
-      </p:sp>
-      <p:sp>
-        <p:nvSpPr>
-          <p:cNvPr id="41" name="Oval 40"/>
-          <p:cNvSpPr/>
-          <p:nvPr/>
-        </p:nvSpPr>
-        <p:spPr>
-          <a:xfrm>
-            <a:off x="6217920" y="2633472"/>
-            <a:ext cx="347472" cy="347472"/>
-          </a:xfrm>
-          <a:prstGeom prst="ellipse">
-            <a:avLst/>
-          </a:prstGeom>
-          <a:solidFill>
-            <a:srgbClr val="FF6B35"/>
-          </a:solidFill>
-          <a:ln>
-            <a:noFill/>
-          </a:ln>
-        </p:spPr>
-        <p:style>
-          <a:lnRef idx="1">
-            <a:schemeClr val="accent1"/>
-          </a:lnRef>
-          <a:fillRef idx="3">
-            <a:schemeClr val="accent1"/>
-          </a:fillRef>
-          <a:effectRef idx="2">
-            <a:schemeClr val="accent1"/>
-          </a:effectRef>
-          <a:fontRef idx="minor">
-            <a:schemeClr val="lt1"/>
-          </a:fontRef>
-        </p:style>
-        <p:txBody>
-          <a:bodyPr rtlCol="0" anchor="ctr"/>
-          <a:lstStyle/>
-          <a:p>
-            <a:pPr algn="ctr"/>
-          </a:p>
-        </p:txBody>
-      </p:sp>
-      <p:sp>
-        <p:nvSpPr>
-          <p:cNvPr id="42" name="TextBox 41"/>
-          <p:cNvSpPr txBox="1"/>
-          <p:nvPr/>
-        </p:nvSpPr>
-        <p:spPr>
-          <a:xfrm>
-            <a:off x="6217920" y="2633472"/>
-            <a:ext cx="347472" cy="347472"/>
-          </a:xfrm>
-          <a:prstGeom prst="rect">
-            <a:avLst/>
-          </a:prstGeom>
-          <a:noFill/>
-        </p:spPr>
-        <p:txBody>
-          <a:bodyPr wrap="none" anchor="ctr">
-            <a:spAutoFit/>
-          </a:bodyPr>
-          <a:lstStyle/>
-          <a:p>
-            <a:pPr algn="ctr"/>
-            <a:r>
-              <a:rPr sz="1000" b="1">
-                <a:solidFill>
-                  <a:srgbClr val="FFFFFF"/>
-                </a:solidFill>
-                <a:latin typeface="Calibri"/>
-              </a:rPr>
-              <a:t>3</a:t>
-            </a:r>
-          </a:p>
-        </p:txBody>
-      </p:sp>
-      <p:sp>
-        <p:nvSpPr>
-          <p:cNvPr id="43" name="TextBox 42"/>
-          <p:cNvSpPr txBox="1"/>
-          <p:nvPr/>
-        </p:nvSpPr>
-        <p:spPr>
-          <a:xfrm>
-            <a:off x="6675120" y="2670048"/>
-            <a:ext cx="4846320" cy="347472"/>
-          </a:xfrm>
-          <a:prstGeom prst="rect">
-            <a:avLst/>
-          </a:prstGeom>
-          <a:noFill/>
-        </p:spPr>
-        <p:txBody>
-          <a:bodyPr wrap="square">
-            <a:spAutoFit/>
-          </a:bodyPr>
-          <a:lstStyle/>
-          <a:p>
-            <a:pPr algn="l"/>
-            <a:r>
-              <a:rPr sz="1050" b="0" i="0">
-                <a:solidFill>
-                  <a:srgbClr val="2C3E50"/>
-                </a:solidFill>
-                <a:latin typeface="Calibri"/>
-              </a:rPr>
-              <a:t>Specialty agent receives question</a:t>
-            </a:r>
-          </a:p>
-        </p:txBody>
-      </p:sp>
-      <p:sp>
-        <p:nvSpPr>
-          <p:cNvPr id="44" name="Oval 43"/>
-          <p:cNvSpPr/>
-          <p:nvPr/>
-        </p:nvSpPr>
-        <p:spPr>
-          <a:xfrm>
-            <a:off x="6217920" y="3163824"/>
-            <a:ext cx="347472" cy="347472"/>
-          </a:xfrm>
-          <a:prstGeom prst="ellipse">
-            <a:avLst/>
-          </a:prstGeom>
-          <a:solidFill>
-            <a:srgbClr val="CC4F1F"/>
-          </a:solidFill>
-          <a:ln>
-            <a:noFill/>
-          </a:ln>
-        </p:spPr>
-        <p:style>
-          <a:lnRef idx="1">
-            <a:schemeClr val="accent1"/>
-          </a:lnRef>
-          <a:fillRef idx="3">
-            <a:schemeClr val="accent1"/>
-          </a:fillRef>
-          <a:effectRef idx="2">
-            <a:schemeClr val="accent1"/>
-          </a:effectRef>
-          <a:fontRef idx="minor">
-            <a:schemeClr val="lt1"/>
-          </a:fontRef>
-        </p:style>
-        <p:txBody>
-          <a:bodyPr rtlCol="0" anchor="ctr"/>
-          <a:lstStyle/>
-          <a:p>
-            <a:pPr algn="ctr"/>
-          </a:p>
-        </p:txBody>
-      </p:sp>
-      <p:sp>
-        <p:nvSpPr>
-          <p:cNvPr id="45" name="TextBox 44"/>
-          <p:cNvSpPr txBox="1"/>
-          <p:nvPr/>
-        </p:nvSpPr>
-        <p:spPr>
-          <a:xfrm>
-            <a:off x="6217920" y="3163824"/>
-            <a:ext cx="347472" cy="347472"/>
-          </a:xfrm>
-          <a:prstGeom prst="rect">
-            <a:avLst/>
-          </a:prstGeom>
-          <a:noFill/>
-        </p:spPr>
-        <p:txBody>
-          <a:bodyPr wrap="none" anchor="ctr">
-            <a:spAutoFit/>
-          </a:bodyPr>
-          <a:lstStyle/>
-          <a:p>
-            <a:pPr algn="ctr"/>
-            <a:r>
-              <a:rPr sz="1000" b="1">
-                <a:solidFill>
-                  <a:srgbClr val="FFFFFF"/>
-                </a:solidFill>
-                <a:latin typeface="Calibri"/>
-              </a:rPr>
-              <a:t>4</a:t>
-            </a:r>
-          </a:p>
-        </p:txBody>
-      </p:sp>
-      <p:sp>
-        <p:nvSpPr>
-          <p:cNvPr id="46" name="TextBox 45"/>
-          <p:cNvSpPr txBox="1"/>
-          <p:nvPr/>
-        </p:nvSpPr>
-        <p:spPr>
-          <a:xfrm>
-            <a:off x="6675120" y="3200400"/>
-            <a:ext cx="4846320" cy="347472"/>
-          </a:xfrm>
-          <a:prstGeom prst="rect">
-            <a:avLst/>
-          </a:prstGeom>
-          <a:noFill/>
-        </p:spPr>
-        <p:txBody>
-          <a:bodyPr wrap="square">
-            <a:spAutoFit/>
-          </a:bodyPr>
-          <a:lstStyle/>
-          <a:p>
-            <a:pPr algn="l"/>
-            <a:r>
-              <a:rPr sz="1050" b="0" i="0">
-                <a:solidFill>
-                  <a:srgbClr val="2C3E50"/>
-                </a:solidFill>
-                <a:latin typeface="Calibri"/>
-              </a:rPr>
-              <a:t>Agent calls kb_retrieve (vector + graph)</a:t>
-            </a:r>
-          </a:p>
-        </p:txBody>
-      </p:sp>
-      <p:sp>
-        <p:nvSpPr>
-          <p:cNvPr id="47" name="Oval 46"/>
-          <p:cNvSpPr/>
-          <p:nvPr/>
-        </p:nvSpPr>
-        <p:spPr>
-          <a:xfrm>
-            <a:off x="6217920" y="3694176"/>
-            <a:ext cx="347472" cy="347472"/>
-          </a:xfrm>
-          <a:prstGeom prst="ellipse">
-            <a:avLst/>
-          </a:prstGeom>
-          <a:solidFill>
-            <a:srgbClr val="FF6B35"/>
-          </a:solidFill>
-          <a:ln>
-            <a:noFill/>
-          </a:ln>
-        </p:spPr>
-        <p:style>
-          <a:lnRef idx="1">
-            <a:schemeClr val="accent1"/>
-          </a:lnRef>
-          <a:fillRef idx="3">
-            <a:schemeClr val="accent1"/>
-          </a:fillRef>
-          <a:effectRef idx="2">
-            <a:schemeClr val="accent1"/>
-          </a:effectRef>
-          <a:fontRef idx="minor">
-            <a:schemeClr val="lt1"/>
-          </a:fontRef>
-        </p:style>
-        <p:txBody>
-          <a:bodyPr rtlCol="0" anchor="ctr"/>
-          <a:lstStyle/>
-          <a:p>
-            <a:pPr algn="ctr"/>
-          </a:p>
-        </p:txBody>
-      </p:sp>
-      <p:sp>
-        <p:nvSpPr>
-          <p:cNvPr id="48" name="TextBox 47"/>
-          <p:cNvSpPr txBox="1"/>
-          <p:nvPr/>
-        </p:nvSpPr>
-        <p:spPr>
-          <a:xfrm>
-            <a:off x="6217920" y="3694176"/>
-            <a:ext cx="347472" cy="347472"/>
-          </a:xfrm>
-          <a:prstGeom prst="rect">
-            <a:avLst/>
-          </a:prstGeom>
-          <a:noFill/>
-        </p:spPr>
-        <p:txBody>
-          <a:bodyPr wrap="none" anchor="ctr">
-            <a:spAutoFit/>
-          </a:bodyPr>
-          <a:lstStyle/>
-          <a:p>
-            <a:pPr algn="ctr"/>
-            <a:r>
-              <a:rPr sz="1000" b="1">
-                <a:solidFill>
-                  <a:srgbClr val="FFFFFF"/>
-                </a:solidFill>
-                <a:latin typeface="Calibri"/>
-              </a:rPr>
-              <a:t>5</a:t>
-            </a:r>
-          </a:p>
-        </p:txBody>
-      </p:sp>
-      <p:sp>
-        <p:nvSpPr>
-          <p:cNvPr id="49" name="TextBox 48"/>
-          <p:cNvSpPr txBox="1"/>
-          <p:nvPr/>
-        </p:nvSpPr>
-        <p:spPr>
-          <a:xfrm>
-            <a:off x="6675120" y="3730752"/>
-            <a:ext cx="4846320" cy="347472"/>
-          </a:xfrm>
-          <a:prstGeom prst="rect">
-            <a:avLst/>
-          </a:prstGeom>
-          <a:noFill/>
-        </p:spPr>
-        <p:txBody>
-          <a:bodyPr wrap="square">
-            <a:spAutoFit/>
-          </a:bodyPr>
-          <a:lstStyle/>
-          <a:p>
-            <a:pPr algn="l"/>
-            <a:r>
-              <a:rPr sz="1050" b="0" i="0">
-                <a:solidFill>
-                  <a:srgbClr val="2C3E50"/>
-                </a:solidFill>
-                <a:latin typeface="Calibri"/>
-              </a:rPr>
-              <a:t>Agent optionally calls icd11_lookup for synonyms</a:t>
-            </a:r>
-          </a:p>
-        </p:txBody>
-      </p:sp>
-      <p:sp>
-        <p:nvSpPr>
-          <p:cNvPr id="50" name="Oval 49"/>
-          <p:cNvSpPr/>
-          <p:nvPr/>
-        </p:nvSpPr>
-        <p:spPr>
-          <a:xfrm>
-            <a:off x="6217920" y="4224528"/>
-            <a:ext cx="347472" cy="347472"/>
-          </a:xfrm>
-          <a:prstGeom prst="ellipse">
-            <a:avLst/>
-          </a:prstGeom>
-          <a:solidFill>
-            <a:srgbClr val="CC4F1F"/>
-          </a:solidFill>
-          <a:ln>
-            <a:noFill/>
-          </a:ln>
-        </p:spPr>
-        <p:style>
-          <a:lnRef idx="1">
-            <a:schemeClr val="accent1"/>
-          </a:lnRef>
-          <a:fillRef idx="3">
-            <a:schemeClr val="accent1"/>
-          </a:fillRef>
-          <a:effectRef idx="2">
-            <a:schemeClr val="accent1"/>
-          </a:effectRef>
-          <a:fontRef idx="minor">
-            <a:schemeClr val="lt1"/>
-          </a:fontRef>
-        </p:style>
-        <p:txBody>
-          <a:bodyPr rtlCol="0" anchor="ctr"/>
-          <a:lstStyle/>
-          <a:p>
-            <a:pPr algn="ctr"/>
-          </a:p>
-        </p:txBody>
-      </p:sp>
-      <p:sp>
-        <p:nvSpPr>
-          <p:cNvPr id="51" name="TextBox 50"/>
-          <p:cNvSpPr txBox="1"/>
-          <p:nvPr/>
-        </p:nvSpPr>
-        <p:spPr>
-          <a:xfrm>
-            <a:off x="6217920" y="4224528"/>
-            <a:ext cx="347472" cy="347472"/>
-          </a:xfrm>
-          <a:prstGeom prst="rect">
-            <a:avLst/>
-          </a:prstGeom>
-          <a:noFill/>
-        </p:spPr>
-        <p:txBody>
-          <a:bodyPr wrap="none" anchor="ctr">
-            <a:spAutoFit/>
-          </a:bodyPr>
-          <a:lstStyle/>
-          <a:p>
-            <a:pPr algn="ctr"/>
-            <a:r>
-              <a:rPr sz="1000" b="1">
-                <a:solidFill>
-                  <a:srgbClr val="FFFFFF"/>
-                </a:solidFill>
-                <a:latin typeface="Calibri"/>
-              </a:rPr>
-              <a:t>6</a:t>
-            </a:r>
-          </a:p>
-        </p:txBody>
-      </p:sp>
-      <p:sp>
-        <p:nvSpPr>
-          <p:cNvPr id="52" name="TextBox 51"/>
-          <p:cNvSpPr txBox="1"/>
-          <p:nvPr/>
-        </p:nvSpPr>
-        <p:spPr>
-          <a:xfrm>
-            <a:off x="6675120" y="4261104"/>
-            <a:ext cx="4846320" cy="347472"/>
-          </a:xfrm>
-          <a:prstGeom prst="rect">
-            <a:avLst/>
-          </a:prstGeom>
-          <a:noFill/>
-        </p:spPr>
-        <p:txBody>
-          <a:bodyPr wrap="square">
-            <a:spAutoFit/>
-          </a:bodyPr>
-          <a:lstStyle/>
-          <a:p>
-            <a:pPr algn="l"/>
-            <a:r>
-              <a:rPr sz="1050" b="0" i="0">
-                <a:solidFill>
-                  <a:srgbClr val="2C3E50"/>
-                </a:solidFill>
-                <a:latin typeface="Calibri"/>
-              </a:rPr>
-              <a:t>Agent optionally calls pubmed_search for latest evidence</a:t>
-            </a:r>
-          </a:p>
-        </p:txBody>
-      </p:sp>
-      <p:sp>
-        <p:nvSpPr>
-          <p:cNvPr id="53" name="Oval 52"/>
-          <p:cNvSpPr/>
-          <p:nvPr/>
-        </p:nvSpPr>
-        <p:spPr>
-          <a:xfrm>
-            <a:off x="6217920" y="4754879"/>
-            <a:ext cx="347472" cy="347472"/>
-          </a:xfrm>
-          <a:prstGeom prst="ellipse">
-            <a:avLst/>
-          </a:prstGeom>
-          <a:solidFill>
-            <a:srgbClr val="FF6B35"/>
-          </a:solidFill>
-          <a:ln>
-            <a:noFill/>
-          </a:ln>
-        </p:spPr>
-        <p:style>
-          <a:lnRef idx="1">
-            <a:schemeClr val="accent1"/>
-          </a:lnRef>
-          <a:fillRef idx="3">
-            <a:schemeClr val="accent1"/>
-          </a:fillRef>
-          <a:effectRef idx="2">
-            <a:schemeClr val="accent1"/>
-          </a:effectRef>
-          <a:fontRef idx="minor">
-            <a:schemeClr val="lt1"/>
-          </a:fontRef>
-        </p:style>
-        <p:txBody>
-          <a:bodyPr rtlCol="0" anchor="ctr"/>
-          <a:lstStyle/>
-          <a:p>
-            <a:pPr algn="ctr"/>
-          </a:p>
-        </p:txBody>
-      </p:sp>
-      <p:sp>
-        <p:nvSpPr>
-          <p:cNvPr id="54" name="TextBox 53"/>
-          <p:cNvSpPr txBox="1"/>
-          <p:nvPr/>
-        </p:nvSpPr>
-        <p:spPr>
-          <a:xfrm>
-            <a:off x="6217920" y="4754879"/>
-            <a:ext cx="347472" cy="347472"/>
-          </a:xfrm>
-          <a:prstGeom prst="rect">
-            <a:avLst/>
-          </a:prstGeom>
-          <a:noFill/>
-        </p:spPr>
-        <p:txBody>
-          <a:bodyPr wrap="none" anchor="ctr">
-            <a:spAutoFit/>
-          </a:bodyPr>
-          <a:lstStyle/>
-          <a:p>
-            <a:pPr algn="ctr"/>
-            <a:r>
-              <a:rPr sz="1000" b="1">
-                <a:solidFill>
-                  <a:srgbClr val="FFFFFF"/>
-                </a:solidFill>
-                <a:latin typeface="Calibri"/>
-              </a:rPr>
-              <a:t>7</a:t>
-            </a:r>
-          </a:p>
-        </p:txBody>
-      </p:sp>
-      <p:sp>
-        <p:nvSpPr>
-          <p:cNvPr id="55" name="TextBox 54"/>
-          <p:cNvSpPr txBox="1"/>
-          <p:nvPr/>
-        </p:nvSpPr>
-        <p:spPr>
-          <a:xfrm>
-            <a:off x="6675120" y="4791455"/>
-            <a:ext cx="4846320" cy="347472"/>
-          </a:xfrm>
-          <a:prstGeom prst="rect">
-            <a:avLst/>
-          </a:prstGeom>
-          <a:noFill/>
-        </p:spPr>
-        <p:txBody>
-          <a:bodyPr wrap="square">
-            <a:spAutoFit/>
-          </a:bodyPr>
-          <a:lstStyle/>
-          <a:p>
-            <a:pPr algn="l"/>
-            <a:r>
-              <a:rPr sz="1050" b="0" i="0">
-                <a:solidFill>
-                  <a:srgbClr val="2C3E50"/>
-                </a:solidFill>
-                <a:latin typeface="Calibri"/>
-              </a:rPr>
-              <a:t>Agent synthesizes all results into grounded answer</a:t>
-            </a:r>
-          </a:p>
-        </p:txBody>
-      </p:sp>
-      <p:sp>
-        <p:nvSpPr>
-          <p:cNvPr id="56" name="Oval 55"/>
-          <p:cNvSpPr/>
-          <p:nvPr/>
-        </p:nvSpPr>
-        <p:spPr>
-          <a:xfrm>
-            <a:off x="6217920" y="5285231"/>
-            <a:ext cx="347472" cy="347472"/>
-          </a:xfrm>
-          <a:prstGeom prst="ellipse">
-            <a:avLst/>
-          </a:prstGeom>
-          <a:solidFill>
-            <a:srgbClr val="CC4F1F"/>
-          </a:solidFill>
-          <a:ln>
-            <a:noFill/>
-          </a:ln>
-        </p:spPr>
-        <p:style>
-          <a:lnRef idx="1">
-            <a:schemeClr val="accent1"/>
-          </a:lnRef>
-          <a:fillRef idx="3">
-            <a:schemeClr val="accent1"/>
-          </a:fillRef>
-          <a:effectRef idx="2">
-            <a:schemeClr val="accent1"/>
-          </a:effectRef>
-          <a:fontRef idx="minor">
-            <a:schemeClr val="lt1"/>
-          </a:fontRef>
-        </p:style>
-        <p:txBody>
-          <a:bodyPr rtlCol="0" anchor="ctr"/>
-          <a:lstStyle/>
-          <a:p>
-            <a:pPr algn="ctr"/>
-          </a:p>
-        </p:txBody>
-      </p:sp>
-      <p:sp>
-        <p:nvSpPr>
-          <p:cNvPr id="57" name="TextBox 56"/>
-          <p:cNvSpPr txBox="1"/>
-          <p:nvPr/>
-        </p:nvSpPr>
-        <p:spPr>
-          <a:xfrm>
-            <a:off x="6217920" y="5285231"/>
-            <a:ext cx="347472" cy="347472"/>
-          </a:xfrm>
-          <a:prstGeom prst="rect">
-            <a:avLst/>
-          </a:prstGeom>
-          <a:noFill/>
-        </p:spPr>
-        <p:txBody>
-          <a:bodyPr wrap="none" anchor="ctr">
-            <a:spAutoFit/>
-          </a:bodyPr>
-          <a:lstStyle/>
-          <a:p>
-            <a:pPr algn="ctr"/>
-            <a:r>
-              <a:rPr sz="1000" b="1">
-                <a:solidFill>
-                  <a:srgbClr val="FFFFFF"/>
-                </a:solidFill>
-                <a:latin typeface="Calibri"/>
-              </a:rPr>
-              <a:t>8</a:t>
-            </a:r>
-          </a:p>
-        </p:txBody>
-      </p:sp>
-      <p:sp>
-        <p:nvSpPr>
-          <p:cNvPr id="58" name="TextBox 57"/>
-          <p:cNvSpPr txBox="1"/>
-          <p:nvPr/>
-        </p:nvSpPr>
-        <p:spPr>
-          <a:xfrm>
-            <a:off x="6675120" y="5321807"/>
-            <a:ext cx="4846320" cy="347472"/>
-          </a:xfrm>
-          <a:prstGeom prst="rect">
-            <a:avLst/>
-          </a:prstGeom>
-          <a:noFill/>
-        </p:spPr>
-        <p:txBody>
-          <a:bodyPr wrap="square">
-            <a:spAutoFit/>
-          </a:bodyPr>
-          <a:lstStyle/>
-          <a:p>
-            <a:pPr algn="l"/>
-            <a:r>
-              <a:rPr sz="1050" b="0" i="0">
-                <a:solidFill>
-                  <a:srgbClr val="2C3E50"/>
-                </a:solidFill>
-                <a:latin typeface="Calibri"/>
-              </a:rPr>
-              <a:t>Citation validator checks every [n] reference</a:t>
+              <a:t>PoC proves the retrieval + generation quality. Production adds Bedrock Agents for dynamic tool selection.</a:t>
             </a:r>
           </a:p>
         </p:txBody>

--- a/docs/Technology_Explanation_Slides.pptx
+++ b/docs/Technology_Explanation_Slides.pptx
@@ -10,6 +10,7 @@
     <p:sldId id="258" r:id="rId9"/>
     <p:sldId id="259" r:id="rId10"/>
     <p:sldId id="260" r:id="rId11"/>
+    <p:sldId id="261" r:id="rId12"/>
   </p:sldIdLst>
   <p:sldSz cx="12191695" cy="6858000" type="screen4x3"/>
   <p:notesSz cx="6858000" cy="9144000"/>
@@ -13599,6 +13600,2430 @@
                 <a:latin typeface="Calibri"/>
               </a:rPr>
               <a:t>Key insight: RAG handles all factual updates (WHO, PubMed, trials). Fine-tuning is ONLY for tone, phrasing, and clinical vocabulary. Never for facts.</a:t>
+            </a:r>
+          </a:p>
+        </p:txBody>
+      </p:sp>
+    </p:spTree>
+  </p:cSld>
+  <p:clrMapOvr>
+    <a:masterClrMapping/>
+  </p:clrMapOvr>
+</p:sld>
+</file>
+
+<file path=ppt/slides/slide6.xml><?xml version="1.0" encoding="utf-8"?>
+<p:sld xmlns:a="http://schemas.openxmlformats.org/drawingml/2006/main" xmlns:p="http://schemas.openxmlformats.org/presentationml/2006/main" xmlns:r="http://schemas.openxmlformats.org/officeDocument/2006/relationships">
+  <p:cSld>
+    <p:spTree>
+      <p:nvGrpSpPr>
+        <p:cNvPr id="1" name=""/>
+        <p:cNvGrpSpPr/>
+        <p:nvPr/>
+      </p:nvGrpSpPr>
+      <p:grpSpPr/>
+      <p:sp>
+        <p:nvSpPr>
+          <p:cNvPr id="2" name="Rectangle 1"/>
+          <p:cNvSpPr/>
+          <p:nvPr/>
+        </p:nvSpPr>
+        <p:spPr>
+          <a:xfrm>
+            <a:off x="0" y="0"/>
+            <a:ext cx="12191695" cy="6858000"/>
+          </a:xfrm>
+          <a:prstGeom prst="rect">
+            <a:avLst/>
+          </a:prstGeom>
+          <a:solidFill>
+            <a:srgbClr val="FFFFFF"/>
+          </a:solidFill>
+          <a:ln>
+            <a:noFill/>
+          </a:ln>
+        </p:spPr>
+        <p:style>
+          <a:lnRef idx="1">
+            <a:schemeClr val="accent1"/>
+          </a:lnRef>
+          <a:fillRef idx="3">
+            <a:schemeClr val="accent1"/>
+          </a:fillRef>
+          <a:effectRef idx="2">
+            <a:schemeClr val="accent1"/>
+          </a:effectRef>
+          <a:fontRef idx="minor">
+            <a:schemeClr val="lt1"/>
+          </a:fontRef>
+        </p:style>
+        <p:txBody>
+          <a:bodyPr rtlCol="0" anchor="ctr"/>
+          <a:lstStyle/>
+          <a:p>
+            <a:pPr algn="ctr"/>
+          </a:p>
+        </p:txBody>
+      </p:sp>
+      <p:sp>
+        <p:nvSpPr>
+          <p:cNvPr id="3" name="Rectangle 2"/>
+          <p:cNvSpPr/>
+          <p:nvPr/>
+        </p:nvSpPr>
+        <p:spPr>
+          <a:xfrm>
+            <a:off x="0" y="0"/>
+            <a:ext cx="12191695" cy="109728"/>
+          </a:xfrm>
+          <a:prstGeom prst="rect">
+            <a:avLst/>
+          </a:prstGeom>
+          <a:solidFill>
+            <a:srgbClr val="FF6B35"/>
+          </a:solidFill>
+          <a:ln>
+            <a:noFill/>
+          </a:ln>
+        </p:spPr>
+        <p:style>
+          <a:lnRef idx="1">
+            <a:schemeClr val="accent1"/>
+          </a:lnRef>
+          <a:fillRef idx="3">
+            <a:schemeClr val="accent1"/>
+          </a:fillRef>
+          <a:effectRef idx="2">
+            <a:schemeClr val="accent1"/>
+          </a:effectRef>
+          <a:fontRef idx="minor">
+            <a:schemeClr val="lt1"/>
+          </a:fontRef>
+        </p:style>
+        <p:txBody>
+          <a:bodyPr rtlCol="0" anchor="ctr"/>
+          <a:lstStyle/>
+          <a:p>
+            <a:pPr algn="ctr"/>
+          </a:p>
+        </p:txBody>
+      </p:sp>
+      <p:sp>
+        <p:nvSpPr>
+          <p:cNvPr id="4" name="TextBox 3"/>
+          <p:cNvSpPr txBox="1"/>
+          <p:nvPr/>
+        </p:nvSpPr>
+        <p:spPr>
+          <a:xfrm>
+            <a:off x="457200" y="6492240"/>
+            <a:ext cx="11247120" cy="256032"/>
+          </a:xfrm>
+          <a:prstGeom prst="rect">
+            <a:avLst/>
+          </a:prstGeom>
+          <a:noFill/>
+        </p:spPr>
+        <p:txBody>
+          <a:bodyPr wrap="none">
+            <a:spAutoFit/>
+          </a:bodyPr>
+          <a:lstStyle/>
+          <a:p>
+            <a:pPr algn="r"/>
+            <a:r>
+              <a:rPr sz="900" i="1">
+                <a:solidFill>
+                  <a:srgbClr val="646464"/>
+                </a:solidFill>
+                <a:latin typeface="Calibri"/>
+              </a:rPr>
+              <a:t>Nova Health Tech  ·  Clinical GenAI Assistant  ·  AWS Singapore</a:t>
+            </a:r>
+          </a:p>
+        </p:txBody>
+      </p:sp>
+      <p:sp>
+        <p:nvSpPr>
+          <p:cNvPr id="5" name="TextBox 4"/>
+          <p:cNvSpPr txBox="1"/>
+          <p:nvPr/>
+        </p:nvSpPr>
+        <p:spPr>
+          <a:xfrm>
+            <a:off x="457200" y="201168"/>
+            <a:ext cx="11247120" cy="594360"/>
+          </a:xfrm>
+          <a:prstGeom prst="rect">
+            <a:avLst/>
+          </a:prstGeom>
+          <a:noFill/>
+        </p:spPr>
+        <p:txBody>
+          <a:bodyPr wrap="none" lIns="0" tIns="0">
+            <a:spAutoFit/>
+          </a:bodyPr>
+          <a:lstStyle/>
+          <a:p>
+            <a:pPr algn="l"/>
+            <a:r>
+              <a:rPr sz="2800" b="1">
+                <a:solidFill>
+                  <a:srgbClr val="CC4F1F"/>
+                </a:solidFill>
+                <a:latin typeface="Calibri"/>
+              </a:rPr>
+              <a:t>LangChain + LangGraph in the PoC</a:t>
+            </a:r>
+          </a:p>
+        </p:txBody>
+      </p:sp>
+      <p:sp>
+        <p:nvSpPr>
+          <p:cNvPr id="6" name="Rectangle 5"/>
+          <p:cNvSpPr/>
+          <p:nvPr/>
+        </p:nvSpPr>
+        <p:spPr>
+          <a:xfrm>
+            <a:off x="457200" y="841248"/>
+            <a:ext cx="5266944" cy="36576"/>
+          </a:xfrm>
+          <a:prstGeom prst="rect">
+            <a:avLst/>
+          </a:prstGeom>
+          <a:solidFill>
+            <a:srgbClr val="FF6B35"/>
+          </a:solidFill>
+          <a:ln>
+            <a:noFill/>
+          </a:ln>
+        </p:spPr>
+        <p:style>
+          <a:lnRef idx="1">
+            <a:schemeClr val="accent1"/>
+          </a:lnRef>
+          <a:fillRef idx="3">
+            <a:schemeClr val="accent1"/>
+          </a:fillRef>
+          <a:effectRef idx="2">
+            <a:schemeClr val="accent1"/>
+          </a:effectRef>
+          <a:fontRef idx="minor">
+            <a:schemeClr val="lt1"/>
+          </a:fontRef>
+        </p:style>
+        <p:txBody>
+          <a:bodyPr rtlCol="0" anchor="ctr"/>
+          <a:lstStyle/>
+          <a:p>
+            <a:pPr algn="ctr"/>
+          </a:p>
+        </p:txBody>
+      </p:sp>
+      <p:sp>
+        <p:nvSpPr>
+          <p:cNvPr id="7" name="Rounded Rectangle 6"/>
+          <p:cNvSpPr/>
+          <p:nvPr/>
+        </p:nvSpPr>
+        <p:spPr>
+          <a:xfrm>
+            <a:off x="457200" y="1005840"/>
+            <a:ext cx="5486400" cy="2926080"/>
+          </a:xfrm>
+          <a:prstGeom prst="roundRect">
+            <a:avLst>
+              <a:gd name="adj" fmla="val 6000"/>
+            </a:avLst>
+          </a:prstGeom>
+          <a:solidFill>
+            <a:srgbClr val="E3F2FD"/>
+          </a:solidFill>
+          <a:ln w="25400">
+            <a:solidFill>
+              <a:srgbClr val="2196F3"/>
+            </a:solidFill>
+          </a:ln>
+        </p:spPr>
+        <p:style>
+          <a:lnRef idx="1">
+            <a:schemeClr val="accent1"/>
+          </a:lnRef>
+          <a:fillRef idx="3">
+            <a:schemeClr val="accent1"/>
+          </a:fillRef>
+          <a:effectRef idx="2">
+            <a:schemeClr val="accent1"/>
+          </a:effectRef>
+          <a:fontRef idx="minor">
+            <a:schemeClr val="lt1"/>
+          </a:fontRef>
+        </p:style>
+        <p:txBody>
+          <a:bodyPr rtlCol="0" anchor="ctr"/>
+          <a:lstStyle/>
+          <a:p>
+            <a:pPr algn="ctr"/>
+          </a:p>
+        </p:txBody>
+      </p:sp>
+      <p:sp>
+        <p:nvSpPr>
+          <p:cNvPr id="8" name="Rectangle 7"/>
+          <p:cNvSpPr/>
+          <p:nvPr/>
+        </p:nvSpPr>
+        <p:spPr>
+          <a:xfrm>
+            <a:off x="457200" y="1005840"/>
+            <a:ext cx="5486400" cy="457200"/>
+          </a:xfrm>
+          <a:prstGeom prst="rect">
+            <a:avLst/>
+          </a:prstGeom>
+          <a:solidFill>
+            <a:srgbClr val="2196F3"/>
+          </a:solidFill>
+          <a:ln>
+            <a:noFill/>
+          </a:ln>
+        </p:spPr>
+        <p:style>
+          <a:lnRef idx="1">
+            <a:schemeClr val="accent1"/>
+          </a:lnRef>
+          <a:fillRef idx="3">
+            <a:schemeClr val="accent1"/>
+          </a:fillRef>
+          <a:effectRef idx="2">
+            <a:schemeClr val="accent1"/>
+          </a:effectRef>
+          <a:fontRef idx="minor">
+            <a:schemeClr val="lt1"/>
+          </a:fontRef>
+        </p:style>
+        <p:txBody>
+          <a:bodyPr rtlCol="0" anchor="ctr"/>
+          <a:lstStyle/>
+          <a:p>
+            <a:pPr algn="ctr"/>
+          </a:p>
+        </p:txBody>
+      </p:sp>
+      <p:sp>
+        <p:nvSpPr>
+          <p:cNvPr id="9" name="TextBox 8"/>
+          <p:cNvSpPr txBox="1"/>
+          <p:nvPr/>
+        </p:nvSpPr>
+        <p:spPr>
+          <a:xfrm>
+            <a:off x="457200" y="1005840"/>
+            <a:ext cx="5486400" cy="457200"/>
+          </a:xfrm>
+          <a:prstGeom prst="rect">
+            <a:avLst/>
+          </a:prstGeom>
+          <a:noFill/>
+        </p:spPr>
+        <p:txBody>
+          <a:bodyPr wrap="square">
+            <a:spAutoFit/>
+          </a:bodyPr>
+          <a:lstStyle/>
+          <a:p>
+            <a:pPr algn="ctr"/>
+            <a:r>
+              <a:rPr sz="1400" b="1" i="0">
+                <a:solidFill>
+                  <a:srgbClr val="FFFFFF"/>
+                </a:solidFill>
+                <a:latin typeface="Calibri"/>
+              </a:rPr>
+              <a:t>LangGraph  -  State Machine Orchestration</a:t>
+            </a:r>
+          </a:p>
+        </p:txBody>
+      </p:sp>
+      <p:sp>
+        <p:nvSpPr>
+          <p:cNvPr id="10" name="TextBox 9"/>
+          <p:cNvSpPr txBox="1"/>
+          <p:nvPr/>
+        </p:nvSpPr>
+        <p:spPr>
+          <a:xfrm>
+            <a:off x="640080" y="1572768"/>
+            <a:ext cx="5120640" cy="411480"/>
+          </a:xfrm>
+          <a:prstGeom prst="rect">
+            <a:avLst/>
+          </a:prstGeom>
+          <a:noFill/>
+        </p:spPr>
+        <p:txBody>
+          <a:bodyPr wrap="square">
+            <a:spAutoFit/>
+          </a:bodyPr>
+          <a:lstStyle/>
+          <a:p>
+            <a:pPr algn="l"/>
+            <a:r>
+              <a:rPr sz="1050" b="0" i="0">
+                <a:solidFill>
+                  <a:srgbClr val="2C3E50"/>
+                </a:solidFill>
+                <a:latin typeface="Calibri"/>
+              </a:rPr>
+              <a:t>Defines the request pipeline as a directed graph of nodes + edges. Each node is a processing step; edges are conditional transitions.</a:t>
+            </a:r>
+          </a:p>
+        </p:txBody>
+      </p:sp>
+      <p:sp>
+        <p:nvSpPr>
+          <p:cNvPr id="11" name="Rectangle 10"/>
+          <p:cNvSpPr/>
+          <p:nvPr/>
+        </p:nvSpPr>
+        <p:spPr>
+          <a:xfrm>
+            <a:off x="640080" y="2057400"/>
+            <a:ext cx="5120640" cy="1645920"/>
+          </a:xfrm>
+          <a:prstGeom prst="rect">
+            <a:avLst/>
+          </a:prstGeom>
+          <a:solidFill>
+            <a:srgbClr val="F5F5F5"/>
+          </a:solidFill>
+          <a:ln w="9525">
+            <a:solidFill>
+              <a:srgbClr val="CBD5E1"/>
+            </a:solidFill>
+          </a:ln>
+        </p:spPr>
+        <p:style>
+          <a:lnRef idx="1">
+            <a:schemeClr val="accent1"/>
+          </a:lnRef>
+          <a:fillRef idx="3">
+            <a:schemeClr val="accent1"/>
+          </a:fillRef>
+          <a:effectRef idx="2">
+            <a:schemeClr val="accent1"/>
+          </a:effectRef>
+          <a:fontRef idx="minor">
+            <a:schemeClr val="lt1"/>
+          </a:fontRef>
+        </p:style>
+        <p:txBody>
+          <a:bodyPr rtlCol="0" anchor="ctr"/>
+          <a:lstStyle/>
+          <a:p>
+            <a:pPr algn="ctr"/>
+          </a:p>
+        </p:txBody>
+      </p:sp>
+      <p:sp>
+        <p:nvSpPr>
+          <p:cNvPr id="12" name="TextBox 11"/>
+          <p:cNvSpPr txBox="1"/>
+          <p:nvPr/>
+        </p:nvSpPr>
+        <p:spPr>
+          <a:xfrm>
+            <a:off x="777240" y="2121408"/>
+            <a:ext cx="4846320" cy="128016"/>
+          </a:xfrm>
+          <a:prstGeom prst="rect">
+            <a:avLst/>
+          </a:prstGeom>
+          <a:noFill/>
+        </p:spPr>
+        <p:txBody>
+          <a:bodyPr wrap="none">
+            <a:spAutoFit/>
+          </a:bodyPr>
+          <a:lstStyle/>
+          <a:p>
+            <a:r>
+              <a:rPr sz="850">
+                <a:solidFill>
+                  <a:srgbClr val="2196F3"/>
+                </a:solidFill>
+                <a:latin typeface="Courier New"/>
+              </a:rPr>
+              <a:t>from langgraph.graph import END, StateGraph</a:t>
+            </a:r>
+          </a:p>
+        </p:txBody>
+      </p:sp>
+      <p:sp>
+        <p:nvSpPr>
+          <p:cNvPr id="13" name="TextBox 12"/>
+          <p:cNvSpPr txBox="1"/>
+          <p:nvPr/>
+        </p:nvSpPr>
+        <p:spPr>
+          <a:xfrm>
+            <a:off x="777240" y="2240279"/>
+            <a:ext cx="4846320" cy="128016"/>
+          </a:xfrm>
+          <a:prstGeom prst="rect">
+            <a:avLst/>
+          </a:prstGeom>
+          <a:noFill/>
+        </p:spPr>
+        <p:txBody>
+          <a:bodyPr wrap="none">
+            <a:spAutoFit/>
+          </a:bodyPr>
+          <a:lstStyle/>
+          <a:p>
+            <a:r>
+              <a:rPr sz="850">
+                <a:solidFill>
+                  <a:srgbClr val="2C3E50"/>
+                </a:solidFill>
+                <a:latin typeface="Courier New"/>
+              </a:rPr>
+              <a:t/>
+            </a:r>
+          </a:p>
+        </p:txBody>
+      </p:sp>
+      <p:sp>
+        <p:nvSpPr>
+          <p:cNvPr id="14" name="TextBox 13"/>
+          <p:cNvSpPr txBox="1"/>
+          <p:nvPr/>
+        </p:nvSpPr>
+        <p:spPr>
+          <a:xfrm>
+            <a:off x="777240" y="2359152"/>
+            <a:ext cx="4846320" cy="128016"/>
+          </a:xfrm>
+          <a:prstGeom prst="rect">
+            <a:avLst/>
+          </a:prstGeom>
+          <a:noFill/>
+        </p:spPr>
+        <p:txBody>
+          <a:bodyPr wrap="none">
+            <a:spAutoFit/>
+          </a:bodyPr>
+          <a:lstStyle/>
+          <a:p>
+            <a:r>
+              <a:rPr sz="850">
+                <a:solidFill>
+                  <a:srgbClr val="2C3E50"/>
+                </a:solidFill>
+                <a:latin typeface="Courier New"/>
+              </a:rPr>
+              <a:t>g = StateGraph(ChatState)</a:t>
+            </a:r>
+          </a:p>
+        </p:txBody>
+      </p:sp>
+      <p:sp>
+        <p:nvSpPr>
+          <p:cNvPr id="15" name="TextBox 14"/>
+          <p:cNvSpPr txBox="1"/>
+          <p:nvPr/>
+        </p:nvSpPr>
+        <p:spPr>
+          <a:xfrm>
+            <a:off x="777240" y="2478024"/>
+            <a:ext cx="4846320" cy="128016"/>
+          </a:xfrm>
+          <a:prstGeom prst="rect">
+            <a:avLst/>
+          </a:prstGeom>
+          <a:noFill/>
+        </p:spPr>
+        <p:txBody>
+          <a:bodyPr wrap="none">
+            <a:spAutoFit/>
+          </a:bodyPr>
+          <a:lstStyle/>
+          <a:p>
+            <a:r>
+              <a:rPr sz="850">
+                <a:solidFill>
+                  <a:srgbClr val="2196F3"/>
+                </a:solidFill>
+                <a:latin typeface="Courier New"/>
+              </a:rPr>
+              <a:t>g.add_node("phi_mask",  _node_phi_mask)</a:t>
+            </a:r>
+          </a:p>
+        </p:txBody>
+      </p:sp>
+      <p:sp>
+        <p:nvSpPr>
+          <p:cNvPr id="16" name="TextBox 15"/>
+          <p:cNvSpPr txBox="1"/>
+          <p:nvPr/>
+        </p:nvSpPr>
+        <p:spPr>
+          <a:xfrm>
+            <a:off x="777240" y="2596896"/>
+            <a:ext cx="4846320" cy="128016"/>
+          </a:xfrm>
+          <a:prstGeom prst="rect">
+            <a:avLst/>
+          </a:prstGeom>
+          <a:noFill/>
+        </p:spPr>
+        <p:txBody>
+          <a:bodyPr wrap="none">
+            <a:spAutoFit/>
+          </a:bodyPr>
+          <a:lstStyle/>
+          <a:p>
+            <a:r>
+              <a:rPr sz="850">
+                <a:solidFill>
+                  <a:srgbClr val="2196F3"/>
+                </a:solidFill>
+                <a:latin typeface="Courier New"/>
+              </a:rPr>
+              <a:t>g.add_node("pick_lane", _node_pick_lane)</a:t>
+            </a:r>
+          </a:p>
+        </p:txBody>
+      </p:sp>
+      <p:sp>
+        <p:nvSpPr>
+          <p:cNvPr id="17" name="TextBox 16"/>
+          <p:cNvSpPr txBox="1"/>
+          <p:nvPr/>
+        </p:nvSpPr>
+        <p:spPr>
+          <a:xfrm>
+            <a:off x="777240" y="2715768"/>
+            <a:ext cx="4846320" cy="128016"/>
+          </a:xfrm>
+          <a:prstGeom prst="rect">
+            <a:avLst/>
+          </a:prstGeom>
+          <a:noFill/>
+        </p:spPr>
+        <p:txBody>
+          <a:bodyPr wrap="none">
+            <a:spAutoFit/>
+          </a:bodyPr>
+          <a:lstStyle/>
+          <a:p>
+            <a:r>
+              <a:rPr sz="850">
+                <a:solidFill>
+                  <a:srgbClr val="2196F3"/>
+                </a:solidFill>
+                <a:latin typeface="Courier New"/>
+              </a:rPr>
+              <a:t>g.add_node("retrieve",  _node_retrieve)</a:t>
+            </a:r>
+          </a:p>
+        </p:txBody>
+      </p:sp>
+      <p:sp>
+        <p:nvSpPr>
+          <p:cNvPr id="18" name="TextBox 17"/>
+          <p:cNvSpPr txBox="1"/>
+          <p:nvPr/>
+        </p:nvSpPr>
+        <p:spPr>
+          <a:xfrm>
+            <a:off x="777240" y="2834639"/>
+            <a:ext cx="4846320" cy="128016"/>
+          </a:xfrm>
+          <a:prstGeom prst="rect">
+            <a:avLst/>
+          </a:prstGeom>
+          <a:noFill/>
+        </p:spPr>
+        <p:txBody>
+          <a:bodyPr wrap="none">
+            <a:spAutoFit/>
+          </a:bodyPr>
+          <a:lstStyle/>
+          <a:p>
+            <a:r>
+              <a:rPr sz="850">
+                <a:solidFill>
+                  <a:srgbClr val="2196F3"/>
+                </a:solidFill>
+                <a:latin typeface="Courier New"/>
+              </a:rPr>
+              <a:t>g.add_node("generate",  _node_generate)</a:t>
+            </a:r>
+          </a:p>
+        </p:txBody>
+      </p:sp>
+      <p:sp>
+        <p:nvSpPr>
+          <p:cNvPr id="19" name="TextBox 18"/>
+          <p:cNvSpPr txBox="1"/>
+          <p:nvPr/>
+        </p:nvSpPr>
+        <p:spPr>
+          <a:xfrm>
+            <a:off x="777240" y="2953512"/>
+            <a:ext cx="4846320" cy="128016"/>
+          </a:xfrm>
+          <a:prstGeom prst="rect">
+            <a:avLst/>
+          </a:prstGeom>
+          <a:noFill/>
+        </p:spPr>
+        <p:txBody>
+          <a:bodyPr wrap="none">
+            <a:spAutoFit/>
+          </a:bodyPr>
+          <a:lstStyle/>
+          <a:p>
+            <a:r>
+              <a:rPr sz="850">
+                <a:solidFill>
+                  <a:srgbClr val="2196F3"/>
+                </a:solidFill>
+                <a:latin typeface="Courier New"/>
+              </a:rPr>
+              <a:t>g.add_conditional_edges("cache_lookup",</a:t>
+            </a:r>
+          </a:p>
+        </p:txBody>
+      </p:sp>
+      <p:sp>
+        <p:nvSpPr>
+          <p:cNvPr id="20" name="TextBox 19"/>
+          <p:cNvSpPr txBox="1"/>
+          <p:nvPr/>
+        </p:nvSpPr>
+        <p:spPr>
+          <a:xfrm>
+            <a:off x="777240" y="3072384"/>
+            <a:ext cx="4846320" cy="128016"/>
+          </a:xfrm>
+          <a:prstGeom prst="rect">
+            <a:avLst/>
+          </a:prstGeom>
+          <a:noFill/>
+        </p:spPr>
+        <p:txBody>
+          <a:bodyPr wrap="none">
+            <a:spAutoFit/>
+          </a:bodyPr>
+          <a:lstStyle/>
+          <a:p>
+            <a:r>
+              <a:rPr sz="850">
+                <a:solidFill>
+                  <a:srgbClr val="2C3E50"/>
+                </a:solidFill>
+                <a:latin typeface="Courier New"/>
+              </a:rPr>
+              <a:t>    _branch_on_lane,</a:t>
+            </a:r>
+          </a:p>
+        </p:txBody>
+      </p:sp>
+      <p:sp>
+        <p:nvSpPr>
+          <p:cNvPr id="21" name="TextBox 20"/>
+          <p:cNvSpPr txBox="1"/>
+          <p:nvPr/>
+        </p:nvSpPr>
+        <p:spPr>
+          <a:xfrm>
+            <a:off x="777240" y="3191256"/>
+            <a:ext cx="4846320" cy="128016"/>
+          </a:xfrm>
+          <a:prstGeom prst="rect">
+            <a:avLst/>
+          </a:prstGeom>
+          <a:noFill/>
+        </p:spPr>
+        <p:txBody>
+          <a:bodyPr wrap="none">
+            <a:spAutoFit/>
+          </a:bodyPr>
+          <a:lstStyle/>
+          <a:p>
+            <a:r>
+              <a:rPr sz="850">
+                <a:solidFill>
+                  <a:srgbClr val="2C3E50"/>
+                </a:solidFill>
+                <a:latin typeface="Courier New"/>
+              </a:rPr>
+              <a:t>    {"emergency": "emergency_agent",</a:t>
+            </a:r>
+          </a:p>
+        </p:txBody>
+      </p:sp>
+      <p:sp>
+        <p:nvSpPr>
+          <p:cNvPr id="22" name="TextBox 21"/>
+          <p:cNvSpPr txBox="1"/>
+          <p:nvPr/>
+        </p:nvSpPr>
+        <p:spPr>
+          <a:xfrm>
+            <a:off x="777240" y="3310128"/>
+            <a:ext cx="4846320" cy="128016"/>
+          </a:xfrm>
+          <a:prstGeom prst="rect">
+            <a:avLst/>
+          </a:prstGeom>
+          <a:noFill/>
+        </p:spPr>
+        <p:txBody>
+          <a:bodyPr wrap="none">
+            <a:spAutoFit/>
+          </a:bodyPr>
+          <a:lstStyle/>
+          <a:p>
+            <a:r>
+              <a:rPr sz="850">
+                <a:solidFill>
+                  <a:srgbClr val="2C3E50"/>
+                </a:solidFill>
+                <a:latin typeface="Courier New"/>
+              </a:rPr>
+              <a:t>     "complex":   "route_department"})</a:t>
+            </a:r>
+          </a:p>
+        </p:txBody>
+      </p:sp>
+      <p:sp>
+        <p:nvSpPr>
+          <p:cNvPr id="23" name="TextBox 22"/>
+          <p:cNvSpPr txBox="1"/>
+          <p:nvPr/>
+        </p:nvSpPr>
+        <p:spPr>
+          <a:xfrm>
+            <a:off x="777240" y="3429000"/>
+            <a:ext cx="4846320" cy="128016"/>
+          </a:xfrm>
+          <a:prstGeom prst="rect">
+            <a:avLst/>
+          </a:prstGeom>
+          <a:noFill/>
+        </p:spPr>
+        <p:txBody>
+          <a:bodyPr wrap="none">
+            <a:spAutoFit/>
+          </a:bodyPr>
+          <a:lstStyle/>
+          <a:p>
+            <a:r>
+              <a:rPr sz="850">
+                <a:solidFill>
+                  <a:srgbClr val="2196F3"/>
+                </a:solidFill>
+                <a:latin typeface="Courier New"/>
+              </a:rPr>
+              <a:t>graph = g.compile()</a:t>
+            </a:r>
+          </a:p>
+        </p:txBody>
+      </p:sp>
+      <p:sp>
+        <p:nvSpPr>
+          <p:cNvPr id="24" name="Rounded Rectangle 23"/>
+          <p:cNvSpPr/>
+          <p:nvPr/>
+        </p:nvSpPr>
+        <p:spPr>
+          <a:xfrm>
+            <a:off x="6217920" y="1005840"/>
+            <a:ext cx="5486400" cy="2926080"/>
+          </a:xfrm>
+          <a:prstGeom prst="roundRect">
+            <a:avLst>
+              <a:gd name="adj" fmla="val 6000"/>
+            </a:avLst>
+          </a:prstGeom>
+          <a:solidFill>
+            <a:srgbClr val="F3E5F5"/>
+          </a:solidFill>
+          <a:ln w="25400">
+            <a:solidFill>
+              <a:srgbClr val="7B1FA2"/>
+            </a:solidFill>
+          </a:ln>
+        </p:spPr>
+        <p:style>
+          <a:lnRef idx="1">
+            <a:schemeClr val="accent1"/>
+          </a:lnRef>
+          <a:fillRef idx="3">
+            <a:schemeClr val="accent1"/>
+          </a:fillRef>
+          <a:effectRef idx="2">
+            <a:schemeClr val="accent1"/>
+          </a:effectRef>
+          <a:fontRef idx="minor">
+            <a:schemeClr val="lt1"/>
+          </a:fontRef>
+        </p:style>
+        <p:txBody>
+          <a:bodyPr rtlCol="0" anchor="ctr"/>
+          <a:lstStyle/>
+          <a:p>
+            <a:pPr algn="ctr"/>
+          </a:p>
+        </p:txBody>
+      </p:sp>
+      <p:sp>
+        <p:nvSpPr>
+          <p:cNvPr id="25" name="Rectangle 24"/>
+          <p:cNvSpPr/>
+          <p:nvPr/>
+        </p:nvSpPr>
+        <p:spPr>
+          <a:xfrm>
+            <a:off x="6217920" y="1005840"/>
+            <a:ext cx="5486400" cy="457200"/>
+          </a:xfrm>
+          <a:prstGeom prst="rect">
+            <a:avLst/>
+          </a:prstGeom>
+          <a:solidFill>
+            <a:srgbClr val="7B1FA2"/>
+          </a:solidFill>
+          <a:ln>
+            <a:noFill/>
+          </a:ln>
+        </p:spPr>
+        <p:style>
+          <a:lnRef idx="1">
+            <a:schemeClr val="accent1"/>
+          </a:lnRef>
+          <a:fillRef idx="3">
+            <a:schemeClr val="accent1"/>
+          </a:fillRef>
+          <a:effectRef idx="2">
+            <a:schemeClr val="accent1"/>
+          </a:effectRef>
+          <a:fontRef idx="minor">
+            <a:schemeClr val="lt1"/>
+          </a:fontRef>
+        </p:style>
+        <p:txBody>
+          <a:bodyPr rtlCol="0" anchor="ctr"/>
+          <a:lstStyle/>
+          <a:p>
+            <a:pPr algn="ctr"/>
+          </a:p>
+        </p:txBody>
+      </p:sp>
+      <p:sp>
+        <p:nvSpPr>
+          <p:cNvPr id="26" name="TextBox 25"/>
+          <p:cNvSpPr txBox="1"/>
+          <p:nvPr/>
+        </p:nvSpPr>
+        <p:spPr>
+          <a:xfrm>
+            <a:off x="6217920" y="1005840"/>
+            <a:ext cx="5486400" cy="457200"/>
+          </a:xfrm>
+          <a:prstGeom prst="rect">
+            <a:avLst/>
+          </a:prstGeom>
+          <a:noFill/>
+        </p:spPr>
+        <p:txBody>
+          <a:bodyPr wrap="square">
+            <a:spAutoFit/>
+          </a:bodyPr>
+          <a:lstStyle/>
+          <a:p>
+            <a:pPr algn="ctr"/>
+            <a:r>
+              <a:rPr sz="1400" b="1" i="0">
+                <a:solidFill>
+                  <a:srgbClr val="FFFFFF"/>
+                </a:solidFill>
+                <a:latin typeface="Calibri"/>
+              </a:rPr>
+              <a:t>LangChain  -  Text Splitting + Cache</a:t>
+            </a:r>
+          </a:p>
+        </p:txBody>
+      </p:sp>
+      <p:sp>
+        <p:nvSpPr>
+          <p:cNvPr id="27" name="TextBox 26"/>
+          <p:cNvSpPr txBox="1"/>
+          <p:nvPr/>
+        </p:nvSpPr>
+        <p:spPr>
+          <a:xfrm>
+            <a:off x="6400800" y="1572768"/>
+            <a:ext cx="5120640" cy="411480"/>
+          </a:xfrm>
+          <a:prstGeom prst="rect">
+            <a:avLst/>
+          </a:prstGeom>
+          <a:noFill/>
+        </p:spPr>
+        <p:txBody>
+          <a:bodyPr wrap="square">
+            <a:spAutoFit/>
+          </a:bodyPr>
+          <a:lstStyle/>
+          <a:p>
+            <a:pPr algn="l"/>
+            <a:r>
+              <a:rPr sz="1050" b="0" i="0">
+                <a:solidFill>
+                  <a:srgbClr val="2C3E50"/>
+                </a:solidFill>
+                <a:latin typeface="Calibri"/>
+              </a:rPr>
+              <a:t>Used for two specific utilities: semantic text splitting during ingestion, and the Redis semantic cache layer.</a:t>
+            </a:r>
+          </a:p>
+        </p:txBody>
+      </p:sp>
+      <p:sp>
+        <p:nvSpPr>
+          <p:cNvPr id="28" name="Rounded Rectangle 27"/>
+          <p:cNvSpPr/>
+          <p:nvPr/>
+        </p:nvSpPr>
+        <p:spPr>
+          <a:xfrm>
+            <a:off x="6400800" y="2084831"/>
+            <a:ext cx="5120640" cy="530352"/>
+          </a:xfrm>
+          <a:prstGeom prst="roundRect">
+            <a:avLst>
+              <a:gd name="adj" fmla="val 8000"/>
+            </a:avLst>
+          </a:prstGeom>
+          <a:solidFill>
+            <a:srgbClr val="FFFFFF"/>
+          </a:solidFill>
+          <a:ln w="15240">
+            <a:solidFill>
+              <a:srgbClr val="7B1FA2"/>
+            </a:solidFill>
+          </a:ln>
+        </p:spPr>
+        <p:style>
+          <a:lnRef idx="1">
+            <a:schemeClr val="accent1"/>
+          </a:lnRef>
+          <a:fillRef idx="3">
+            <a:schemeClr val="accent1"/>
+          </a:fillRef>
+          <a:effectRef idx="2">
+            <a:schemeClr val="accent1"/>
+          </a:effectRef>
+          <a:fontRef idx="minor">
+            <a:schemeClr val="lt1"/>
+          </a:fontRef>
+        </p:style>
+        <p:txBody>
+          <a:bodyPr rtlCol="0" anchor="ctr"/>
+          <a:lstStyle/>
+          <a:p>
+            <a:pPr algn="ctr"/>
+          </a:p>
+        </p:txBody>
+      </p:sp>
+      <p:sp>
+        <p:nvSpPr>
+          <p:cNvPr id="29" name="Rectangle 28"/>
+          <p:cNvSpPr/>
+          <p:nvPr/>
+        </p:nvSpPr>
+        <p:spPr>
+          <a:xfrm>
+            <a:off x="6400800" y="2084831"/>
+            <a:ext cx="54864" cy="530352"/>
+          </a:xfrm>
+          <a:prstGeom prst="rect">
+            <a:avLst/>
+          </a:prstGeom>
+          <a:solidFill>
+            <a:srgbClr val="7B1FA2"/>
+          </a:solidFill>
+          <a:ln>
+            <a:noFill/>
+          </a:ln>
+        </p:spPr>
+        <p:style>
+          <a:lnRef idx="1">
+            <a:schemeClr val="accent1"/>
+          </a:lnRef>
+          <a:fillRef idx="3">
+            <a:schemeClr val="accent1"/>
+          </a:fillRef>
+          <a:effectRef idx="2">
+            <a:schemeClr val="accent1"/>
+          </a:effectRef>
+          <a:fontRef idx="minor">
+            <a:schemeClr val="lt1"/>
+          </a:fontRef>
+        </p:style>
+        <p:txBody>
+          <a:bodyPr rtlCol="0" anchor="ctr"/>
+          <a:lstStyle/>
+          <a:p>
+            <a:pPr algn="ctr"/>
+          </a:p>
+        </p:txBody>
+      </p:sp>
+      <p:sp>
+        <p:nvSpPr>
+          <p:cNvPr id="30" name="TextBox 29"/>
+          <p:cNvSpPr txBox="1"/>
+          <p:nvPr/>
+        </p:nvSpPr>
+        <p:spPr>
+          <a:xfrm>
+            <a:off x="6537960" y="2121407"/>
+            <a:ext cx="1828800" cy="228600"/>
+          </a:xfrm>
+          <a:prstGeom prst="rect">
+            <a:avLst/>
+          </a:prstGeom>
+          <a:noFill/>
+        </p:spPr>
+        <p:txBody>
+          <a:bodyPr wrap="square">
+            <a:spAutoFit/>
+          </a:bodyPr>
+          <a:lstStyle/>
+          <a:p>
+            <a:pPr algn="l"/>
+            <a:r>
+              <a:rPr sz="950" b="1" i="0">
+                <a:solidFill>
+                  <a:srgbClr val="7B1FA2"/>
+                </a:solidFill>
+                <a:latin typeface="Calibri"/>
+              </a:rPr>
+              <a:t>langchain-text-splitters</a:t>
+            </a:r>
+          </a:p>
+        </p:txBody>
+      </p:sp>
+      <p:sp>
+        <p:nvSpPr>
+          <p:cNvPr id="31" name="TextBox 30"/>
+          <p:cNvSpPr txBox="1"/>
+          <p:nvPr/>
+        </p:nvSpPr>
+        <p:spPr>
+          <a:xfrm>
+            <a:off x="6537960" y="2340863"/>
+            <a:ext cx="4846320" cy="256032"/>
+          </a:xfrm>
+          <a:prstGeom prst="rect">
+            <a:avLst/>
+          </a:prstGeom>
+          <a:noFill/>
+        </p:spPr>
+        <p:txBody>
+          <a:bodyPr wrap="square">
+            <a:spAutoFit/>
+          </a:bodyPr>
+          <a:lstStyle/>
+          <a:p>
+            <a:pPr algn="l"/>
+            <a:r>
+              <a:rPr sz="900" b="0" i="1">
+                <a:solidFill>
+                  <a:srgbClr val="2C3E50"/>
+                </a:solidFill>
+                <a:latin typeface="Calibri"/>
+              </a:rPr>
+              <a:t>SemanticChunker for clinical trial PDFs
+(max 512 tokens, 80th percentile breakpoint)</a:t>
+            </a:r>
+          </a:p>
+        </p:txBody>
+      </p:sp>
+      <p:sp>
+        <p:nvSpPr>
+          <p:cNvPr id="32" name="Rounded Rectangle 31"/>
+          <p:cNvSpPr/>
+          <p:nvPr/>
+        </p:nvSpPr>
+        <p:spPr>
+          <a:xfrm>
+            <a:off x="6400800" y="2679191"/>
+            <a:ext cx="5120640" cy="530352"/>
+          </a:xfrm>
+          <a:prstGeom prst="roundRect">
+            <a:avLst>
+              <a:gd name="adj" fmla="val 8000"/>
+            </a:avLst>
+          </a:prstGeom>
+          <a:solidFill>
+            <a:srgbClr val="FFFFFF"/>
+          </a:solidFill>
+          <a:ln w="15240">
+            <a:solidFill>
+              <a:srgbClr val="7B1FA2"/>
+            </a:solidFill>
+          </a:ln>
+        </p:spPr>
+        <p:style>
+          <a:lnRef idx="1">
+            <a:schemeClr val="accent1"/>
+          </a:lnRef>
+          <a:fillRef idx="3">
+            <a:schemeClr val="accent1"/>
+          </a:fillRef>
+          <a:effectRef idx="2">
+            <a:schemeClr val="accent1"/>
+          </a:effectRef>
+          <a:fontRef idx="minor">
+            <a:schemeClr val="lt1"/>
+          </a:fontRef>
+        </p:style>
+        <p:txBody>
+          <a:bodyPr rtlCol="0" anchor="ctr"/>
+          <a:lstStyle/>
+          <a:p>
+            <a:pPr algn="ctr"/>
+          </a:p>
+        </p:txBody>
+      </p:sp>
+      <p:sp>
+        <p:nvSpPr>
+          <p:cNvPr id="33" name="Rectangle 32"/>
+          <p:cNvSpPr/>
+          <p:nvPr/>
+        </p:nvSpPr>
+        <p:spPr>
+          <a:xfrm>
+            <a:off x="6400800" y="2679191"/>
+            <a:ext cx="54864" cy="530352"/>
+          </a:xfrm>
+          <a:prstGeom prst="rect">
+            <a:avLst/>
+          </a:prstGeom>
+          <a:solidFill>
+            <a:srgbClr val="7B1FA2"/>
+          </a:solidFill>
+          <a:ln>
+            <a:noFill/>
+          </a:ln>
+        </p:spPr>
+        <p:style>
+          <a:lnRef idx="1">
+            <a:schemeClr val="accent1"/>
+          </a:lnRef>
+          <a:fillRef idx="3">
+            <a:schemeClr val="accent1"/>
+          </a:fillRef>
+          <a:effectRef idx="2">
+            <a:schemeClr val="accent1"/>
+          </a:effectRef>
+          <a:fontRef idx="minor">
+            <a:schemeClr val="lt1"/>
+          </a:fontRef>
+        </p:style>
+        <p:txBody>
+          <a:bodyPr rtlCol="0" anchor="ctr"/>
+          <a:lstStyle/>
+          <a:p>
+            <a:pPr algn="ctr"/>
+          </a:p>
+        </p:txBody>
+      </p:sp>
+      <p:sp>
+        <p:nvSpPr>
+          <p:cNvPr id="34" name="TextBox 33"/>
+          <p:cNvSpPr txBox="1"/>
+          <p:nvPr/>
+        </p:nvSpPr>
+        <p:spPr>
+          <a:xfrm>
+            <a:off x="6537960" y="2715767"/>
+            <a:ext cx="1828800" cy="228600"/>
+          </a:xfrm>
+          <a:prstGeom prst="rect">
+            <a:avLst/>
+          </a:prstGeom>
+          <a:noFill/>
+        </p:spPr>
+        <p:txBody>
+          <a:bodyPr wrap="square">
+            <a:spAutoFit/>
+          </a:bodyPr>
+          <a:lstStyle/>
+          <a:p>
+            <a:pPr algn="l"/>
+            <a:r>
+              <a:rPr sz="950" b="1" i="0">
+                <a:solidFill>
+                  <a:srgbClr val="7B1FA2"/>
+                </a:solidFill>
+                <a:latin typeface="Calibri"/>
+              </a:rPr>
+              <a:t>langchain-community</a:t>
+            </a:r>
+          </a:p>
+        </p:txBody>
+      </p:sp>
+      <p:sp>
+        <p:nvSpPr>
+          <p:cNvPr id="35" name="TextBox 34"/>
+          <p:cNvSpPr txBox="1"/>
+          <p:nvPr/>
+        </p:nvSpPr>
+        <p:spPr>
+          <a:xfrm>
+            <a:off x="6537960" y="2935223"/>
+            <a:ext cx="4846320" cy="256032"/>
+          </a:xfrm>
+          <a:prstGeom prst="rect">
+            <a:avLst/>
+          </a:prstGeom>
+          <a:noFill/>
+        </p:spPr>
+        <p:txBody>
+          <a:bodyPr wrap="square">
+            <a:spAutoFit/>
+          </a:bodyPr>
+          <a:lstStyle/>
+          <a:p>
+            <a:pPr algn="l"/>
+            <a:r>
+              <a:rPr sz="900" b="0" i="1">
+                <a:solidFill>
+                  <a:srgbClr val="2C3E50"/>
+                </a:solidFill>
+                <a:latin typeface="Calibri"/>
+              </a:rPr>
+              <a:t>Redis cache integration (SHA-256 key in PoC,
+vector similarity in production)</a:t>
+            </a:r>
+          </a:p>
+        </p:txBody>
+      </p:sp>
+      <p:sp>
+        <p:nvSpPr>
+          <p:cNvPr id="36" name="Rounded Rectangle 35"/>
+          <p:cNvSpPr/>
+          <p:nvPr/>
+        </p:nvSpPr>
+        <p:spPr>
+          <a:xfrm>
+            <a:off x="6400800" y="3273552"/>
+            <a:ext cx="5120640" cy="530352"/>
+          </a:xfrm>
+          <a:prstGeom prst="roundRect">
+            <a:avLst>
+              <a:gd name="adj" fmla="val 8000"/>
+            </a:avLst>
+          </a:prstGeom>
+          <a:solidFill>
+            <a:srgbClr val="FFFFFF"/>
+          </a:solidFill>
+          <a:ln w="15240">
+            <a:solidFill>
+              <a:srgbClr val="7B1FA2"/>
+            </a:solidFill>
+          </a:ln>
+        </p:spPr>
+        <p:style>
+          <a:lnRef idx="1">
+            <a:schemeClr val="accent1"/>
+          </a:lnRef>
+          <a:fillRef idx="3">
+            <a:schemeClr val="accent1"/>
+          </a:fillRef>
+          <a:effectRef idx="2">
+            <a:schemeClr val="accent1"/>
+          </a:effectRef>
+          <a:fontRef idx="minor">
+            <a:schemeClr val="lt1"/>
+          </a:fontRef>
+        </p:style>
+        <p:txBody>
+          <a:bodyPr rtlCol="0" anchor="ctr"/>
+          <a:lstStyle/>
+          <a:p>
+            <a:pPr algn="ctr"/>
+          </a:p>
+        </p:txBody>
+      </p:sp>
+      <p:sp>
+        <p:nvSpPr>
+          <p:cNvPr id="37" name="Rectangle 36"/>
+          <p:cNvSpPr/>
+          <p:nvPr/>
+        </p:nvSpPr>
+        <p:spPr>
+          <a:xfrm>
+            <a:off x="6400800" y="3273552"/>
+            <a:ext cx="54864" cy="530352"/>
+          </a:xfrm>
+          <a:prstGeom prst="rect">
+            <a:avLst/>
+          </a:prstGeom>
+          <a:solidFill>
+            <a:srgbClr val="7B1FA2"/>
+          </a:solidFill>
+          <a:ln>
+            <a:noFill/>
+          </a:ln>
+        </p:spPr>
+        <p:style>
+          <a:lnRef idx="1">
+            <a:schemeClr val="accent1"/>
+          </a:lnRef>
+          <a:fillRef idx="3">
+            <a:schemeClr val="accent1"/>
+          </a:fillRef>
+          <a:effectRef idx="2">
+            <a:schemeClr val="accent1"/>
+          </a:effectRef>
+          <a:fontRef idx="minor">
+            <a:schemeClr val="lt1"/>
+          </a:fontRef>
+        </p:style>
+        <p:txBody>
+          <a:bodyPr rtlCol="0" anchor="ctr"/>
+          <a:lstStyle/>
+          <a:p>
+            <a:pPr algn="ctr"/>
+          </a:p>
+        </p:txBody>
+      </p:sp>
+      <p:sp>
+        <p:nvSpPr>
+          <p:cNvPr id="38" name="TextBox 37"/>
+          <p:cNvSpPr txBox="1"/>
+          <p:nvPr/>
+        </p:nvSpPr>
+        <p:spPr>
+          <a:xfrm>
+            <a:off x="6537960" y="3310128"/>
+            <a:ext cx="1828800" cy="228600"/>
+          </a:xfrm>
+          <a:prstGeom prst="rect">
+            <a:avLst/>
+          </a:prstGeom>
+          <a:noFill/>
+        </p:spPr>
+        <p:txBody>
+          <a:bodyPr wrap="square">
+            <a:spAutoFit/>
+          </a:bodyPr>
+          <a:lstStyle/>
+          <a:p>
+            <a:pPr algn="l"/>
+            <a:r>
+              <a:rPr sz="950" b="1" i="0">
+                <a:solidFill>
+                  <a:srgbClr val="7B1FA2"/>
+                </a:solidFill>
+                <a:latin typeface="Calibri"/>
+              </a:rPr>
+              <a:t>langchain-core</a:t>
+            </a:r>
+          </a:p>
+        </p:txBody>
+      </p:sp>
+      <p:sp>
+        <p:nvSpPr>
+          <p:cNvPr id="39" name="TextBox 38"/>
+          <p:cNvSpPr txBox="1"/>
+          <p:nvPr/>
+        </p:nvSpPr>
+        <p:spPr>
+          <a:xfrm>
+            <a:off x="6537960" y="3529584"/>
+            <a:ext cx="4846320" cy="256032"/>
+          </a:xfrm>
+          <a:prstGeom prst="rect">
+            <a:avLst/>
+          </a:prstGeom>
+          <a:noFill/>
+        </p:spPr>
+        <p:txBody>
+          <a:bodyPr wrap="square">
+            <a:spAutoFit/>
+          </a:bodyPr>
+          <a:lstStyle/>
+          <a:p>
+            <a:pPr algn="l"/>
+            <a:r>
+              <a:rPr sz="900" b="0" i="1">
+                <a:solidFill>
+                  <a:srgbClr val="2C3E50"/>
+                </a:solidFill>
+                <a:latin typeface="Calibri"/>
+              </a:rPr>
+              <a:t>Base types and interfaces used by LangGraph</a:t>
+            </a:r>
+          </a:p>
+        </p:txBody>
+      </p:sp>
+      <p:sp>
+        <p:nvSpPr>
+          <p:cNvPr id="40" name="Rounded Rectangle 39"/>
+          <p:cNvSpPr/>
+          <p:nvPr/>
+        </p:nvSpPr>
+        <p:spPr>
+          <a:xfrm>
+            <a:off x="457200" y="4069080"/>
+            <a:ext cx="11247120" cy="1920240"/>
+          </a:xfrm>
+          <a:prstGeom prst="roundRect">
+            <a:avLst>
+              <a:gd name="adj" fmla="val 6000"/>
+            </a:avLst>
+          </a:prstGeom>
+          <a:solidFill>
+            <a:srgbClr val="FFE8DA"/>
+          </a:solidFill>
+          <a:ln w="19050">
+            <a:solidFill>
+              <a:srgbClr val="FF6B35"/>
+            </a:solidFill>
+          </a:ln>
+        </p:spPr>
+        <p:style>
+          <a:lnRef idx="1">
+            <a:schemeClr val="accent1"/>
+          </a:lnRef>
+          <a:fillRef idx="3">
+            <a:schemeClr val="accent1"/>
+          </a:fillRef>
+          <a:effectRef idx="2">
+            <a:schemeClr val="accent1"/>
+          </a:effectRef>
+          <a:fontRef idx="minor">
+            <a:schemeClr val="lt1"/>
+          </a:fontRef>
+        </p:style>
+        <p:txBody>
+          <a:bodyPr rtlCol="0" anchor="ctr"/>
+          <a:lstStyle/>
+          <a:p>
+            <a:pPr algn="ctr"/>
+          </a:p>
+        </p:txBody>
+      </p:sp>
+      <p:sp>
+        <p:nvSpPr>
+          <p:cNvPr id="41" name="TextBox 40"/>
+          <p:cNvSpPr txBox="1"/>
+          <p:nvPr/>
+        </p:nvSpPr>
+        <p:spPr>
+          <a:xfrm>
+            <a:off x="640080" y="4133087"/>
+            <a:ext cx="10972800" cy="347472"/>
+          </a:xfrm>
+          <a:prstGeom prst="rect">
+            <a:avLst/>
+          </a:prstGeom>
+          <a:noFill/>
+        </p:spPr>
+        <p:txBody>
+          <a:bodyPr wrap="square">
+            <a:spAutoFit/>
+          </a:bodyPr>
+          <a:lstStyle/>
+          <a:p>
+            <a:pPr algn="l"/>
+            <a:r>
+              <a:rPr sz="1300" b="1" i="0">
+                <a:solidFill>
+                  <a:srgbClr val="CC4F1F"/>
+                </a:solidFill>
+                <a:latin typeface="Calibri"/>
+              </a:rPr>
+              <a:t>LangGraph State Machine: Full Node Graph (PoC)</a:t>
+            </a:r>
+          </a:p>
+        </p:txBody>
+      </p:sp>
+      <p:sp>
+        <p:nvSpPr>
+          <p:cNvPr id="42" name="Rounded Rectangle 41"/>
+          <p:cNvSpPr/>
+          <p:nvPr/>
+        </p:nvSpPr>
+        <p:spPr>
+          <a:xfrm>
+            <a:off x="594360" y="4572000"/>
+            <a:ext cx="1143000" cy="411480"/>
+          </a:xfrm>
+          <a:prstGeom prst="roundRect">
+            <a:avLst>
+              <a:gd name="adj" fmla="val 15000"/>
+            </a:avLst>
+          </a:prstGeom>
+          <a:solidFill>
+            <a:srgbClr val="FF6B35"/>
+          </a:solidFill>
+          <a:ln>
+            <a:noFill/>
+          </a:ln>
+        </p:spPr>
+        <p:style>
+          <a:lnRef idx="1">
+            <a:schemeClr val="accent1"/>
+          </a:lnRef>
+          <a:fillRef idx="3">
+            <a:schemeClr val="accent1"/>
+          </a:fillRef>
+          <a:effectRef idx="2">
+            <a:schemeClr val="accent1"/>
+          </a:effectRef>
+          <a:fontRef idx="minor">
+            <a:schemeClr val="lt1"/>
+          </a:fontRef>
+        </p:style>
+        <p:txBody>
+          <a:bodyPr rtlCol="0" anchor="ctr"/>
+          <a:lstStyle/>
+          <a:p>
+            <a:pPr algn="ctr"/>
+          </a:p>
+        </p:txBody>
+      </p:sp>
+      <p:sp>
+        <p:nvSpPr>
+          <p:cNvPr id="43" name="TextBox 42"/>
+          <p:cNvSpPr txBox="1"/>
+          <p:nvPr/>
+        </p:nvSpPr>
+        <p:spPr>
+          <a:xfrm>
+            <a:off x="594360" y="4572000"/>
+            <a:ext cx="1143000" cy="411480"/>
+          </a:xfrm>
+          <a:prstGeom prst="rect">
+            <a:avLst/>
+          </a:prstGeom>
+          <a:noFill/>
+        </p:spPr>
+        <p:txBody>
+          <a:bodyPr wrap="none" anchor="ctr">
+            <a:spAutoFit/>
+          </a:bodyPr>
+          <a:lstStyle/>
+          <a:p>
+            <a:pPr algn="ctr"/>
+            <a:r>
+              <a:rPr sz="850" b="1">
+                <a:solidFill>
+                  <a:srgbClr val="FFFFFF"/>
+                </a:solidFill>
+                <a:latin typeface="Courier New"/>
+              </a:rPr>
+              <a:t>phi_mask</a:t>
+            </a:r>
+          </a:p>
+        </p:txBody>
+      </p:sp>
+      <p:sp>
+        <p:nvSpPr>
+          <p:cNvPr id="44" name="Rounded Rectangle 43"/>
+          <p:cNvSpPr/>
+          <p:nvPr/>
+        </p:nvSpPr>
+        <p:spPr>
+          <a:xfrm>
+            <a:off x="1874519" y="4572000"/>
+            <a:ext cx="1143000" cy="411480"/>
+          </a:xfrm>
+          <a:prstGeom prst="roundRect">
+            <a:avLst>
+              <a:gd name="adj" fmla="val 15000"/>
+            </a:avLst>
+          </a:prstGeom>
+          <a:solidFill>
+            <a:srgbClr val="FF6B35"/>
+          </a:solidFill>
+          <a:ln>
+            <a:noFill/>
+          </a:ln>
+        </p:spPr>
+        <p:style>
+          <a:lnRef idx="1">
+            <a:schemeClr val="accent1"/>
+          </a:lnRef>
+          <a:fillRef idx="3">
+            <a:schemeClr val="accent1"/>
+          </a:fillRef>
+          <a:effectRef idx="2">
+            <a:schemeClr val="accent1"/>
+          </a:effectRef>
+          <a:fontRef idx="minor">
+            <a:schemeClr val="lt1"/>
+          </a:fontRef>
+        </p:style>
+        <p:txBody>
+          <a:bodyPr rtlCol="0" anchor="ctr"/>
+          <a:lstStyle/>
+          <a:p>
+            <a:pPr algn="ctr"/>
+          </a:p>
+        </p:txBody>
+      </p:sp>
+      <p:sp>
+        <p:nvSpPr>
+          <p:cNvPr id="45" name="TextBox 44"/>
+          <p:cNvSpPr txBox="1"/>
+          <p:nvPr/>
+        </p:nvSpPr>
+        <p:spPr>
+          <a:xfrm>
+            <a:off x="1874519" y="4572000"/>
+            <a:ext cx="1143000" cy="411480"/>
+          </a:xfrm>
+          <a:prstGeom prst="rect">
+            <a:avLst/>
+          </a:prstGeom>
+          <a:noFill/>
+        </p:spPr>
+        <p:txBody>
+          <a:bodyPr wrap="none" anchor="ctr">
+            <a:spAutoFit/>
+          </a:bodyPr>
+          <a:lstStyle/>
+          <a:p>
+            <a:pPr algn="ctr"/>
+            <a:r>
+              <a:rPr sz="850" b="1">
+                <a:solidFill>
+                  <a:srgbClr val="FFFFFF"/>
+                </a:solidFill>
+                <a:latin typeface="Courier New"/>
+              </a:rPr>
+              <a:t>pick_lane</a:t>
+            </a:r>
+          </a:p>
+        </p:txBody>
+      </p:sp>
+      <p:sp>
+        <p:nvSpPr>
+          <p:cNvPr id="46" name="Rounded Rectangle 45"/>
+          <p:cNvSpPr/>
+          <p:nvPr/>
+        </p:nvSpPr>
+        <p:spPr>
+          <a:xfrm>
+            <a:off x="3154680" y="4572000"/>
+            <a:ext cx="1143000" cy="411480"/>
+          </a:xfrm>
+          <a:prstGeom prst="roundRect">
+            <a:avLst>
+              <a:gd name="adj" fmla="val 15000"/>
+            </a:avLst>
+          </a:prstGeom>
+          <a:solidFill>
+            <a:srgbClr val="FF6B35"/>
+          </a:solidFill>
+          <a:ln>
+            <a:noFill/>
+          </a:ln>
+        </p:spPr>
+        <p:style>
+          <a:lnRef idx="1">
+            <a:schemeClr val="accent1"/>
+          </a:lnRef>
+          <a:fillRef idx="3">
+            <a:schemeClr val="accent1"/>
+          </a:fillRef>
+          <a:effectRef idx="2">
+            <a:schemeClr val="accent1"/>
+          </a:effectRef>
+          <a:fontRef idx="minor">
+            <a:schemeClr val="lt1"/>
+          </a:fontRef>
+        </p:style>
+        <p:txBody>
+          <a:bodyPr rtlCol="0" anchor="ctr"/>
+          <a:lstStyle/>
+          <a:p>
+            <a:pPr algn="ctr"/>
+          </a:p>
+        </p:txBody>
+      </p:sp>
+      <p:sp>
+        <p:nvSpPr>
+          <p:cNvPr id="47" name="TextBox 46"/>
+          <p:cNvSpPr txBox="1"/>
+          <p:nvPr/>
+        </p:nvSpPr>
+        <p:spPr>
+          <a:xfrm>
+            <a:off x="3154680" y="4572000"/>
+            <a:ext cx="1143000" cy="411480"/>
+          </a:xfrm>
+          <a:prstGeom prst="rect">
+            <a:avLst/>
+          </a:prstGeom>
+          <a:noFill/>
+        </p:spPr>
+        <p:txBody>
+          <a:bodyPr wrap="none" anchor="ctr">
+            <a:spAutoFit/>
+          </a:bodyPr>
+          <a:lstStyle/>
+          <a:p>
+            <a:pPr algn="ctr"/>
+            <a:r>
+              <a:rPr sz="850" b="1">
+                <a:solidFill>
+                  <a:srgbClr val="FFFFFF"/>
+                </a:solidFill>
+                <a:latin typeface="Courier New"/>
+              </a:rPr>
+              <a:t>cache_lookup</a:t>
+            </a:r>
+          </a:p>
+        </p:txBody>
+      </p:sp>
+      <p:sp>
+        <p:nvSpPr>
+          <p:cNvPr id="48" name="Rounded Rectangle 47"/>
+          <p:cNvSpPr/>
+          <p:nvPr/>
+        </p:nvSpPr>
+        <p:spPr>
+          <a:xfrm>
+            <a:off x="1874519" y="5230368"/>
+            <a:ext cx="1143000" cy="411480"/>
+          </a:xfrm>
+          <a:prstGeom prst="roundRect">
+            <a:avLst>
+              <a:gd name="adj" fmla="val 15000"/>
+            </a:avLst>
+          </a:prstGeom>
+          <a:solidFill>
+            <a:srgbClr val="2196F3"/>
+          </a:solidFill>
+          <a:ln>
+            <a:noFill/>
+          </a:ln>
+        </p:spPr>
+        <p:style>
+          <a:lnRef idx="1">
+            <a:schemeClr val="accent1"/>
+          </a:lnRef>
+          <a:fillRef idx="3">
+            <a:schemeClr val="accent1"/>
+          </a:fillRef>
+          <a:effectRef idx="2">
+            <a:schemeClr val="accent1"/>
+          </a:effectRef>
+          <a:fontRef idx="minor">
+            <a:schemeClr val="lt1"/>
+          </a:fontRef>
+        </p:style>
+        <p:txBody>
+          <a:bodyPr rtlCol="0" anchor="ctr"/>
+          <a:lstStyle/>
+          <a:p>
+            <a:pPr algn="ctr"/>
+          </a:p>
+        </p:txBody>
+      </p:sp>
+      <p:sp>
+        <p:nvSpPr>
+          <p:cNvPr id="49" name="TextBox 48"/>
+          <p:cNvSpPr txBox="1"/>
+          <p:nvPr/>
+        </p:nvSpPr>
+        <p:spPr>
+          <a:xfrm>
+            <a:off x="1874519" y="5230368"/>
+            <a:ext cx="1143000" cy="411480"/>
+          </a:xfrm>
+          <a:prstGeom prst="rect">
+            <a:avLst/>
+          </a:prstGeom>
+          <a:noFill/>
+        </p:spPr>
+        <p:txBody>
+          <a:bodyPr wrap="none" anchor="ctr">
+            <a:spAutoFit/>
+          </a:bodyPr>
+          <a:lstStyle/>
+          <a:p>
+            <a:pPr algn="ctr"/>
+            <a:r>
+              <a:rPr sz="850" b="1">
+                <a:solidFill>
+                  <a:srgbClr val="FFFFFF"/>
+                </a:solidFill>
+                <a:latin typeface="Courier New"/>
+              </a:rPr>
+              <a:t>emergency_agent</a:t>
+            </a:r>
+          </a:p>
+        </p:txBody>
+      </p:sp>
+      <p:sp>
+        <p:nvSpPr>
+          <p:cNvPr id="50" name="Rounded Rectangle 49"/>
+          <p:cNvSpPr/>
+          <p:nvPr/>
+        </p:nvSpPr>
+        <p:spPr>
+          <a:xfrm>
+            <a:off x="4434840" y="5230368"/>
+            <a:ext cx="1143000" cy="411480"/>
+          </a:xfrm>
+          <a:prstGeom prst="roundRect">
+            <a:avLst>
+              <a:gd name="adj" fmla="val 15000"/>
+            </a:avLst>
+          </a:prstGeom>
+          <a:solidFill>
+            <a:srgbClr val="2196F3"/>
+          </a:solidFill>
+          <a:ln>
+            <a:noFill/>
+          </a:ln>
+        </p:spPr>
+        <p:style>
+          <a:lnRef idx="1">
+            <a:schemeClr val="accent1"/>
+          </a:lnRef>
+          <a:fillRef idx="3">
+            <a:schemeClr val="accent1"/>
+          </a:fillRef>
+          <a:effectRef idx="2">
+            <a:schemeClr val="accent1"/>
+          </a:effectRef>
+          <a:fontRef idx="minor">
+            <a:schemeClr val="lt1"/>
+          </a:fontRef>
+        </p:style>
+        <p:txBody>
+          <a:bodyPr rtlCol="0" anchor="ctr"/>
+          <a:lstStyle/>
+          <a:p>
+            <a:pPr algn="ctr"/>
+          </a:p>
+        </p:txBody>
+      </p:sp>
+      <p:sp>
+        <p:nvSpPr>
+          <p:cNvPr id="51" name="TextBox 50"/>
+          <p:cNvSpPr txBox="1"/>
+          <p:nvPr/>
+        </p:nvSpPr>
+        <p:spPr>
+          <a:xfrm>
+            <a:off x="4434840" y="5230368"/>
+            <a:ext cx="1143000" cy="411480"/>
+          </a:xfrm>
+          <a:prstGeom prst="rect">
+            <a:avLst/>
+          </a:prstGeom>
+          <a:noFill/>
+        </p:spPr>
+        <p:txBody>
+          <a:bodyPr wrap="none" anchor="ctr">
+            <a:spAutoFit/>
+          </a:bodyPr>
+          <a:lstStyle/>
+          <a:p>
+            <a:pPr algn="ctr"/>
+            <a:r>
+              <a:rPr sz="850" b="1">
+                <a:solidFill>
+                  <a:srgbClr val="FFFFFF"/>
+                </a:solidFill>
+                <a:latin typeface="Courier New"/>
+              </a:rPr>
+              <a:t>route_dept</a:t>
+            </a:r>
+          </a:p>
+        </p:txBody>
+      </p:sp>
+      <p:sp>
+        <p:nvSpPr>
+          <p:cNvPr id="52" name="Rounded Rectangle 51"/>
+          <p:cNvSpPr/>
+          <p:nvPr/>
+        </p:nvSpPr>
+        <p:spPr>
+          <a:xfrm>
+            <a:off x="5715000" y="4572000"/>
+            <a:ext cx="1143000" cy="411480"/>
+          </a:xfrm>
+          <a:prstGeom prst="roundRect">
+            <a:avLst>
+              <a:gd name="adj" fmla="val 15000"/>
+            </a:avLst>
+          </a:prstGeom>
+          <a:solidFill>
+            <a:srgbClr val="27AE60"/>
+          </a:solidFill>
+          <a:ln>
+            <a:noFill/>
+          </a:ln>
+        </p:spPr>
+        <p:style>
+          <a:lnRef idx="1">
+            <a:schemeClr val="accent1"/>
+          </a:lnRef>
+          <a:fillRef idx="3">
+            <a:schemeClr val="accent1"/>
+          </a:fillRef>
+          <a:effectRef idx="2">
+            <a:schemeClr val="accent1"/>
+          </a:effectRef>
+          <a:fontRef idx="minor">
+            <a:schemeClr val="lt1"/>
+          </a:fontRef>
+        </p:style>
+        <p:txBody>
+          <a:bodyPr rtlCol="0" anchor="ctr"/>
+          <a:lstStyle/>
+          <a:p>
+            <a:pPr algn="ctr"/>
+          </a:p>
+        </p:txBody>
+      </p:sp>
+      <p:sp>
+        <p:nvSpPr>
+          <p:cNvPr id="53" name="TextBox 52"/>
+          <p:cNvSpPr txBox="1"/>
+          <p:nvPr/>
+        </p:nvSpPr>
+        <p:spPr>
+          <a:xfrm>
+            <a:off x="5715000" y="4572000"/>
+            <a:ext cx="1143000" cy="411480"/>
+          </a:xfrm>
+          <a:prstGeom prst="rect">
+            <a:avLst/>
+          </a:prstGeom>
+          <a:noFill/>
+        </p:spPr>
+        <p:txBody>
+          <a:bodyPr wrap="none" anchor="ctr">
+            <a:spAutoFit/>
+          </a:bodyPr>
+          <a:lstStyle/>
+          <a:p>
+            <a:pPr algn="ctr"/>
+            <a:r>
+              <a:rPr sz="850" b="1">
+                <a:solidFill>
+                  <a:srgbClr val="FFFFFF"/>
+                </a:solidFill>
+                <a:latin typeface="Courier New"/>
+              </a:rPr>
+              <a:t>retrieve</a:t>
+            </a:r>
+          </a:p>
+        </p:txBody>
+      </p:sp>
+      <p:sp>
+        <p:nvSpPr>
+          <p:cNvPr id="54" name="Rounded Rectangle 53"/>
+          <p:cNvSpPr/>
+          <p:nvPr/>
+        </p:nvSpPr>
+        <p:spPr>
+          <a:xfrm>
+            <a:off x="7178040" y="4572000"/>
+            <a:ext cx="1143000" cy="411480"/>
+          </a:xfrm>
+          <a:prstGeom prst="roundRect">
+            <a:avLst>
+              <a:gd name="adj" fmla="val 15000"/>
+            </a:avLst>
+          </a:prstGeom>
+          <a:solidFill>
+            <a:srgbClr val="27AE60"/>
+          </a:solidFill>
+          <a:ln>
+            <a:noFill/>
+          </a:ln>
+        </p:spPr>
+        <p:style>
+          <a:lnRef idx="1">
+            <a:schemeClr val="accent1"/>
+          </a:lnRef>
+          <a:fillRef idx="3">
+            <a:schemeClr val="accent1"/>
+          </a:fillRef>
+          <a:effectRef idx="2">
+            <a:schemeClr val="accent1"/>
+          </a:effectRef>
+          <a:fontRef idx="minor">
+            <a:schemeClr val="lt1"/>
+          </a:fontRef>
+        </p:style>
+        <p:txBody>
+          <a:bodyPr rtlCol="0" anchor="ctr"/>
+          <a:lstStyle/>
+          <a:p>
+            <a:pPr algn="ctr"/>
+          </a:p>
+        </p:txBody>
+      </p:sp>
+      <p:sp>
+        <p:nvSpPr>
+          <p:cNvPr id="55" name="TextBox 54"/>
+          <p:cNvSpPr txBox="1"/>
+          <p:nvPr/>
+        </p:nvSpPr>
+        <p:spPr>
+          <a:xfrm>
+            <a:off x="7178040" y="4572000"/>
+            <a:ext cx="1143000" cy="411480"/>
+          </a:xfrm>
+          <a:prstGeom prst="rect">
+            <a:avLst/>
+          </a:prstGeom>
+          <a:noFill/>
+        </p:spPr>
+        <p:txBody>
+          <a:bodyPr wrap="none" anchor="ctr">
+            <a:spAutoFit/>
+          </a:bodyPr>
+          <a:lstStyle/>
+          <a:p>
+            <a:pPr algn="ctr"/>
+            <a:r>
+              <a:rPr sz="850" b="1">
+                <a:solidFill>
+                  <a:srgbClr val="FFFFFF"/>
+                </a:solidFill>
+                <a:latin typeface="Courier New"/>
+              </a:rPr>
+              <a:t>generate</a:t>
+            </a:r>
+          </a:p>
+        </p:txBody>
+      </p:sp>
+      <p:sp>
+        <p:nvSpPr>
+          <p:cNvPr id="56" name="Rounded Rectangle 55"/>
+          <p:cNvSpPr/>
+          <p:nvPr/>
+        </p:nvSpPr>
+        <p:spPr>
+          <a:xfrm>
+            <a:off x="8641080" y="4572000"/>
+            <a:ext cx="1143000" cy="411480"/>
+          </a:xfrm>
+          <a:prstGeom prst="roundRect">
+            <a:avLst>
+              <a:gd name="adj" fmla="val 15000"/>
+            </a:avLst>
+          </a:prstGeom>
+          <a:solidFill>
+            <a:srgbClr val="FF6B35"/>
+          </a:solidFill>
+          <a:ln>
+            <a:noFill/>
+          </a:ln>
+        </p:spPr>
+        <p:style>
+          <a:lnRef idx="1">
+            <a:schemeClr val="accent1"/>
+          </a:lnRef>
+          <a:fillRef idx="3">
+            <a:schemeClr val="accent1"/>
+          </a:fillRef>
+          <a:effectRef idx="2">
+            <a:schemeClr val="accent1"/>
+          </a:effectRef>
+          <a:fontRef idx="minor">
+            <a:schemeClr val="lt1"/>
+          </a:fontRef>
+        </p:style>
+        <p:txBody>
+          <a:bodyPr rtlCol="0" anchor="ctr"/>
+          <a:lstStyle/>
+          <a:p>
+            <a:pPr algn="ctr"/>
+          </a:p>
+        </p:txBody>
+      </p:sp>
+      <p:sp>
+        <p:nvSpPr>
+          <p:cNvPr id="57" name="TextBox 56"/>
+          <p:cNvSpPr txBox="1"/>
+          <p:nvPr/>
+        </p:nvSpPr>
+        <p:spPr>
+          <a:xfrm>
+            <a:off x="8641080" y="4572000"/>
+            <a:ext cx="1143000" cy="411480"/>
+          </a:xfrm>
+          <a:prstGeom prst="rect">
+            <a:avLst/>
+          </a:prstGeom>
+          <a:noFill/>
+        </p:spPr>
+        <p:txBody>
+          <a:bodyPr wrap="none" anchor="ctr">
+            <a:spAutoFit/>
+          </a:bodyPr>
+          <a:lstStyle/>
+          <a:p>
+            <a:pPr algn="ctr"/>
+            <a:r>
+              <a:rPr sz="850" b="1">
+                <a:solidFill>
+                  <a:srgbClr val="FFFFFF"/>
+                </a:solidFill>
+                <a:latin typeface="Courier New"/>
+              </a:rPr>
+              <a:t>cache_write</a:t>
+            </a:r>
+          </a:p>
+        </p:txBody>
+      </p:sp>
+      <p:sp>
+        <p:nvSpPr>
+          <p:cNvPr id="58" name="Rounded Rectangle 57"/>
+          <p:cNvSpPr/>
+          <p:nvPr/>
+        </p:nvSpPr>
+        <p:spPr>
+          <a:xfrm>
+            <a:off x="10104120" y="4572000"/>
+            <a:ext cx="1143000" cy="411480"/>
+          </a:xfrm>
+          <a:prstGeom prst="roundRect">
+            <a:avLst>
+              <a:gd name="adj" fmla="val 15000"/>
+            </a:avLst>
+          </a:prstGeom>
+          <a:solidFill>
+            <a:srgbClr val="646464"/>
+          </a:solidFill>
+          <a:ln>
+            <a:noFill/>
+          </a:ln>
+        </p:spPr>
+        <p:style>
+          <a:lnRef idx="1">
+            <a:schemeClr val="accent1"/>
+          </a:lnRef>
+          <a:fillRef idx="3">
+            <a:schemeClr val="accent1"/>
+          </a:fillRef>
+          <a:effectRef idx="2">
+            <a:schemeClr val="accent1"/>
+          </a:effectRef>
+          <a:fontRef idx="minor">
+            <a:schemeClr val="lt1"/>
+          </a:fontRef>
+        </p:style>
+        <p:txBody>
+          <a:bodyPr rtlCol="0" anchor="ctr"/>
+          <a:lstStyle/>
+          <a:p>
+            <a:pPr algn="ctr"/>
+          </a:p>
+        </p:txBody>
+      </p:sp>
+      <p:sp>
+        <p:nvSpPr>
+          <p:cNvPr id="59" name="TextBox 58"/>
+          <p:cNvSpPr txBox="1"/>
+          <p:nvPr/>
+        </p:nvSpPr>
+        <p:spPr>
+          <a:xfrm>
+            <a:off x="10104120" y="4572000"/>
+            <a:ext cx="1143000" cy="411480"/>
+          </a:xfrm>
+          <a:prstGeom prst="rect">
+            <a:avLst/>
+          </a:prstGeom>
+          <a:noFill/>
+        </p:spPr>
+        <p:txBody>
+          <a:bodyPr wrap="none" anchor="ctr">
+            <a:spAutoFit/>
+          </a:bodyPr>
+          <a:lstStyle/>
+          <a:p>
+            <a:pPr algn="ctr"/>
+            <a:r>
+              <a:rPr sz="850" b="1">
+                <a:solidFill>
+                  <a:srgbClr val="FFFFFF"/>
+                </a:solidFill>
+                <a:latin typeface="Courier New"/>
+              </a:rPr>
+              <a:t>END</a:t>
+            </a:r>
+          </a:p>
+        </p:txBody>
+      </p:sp>
+      <p:sp>
+        <p:nvSpPr>
+          <p:cNvPr id="60" name="TextBox 59"/>
+          <p:cNvSpPr txBox="1"/>
+          <p:nvPr/>
+        </p:nvSpPr>
+        <p:spPr>
+          <a:xfrm>
+            <a:off x="3154680" y="5029200"/>
+            <a:ext cx="1371600" cy="201168"/>
+          </a:xfrm>
+          <a:prstGeom prst="rect">
+            <a:avLst/>
+          </a:prstGeom>
+          <a:noFill/>
+        </p:spPr>
+        <p:txBody>
+          <a:bodyPr wrap="square">
+            <a:spAutoFit/>
+          </a:bodyPr>
+          <a:lstStyle/>
+          <a:p>
+            <a:pPr algn="l"/>
+            <a:r>
+              <a:rPr sz="800" b="0" i="1">
+                <a:solidFill>
+                  <a:srgbClr val="2196F3"/>
+                </a:solidFill>
+                <a:latin typeface="Calibri"/>
+              </a:rPr>
+              <a:t>emergency</a:t>
+            </a:r>
+          </a:p>
+        </p:txBody>
+      </p:sp>
+      <p:sp>
+        <p:nvSpPr>
+          <p:cNvPr id="61" name="TextBox 60"/>
+          <p:cNvSpPr txBox="1"/>
+          <p:nvPr/>
+        </p:nvSpPr>
+        <p:spPr>
+          <a:xfrm>
+            <a:off x="3154680" y="5166360"/>
+            <a:ext cx="1371600" cy="201168"/>
+          </a:xfrm>
+          <a:prstGeom prst="rect">
+            <a:avLst/>
+          </a:prstGeom>
+          <a:noFill/>
+        </p:spPr>
+        <p:txBody>
+          <a:bodyPr wrap="square">
+            <a:spAutoFit/>
+          </a:bodyPr>
+          <a:lstStyle/>
+          <a:p>
+            <a:pPr algn="l"/>
+            <a:r>
+              <a:rPr sz="800" b="0" i="1">
+                <a:solidFill>
+                  <a:srgbClr val="2196F3"/>
+                </a:solidFill>
+                <a:latin typeface="Calibri"/>
+              </a:rPr>
+              <a:t>complex</a:t>
+            </a:r>
+          </a:p>
+        </p:txBody>
+      </p:sp>
+      <p:sp>
+        <p:nvSpPr>
+          <p:cNvPr id="62" name="Rounded Rectangle 61"/>
+          <p:cNvSpPr/>
+          <p:nvPr/>
+        </p:nvSpPr>
+        <p:spPr>
+          <a:xfrm>
+            <a:off x="457200" y="6080760"/>
+            <a:ext cx="11247120" cy="347472"/>
+          </a:xfrm>
+          <a:prstGeom prst="roundRect">
+            <a:avLst>
+              <a:gd name="adj" fmla="val 20000"/>
+            </a:avLst>
+          </a:prstGeom>
+          <a:solidFill>
+            <a:srgbClr val="FF6B35"/>
+          </a:solidFill>
+          <a:ln>
+            <a:noFill/>
+          </a:ln>
+        </p:spPr>
+        <p:style>
+          <a:lnRef idx="1">
+            <a:schemeClr val="accent1"/>
+          </a:lnRef>
+          <a:fillRef idx="3">
+            <a:schemeClr val="accent1"/>
+          </a:fillRef>
+          <a:effectRef idx="2">
+            <a:schemeClr val="accent1"/>
+          </a:effectRef>
+          <a:fontRef idx="minor">
+            <a:schemeClr val="lt1"/>
+          </a:fontRef>
+        </p:style>
+        <p:txBody>
+          <a:bodyPr rtlCol="0" anchor="ctr"/>
+          <a:lstStyle/>
+          <a:p>
+            <a:pPr algn="ctr"/>
+          </a:p>
+        </p:txBody>
+      </p:sp>
+      <p:sp>
+        <p:nvSpPr>
+          <p:cNvPr id="63" name="TextBox 62"/>
+          <p:cNvSpPr txBox="1"/>
+          <p:nvPr/>
+        </p:nvSpPr>
+        <p:spPr>
+          <a:xfrm>
+            <a:off x="640080" y="6117336"/>
+            <a:ext cx="10881360" cy="292608"/>
+          </a:xfrm>
+          <a:prstGeom prst="rect">
+            <a:avLst/>
+          </a:prstGeom>
+          <a:noFill/>
+        </p:spPr>
+        <p:txBody>
+          <a:bodyPr wrap="square">
+            <a:spAutoFit/>
+          </a:bodyPr>
+          <a:lstStyle/>
+          <a:p>
+            <a:pPr algn="ctr"/>
+            <a:r>
+              <a:rPr sz="1100" b="1" i="0">
+                <a:solidFill>
+                  <a:srgbClr val="FFFFFF"/>
+                </a:solidFill>
+                <a:latin typeface="Calibri"/>
+              </a:rPr>
+              <a:t>LangGraph = orchestration (state machine).  LangChain = utilities (text splitting, cache).  Neither replaces Bedrock Agents for tool calling.</a:t>
             </a:r>
           </a:p>
         </p:txBody>

--- a/docs/Technology_Explanation_Slides.pptx
+++ b/docs/Technology_Explanation_Slides.pptx
@@ -11,6 +11,7 @@
     <p:sldId id="259" r:id="rId10"/>
     <p:sldId id="260" r:id="rId11"/>
     <p:sldId id="261" r:id="rId12"/>
+    <p:sldId id="262" r:id="rId13"/>
   </p:sldIdLst>
   <p:sldSz cx="12191695" cy="6858000" type="screen4x3"/>
   <p:notesSz cx="6858000" cy="9144000"/>
@@ -16024,6 +16025,4100 @@
                 <a:latin typeface="Calibri"/>
               </a:rPr>
               <a:t>LangGraph = orchestration (state machine).  LangChain = utilities (text splitting, cache).  Neither replaces Bedrock Agents for tool calling.</a:t>
+            </a:r>
+          </a:p>
+        </p:txBody>
+      </p:sp>
+    </p:spTree>
+  </p:cSld>
+  <p:clrMapOvr>
+    <a:masterClrMapping/>
+  </p:clrMapOvr>
+</p:sld>
+</file>
+
+<file path=ppt/slides/slide7.xml><?xml version="1.0" encoding="utf-8"?>
+<p:sld xmlns:a="http://schemas.openxmlformats.org/drawingml/2006/main" xmlns:p="http://schemas.openxmlformats.org/presentationml/2006/main" xmlns:r="http://schemas.openxmlformats.org/officeDocument/2006/relationships">
+  <p:cSld>
+    <p:spTree>
+      <p:nvGrpSpPr>
+        <p:cNvPr id="1" name=""/>
+        <p:cNvGrpSpPr/>
+        <p:nvPr/>
+      </p:nvGrpSpPr>
+      <p:grpSpPr/>
+      <p:sp>
+        <p:nvSpPr>
+          <p:cNvPr id="2" name="Rectangle 1"/>
+          <p:cNvSpPr/>
+          <p:nvPr/>
+        </p:nvSpPr>
+        <p:spPr>
+          <a:xfrm>
+            <a:off x="0" y="0"/>
+            <a:ext cx="12191695" cy="6858000"/>
+          </a:xfrm>
+          <a:prstGeom prst="rect">
+            <a:avLst/>
+          </a:prstGeom>
+          <a:solidFill>
+            <a:srgbClr val="FFFFFF"/>
+          </a:solidFill>
+          <a:ln>
+            <a:noFill/>
+          </a:ln>
+        </p:spPr>
+        <p:style>
+          <a:lnRef idx="1">
+            <a:schemeClr val="accent1"/>
+          </a:lnRef>
+          <a:fillRef idx="3">
+            <a:schemeClr val="accent1"/>
+          </a:fillRef>
+          <a:effectRef idx="2">
+            <a:schemeClr val="accent1"/>
+          </a:effectRef>
+          <a:fontRef idx="minor">
+            <a:schemeClr val="lt1"/>
+          </a:fontRef>
+        </p:style>
+        <p:txBody>
+          <a:bodyPr rtlCol="0" anchor="ctr"/>
+          <a:lstStyle/>
+          <a:p>
+            <a:pPr algn="ctr"/>
+          </a:p>
+        </p:txBody>
+      </p:sp>
+      <p:sp>
+        <p:nvSpPr>
+          <p:cNvPr id="3" name="Rectangle 2"/>
+          <p:cNvSpPr/>
+          <p:nvPr/>
+        </p:nvSpPr>
+        <p:spPr>
+          <a:xfrm>
+            <a:off x="0" y="0"/>
+            <a:ext cx="12191695" cy="109728"/>
+          </a:xfrm>
+          <a:prstGeom prst="rect">
+            <a:avLst/>
+          </a:prstGeom>
+          <a:solidFill>
+            <a:srgbClr val="FF6B35"/>
+          </a:solidFill>
+          <a:ln>
+            <a:noFill/>
+          </a:ln>
+        </p:spPr>
+        <p:style>
+          <a:lnRef idx="1">
+            <a:schemeClr val="accent1"/>
+          </a:lnRef>
+          <a:fillRef idx="3">
+            <a:schemeClr val="accent1"/>
+          </a:fillRef>
+          <a:effectRef idx="2">
+            <a:schemeClr val="accent1"/>
+          </a:effectRef>
+          <a:fontRef idx="minor">
+            <a:schemeClr val="lt1"/>
+          </a:fontRef>
+        </p:style>
+        <p:txBody>
+          <a:bodyPr rtlCol="0" anchor="ctr"/>
+          <a:lstStyle/>
+          <a:p>
+            <a:pPr algn="ctr"/>
+          </a:p>
+        </p:txBody>
+      </p:sp>
+      <p:sp>
+        <p:nvSpPr>
+          <p:cNvPr id="4" name="TextBox 3"/>
+          <p:cNvSpPr txBox="1"/>
+          <p:nvPr/>
+        </p:nvSpPr>
+        <p:spPr>
+          <a:xfrm>
+            <a:off x="457200" y="6492240"/>
+            <a:ext cx="11247120" cy="256032"/>
+          </a:xfrm>
+          <a:prstGeom prst="rect">
+            <a:avLst/>
+          </a:prstGeom>
+          <a:noFill/>
+        </p:spPr>
+        <p:txBody>
+          <a:bodyPr wrap="none">
+            <a:spAutoFit/>
+          </a:bodyPr>
+          <a:lstStyle/>
+          <a:p>
+            <a:pPr algn="r"/>
+            <a:r>
+              <a:rPr sz="900" i="1">
+                <a:solidFill>
+                  <a:srgbClr val="646464"/>
+                </a:solidFill>
+                <a:latin typeface="Calibri"/>
+              </a:rPr>
+              <a:t>Nova Health Tech  ·  Clinical GenAI Assistant  ·  AWS Singapore</a:t>
+            </a:r>
+          </a:p>
+        </p:txBody>
+      </p:sp>
+      <p:sp>
+        <p:nvSpPr>
+          <p:cNvPr id="5" name="TextBox 4"/>
+          <p:cNvSpPr txBox="1"/>
+          <p:nvPr/>
+        </p:nvSpPr>
+        <p:spPr>
+          <a:xfrm>
+            <a:off x="457200" y="201168"/>
+            <a:ext cx="11247120" cy="594360"/>
+          </a:xfrm>
+          <a:prstGeom prst="rect">
+            <a:avLst/>
+          </a:prstGeom>
+          <a:noFill/>
+        </p:spPr>
+        <p:txBody>
+          <a:bodyPr wrap="none" lIns="0" tIns="0">
+            <a:spAutoFit/>
+          </a:bodyPr>
+          <a:lstStyle/>
+          <a:p>
+            <a:pPr algn="l"/>
+            <a:r>
+              <a:rPr sz="2800" b="1">
+                <a:solidFill>
+                  <a:srgbClr val="CC4F1F"/>
+                </a:solidFill>
+                <a:latin typeface="Calibri"/>
+              </a:rPr>
+              <a:t>Compliance, Regulations &amp; Security</a:t>
+            </a:r>
+          </a:p>
+        </p:txBody>
+      </p:sp>
+      <p:sp>
+        <p:nvSpPr>
+          <p:cNvPr id="6" name="Rectangle 5"/>
+          <p:cNvSpPr/>
+          <p:nvPr/>
+        </p:nvSpPr>
+        <p:spPr>
+          <a:xfrm>
+            <a:off x="457200" y="841248"/>
+            <a:ext cx="5596128" cy="36576"/>
+          </a:xfrm>
+          <a:prstGeom prst="rect">
+            <a:avLst/>
+          </a:prstGeom>
+          <a:solidFill>
+            <a:srgbClr val="FF6B35"/>
+          </a:solidFill>
+          <a:ln>
+            <a:noFill/>
+          </a:ln>
+        </p:spPr>
+        <p:style>
+          <a:lnRef idx="1">
+            <a:schemeClr val="accent1"/>
+          </a:lnRef>
+          <a:fillRef idx="3">
+            <a:schemeClr val="accent1"/>
+          </a:fillRef>
+          <a:effectRef idx="2">
+            <a:schemeClr val="accent1"/>
+          </a:effectRef>
+          <a:fontRef idx="minor">
+            <a:schemeClr val="lt1"/>
+          </a:fontRef>
+        </p:style>
+        <p:txBody>
+          <a:bodyPr rtlCol="0" anchor="ctr"/>
+          <a:lstStyle/>
+          <a:p>
+            <a:pPr algn="ctr"/>
+          </a:p>
+        </p:txBody>
+      </p:sp>
+      <p:sp>
+        <p:nvSpPr>
+          <p:cNvPr id="7" name="Rectangle 6"/>
+          <p:cNvSpPr/>
+          <p:nvPr/>
+        </p:nvSpPr>
+        <p:spPr>
+          <a:xfrm>
+            <a:off x="457200" y="1005840"/>
+            <a:ext cx="7132320" cy="347472"/>
+          </a:xfrm>
+          <a:prstGeom prst="rect">
+            <a:avLst/>
+          </a:prstGeom>
+          <a:solidFill>
+            <a:srgbClr val="00897B"/>
+          </a:solidFill>
+          <a:ln>
+            <a:noFill/>
+          </a:ln>
+        </p:spPr>
+        <p:style>
+          <a:lnRef idx="1">
+            <a:schemeClr val="accent1"/>
+          </a:lnRef>
+          <a:fillRef idx="3">
+            <a:schemeClr val="accent1"/>
+          </a:fillRef>
+          <a:effectRef idx="2">
+            <a:schemeClr val="accent1"/>
+          </a:effectRef>
+          <a:fontRef idx="minor">
+            <a:schemeClr val="lt1"/>
+          </a:fontRef>
+        </p:style>
+        <p:txBody>
+          <a:bodyPr rtlCol="0" anchor="ctr"/>
+          <a:lstStyle/>
+          <a:p>
+            <a:pPr algn="ctr"/>
+          </a:p>
+        </p:txBody>
+      </p:sp>
+      <p:sp>
+        <p:nvSpPr>
+          <p:cNvPr id="8" name="TextBox 7"/>
+          <p:cNvSpPr txBox="1"/>
+          <p:nvPr/>
+        </p:nvSpPr>
+        <p:spPr>
+          <a:xfrm>
+            <a:off x="457200" y="1005840"/>
+            <a:ext cx="7132320" cy="347472"/>
+          </a:xfrm>
+          <a:prstGeom prst="rect">
+            <a:avLst/>
+          </a:prstGeom>
+          <a:noFill/>
+        </p:spPr>
+        <p:txBody>
+          <a:bodyPr wrap="square">
+            <a:spAutoFit/>
+          </a:bodyPr>
+          <a:lstStyle/>
+          <a:p>
+            <a:pPr algn="ctr"/>
+            <a:r>
+              <a:rPr sz="1200" b="1" i="0">
+                <a:solidFill>
+                  <a:srgbClr val="FFFFFF"/>
+                </a:solidFill>
+                <a:latin typeface="Calibri"/>
+              </a:rPr>
+              <a:t>Singapore Healthcare Regulations</a:t>
+            </a:r>
+          </a:p>
+        </p:txBody>
+      </p:sp>
+      <p:sp>
+        <p:nvSpPr>
+          <p:cNvPr id="9" name="Rounded Rectangle 8"/>
+          <p:cNvSpPr/>
+          <p:nvPr/>
+        </p:nvSpPr>
+        <p:spPr>
+          <a:xfrm>
+            <a:off x="457200" y="1417320"/>
+            <a:ext cx="1691640" cy="1417320"/>
+          </a:xfrm>
+          <a:prstGeom prst="roundRect">
+            <a:avLst>
+              <a:gd name="adj" fmla="val 6000"/>
+            </a:avLst>
+          </a:prstGeom>
+          <a:solidFill>
+            <a:srgbClr val="E0F2F1"/>
+          </a:solidFill>
+          <a:ln w="19050">
+            <a:solidFill>
+              <a:srgbClr val="00897B"/>
+            </a:solidFill>
+          </a:ln>
+        </p:spPr>
+        <p:style>
+          <a:lnRef idx="1">
+            <a:schemeClr val="accent1"/>
+          </a:lnRef>
+          <a:fillRef idx="3">
+            <a:schemeClr val="accent1"/>
+          </a:fillRef>
+          <a:effectRef idx="2">
+            <a:schemeClr val="accent1"/>
+          </a:effectRef>
+          <a:fontRef idx="minor">
+            <a:schemeClr val="lt1"/>
+          </a:fontRef>
+        </p:style>
+        <p:txBody>
+          <a:bodyPr rtlCol="0" anchor="ctr"/>
+          <a:lstStyle/>
+          <a:p>
+            <a:pPr algn="ctr"/>
+          </a:p>
+        </p:txBody>
+      </p:sp>
+      <p:sp>
+        <p:nvSpPr>
+          <p:cNvPr id="10" name="Rectangle 9"/>
+          <p:cNvSpPr/>
+          <p:nvPr/>
+        </p:nvSpPr>
+        <p:spPr>
+          <a:xfrm>
+            <a:off x="457200" y="1417320"/>
+            <a:ext cx="1691640" cy="347472"/>
+          </a:xfrm>
+          <a:prstGeom prst="rect">
+            <a:avLst/>
+          </a:prstGeom>
+          <a:solidFill>
+            <a:srgbClr val="00897B"/>
+          </a:solidFill>
+          <a:ln>
+            <a:noFill/>
+          </a:ln>
+        </p:spPr>
+        <p:style>
+          <a:lnRef idx="1">
+            <a:schemeClr val="accent1"/>
+          </a:lnRef>
+          <a:fillRef idx="3">
+            <a:schemeClr val="accent1"/>
+          </a:fillRef>
+          <a:effectRef idx="2">
+            <a:schemeClr val="accent1"/>
+          </a:effectRef>
+          <a:fontRef idx="minor">
+            <a:schemeClr val="lt1"/>
+          </a:fontRef>
+        </p:style>
+        <p:txBody>
+          <a:bodyPr rtlCol="0" anchor="ctr"/>
+          <a:lstStyle/>
+          <a:p>
+            <a:pPr algn="ctr"/>
+          </a:p>
+        </p:txBody>
+      </p:sp>
+      <p:sp>
+        <p:nvSpPr>
+          <p:cNvPr id="11" name="TextBox 10"/>
+          <p:cNvSpPr txBox="1"/>
+          <p:nvPr/>
+        </p:nvSpPr>
+        <p:spPr>
+          <a:xfrm>
+            <a:off x="457200" y="1417320"/>
+            <a:ext cx="1691640" cy="347472"/>
+          </a:xfrm>
+          <a:prstGeom prst="rect">
+            <a:avLst/>
+          </a:prstGeom>
+          <a:noFill/>
+        </p:spPr>
+        <p:txBody>
+          <a:bodyPr wrap="square">
+            <a:spAutoFit/>
+          </a:bodyPr>
+          <a:lstStyle/>
+          <a:p>
+            <a:pPr algn="ctr"/>
+            <a:r>
+              <a:rPr sz="1300" b="1" i="0">
+                <a:solidFill>
+                  <a:srgbClr val="FFFFFF"/>
+                </a:solidFill>
+                <a:latin typeface="Calibri"/>
+              </a:rPr>
+              <a:t>PDPA</a:t>
+            </a:r>
+          </a:p>
+        </p:txBody>
+      </p:sp>
+      <p:sp>
+        <p:nvSpPr>
+          <p:cNvPr id="12" name="TextBox 11"/>
+          <p:cNvSpPr txBox="1"/>
+          <p:nvPr/>
+        </p:nvSpPr>
+        <p:spPr>
+          <a:xfrm>
+            <a:off x="530352" y="1801368"/>
+            <a:ext cx="1545336" cy="292608"/>
+          </a:xfrm>
+          <a:prstGeom prst="rect">
+            <a:avLst/>
+          </a:prstGeom>
+          <a:noFill/>
+        </p:spPr>
+        <p:txBody>
+          <a:bodyPr wrap="square">
+            <a:spAutoFit/>
+          </a:bodyPr>
+          <a:lstStyle/>
+          <a:p>
+            <a:pPr algn="l"/>
+            <a:r>
+              <a:rPr sz="850" b="1" i="0">
+                <a:solidFill>
+                  <a:srgbClr val="00897B"/>
+                </a:solidFill>
+                <a:latin typeface="Calibri"/>
+              </a:rPr>
+              <a:t>Personal Data Protection Act</a:t>
+            </a:r>
+          </a:p>
+        </p:txBody>
+      </p:sp>
+      <p:sp>
+        <p:nvSpPr>
+          <p:cNvPr id="13" name="TextBox 12"/>
+          <p:cNvSpPr txBox="1"/>
+          <p:nvPr/>
+        </p:nvSpPr>
+        <p:spPr>
+          <a:xfrm>
+            <a:off x="530352" y="2112264"/>
+            <a:ext cx="1545336" cy="347472"/>
+          </a:xfrm>
+          <a:prstGeom prst="rect">
+            <a:avLst/>
+          </a:prstGeom>
+          <a:noFill/>
+        </p:spPr>
+        <p:txBody>
+          <a:bodyPr wrap="square">
+            <a:spAutoFit/>
+          </a:bodyPr>
+          <a:lstStyle/>
+          <a:p>
+            <a:pPr algn="l"/>
+            <a:r>
+              <a:rPr sz="800" b="0" i="1">
+                <a:solidFill>
+                  <a:srgbClr val="2C3E50"/>
+                </a:solidFill>
+                <a:latin typeface="Calibri"/>
+              </a:rPr>
+              <a:t>Patient data protection, 72h breach notification, DPO required</a:t>
+            </a:r>
+          </a:p>
+        </p:txBody>
+      </p:sp>
+      <p:sp>
+        <p:nvSpPr>
+          <p:cNvPr id="14" name="TextBox 13"/>
+          <p:cNvSpPr txBox="1"/>
+          <p:nvPr/>
+        </p:nvSpPr>
+        <p:spPr>
+          <a:xfrm>
+            <a:off x="530352" y="2496312"/>
+            <a:ext cx="1545336" cy="292608"/>
+          </a:xfrm>
+          <a:prstGeom prst="rect">
+            <a:avLst/>
+          </a:prstGeom>
+          <a:noFill/>
+        </p:spPr>
+        <p:txBody>
+          <a:bodyPr wrap="square">
+            <a:spAutoFit/>
+          </a:bodyPr>
+          <a:lstStyle/>
+          <a:p>
+            <a:pPr algn="l"/>
+            <a:r>
+              <a:rPr sz="800" b="1" i="0">
+                <a:solidFill>
+                  <a:srgbClr val="27AE60"/>
+                </a:solidFill>
+                <a:latin typeface="Calibri"/>
+              </a:rPr>
+              <a:t>PHI mask + KMS BYOK + audit trail</a:t>
+            </a:r>
+          </a:p>
+        </p:txBody>
+      </p:sp>
+      <p:sp>
+        <p:nvSpPr>
+          <p:cNvPr id="15" name="Rounded Rectangle 14"/>
+          <p:cNvSpPr/>
+          <p:nvPr/>
+        </p:nvSpPr>
+        <p:spPr>
+          <a:xfrm>
+            <a:off x="2221992" y="1417320"/>
+            <a:ext cx="1691640" cy="1417320"/>
+          </a:xfrm>
+          <a:prstGeom prst="roundRect">
+            <a:avLst>
+              <a:gd name="adj" fmla="val 6000"/>
+            </a:avLst>
+          </a:prstGeom>
+          <a:solidFill>
+            <a:srgbClr val="E0F2F1"/>
+          </a:solidFill>
+          <a:ln w="19050">
+            <a:solidFill>
+              <a:srgbClr val="00897B"/>
+            </a:solidFill>
+          </a:ln>
+        </p:spPr>
+        <p:style>
+          <a:lnRef idx="1">
+            <a:schemeClr val="accent1"/>
+          </a:lnRef>
+          <a:fillRef idx="3">
+            <a:schemeClr val="accent1"/>
+          </a:fillRef>
+          <a:effectRef idx="2">
+            <a:schemeClr val="accent1"/>
+          </a:effectRef>
+          <a:fontRef idx="minor">
+            <a:schemeClr val="lt1"/>
+          </a:fontRef>
+        </p:style>
+        <p:txBody>
+          <a:bodyPr rtlCol="0" anchor="ctr"/>
+          <a:lstStyle/>
+          <a:p>
+            <a:pPr algn="ctr"/>
+          </a:p>
+        </p:txBody>
+      </p:sp>
+      <p:sp>
+        <p:nvSpPr>
+          <p:cNvPr id="16" name="Rectangle 15"/>
+          <p:cNvSpPr/>
+          <p:nvPr/>
+        </p:nvSpPr>
+        <p:spPr>
+          <a:xfrm>
+            <a:off x="2221992" y="1417320"/>
+            <a:ext cx="1691640" cy="347472"/>
+          </a:xfrm>
+          <a:prstGeom prst="rect">
+            <a:avLst/>
+          </a:prstGeom>
+          <a:solidFill>
+            <a:srgbClr val="00897B"/>
+          </a:solidFill>
+          <a:ln>
+            <a:noFill/>
+          </a:ln>
+        </p:spPr>
+        <p:style>
+          <a:lnRef idx="1">
+            <a:schemeClr val="accent1"/>
+          </a:lnRef>
+          <a:fillRef idx="3">
+            <a:schemeClr val="accent1"/>
+          </a:fillRef>
+          <a:effectRef idx="2">
+            <a:schemeClr val="accent1"/>
+          </a:effectRef>
+          <a:fontRef idx="minor">
+            <a:schemeClr val="lt1"/>
+          </a:fontRef>
+        </p:style>
+        <p:txBody>
+          <a:bodyPr rtlCol="0" anchor="ctr"/>
+          <a:lstStyle/>
+          <a:p>
+            <a:pPr algn="ctr"/>
+          </a:p>
+        </p:txBody>
+      </p:sp>
+      <p:sp>
+        <p:nvSpPr>
+          <p:cNvPr id="17" name="TextBox 16"/>
+          <p:cNvSpPr txBox="1"/>
+          <p:nvPr/>
+        </p:nvSpPr>
+        <p:spPr>
+          <a:xfrm>
+            <a:off x="2221992" y="1417320"/>
+            <a:ext cx="1691640" cy="347472"/>
+          </a:xfrm>
+          <a:prstGeom prst="rect">
+            <a:avLst/>
+          </a:prstGeom>
+          <a:noFill/>
+        </p:spPr>
+        <p:txBody>
+          <a:bodyPr wrap="square">
+            <a:spAutoFit/>
+          </a:bodyPr>
+          <a:lstStyle/>
+          <a:p>
+            <a:pPr algn="ctr"/>
+            <a:r>
+              <a:rPr sz="1300" b="1" i="0">
+                <a:solidFill>
+                  <a:srgbClr val="FFFFFF"/>
+                </a:solidFill>
+                <a:latin typeface="Calibri"/>
+              </a:rPr>
+              <a:t>HCSA 2020</a:t>
+            </a:r>
+          </a:p>
+        </p:txBody>
+      </p:sp>
+      <p:sp>
+        <p:nvSpPr>
+          <p:cNvPr id="18" name="TextBox 17"/>
+          <p:cNvSpPr txBox="1"/>
+          <p:nvPr/>
+        </p:nvSpPr>
+        <p:spPr>
+          <a:xfrm>
+            <a:off x="2295144" y="1801368"/>
+            <a:ext cx="1545336" cy="292608"/>
+          </a:xfrm>
+          <a:prstGeom prst="rect">
+            <a:avLst/>
+          </a:prstGeom>
+          <a:noFill/>
+        </p:spPr>
+        <p:txBody>
+          <a:bodyPr wrap="square">
+            <a:spAutoFit/>
+          </a:bodyPr>
+          <a:lstStyle/>
+          <a:p>
+            <a:pPr algn="l"/>
+            <a:r>
+              <a:rPr sz="850" b="1" i="0">
+                <a:solidFill>
+                  <a:srgbClr val="00897B"/>
+                </a:solidFill>
+                <a:latin typeface="Calibri"/>
+              </a:rPr>
+              <a:t>Healthcare Services Act</a:t>
+            </a:r>
+          </a:p>
+        </p:txBody>
+      </p:sp>
+      <p:sp>
+        <p:nvSpPr>
+          <p:cNvPr id="19" name="TextBox 18"/>
+          <p:cNvSpPr txBox="1"/>
+          <p:nvPr/>
+        </p:nvSpPr>
+        <p:spPr>
+          <a:xfrm>
+            <a:off x="2295144" y="2112264"/>
+            <a:ext cx="1545336" cy="347472"/>
+          </a:xfrm>
+          <a:prstGeom prst="rect">
+            <a:avLst/>
+          </a:prstGeom>
+          <a:noFill/>
+        </p:spPr>
+        <p:txBody>
+          <a:bodyPr wrap="square">
+            <a:spAutoFit/>
+          </a:bodyPr>
+          <a:lstStyle/>
+          <a:p>
+            <a:pPr algn="l"/>
+            <a:r>
+              <a:rPr sz="800" b="0" i="1">
+                <a:solidFill>
+                  <a:srgbClr val="2C3E50"/>
+                </a:solidFill>
+                <a:latin typeface="Calibri"/>
+              </a:rPr>
+              <a:t>License for clinical decision support (replaces PHMC 1980)</a:t>
+            </a:r>
+          </a:p>
+        </p:txBody>
+      </p:sp>
+      <p:sp>
+        <p:nvSpPr>
+          <p:cNvPr id="20" name="TextBox 19"/>
+          <p:cNvSpPr txBox="1"/>
+          <p:nvPr/>
+        </p:nvSpPr>
+        <p:spPr>
+          <a:xfrm>
+            <a:off x="2295144" y="2496312"/>
+            <a:ext cx="1545336" cy="292608"/>
+          </a:xfrm>
+          <a:prstGeom prst="rect">
+            <a:avLst/>
+          </a:prstGeom>
+          <a:noFill/>
+        </p:spPr>
+        <p:txBody>
+          <a:bodyPr wrap="square">
+            <a:spAutoFit/>
+          </a:bodyPr>
+          <a:lstStyle/>
+          <a:p>
+            <a:pPr algn="l"/>
+            <a:r>
+              <a:rPr sz="800" b="1" i="0">
+                <a:solidFill>
+                  <a:srgbClr val="27AE60"/>
+                </a:solidFill>
+                <a:latin typeface="Calibri"/>
+              </a:rPr>
+              <a:t>Decision support only, human-in-the-loop, audit ready</a:t>
+            </a:r>
+          </a:p>
+        </p:txBody>
+      </p:sp>
+      <p:sp>
+        <p:nvSpPr>
+          <p:cNvPr id="21" name="Rounded Rectangle 20"/>
+          <p:cNvSpPr/>
+          <p:nvPr/>
+        </p:nvSpPr>
+        <p:spPr>
+          <a:xfrm>
+            <a:off x="3986784" y="1417320"/>
+            <a:ext cx="1691640" cy="1417320"/>
+          </a:xfrm>
+          <a:prstGeom prst="roundRect">
+            <a:avLst>
+              <a:gd name="adj" fmla="val 6000"/>
+            </a:avLst>
+          </a:prstGeom>
+          <a:solidFill>
+            <a:srgbClr val="E0F2F1"/>
+          </a:solidFill>
+          <a:ln w="19050">
+            <a:solidFill>
+              <a:srgbClr val="00897B"/>
+            </a:solidFill>
+          </a:ln>
+        </p:spPr>
+        <p:style>
+          <a:lnRef idx="1">
+            <a:schemeClr val="accent1"/>
+          </a:lnRef>
+          <a:fillRef idx="3">
+            <a:schemeClr val="accent1"/>
+          </a:fillRef>
+          <a:effectRef idx="2">
+            <a:schemeClr val="accent1"/>
+          </a:effectRef>
+          <a:fontRef idx="minor">
+            <a:schemeClr val="lt1"/>
+          </a:fontRef>
+        </p:style>
+        <p:txBody>
+          <a:bodyPr rtlCol="0" anchor="ctr"/>
+          <a:lstStyle/>
+          <a:p>
+            <a:pPr algn="ctr"/>
+          </a:p>
+        </p:txBody>
+      </p:sp>
+      <p:sp>
+        <p:nvSpPr>
+          <p:cNvPr id="22" name="Rectangle 21"/>
+          <p:cNvSpPr/>
+          <p:nvPr/>
+        </p:nvSpPr>
+        <p:spPr>
+          <a:xfrm>
+            <a:off x="3986784" y="1417320"/>
+            <a:ext cx="1691640" cy="347472"/>
+          </a:xfrm>
+          <a:prstGeom prst="rect">
+            <a:avLst/>
+          </a:prstGeom>
+          <a:solidFill>
+            <a:srgbClr val="00897B"/>
+          </a:solidFill>
+          <a:ln>
+            <a:noFill/>
+          </a:ln>
+        </p:spPr>
+        <p:style>
+          <a:lnRef idx="1">
+            <a:schemeClr val="accent1"/>
+          </a:lnRef>
+          <a:fillRef idx="3">
+            <a:schemeClr val="accent1"/>
+          </a:fillRef>
+          <a:effectRef idx="2">
+            <a:schemeClr val="accent1"/>
+          </a:effectRef>
+          <a:fontRef idx="minor">
+            <a:schemeClr val="lt1"/>
+          </a:fontRef>
+        </p:style>
+        <p:txBody>
+          <a:bodyPr rtlCol="0" anchor="ctr"/>
+          <a:lstStyle/>
+          <a:p>
+            <a:pPr algn="ctr"/>
+          </a:p>
+        </p:txBody>
+      </p:sp>
+      <p:sp>
+        <p:nvSpPr>
+          <p:cNvPr id="23" name="TextBox 22"/>
+          <p:cNvSpPr txBox="1"/>
+          <p:nvPr/>
+        </p:nvSpPr>
+        <p:spPr>
+          <a:xfrm>
+            <a:off x="3986784" y="1417320"/>
+            <a:ext cx="1691640" cy="347472"/>
+          </a:xfrm>
+          <a:prstGeom prst="rect">
+            <a:avLst/>
+          </a:prstGeom>
+          <a:noFill/>
+        </p:spPr>
+        <p:txBody>
+          <a:bodyPr wrap="square">
+            <a:spAutoFit/>
+          </a:bodyPr>
+          <a:lstStyle/>
+          <a:p>
+            <a:pPr algn="ctr"/>
+            <a:r>
+              <a:rPr sz="1300" b="1" i="0">
+                <a:solidFill>
+                  <a:srgbClr val="FFFFFF"/>
+                </a:solidFill>
+                <a:latin typeface="Calibri"/>
+              </a:rPr>
+              <a:t>HIA 2026</a:t>
+            </a:r>
+          </a:p>
+        </p:txBody>
+      </p:sp>
+      <p:sp>
+        <p:nvSpPr>
+          <p:cNvPr id="24" name="TextBox 23"/>
+          <p:cNvSpPr txBox="1"/>
+          <p:nvPr/>
+        </p:nvSpPr>
+        <p:spPr>
+          <a:xfrm>
+            <a:off x="4059936" y="1801368"/>
+            <a:ext cx="1545336" cy="292608"/>
+          </a:xfrm>
+          <a:prstGeom prst="rect">
+            <a:avLst/>
+          </a:prstGeom>
+          <a:noFill/>
+        </p:spPr>
+        <p:txBody>
+          <a:bodyPr wrap="square">
+            <a:spAutoFit/>
+          </a:bodyPr>
+          <a:lstStyle/>
+          <a:p>
+            <a:pPr algn="l"/>
+            <a:r>
+              <a:rPr sz="850" b="1" i="0">
+                <a:solidFill>
+                  <a:srgbClr val="00897B"/>
+                </a:solidFill>
+                <a:latin typeface="Calibri"/>
+              </a:rPr>
+              <a:t>Health Information Act</a:t>
+            </a:r>
+          </a:p>
+        </p:txBody>
+      </p:sp>
+      <p:sp>
+        <p:nvSpPr>
+          <p:cNvPr id="25" name="TextBox 24"/>
+          <p:cNvSpPr txBox="1"/>
+          <p:nvPr/>
+        </p:nvSpPr>
+        <p:spPr>
+          <a:xfrm>
+            <a:off x="4059936" y="2112264"/>
+            <a:ext cx="1545336" cy="347472"/>
+          </a:xfrm>
+          <a:prstGeom prst="rect">
+            <a:avLst/>
+          </a:prstGeom>
+          <a:noFill/>
+        </p:spPr>
+        <p:txBody>
+          <a:bodyPr wrap="square">
+            <a:spAutoFit/>
+          </a:bodyPr>
+          <a:lstStyle/>
+          <a:p>
+            <a:pPr algn="l"/>
+            <a:r>
+              <a:rPr sz="800" b="0" i="1">
+                <a:solidFill>
+                  <a:srgbClr val="2C3E50"/>
+                </a:solidFill>
+                <a:latin typeface="Calibri"/>
+              </a:rPr>
+              <a:t>Mandatory NEHR contribution (effective early 2027)</a:t>
+            </a:r>
+          </a:p>
+        </p:txBody>
+      </p:sp>
+      <p:sp>
+        <p:nvSpPr>
+          <p:cNvPr id="26" name="TextBox 25"/>
+          <p:cNvSpPr txBox="1"/>
+          <p:nvPr/>
+        </p:nvSpPr>
+        <p:spPr>
+          <a:xfrm>
+            <a:off x="4059936" y="2496312"/>
+            <a:ext cx="1545336" cy="292608"/>
+          </a:xfrm>
+          <a:prstGeom prst="rect">
+            <a:avLst/>
+          </a:prstGeom>
+          <a:noFill/>
+        </p:spPr>
+        <p:txBody>
+          <a:bodyPr wrap="square">
+            <a:spAutoFit/>
+          </a:bodyPr>
+          <a:lstStyle/>
+          <a:p>
+            <a:pPr algn="l"/>
+            <a:r>
+              <a:rPr sz="800" b="1" i="0">
+                <a:solidFill>
+                  <a:srgbClr val="27AE60"/>
+                </a:solidFill>
+                <a:latin typeface="Calibri"/>
+              </a:rPr>
+              <a:t>NEHR connector planned Year 2, consent + audit trail</a:t>
+            </a:r>
+          </a:p>
+        </p:txBody>
+      </p:sp>
+      <p:sp>
+        <p:nvSpPr>
+          <p:cNvPr id="27" name="Rounded Rectangle 26"/>
+          <p:cNvSpPr/>
+          <p:nvPr/>
+        </p:nvSpPr>
+        <p:spPr>
+          <a:xfrm>
+            <a:off x="5751576" y="1417320"/>
+            <a:ext cx="1691640" cy="1417320"/>
+          </a:xfrm>
+          <a:prstGeom prst="roundRect">
+            <a:avLst>
+              <a:gd name="adj" fmla="val 6000"/>
+            </a:avLst>
+          </a:prstGeom>
+          <a:solidFill>
+            <a:srgbClr val="E0F2F1"/>
+          </a:solidFill>
+          <a:ln w="19050">
+            <a:solidFill>
+              <a:srgbClr val="00897B"/>
+            </a:solidFill>
+          </a:ln>
+        </p:spPr>
+        <p:style>
+          <a:lnRef idx="1">
+            <a:schemeClr val="accent1"/>
+          </a:lnRef>
+          <a:fillRef idx="3">
+            <a:schemeClr val="accent1"/>
+          </a:fillRef>
+          <a:effectRef idx="2">
+            <a:schemeClr val="accent1"/>
+          </a:effectRef>
+          <a:fontRef idx="minor">
+            <a:schemeClr val="lt1"/>
+          </a:fontRef>
+        </p:style>
+        <p:txBody>
+          <a:bodyPr rtlCol="0" anchor="ctr"/>
+          <a:lstStyle/>
+          <a:p>
+            <a:pPr algn="ctr"/>
+          </a:p>
+        </p:txBody>
+      </p:sp>
+      <p:sp>
+        <p:nvSpPr>
+          <p:cNvPr id="28" name="Rectangle 27"/>
+          <p:cNvSpPr/>
+          <p:nvPr/>
+        </p:nvSpPr>
+        <p:spPr>
+          <a:xfrm>
+            <a:off x="5751576" y="1417320"/>
+            <a:ext cx="1691640" cy="347472"/>
+          </a:xfrm>
+          <a:prstGeom prst="rect">
+            <a:avLst/>
+          </a:prstGeom>
+          <a:solidFill>
+            <a:srgbClr val="00897B"/>
+          </a:solidFill>
+          <a:ln>
+            <a:noFill/>
+          </a:ln>
+        </p:spPr>
+        <p:style>
+          <a:lnRef idx="1">
+            <a:schemeClr val="accent1"/>
+          </a:lnRef>
+          <a:fillRef idx="3">
+            <a:schemeClr val="accent1"/>
+          </a:fillRef>
+          <a:effectRef idx="2">
+            <a:schemeClr val="accent1"/>
+          </a:effectRef>
+          <a:fontRef idx="minor">
+            <a:schemeClr val="lt1"/>
+          </a:fontRef>
+        </p:style>
+        <p:txBody>
+          <a:bodyPr rtlCol="0" anchor="ctr"/>
+          <a:lstStyle/>
+          <a:p>
+            <a:pPr algn="ctr"/>
+          </a:p>
+        </p:txBody>
+      </p:sp>
+      <p:sp>
+        <p:nvSpPr>
+          <p:cNvPr id="29" name="TextBox 28"/>
+          <p:cNvSpPr txBox="1"/>
+          <p:nvPr/>
+        </p:nvSpPr>
+        <p:spPr>
+          <a:xfrm>
+            <a:off x="5751576" y="1417320"/>
+            <a:ext cx="1691640" cy="347472"/>
+          </a:xfrm>
+          <a:prstGeom prst="rect">
+            <a:avLst/>
+          </a:prstGeom>
+          <a:noFill/>
+        </p:spPr>
+        <p:txBody>
+          <a:bodyPr wrap="square">
+            <a:spAutoFit/>
+          </a:bodyPr>
+          <a:lstStyle/>
+          <a:p>
+            <a:pPr algn="ctr"/>
+            <a:r>
+              <a:rPr sz="1300" b="1" i="0">
+                <a:solidFill>
+                  <a:srgbClr val="FFFFFF"/>
+                </a:solidFill>
+                <a:latin typeface="Calibri"/>
+              </a:rPr>
+              <a:t>AIHGle 2.0</a:t>
+            </a:r>
+          </a:p>
+        </p:txBody>
+      </p:sp>
+      <p:sp>
+        <p:nvSpPr>
+          <p:cNvPr id="30" name="TextBox 29"/>
+          <p:cNvSpPr txBox="1"/>
+          <p:nvPr/>
+        </p:nvSpPr>
+        <p:spPr>
+          <a:xfrm>
+            <a:off x="5824728" y="1801368"/>
+            <a:ext cx="1545336" cy="292608"/>
+          </a:xfrm>
+          <a:prstGeom prst="rect">
+            <a:avLst/>
+          </a:prstGeom>
+          <a:noFill/>
+        </p:spPr>
+        <p:txBody>
+          <a:bodyPr wrap="square">
+            <a:spAutoFit/>
+          </a:bodyPr>
+          <a:lstStyle/>
+          <a:p>
+            <a:pPr algn="l"/>
+            <a:r>
+              <a:rPr sz="850" b="1" i="0">
+                <a:solidFill>
+                  <a:srgbClr val="00897B"/>
+                </a:solidFill>
+                <a:latin typeface="Calibri"/>
+              </a:rPr>
+              <a:t>AI in Healthcare Guidelines
+(MOH+HSA, March 2026)</a:t>
+            </a:r>
+          </a:p>
+        </p:txBody>
+      </p:sp>
+      <p:sp>
+        <p:nvSpPr>
+          <p:cNvPr id="31" name="TextBox 30"/>
+          <p:cNvSpPr txBox="1"/>
+          <p:nvPr/>
+        </p:nvSpPr>
+        <p:spPr>
+          <a:xfrm>
+            <a:off x="5824728" y="2112264"/>
+            <a:ext cx="1545336" cy="347472"/>
+          </a:xfrm>
+          <a:prstGeom prst="rect">
+            <a:avLst/>
+          </a:prstGeom>
+          <a:noFill/>
+        </p:spPr>
+        <p:txBody>
+          <a:bodyPr wrap="square">
+            <a:spAutoFit/>
+          </a:bodyPr>
+          <a:lstStyle/>
+          <a:p>
+            <a:pPr algn="l"/>
+            <a:r>
+              <a:rPr sz="800" b="0" i="1">
+                <a:solidFill>
+                  <a:srgbClr val="2C3E50"/>
+                </a:solidFill>
+                <a:latin typeface="Calibri"/>
+              </a:rPr>
+              <a:t>7 principles: safety, fairness, transparency, explainability...</a:t>
+            </a:r>
+          </a:p>
+        </p:txBody>
+      </p:sp>
+      <p:sp>
+        <p:nvSpPr>
+          <p:cNvPr id="32" name="TextBox 31"/>
+          <p:cNvSpPr txBox="1"/>
+          <p:nvPr/>
+        </p:nvSpPr>
+        <p:spPr>
+          <a:xfrm>
+            <a:off x="5824728" y="2496312"/>
+            <a:ext cx="1545336" cy="292608"/>
+          </a:xfrm>
+          <a:prstGeom prst="rect">
+            <a:avLst/>
+          </a:prstGeom>
+          <a:noFill/>
+        </p:spPr>
+        <p:txBody>
+          <a:bodyPr wrap="square">
+            <a:spAutoFit/>
+          </a:bodyPr>
+          <a:lstStyle/>
+          <a:p>
+            <a:pPr algn="l"/>
+            <a:r>
+              <a:rPr sz="800" b="1" i="0">
+                <a:solidFill>
+                  <a:srgbClr val="27AE60"/>
+                </a:solidFill>
+                <a:latin typeface="Calibri"/>
+              </a:rPr>
+              <a:t>All 7 principles addressed in architecture</a:t>
+            </a:r>
+          </a:p>
+        </p:txBody>
+      </p:sp>
+      <p:sp>
+        <p:nvSpPr>
+          <p:cNvPr id="33" name="Rectangle 32"/>
+          <p:cNvSpPr/>
+          <p:nvPr/>
+        </p:nvSpPr>
+        <p:spPr>
+          <a:xfrm>
+            <a:off x="7818120" y="1005840"/>
+            <a:ext cx="3931920" cy="347472"/>
+          </a:xfrm>
+          <a:prstGeom prst="rect">
+            <a:avLst/>
+          </a:prstGeom>
+          <a:solidFill>
+            <a:srgbClr val="2196F3"/>
+          </a:solidFill>
+          <a:ln>
+            <a:noFill/>
+          </a:ln>
+        </p:spPr>
+        <p:style>
+          <a:lnRef idx="1">
+            <a:schemeClr val="accent1"/>
+          </a:lnRef>
+          <a:fillRef idx="3">
+            <a:schemeClr val="accent1"/>
+          </a:fillRef>
+          <a:effectRef idx="2">
+            <a:schemeClr val="accent1"/>
+          </a:effectRef>
+          <a:fontRef idx="minor">
+            <a:schemeClr val="lt1"/>
+          </a:fontRef>
+        </p:style>
+        <p:txBody>
+          <a:bodyPr rtlCol="0" anchor="ctr"/>
+          <a:lstStyle/>
+          <a:p>
+            <a:pPr algn="ctr"/>
+          </a:p>
+        </p:txBody>
+      </p:sp>
+      <p:sp>
+        <p:nvSpPr>
+          <p:cNvPr id="34" name="TextBox 33"/>
+          <p:cNvSpPr txBox="1"/>
+          <p:nvPr/>
+        </p:nvSpPr>
+        <p:spPr>
+          <a:xfrm>
+            <a:off x="7818120" y="1005840"/>
+            <a:ext cx="3931920" cy="347472"/>
+          </a:xfrm>
+          <a:prstGeom prst="rect">
+            <a:avLst/>
+          </a:prstGeom>
+          <a:noFill/>
+        </p:spPr>
+        <p:txBody>
+          <a:bodyPr wrap="square">
+            <a:spAutoFit/>
+          </a:bodyPr>
+          <a:lstStyle/>
+          <a:p>
+            <a:pPr algn="ctr"/>
+            <a:r>
+              <a:rPr sz="1200" b="1" i="0">
+                <a:solidFill>
+                  <a:srgbClr val="FFFFFF"/>
+                </a:solidFill>
+                <a:latin typeface="Calibri"/>
+              </a:rPr>
+              <a:t>Clinical &amp; International Standards</a:t>
+            </a:r>
+          </a:p>
+        </p:txBody>
+      </p:sp>
+      <p:sp>
+        <p:nvSpPr>
+          <p:cNvPr id="35" name="Rounded Rectangle 34"/>
+          <p:cNvSpPr/>
+          <p:nvPr/>
+        </p:nvSpPr>
+        <p:spPr>
+          <a:xfrm>
+            <a:off x="7818120" y="1417320"/>
+            <a:ext cx="3931920" cy="320040"/>
+          </a:xfrm>
+          <a:prstGeom prst="roundRect">
+            <a:avLst>
+              <a:gd name="adj" fmla="val 8000"/>
+            </a:avLst>
+          </a:prstGeom>
+          <a:solidFill>
+            <a:srgbClr val="E3F2FD"/>
+          </a:solidFill>
+          <a:ln w="12700">
+            <a:solidFill>
+              <a:srgbClr val="2196F3"/>
+            </a:solidFill>
+          </a:ln>
+        </p:spPr>
+        <p:style>
+          <a:lnRef idx="1">
+            <a:schemeClr val="accent1"/>
+          </a:lnRef>
+          <a:fillRef idx="3">
+            <a:schemeClr val="accent1"/>
+          </a:fillRef>
+          <a:effectRef idx="2">
+            <a:schemeClr val="accent1"/>
+          </a:effectRef>
+          <a:fontRef idx="minor">
+            <a:schemeClr val="lt1"/>
+          </a:fontRef>
+        </p:style>
+        <p:txBody>
+          <a:bodyPr rtlCol="0" anchor="ctr"/>
+          <a:lstStyle/>
+          <a:p>
+            <a:pPr algn="ctr"/>
+          </a:p>
+        </p:txBody>
+      </p:sp>
+      <p:sp>
+        <p:nvSpPr>
+          <p:cNvPr id="36" name="Rectangle 35"/>
+          <p:cNvSpPr/>
+          <p:nvPr/>
+        </p:nvSpPr>
+        <p:spPr>
+          <a:xfrm>
+            <a:off x="7818120" y="1417320"/>
+            <a:ext cx="45720" cy="320040"/>
+          </a:xfrm>
+          <a:prstGeom prst="rect">
+            <a:avLst/>
+          </a:prstGeom>
+          <a:solidFill>
+            <a:srgbClr val="2196F3"/>
+          </a:solidFill>
+          <a:ln>
+            <a:noFill/>
+          </a:ln>
+        </p:spPr>
+        <p:style>
+          <a:lnRef idx="1">
+            <a:schemeClr val="accent1"/>
+          </a:lnRef>
+          <a:fillRef idx="3">
+            <a:schemeClr val="accent1"/>
+          </a:fillRef>
+          <a:effectRef idx="2">
+            <a:schemeClr val="accent1"/>
+          </a:effectRef>
+          <a:fontRef idx="minor">
+            <a:schemeClr val="lt1"/>
+          </a:fontRef>
+        </p:style>
+        <p:txBody>
+          <a:bodyPr rtlCol="0" anchor="ctr"/>
+          <a:lstStyle/>
+          <a:p>
+            <a:pPr algn="ctr"/>
+          </a:p>
+        </p:txBody>
+      </p:sp>
+      <p:sp>
+        <p:nvSpPr>
+          <p:cNvPr id="37" name="TextBox 36"/>
+          <p:cNvSpPr txBox="1"/>
+          <p:nvPr/>
+        </p:nvSpPr>
+        <p:spPr>
+          <a:xfrm>
+            <a:off x="7909560" y="1435608"/>
+            <a:ext cx="1188720" cy="164592"/>
+          </a:xfrm>
+          <a:prstGeom prst="rect">
+            <a:avLst/>
+          </a:prstGeom>
+          <a:noFill/>
+        </p:spPr>
+        <p:txBody>
+          <a:bodyPr wrap="square">
+            <a:spAutoFit/>
+          </a:bodyPr>
+          <a:lstStyle/>
+          <a:p>
+            <a:pPr algn="l"/>
+            <a:r>
+              <a:rPr sz="900" b="1" i="0">
+                <a:solidFill>
+                  <a:srgbClr val="2196F3"/>
+                </a:solidFill>
+                <a:latin typeface="Calibri"/>
+              </a:rPr>
+              <a:t>HSA SaMD Class B</a:t>
+            </a:r>
+          </a:p>
+        </p:txBody>
+      </p:sp>
+      <p:sp>
+        <p:nvSpPr>
+          <p:cNvPr id="38" name="TextBox 37"/>
+          <p:cNvSpPr txBox="1"/>
+          <p:nvPr/>
+        </p:nvSpPr>
+        <p:spPr>
+          <a:xfrm>
+            <a:off x="9144000" y="1435608"/>
+            <a:ext cx="2514600" cy="292608"/>
+          </a:xfrm>
+          <a:prstGeom prst="rect">
+            <a:avLst/>
+          </a:prstGeom>
+          <a:noFill/>
+        </p:spPr>
+        <p:txBody>
+          <a:bodyPr wrap="square">
+            <a:spAutoFit/>
+          </a:bodyPr>
+          <a:lstStyle/>
+          <a:p>
+            <a:pPr algn="l"/>
+            <a:r>
+              <a:rPr sz="800" b="0" i="1">
+                <a:solidFill>
+                  <a:srgbClr val="2C3E50"/>
+                </a:solidFill>
+                <a:latin typeface="Calibri"/>
+              </a:rPr>
+              <a:t>Software as Medical Device registration
+via SHARE platform (July 2025)</a:t>
+            </a:r>
+          </a:p>
+        </p:txBody>
+      </p:sp>
+      <p:sp>
+        <p:nvSpPr>
+          <p:cNvPr id="39" name="Rounded Rectangle 38"/>
+          <p:cNvSpPr/>
+          <p:nvPr/>
+        </p:nvSpPr>
+        <p:spPr>
+          <a:xfrm>
+            <a:off x="7818120" y="1764792"/>
+            <a:ext cx="3931920" cy="320040"/>
+          </a:xfrm>
+          <a:prstGeom prst="roundRect">
+            <a:avLst>
+              <a:gd name="adj" fmla="val 8000"/>
+            </a:avLst>
+          </a:prstGeom>
+          <a:solidFill>
+            <a:srgbClr val="FFFFFF"/>
+          </a:solidFill>
+          <a:ln w="12700">
+            <a:solidFill>
+              <a:srgbClr val="2196F3"/>
+            </a:solidFill>
+          </a:ln>
+        </p:spPr>
+        <p:style>
+          <a:lnRef idx="1">
+            <a:schemeClr val="accent1"/>
+          </a:lnRef>
+          <a:fillRef idx="3">
+            <a:schemeClr val="accent1"/>
+          </a:fillRef>
+          <a:effectRef idx="2">
+            <a:schemeClr val="accent1"/>
+          </a:effectRef>
+          <a:fontRef idx="minor">
+            <a:schemeClr val="lt1"/>
+          </a:fontRef>
+        </p:style>
+        <p:txBody>
+          <a:bodyPr rtlCol="0" anchor="ctr"/>
+          <a:lstStyle/>
+          <a:p>
+            <a:pPr algn="ctr"/>
+          </a:p>
+        </p:txBody>
+      </p:sp>
+      <p:sp>
+        <p:nvSpPr>
+          <p:cNvPr id="40" name="Rectangle 39"/>
+          <p:cNvSpPr/>
+          <p:nvPr/>
+        </p:nvSpPr>
+        <p:spPr>
+          <a:xfrm>
+            <a:off x="7818120" y="1764792"/>
+            <a:ext cx="45720" cy="320040"/>
+          </a:xfrm>
+          <a:prstGeom prst="rect">
+            <a:avLst/>
+          </a:prstGeom>
+          <a:solidFill>
+            <a:srgbClr val="2196F3"/>
+          </a:solidFill>
+          <a:ln>
+            <a:noFill/>
+          </a:ln>
+        </p:spPr>
+        <p:style>
+          <a:lnRef idx="1">
+            <a:schemeClr val="accent1"/>
+          </a:lnRef>
+          <a:fillRef idx="3">
+            <a:schemeClr val="accent1"/>
+          </a:fillRef>
+          <a:effectRef idx="2">
+            <a:schemeClr val="accent1"/>
+          </a:effectRef>
+          <a:fontRef idx="minor">
+            <a:schemeClr val="lt1"/>
+          </a:fontRef>
+        </p:style>
+        <p:txBody>
+          <a:bodyPr rtlCol="0" anchor="ctr"/>
+          <a:lstStyle/>
+          <a:p>
+            <a:pPr algn="ctr"/>
+          </a:p>
+        </p:txBody>
+      </p:sp>
+      <p:sp>
+        <p:nvSpPr>
+          <p:cNvPr id="41" name="TextBox 40"/>
+          <p:cNvSpPr txBox="1"/>
+          <p:nvPr/>
+        </p:nvSpPr>
+        <p:spPr>
+          <a:xfrm>
+            <a:off x="7909560" y="1783080"/>
+            <a:ext cx="1188720" cy="164592"/>
+          </a:xfrm>
+          <a:prstGeom prst="rect">
+            <a:avLst/>
+          </a:prstGeom>
+          <a:noFill/>
+        </p:spPr>
+        <p:txBody>
+          <a:bodyPr wrap="square">
+            <a:spAutoFit/>
+          </a:bodyPr>
+          <a:lstStyle/>
+          <a:p>
+            <a:pPr algn="l"/>
+            <a:r>
+              <a:rPr sz="900" b="1" i="0">
+                <a:solidFill>
+                  <a:srgbClr val="2196F3"/>
+                </a:solidFill>
+                <a:latin typeface="Calibri"/>
+              </a:rPr>
+              <a:t>HIPAA 164.530(j)</a:t>
+            </a:r>
+          </a:p>
+        </p:txBody>
+      </p:sp>
+      <p:sp>
+        <p:nvSpPr>
+          <p:cNvPr id="42" name="TextBox 41"/>
+          <p:cNvSpPr txBox="1"/>
+          <p:nvPr/>
+        </p:nvSpPr>
+        <p:spPr>
+          <a:xfrm>
+            <a:off x="9144000" y="1783080"/>
+            <a:ext cx="2514600" cy="292608"/>
+          </a:xfrm>
+          <a:prstGeom prst="rect">
+            <a:avLst/>
+          </a:prstGeom>
+          <a:noFill/>
+        </p:spPr>
+        <p:txBody>
+          <a:bodyPr wrap="square">
+            <a:spAutoFit/>
+          </a:bodyPr>
+          <a:lstStyle/>
+          <a:p>
+            <a:pPr algn="l"/>
+            <a:r>
+              <a:rPr sz="800" b="0" i="1">
+                <a:solidFill>
+                  <a:srgbClr val="2C3E50"/>
+                </a:solidFill>
+                <a:latin typeface="Calibri"/>
+              </a:rPr>
+              <a:t>6-year audit retention via S3 Object Lock
+Signed BAA over Bedrock + S3 + Lambda</a:t>
+            </a:r>
+          </a:p>
+        </p:txBody>
+      </p:sp>
+      <p:sp>
+        <p:nvSpPr>
+          <p:cNvPr id="43" name="Rounded Rectangle 42"/>
+          <p:cNvSpPr/>
+          <p:nvPr/>
+        </p:nvSpPr>
+        <p:spPr>
+          <a:xfrm>
+            <a:off x="7818120" y="2112264"/>
+            <a:ext cx="3931920" cy="320040"/>
+          </a:xfrm>
+          <a:prstGeom prst="roundRect">
+            <a:avLst>
+              <a:gd name="adj" fmla="val 8000"/>
+            </a:avLst>
+          </a:prstGeom>
+          <a:solidFill>
+            <a:srgbClr val="E3F2FD"/>
+          </a:solidFill>
+          <a:ln w="12700">
+            <a:solidFill>
+              <a:srgbClr val="2196F3"/>
+            </a:solidFill>
+          </a:ln>
+        </p:spPr>
+        <p:style>
+          <a:lnRef idx="1">
+            <a:schemeClr val="accent1"/>
+          </a:lnRef>
+          <a:fillRef idx="3">
+            <a:schemeClr val="accent1"/>
+          </a:fillRef>
+          <a:effectRef idx="2">
+            <a:schemeClr val="accent1"/>
+          </a:effectRef>
+          <a:fontRef idx="minor">
+            <a:schemeClr val="lt1"/>
+          </a:fontRef>
+        </p:style>
+        <p:txBody>
+          <a:bodyPr rtlCol="0" anchor="ctr"/>
+          <a:lstStyle/>
+          <a:p>
+            <a:pPr algn="ctr"/>
+          </a:p>
+        </p:txBody>
+      </p:sp>
+      <p:sp>
+        <p:nvSpPr>
+          <p:cNvPr id="44" name="Rectangle 43"/>
+          <p:cNvSpPr/>
+          <p:nvPr/>
+        </p:nvSpPr>
+        <p:spPr>
+          <a:xfrm>
+            <a:off x="7818120" y="2112264"/>
+            <a:ext cx="45720" cy="320040"/>
+          </a:xfrm>
+          <a:prstGeom prst="rect">
+            <a:avLst/>
+          </a:prstGeom>
+          <a:solidFill>
+            <a:srgbClr val="2196F3"/>
+          </a:solidFill>
+          <a:ln>
+            <a:noFill/>
+          </a:ln>
+        </p:spPr>
+        <p:style>
+          <a:lnRef idx="1">
+            <a:schemeClr val="accent1"/>
+          </a:lnRef>
+          <a:fillRef idx="3">
+            <a:schemeClr val="accent1"/>
+          </a:fillRef>
+          <a:effectRef idx="2">
+            <a:schemeClr val="accent1"/>
+          </a:effectRef>
+          <a:fontRef idx="minor">
+            <a:schemeClr val="lt1"/>
+          </a:fontRef>
+        </p:style>
+        <p:txBody>
+          <a:bodyPr rtlCol="0" anchor="ctr"/>
+          <a:lstStyle/>
+          <a:p>
+            <a:pPr algn="ctr"/>
+          </a:p>
+        </p:txBody>
+      </p:sp>
+      <p:sp>
+        <p:nvSpPr>
+          <p:cNvPr id="45" name="TextBox 44"/>
+          <p:cNvSpPr txBox="1"/>
+          <p:nvPr/>
+        </p:nvSpPr>
+        <p:spPr>
+          <a:xfrm>
+            <a:off x="7909560" y="2130552"/>
+            <a:ext cx="1188720" cy="164592"/>
+          </a:xfrm>
+          <a:prstGeom prst="rect">
+            <a:avLst/>
+          </a:prstGeom>
+          <a:noFill/>
+        </p:spPr>
+        <p:txBody>
+          <a:bodyPr wrap="square">
+            <a:spAutoFit/>
+          </a:bodyPr>
+          <a:lstStyle/>
+          <a:p>
+            <a:pPr algn="l"/>
+            <a:r>
+              <a:rPr sz="900" b="1" i="0">
+                <a:solidFill>
+                  <a:srgbClr val="2196F3"/>
+                </a:solidFill>
+                <a:latin typeface="Calibri"/>
+              </a:rPr>
+              <a:t>ISO 27001 / SOC 2</a:t>
+            </a:r>
+          </a:p>
+        </p:txBody>
+      </p:sp>
+      <p:sp>
+        <p:nvSpPr>
+          <p:cNvPr id="46" name="TextBox 45"/>
+          <p:cNvSpPr txBox="1"/>
+          <p:nvPr/>
+        </p:nvSpPr>
+        <p:spPr>
+          <a:xfrm>
+            <a:off x="9144000" y="2130552"/>
+            <a:ext cx="2514600" cy="292608"/>
+          </a:xfrm>
+          <a:prstGeom prst="rect">
+            <a:avLst/>
+          </a:prstGeom>
+          <a:noFill/>
+        </p:spPr>
+        <p:txBody>
+          <a:bodyPr wrap="square">
+            <a:spAutoFit/>
+          </a:bodyPr>
+          <a:lstStyle/>
+          <a:p>
+            <a:pPr algn="l"/>
+            <a:r>
+              <a:rPr sz="800" b="0" i="1">
+                <a:solidFill>
+                  <a:srgbClr val="2C3E50"/>
+                </a:solidFill>
+                <a:latin typeface="Calibri"/>
+              </a:rPr>
+              <a:t>Inherited from AWS Singapore
+No separate Nova certification needed</a:t>
+            </a:r>
+          </a:p>
+        </p:txBody>
+      </p:sp>
+      <p:sp>
+        <p:nvSpPr>
+          <p:cNvPr id="47" name="Rounded Rectangle 46"/>
+          <p:cNvSpPr/>
+          <p:nvPr/>
+        </p:nvSpPr>
+        <p:spPr>
+          <a:xfrm>
+            <a:off x="7818120" y="2459736"/>
+            <a:ext cx="3931920" cy="320040"/>
+          </a:xfrm>
+          <a:prstGeom prst="roundRect">
+            <a:avLst>
+              <a:gd name="adj" fmla="val 8000"/>
+            </a:avLst>
+          </a:prstGeom>
+          <a:solidFill>
+            <a:srgbClr val="FFFFFF"/>
+          </a:solidFill>
+          <a:ln w="12700">
+            <a:solidFill>
+              <a:srgbClr val="2196F3"/>
+            </a:solidFill>
+          </a:ln>
+        </p:spPr>
+        <p:style>
+          <a:lnRef idx="1">
+            <a:schemeClr val="accent1"/>
+          </a:lnRef>
+          <a:fillRef idx="3">
+            <a:schemeClr val="accent1"/>
+          </a:fillRef>
+          <a:effectRef idx="2">
+            <a:schemeClr val="accent1"/>
+          </a:effectRef>
+          <a:fontRef idx="minor">
+            <a:schemeClr val="lt1"/>
+          </a:fontRef>
+        </p:style>
+        <p:txBody>
+          <a:bodyPr rtlCol="0" anchor="ctr"/>
+          <a:lstStyle/>
+          <a:p>
+            <a:pPr algn="ctr"/>
+          </a:p>
+        </p:txBody>
+      </p:sp>
+      <p:sp>
+        <p:nvSpPr>
+          <p:cNvPr id="48" name="Rectangle 47"/>
+          <p:cNvSpPr/>
+          <p:nvPr/>
+        </p:nvSpPr>
+        <p:spPr>
+          <a:xfrm>
+            <a:off x="7818120" y="2459736"/>
+            <a:ext cx="45720" cy="320040"/>
+          </a:xfrm>
+          <a:prstGeom prst="rect">
+            <a:avLst/>
+          </a:prstGeom>
+          <a:solidFill>
+            <a:srgbClr val="2196F3"/>
+          </a:solidFill>
+          <a:ln>
+            <a:noFill/>
+          </a:ln>
+        </p:spPr>
+        <p:style>
+          <a:lnRef idx="1">
+            <a:schemeClr val="accent1"/>
+          </a:lnRef>
+          <a:fillRef idx="3">
+            <a:schemeClr val="accent1"/>
+          </a:fillRef>
+          <a:effectRef idx="2">
+            <a:schemeClr val="accent1"/>
+          </a:effectRef>
+          <a:fontRef idx="minor">
+            <a:schemeClr val="lt1"/>
+          </a:fontRef>
+        </p:style>
+        <p:txBody>
+          <a:bodyPr rtlCol="0" anchor="ctr"/>
+          <a:lstStyle/>
+          <a:p>
+            <a:pPr algn="ctr"/>
+          </a:p>
+        </p:txBody>
+      </p:sp>
+      <p:sp>
+        <p:nvSpPr>
+          <p:cNvPr id="49" name="TextBox 48"/>
+          <p:cNvSpPr txBox="1"/>
+          <p:nvPr/>
+        </p:nvSpPr>
+        <p:spPr>
+          <a:xfrm>
+            <a:off x="7909560" y="2478024"/>
+            <a:ext cx="1188720" cy="164592"/>
+          </a:xfrm>
+          <a:prstGeom prst="rect">
+            <a:avLst/>
+          </a:prstGeom>
+          <a:noFill/>
+        </p:spPr>
+        <p:txBody>
+          <a:bodyPr wrap="square">
+            <a:spAutoFit/>
+          </a:bodyPr>
+          <a:lstStyle/>
+          <a:p>
+            <a:pPr algn="l"/>
+            <a:r>
+              <a:rPr sz="900" b="1" i="0">
+                <a:solidFill>
+                  <a:srgbClr val="2196F3"/>
+                </a:solidFill>
+                <a:latin typeface="Calibri"/>
+              </a:rPr>
+              <a:t>IMDA AI Verify</a:t>
+            </a:r>
+          </a:p>
+        </p:txBody>
+      </p:sp>
+      <p:sp>
+        <p:nvSpPr>
+          <p:cNvPr id="50" name="TextBox 49"/>
+          <p:cNvSpPr txBox="1"/>
+          <p:nvPr/>
+        </p:nvSpPr>
+        <p:spPr>
+          <a:xfrm>
+            <a:off x="9144000" y="2478024"/>
+            <a:ext cx="2514600" cy="292608"/>
+          </a:xfrm>
+          <a:prstGeom prst="rect">
+            <a:avLst/>
+          </a:prstGeom>
+          <a:noFill/>
+        </p:spPr>
+        <p:txBody>
+          <a:bodyPr wrap="square">
+            <a:spAutoFit/>
+          </a:bodyPr>
+          <a:lstStyle/>
+          <a:p>
+            <a:pPr algn="l"/>
+            <a:r>
+              <a:rPr sz="800" b="0" i="1">
+                <a:solidFill>
+                  <a:srgbClr val="2C3E50"/>
+                </a:solidFill>
+                <a:latin typeface="Calibri"/>
+              </a:rPr>
+              <a:t>Responsible AI framework
+Self-assessment planned Month 5</a:t>
+            </a:r>
+          </a:p>
+        </p:txBody>
+      </p:sp>
+      <p:sp>
+        <p:nvSpPr>
+          <p:cNvPr id="51" name="Rectangle 50"/>
+          <p:cNvSpPr/>
+          <p:nvPr/>
+        </p:nvSpPr>
+        <p:spPr>
+          <a:xfrm>
+            <a:off x="457200" y="2999232"/>
+            <a:ext cx="11247120" cy="347472"/>
+          </a:xfrm>
+          <a:prstGeom prst="rect">
+            <a:avLst/>
+          </a:prstGeom>
+          <a:solidFill>
+            <a:srgbClr val="CC4F1F"/>
+          </a:solidFill>
+          <a:ln>
+            <a:noFill/>
+          </a:ln>
+        </p:spPr>
+        <p:style>
+          <a:lnRef idx="1">
+            <a:schemeClr val="accent1"/>
+          </a:lnRef>
+          <a:fillRef idx="3">
+            <a:schemeClr val="accent1"/>
+          </a:fillRef>
+          <a:effectRef idx="2">
+            <a:schemeClr val="accent1"/>
+          </a:effectRef>
+          <a:fontRef idx="minor">
+            <a:schemeClr val="lt1"/>
+          </a:fontRef>
+        </p:style>
+        <p:txBody>
+          <a:bodyPr rtlCol="0" anchor="ctr"/>
+          <a:lstStyle/>
+          <a:p>
+            <a:pPr algn="ctr"/>
+          </a:p>
+        </p:txBody>
+      </p:sp>
+      <p:sp>
+        <p:nvSpPr>
+          <p:cNvPr id="52" name="TextBox 51"/>
+          <p:cNvSpPr txBox="1"/>
+          <p:nvPr/>
+        </p:nvSpPr>
+        <p:spPr>
+          <a:xfrm>
+            <a:off x="457200" y="2999232"/>
+            <a:ext cx="11247120" cy="347472"/>
+          </a:xfrm>
+          <a:prstGeom prst="rect">
+            <a:avLst/>
+          </a:prstGeom>
+          <a:noFill/>
+        </p:spPr>
+        <p:txBody>
+          <a:bodyPr wrap="square">
+            <a:spAutoFit/>
+          </a:bodyPr>
+          <a:lstStyle/>
+          <a:p>
+            <a:pPr algn="ctr"/>
+            <a:r>
+              <a:rPr sz="1200" b="1" i="0">
+                <a:solidFill>
+                  <a:srgbClr val="FFFFFF"/>
+                </a:solidFill>
+                <a:latin typeface="Calibri"/>
+              </a:rPr>
+              <a:t>AWS Shared Responsibility Model</a:t>
+            </a:r>
+          </a:p>
+        </p:txBody>
+      </p:sp>
+      <p:sp>
+        <p:nvSpPr>
+          <p:cNvPr id="53" name="Rounded Rectangle 52"/>
+          <p:cNvSpPr/>
+          <p:nvPr/>
+        </p:nvSpPr>
+        <p:spPr>
+          <a:xfrm>
+            <a:off x="457200" y="3383280"/>
+            <a:ext cx="5303520" cy="1691640"/>
+          </a:xfrm>
+          <a:prstGeom prst="roundRect">
+            <a:avLst>
+              <a:gd name="adj" fmla="val 6000"/>
+            </a:avLst>
+          </a:prstGeom>
+          <a:solidFill>
+            <a:srgbClr val="FFE8DA"/>
+          </a:solidFill>
+          <a:ln w="19050">
+            <a:solidFill>
+              <a:srgbClr val="FF6B35"/>
+            </a:solidFill>
+          </a:ln>
+        </p:spPr>
+        <p:style>
+          <a:lnRef idx="1">
+            <a:schemeClr val="accent1"/>
+          </a:lnRef>
+          <a:fillRef idx="3">
+            <a:schemeClr val="accent1"/>
+          </a:fillRef>
+          <a:effectRef idx="2">
+            <a:schemeClr val="accent1"/>
+          </a:effectRef>
+          <a:fontRef idx="minor">
+            <a:schemeClr val="lt1"/>
+          </a:fontRef>
+        </p:style>
+        <p:txBody>
+          <a:bodyPr rtlCol="0" anchor="ctr"/>
+          <a:lstStyle/>
+          <a:p>
+            <a:pPr algn="ctr"/>
+          </a:p>
+        </p:txBody>
+      </p:sp>
+      <p:sp>
+        <p:nvSpPr>
+          <p:cNvPr id="54" name="Rectangle 53"/>
+          <p:cNvSpPr/>
+          <p:nvPr/>
+        </p:nvSpPr>
+        <p:spPr>
+          <a:xfrm>
+            <a:off x="457200" y="3383280"/>
+            <a:ext cx="5303520" cy="347472"/>
+          </a:xfrm>
+          <a:prstGeom prst="rect">
+            <a:avLst/>
+          </a:prstGeom>
+          <a:solidFill>
+            <a:srgbClr val="FF6B35"/>
+          </a:solidFill>
+          <a:ln>
+            <a:noFill/>
+          </a:ln>
+        </p:spPr>
+        <p:style>
+          <a:lnRef idx="1">
+            <a:schemeClr val="accent1"/>
+          </a:lnRef>
+          <a:fillRef idx="3">
+            <a:schemeClr val="accent1"/>
+          </a:fillRef>
+          <a:effectRef idx="2">
+            <a:schemeClr val="accent1"/>
+          </a:effectRef>
+          <a:fontRef idx="minor">
+            <a:schemeClr val="lt1"/>
+          </a:fontRef>
+        </p:style>
+        <p:txBody>
+          <a:bodyPr rtlCol="0" anchor="ctr"/>
+          <a:lstStyle/>
+          <a:p>
+            <a:pPr algn="ctr"/>
+          </a:p>
+        </p:txBody>
+      </p:sp>
+      <p:sp>
+        <p:nvSpPr>
+          <p:cNvPr id="55" name="TextBox 54"/>
+          <p:cNvSpPr txBox="1"/>
+          <p:nvPr/>
+        </p:nvSpPr>
+        <p:spPr>
+          <a:xfrm>
+            <a:off x="457200" y="3383280"/>
+            <a:ext cx="5303520" cy="347472"/>
+          </a:xfrm>
+          <a:prstGeom prst="rect">
+            <a:avLst/>
+          </a:prstGeom>
+          <a:noFill/>
+        </p:spPr>
+        <p:txBody>
+          <a:bodyPr wrap="square">
+            <a:spAutoFit/>
+          </a:bodyPr>
+          <a:lstStyle/>
+          <a:p>
+            <a:pPr algn="ctr"/>
+            <a:r>
+              <a:rPr sz="1100" b="1" i="0">
+                <a:solidFill>
+                  <a:srgbClr val="FFFFFF"/>
+                </a:solidFill>
+                <a:latin typeface="Calibri"/>
+              </a:rPr>
+              <a:t>AWS Responsibility  (Security OF the Cloud)</a:t>
+            </a:r>
+          </a:p>
+        </p:txBody>
+      </p:sp>
+      <p:sp>
+        <p:nvSpPr>
+          <p:cNvPr id="56" name="TextBox 55"/>
+          <p:cNvSpPr txBox="1"/>
+          <p:nvPr/>
+        </p:nvSpPr>
+        <p:spPr>
+          <a:xfrm>
+            <a:off x="594360" y="3803904"/>
+            <a:ext cx="5029200" cy="237744"/>
+          </a:xfrm>
+          <a:prstGeom prst="rect">
+            <a:avLst/>
+          </a:prstGeom>
+          <a:noFill/>
+        </p:spPr>
+        <p:txBody>
+          <a:bodyPr wrap="none">
+            <a:spAutoFit/>
+          </a:bodyPr>
+          <a:lstStyle/>
+          <a:p>
+            <a:r>
+              <a:rPr sz="1000" b="1">
+                <a:solidFill>
+                  <a:srgbClr val="FF6B35"/>
+                </a:solidFill>
+                <a:latin typeface="Calibri"/>
+              </a:rPr>
+              <a:t>▸ </a:t>
+            </a:r>
+            <a:r>
+              <a:rPr sz="950">
+                <a:solidFill>
+                  <a:srgbClr val="2C3E50"/>
+                </a:solidFill>
+                <a:latin typeface="Calibri"/>
+              </a:rPr>
+              <a:t>Physical data center security (Singapore ap-southeast-1)</a:t>
+            </a:r>
+          </a:p>
+        </p:txBody>
+      </p:sp>
+      <p:sp>
+        <p:nvSpPr>
+          <p:cNvPr id="57" name="TextBox 56"/>
+          <p:cNvSpPr txBox="1"/>
+          <p:nvPr/>
+        </p:nvSpPr>
+        <p:spPr>
+          <a:xfrm>
+            <a:off x="594360" y="4050792"/>
+            <a:ext cx="5029200" cy="237744"/>
+          </a:xfrm>
+          <a:prstGeom prst="rect">
+            <a:avLst/>
+          </a:prstGeom>
+          <a:noFill/>
+        </p:spPr>
+        <p:txBody>
+          <a:bodyPr wrap="none">
+            <a:spAutoFit/>
+          </a:bodyPr>
+          <a:lstStyle/>
+          <a:p>
+            <a:r>
+              <a:rPr sz="1000" b="1">
+                <a:solidFill>
+                  <a:srgbClr val="FF6B35"/>
+                </a:solidFill>
+                <a:latin typeface="Calibri"/>
+              </a:rPr>
+              <a:t>▸ </a:t>
+            </a:r>
+            <a:r>
+              <a:rPr sz="950">
+                <a:solidFill>
+                  <a:srgbClr val="2C3E50"/>
+                </a:solidFill>
+                <a:latin typeface="Calibri"/>
+              </a:rPr>
+              <a:t>Hardware, network, hypervisor infrastructure</a:t>
+            </a:r>
+          </a:p>
+        </p:txBody>
+      </p:sp>
+      <p:sp>
+        <p:nvSpPr>
+          <p:cNvPr id="58" name="TextBox 57"/>
+          <p:cNvSpPr txBox="1"/>
+          <p:nvPr/>
+        </p:nvSpPr>
+        <p:spPr>
+          <a:xfrm>
+            <a:off x="594360" y="4297680"/>
+            <a:ext cx="5029200" cy="237744"/>
+          </a:xfrm>
+          <a:prstGeom prst="rect">
+            <a:avLst/>
+          </a:prstGeom>
+          <a:noFill/>
+        </p:spPr>
+        <p:txBody>
+          <a:bodyPr wrap="none">
+            <a:spAutoFit/>
+          </a:bodyPr>
+          <a:lstStyle/>
+          <a:p>
+            <a:r>
+              <a:rPr sz="1000" b="1">
+                <a:solidFill>
+                  <a:srgbClr val="FF6B35"/>
+                </a:solidFill>
+                <a:latin typeface="Calibri"/>
+              </a:rPr>
+              <a:t>▸ </a:t>
+            </a:r>
+            <a:r>
+              <a:rPr sz="950">
+                <a:solidFill>
+                  <a:srgbClr val="2C3E50"/>
+                </a:solidFill>
+                <a:latin typeface="Calibri"/>
+              </a:rPr>
+              <a:t>Managed service availability (Bedrock, OpenSearch, Neptune)</a:t>
+            </a:r>
+          </a:p>
+        </p:txBody>
+      </p:sp>
+      <p:sp>
+        <p:nvSpPr>
+          <p:cNvPr id="59" name="TextBox 58"/>
+          <p:cNvSpPr txBox="1"/>
+          <p:nvPr/>
+        </p:nvSpPr>
+        <p:spPr>
+          <a:xfrm>
+            <a:off x="594360" y="4544568"/>
+            <a:ext cx="5029200" cy="237744"/>
+          </a:xfrm>
+          <a:prstGeom prst="rect">
+            <a:avLst/>
+          </a:prstGeom>
+          <a:noFill/>
+        </p:spPr>
+        <p:txBody>
+          <a:bodyPr wrap="none">
+            <a:spAutoFit/>
+          </a:bodyPr>
+          <a:lstStyle/>
+          <a:p>
+            <a:r>
+              <a:rPr sz="1000" b="1">
+                <a:solidFill>
+                  <a:srgbClr val="FF6B35"/>
+                </a:solidFill>
+                <a:latin typeface="Calibri"/>
+              </a:rPr>
+              <a:t>▸ </a:t>
+            </a:r>
+            <a:r>
+              <a:rPr sz="950">
+                <a:solidFill>
+                  <a:srgbClr val="2C3E50"/>
+                </a:solidFill>
+                <a:latin typeface="Calibri"/>
+              </a:rPr>
+              <a:t>ISO 27001, SOC 2, PCI-DSS certifications</a:t>
+            </a:r>
+          </a:p>
+        </p:txBody>
+      </p:sp>
+      <p:sp>
+        <p:nvSpPr>
+          <p:cNvPr id="60" name="TextBox 59"/>
+          <p:cNvSpPr txBox="1"/>
+          <p:nvPr/>
+        </p:nvSpPr>
+        <p:spPr>
+          <a:xfrm>
+            <a:off x="594360" y="4791456"/>
+            <a:ext cx="5029200" cy="237744"/>
+          </a:xfrm>
+          <a:prstGeom prst="rect">
+            <a:avLst/>
+          </a:prstGeom>
+          <a:noFill/>
+        </p:spPr>
+        <p:txBody>
+          <a:bodyPr wrap="none">
+            <a:spAutoFit/>
+          </a:bodyPr>
+          <a:lstStyle/>
+          <a:p>
+            <a:r>
+              <a:rPr sz="1000" b="1">
+                <a:solidFill>
+                  <a:srgbClr val="FF6B35"/>
+                </a:solidFill>
+                <a:latin typeface="Calibri"/>
+              </a:rPr>
+              <a:t>▸ </a:t>
+            </a:r>
+            <a:r>
+              <a:rPr sz="950">
+                <a:solidFill>
+                  <a:srgbClr val="2C3E50"/>
+                </a:solidFill>
+                <a:latin typeface="Calibri"/>
+              </a:rPr>
+              <a:t>Compliance with Singapore data residency requirements</a:t>
+            </a:r>
+          </a:p>
+        </p:txBody>
+      </p:sp>
+      <p:sp>
+        <p:nvSpPr>
+          <p:cNvPr id="61" name="Rounded Rectangle 60"/>
+          <p:cNvSpPr/>
+          <p:nvPr/>
+        </p:nvSpPr>
+        <p:spPr>
+          <a:xfrm>
+            <a:off x="5989320" y="3383280"/>
+            <a:ext cx="2743200" cy="1691640"/>
+          </a:xfrm>
+          <a:prstGeom prst="roundRect">
+            <a:avLst>
+              <a:gd name="adj" fmla="val 6000"/>
+            </a:avLst>
+          </a:prstGeom>
+          <a:solidFill>
+            <a:srgbClr val="F3E5F5"/>
+          </a:solidFill>
+          <a:ln w="19050">
+            <a:solidFill>
+              <a:srgbClr val="7B1FA2"/>
+            </a:solidFill>
+          </a:ln>
+        </p:spPr>
+        <p:style>
+          <a:lnRef idx="1">
+            <a:schemeClr val="accent1"/>
+          </a:lnRef>
+          <a:fillRef idx="3">
+            <a:schemeClr val="accent1"/>
+          </a:fillRef>
+          <a:effectRef idx="2">
+            <a:schemeClr val="accent1"/>
+          </a:effectRef>
+          <a:fontRef idx="minor">
+            <a:schemeClr val="lt1"/>
+          </a:fontRef>
+        </p:style>
+        <p:txBody>
+          <a:bodyPr rtlCol="0" anchor="ctr"/>
+          <a:lstStyle/>
+          <a:p>
+            <a:pPr algn="ctr"/>
+          </a:p>
+        </p:txBody>
+      </p:sp>
+      <p:sp>
+        <p:nvSpPr>
+          <p:cNvPr id="62" name="Rectangle 61"/>
+          <p:cNvSpPr/>
+          <p:nvPr/>
+        </p:nvSpPr>
+        <p:spPr>
+          <a:xfrm>
+            <a:off x="5989320" y="3383280"/>
+            <a:ext cx="2743200" cy="347472"/>
+          </a:xfrm>
+          <a:prstGeom prst="rect">
+            <a:avLst/>
+          </a:prstGeom>
+          <a:solidFill>
+            <a:srgbClr val="7B1FA2"/>
+          </a:solidFill>
+          <a:ln>
+            <a:noFill/>
+          </a:ln>
+        </p:spPr>
+        <p:style>
+          <a:lnRef idx="1">
+            <a:schemeClr val="accent1"/>
+          </a:lnRef>
+          <a:fillRef idx="3">
+            <a:schemeClr val="accent1"/>
+          </a:fillRef>
+          <a:effectRef idx="2">
+            <a:schemeClr val="accent1"/>
+          </a:effectRef>
+          <a:fontRef idx="minor">
+            <a:schemeClr val="lt1"/>
+          </a:fontRef>
+        </p:style>
+        <p:txBody>
+          <a:bodyPr rtlCol="0" anchor="ctr"/>
+          <a:lstStyle/>
+          <a:p>
+            <a:pPr algn="ctr"/>
+          </a:p>
+        </p:txBody>
+      </p:sp>
+      <p:sp>
+        <p:nvSpPr>
+          <p:cNvPr id="63" name="TextBox 62"/>
+          <p:cNvSpPr txBox="1"/>
+          <p:nvPr/>
+        </p:nvSpPr>
+        <p:spPr>
+          <a:xfrm>
+            <a:off x="5989320" y="3383280"/>
+            <a:ext cx="2743200" cy="347472"/>
+          </a:xfrm>
+          <a:prstGeom prst="rect">
+            <a:avLst/>
+          </a:prstGeom>
+          <a:noFill/>
+        </p:spPr>
+        <p:txBody>
+          <a:bodyPr wrap="square">
+            <a:spAutoFit/>
+          </a:bodyPr>
+          <a:lstStyle/>
+          <a:p>
+            <a:pPr algn="ctr"/>
+            <a:r>
+              <a:rPr sz="1100" b="1" i="0">
+                <a:solidFill>
+                  <a:srgbClr val="FFFFFF"/>
+                </a:solidFill>
+                <a:latin typeface="Calibri"/>
+              </a:rPr>
+              <a:t>Nova Responsibility</a:t>
+            </a:r>
+          </a:p>
+        </p:txBody>
+      </p:sp>
+      <p:sp>
+        <p:nvSpPr>
+          <p:cNvPr id="64" name="TextBox 63"/>
+          <p:cNvSpPr txBox="1"/>
+          <p:nvPr/>
+        </p:nvSpPr>
+        <p:spPr>
+          <a:xfrm>
+            <a:off x="6126480" y="3803904"/>
+            <a:ext cx="2468880" cy="237744"/>
+          </a:xfrm>
+          <a:prstGeom prst="rect">
+            <a:avLst/>
+          </a:prstGeom>
+          <a:noFill/>
+        </p:spPr>
+        <p:txBody>
+          <a:bodyPr wrap="none">
+            <a:spAutoFit/>
+          </a:bodyPr>
+          <a:lstStyle/>
+          <a:p>
+            <a:r>
+              <a:rPr sz="1000" b="1">
+                <a:solidFill>
+                  <a:srgbClr val="7B1FA2"/>
+                </a:solidFill>
+                <a:latin typeface="Calibri"/>
+              </a:rPr>
+              <a:t>▸ </a:t>
+            </a:r>
+            <a:r>
+              <a:rPr sz="950">
+                <a:solidFill>
+                  <a:srgbClr val="2C3E50"/>
+                </a:solidFill>
+                <a:latin typeface="Calibri"/>
+              </a:rPr>
+              <a:t>PHI masking (Comprehend Medical)</a:t>
+            </a:r>
+          </a:p>
+        </p:txBody>
+      </p:sp>
+      <p:sp>
+        <p:nvSpPr>
+          <p:cNvPr id="65" name="TextBox 64"/>
+          <p:cNvSpPr txBox="1"/>
+          <p:nvPr/>
+        </p:nvSpPr>
+        <p:spPr>
+          <a:xfrm>
+            <a:off x="6126480" y="4050792"/>
+            <a:ext cx="2468880" cy="237744"/>
+          </a:xfrm>
+          <a:prstGeom prst="rect">
+            <a:avLst/>
+          </a:prstGeom>
+          <a:noFill/>
+        </p:spPr>
+        <p:txBody>
+          <a:bodyPr wrap="none">
+            <a:spAutoFit/>
+          </a:bodyPr>
+          <a:lstStyle/>
+          <a:p>
+            <a:r>
+              <a:rPr sz="1000" b="1">
+                <a:solidFill>
+                  <a:srgbClr val="7B1FA2"/>
+                </a:solidFill>
+                <a:latin typeface="Calibri"/>
+              </a:rPr>
+              <a:t>▸ </a:t>
+            </a:r>
+            <a:r>
+              <a:rPr sz="950">
+                <a:solidFill>
+                  <a:srgbClr val="2C3E50"/>
+                </a:solidFill>
+                <a:latin typeface="Calibri"/>
+              </a:rPr>
+              <a:t>Application security + PDPA</a:t>
+            </a:r>
+          </a:p>
+        </p:txBody>
+      </p:sp>
+      <p:sp>
+        <p:nvSpPr>
+          <p:cNvPr id="66" name="TextBox 65"/>
+          <p:cNvSpPr txBox="1"/>
+          <p:nvPr/>
+        </p:nvSpPr>
+        <p:spPr>
+          <a:xfrm>
+            <a:off x="6126480" y="4297680"/>
+            <a:ext cx="2468880" cy="237744"/>
+          </a:xfrm>
+          <a:prstGeom prst="rect">
+            <a:avLst/>
+          </a:prstGeom>
+          <a:noFill/>
+        </p:spPr>
+        <p:txBody>
+          <a:bodyPr wrap="none">
+            <a:spAutoFit/>
+          </a:bodyPr>
+          <a:lstStyle/>
+          <a:p>
+            <a:r>
+              <a:rPr sz="1000" b="1">
+                <a:solidFill>
+                  <a:srgbClr val="7B1FA2"/>
+                </a:solidFill>
+                <a:latin typeface="Calibri"/>
+              </a:rPr>
+              <a:t>▸ </a:t>
+            </a:r>
+            <a:r>
+              <a:rPr sz="950">
+                <a:solidFill>
+                  <a:srgbClr val="2C3E50"/>
+                </a:solidFill>
+                <a:latin typeface="Calibri"/>
+              </a:rPr>
+              <a:t>HCSA license + audit trail</a:t>
+            </a:r>
+          </a:p>
+        </p:txBody>
+      </p:sp>
+      <p:sp>
+        <p:nvSpPr>
+          <p:cNvPr id="67" name="TextBox 66"/>
+          <p:cNvSpPr txBox="1"/>
+          <p:nvPr/>
+        </p:nvSpPr>
+        <p:spPr>
+          <a:xfrm>
+            <a:off x="6126480" y="4544568"/>
+            <a:ext cx="2468880" cy="237744"/>
+          </a:xfrm>
+          <a:prstGeom prst="rect">
+            <a:avLst/>
+          </a:prstGeom>
+          <a:noFill/>
+        </p:spPr>
+        <p:txBody>
+          <a:bodyPr wrap="none">
+            <a:spAutoFit/>
+          </a:bodyPr>
+          <a:lstStyle/>
+          <a:p>
+            <a:r>
+              <a:rPr sz="1000" b="1">
+                <a:solidFill>
+                  <a:srgbClr val="7B1FA2"/>
+                </a:solidFill>
+                <a:latin typeface="Calibri"/>
+              </a:rPr>
+              <a:t>▸ </a:t>
+            </a:r>
+            <a:r>
+              <a:rPr sz="950">
+                <a:solidFill>
+                  <a:srgbClr val="2C3E50"/>
+                </a:solidFill>
+                <a:latin typeface="Calibri"/>
+              </a:rPr>
+              <a:t>Guardrails + citation validator</a:t>
+            </a:r>
+          </a:p>
+        </p:txBody>
+      </p:sp>
+      <p:sp>
+        <p:nvSpPr>
+          <p:cNvPr id="68" name="TextBox 67"/>
+          <p:cNvSpPr txBox="1"/>
+          <p:nvPr/>
+        </p:nvSpPr>
+        <p:spPr>
+          <a:xfrm>
+            <a:off x="6126480" y="4791456"/>
+            <a:ext cx="2468880" cy="237744"/>
+          </a:xfrm>
+          <a:prstGeom prst="rect">
+            <a:avLst/>
+          </a:prstGeom>
+          <a:noFill/>
+        </p:spPr>
+        <p:txBody>
+          <a:bodyPr wrap="none">
+            <a:spAutoFit/>
+          </a:bodyPr>
+          <a:lstStyle/>
+          <a:p>
+            <a:r>
+              <a:rPr sz="1000" b="1">
+                <a:solidFill>
+                  <a:srgbClr val="7B1FA2"/>
+                </a:solidFill>
+                <a:latin typeface="Calibri"/>
+              </a:rPr>
+              <a:t>▸ </a:t>
+            </a:r>
+            <a:r>
+              <a:rPr sz="950">
+                <a:solidFill>
+                  <a:srgbClr val="2C3E50"/>
+                </a:solidFill>
+                <a:latin typeface="Calibri"/>
+              </a:rPr>
+              <a:t>Incident response + DPO</a:t>
+            </a:r>
+          </a:p>
+        </p:txBody>
+      </p:sp>
+      <p:sp>
+        <p:nvSpPr>
+          <p:cNvPr id="69" name="Rounded Rectangle 68"/>
+          <p:cNvSpPr/>
+          <p:nvPr/>
+        </p:nvSpPr>
+        <p:spPr>
+          <a:xfrm>
+            <a:off x="8961120" y="3383280"/>
+            <a:ext cx="2743200" cy="1691640"/>
+          </a:xfrm>
+          <a:prstGeom prst="roundRect">
+            <a:avLst>
+              <a:gd name="adj" fmla="val 6000"/>
+            </a:avLst>
+          </a:prstGeom>
+          <a:solidFill>
+            <a:srgbClr val="FFF8E1"/>
+          </a:solidFill>
+          <a:ln w="19050">
+            <a:solidFill>
+              <a:srgbClr val="FF8F00"/>
+            </a:solidFill>
+          </a:ln>
+        </p:spPr>
+        <p:style>
+          <a:lnRef idx="1">
+            <a:schemeClr val="accent1"/>
+          </a:lnRef>
+          <a:fillRef idx="3">
+            <a:schemeClr val="accent1"/>
+          </a:fillRef>
+          <a:effectRef idx="2">
+            <a:schemeClr val="accent1"/>
+          </a:effectRef>
+          <a:fontRef idx="minor">
+            <a:schemeClr val="lt1"/>
+          </a:fontRef>
+        </p:style>
+        <p:txBody>
+          <a:bodyPr rtlCol="0" anchor="ctr"/>
+          <a:lstStyle/>
+          <a:p>
+            <a:pPr algn="ctr"/>
+          </a:p>
+        </p:txBody>
+      </p:sp>
+      <p:sp>
+        <p:nvSpPr>
+          <p:cNvPr id="70" name="Rectangle 69"/>
+          <p:cNvSpPr/>
+          <p:nvPr/>
+        </p:nvSpPr>
+        <p:spPr>
+          <a:xfrm>
+            <a:off x="8961120" y="3383280"/>
+            <a:ext cx="2743200" cy="347472"/>
+          </a:xfrm>
+          <a:prstGeom prst="rect">
+            <a:avLst/>
+          </a:prstGeom>
+          <a:solidFill>
+            <a:srgbClr val="FF8F00"/>
+          </a:solidFill>
+          <a:ln>
+            <a:noFill/>
+          </a:ln>
+        </p:spPr>
+        <p:style>
+          <a:lnRef idx="1">
+            <a:schemeClr val="accent1"/>
+          </a:lnRef>
+          <a:fillRef idx="3">
+            <a:schemeClr val="accent1"/>
+          </a:fillRef>
+          <a:effectRef idx="2">
+            <a:schemeClr val="accent1"/>
+          </a:effectRef>
+          <a:fontRef idx="minor">
+            <a:schemeClr val="lt1"/>
+          </a:fontRef>
+        </p:style>
+        <p:txBody>
+          <a:bodyPr rtlCol="0" anchor="ctr"/>
+          <a:lstStyle/>
+          <a:p>
+            <a:pPr algn="ctr"/>
+          </a:p>
+        </p:txBody>
+      </p:sp>
+      <p:sp>
+        <p:nvSpPr>
+          <p:cNvPr id="71" name="TextBox 70"/>
+          <p:cNvSpPr txBox="1"/>
+          <p:nvPr/>
+        </p:nvSpPr>
+        <p:spPr>
+          <a:xfrm>
+            <a:off x="8961120" y="3383280"/>
+            <a:ext cx="2743200" cy="347472"/>
+          </a:xfrm>
+          <a:prstGeom prst="rect">
+            <a:avLst/>
+          </a:prstGeom>
+          <a:noFill/>
+        </p:spPr>
+        <p:txBody>
+          <a:bodyPr wrap="square">
+            <a:spAutoFit/>
+          </a:bodyPr>
+          <a:lstStyle/>
+          <a:p>
+            <a:pPr algn="ctr"/>
+            <a:r>
+              <a:rPr sz="1100" b="1" i="0">
+                <a:solidFill>
+                  <a:srgbClr val="FFFFFF"/>
+                </a:solidFill>
+                <a:latin typeface="Calibri"/>
+              </a:rPr>
+              <a:t>Hospital Responsibility</a:t>
+            </a:r>
+          </a:p>
+        </p:txBody>
+      </p:sp>
+      <p:sp>
+        <p:nvSpPr>
+          <p:cNvPr id="72" name="TextBox 71"/>
+          <p:cNvSpPr txBox="1"/>
+          <p:nvPr/>
+        </p:nvSpPr>
+        <p:spPr>
+          <a:xfrm>
+            <a:off x="9098280" y="3803904"/>
+            <a:ext cx="2468880" cy="237744"/>
+          </a:xfrm>
+          <a:prstGeom prst="rect">
+            <a:avLst/>
+          </a:prstGeom>
+          <a:noFill/>
+        </p:spPr>
+        <p:txBody>
+          <a:bodyPr wrap="none">
+            <a:spAutoFit/>
+          </a:bodyPr>
+          <a:lstStyle/>
+          <a:p>
+            <a:r>
+              <a:rPr sz="1000" b="1">
+                <a:solidFill>
+                  <a:srgbClr val="FF8F00"/>
+                </a:solidFill>
+                <a:latin typeface="Calibri"/>
+              </a:rPr>
+              <a:t>▸ </a:t>
+            </a:r>
+            <a:r>
+              <a:rPr sz="950">
+                <a:solidFill>
+                  <a:srgbClr val="2C3E50"/>
+                </a:solidFill>
+                <a:latin typeface="Calibri"/>
+              </a:rPr>
+              <a:t>Clinical decisions (physician)</a:t>
+            </a:r>
+          </a:p>
+        </p:txBody>
+      </p:sp>
+      <p:sp>
+        <p:nvSpPr>
+          <p:cNvPr id="73" name="TextBox 72"/>
+          <p:cNvSpPr txBox="1"/>
+          <p:nvPr/>
+        </p:nvSpPr>
+        <p:spPr>
+          <a:xfrm>
+            <a:off x="9098280" y="4050792"/>
+            <a:ext cx="2468880" cy="237744"/>
+          </a:xfrm>
+          <a:prstGeom prst="rect">
+            <a:avLst/>
+          </a:prstGeom>
+          <a:noFill/>
+        </p:spPr>
+        <p:txBody>
+          <a:bodyPr wrap="none">
+            <a:spAutoFit/>
+          </a:bodyPr>
+          <a:lstStyle/>
+          <a:p>
+            <a:r>
+              <a:rPr sz="1000" b="1">
+                <a:solidFill>
+                  <a:srgbClr val="FF8F00"/>
+                </a:solidFill>
+                <a:latin typeface="Calibri"/>
+              </a:rPr>
+              <a:t>▸ </a:t>
+            </a:r>
+            <a:r>
+              <a:rPr sz="950">
+                <a:solidFill>
+                  <a:srgbClr val="2C3E50"/>
+                </a:solidFill>
+                <a:latin typeface="Calibri"/>
+              </a:rPr>
+              <a:t>HCSA license (deployer)</a:t>
+            </a:r>
+          </a:p>
+        </p:txBody>
+      </p:sp>
+      <p:sp>
+        <p:nvSpPr>
+          <p:cNvPr id="74" name="TextBox 73"/>
+          <p:cNvSpPr txBox="1"/>
+          <p:nvPr/>
+        </p:nvSpPr>
+        <p:spPr>
+          <a:xfrm>
+            <a:off x="9098280" y="4297680"/>
+            <a:ext cx="2468880" cy="237744"/>
+          </a:xfrm>
+          <a:prstGeom prst="rect">
+            <a:avLst/>
+          </a:prstGeom>
+          <a:noFill/>
+        </p:spPr>
+        <p:txBody>
+          <a:bodyPr wrap="none">
+            <a:spAutoFit/>
+          </a:bodyPr>
+          <a:lstStyle/>
+          <a:p>
+            <a:r>
+              <a:rPr sz="1000" b="1">
+                <a:solidFill>
+                  <a:srgbClr val="FF8F00"/>
+                </a:solidFill>
+                <a:latin typeface="Calibri"/>
+              </a:rPr>
+              <a:t>▸ </a:t>
+            </a:r>
+            <a:r>
+              <a:rPr sz="950">
+                <a:solidFill>
+                  <a:srgbClr val="2C3E50"/>
+                </a:solidFill>
+                <a:latin typeface="Calibri"/>
+              </a:rPr>
+              <a:t>Staff training + consent</a:t>
+            </a:r>
+          </a:p>
+        </p:txBody>
+      </p:sp>
+      <p:sp>
+        <p:nvSpPr>
+          <p:cNvPr id="75" name="TextBox 74"/>
+          <p:cNvSpPr txBox="1"/>
+          <p:nvPr/>
+        </p:nvSpPr>
+        <p:spPr>
+          <a:xfrm>
+            <a:off x="9098280" y="4544568"/>
+            <a:ext cx="2468880" cy="237744"/>
+          </a:xfrm>
+          <a:prstGeom prst="rect">
+            <a:avLst/>
+          </a:prstGeom>
+          <a:noFill/>
+        </p:spPr>
+        <p:txBody>
+          <a:bodyPr wrap="none">
+            <a:spAutoFit/>
+          </a:bodyPr>
+          <a:lstStyle/>
+          <a:p>
+            <a:r>
+              <a:rPr sz="1000" b="1">
+                <a:solidFill>
+                  <a:srgbClr val="FF8F00"/>
+                </a:solidFill>
+                <a:latin typeface="Calibri"/>
+              </a:rPr>
+              <a:t>▸ </a:t>
+            </a:r>
+            <a:r>
+              <a:rPr sz="950">
+                <a:solidFill>
+                  <a:srgbClr val="2C3E50"/>
+                </a:solidFill>
+                <a:latin typeface="Calibri"/>
+              </a:rPr>
+              <a:t>EHR access controls</a:t>
+            </a:r>
+          </a:p>
+        </p:txBody>
+      </p:sp>
+      <p:sp>
+        <p:nvSpPr>
+          <p:cNvPr id="76" name="TextBox 75"/>
+          <p:cNvSpPr txBox="1"/>
+          <p:nvPr/>
+        </p:nvSpPr>
+        <p:spPr>
+          <a:xfrm>
+            <a:off x="9098280" y="4791456"/>
+            <a:ext cx="2468880" cy="237744"/>
+          </a:xfrm>
+          <a:prstGeom prst="rect">
+            <a:avLst/>
+          </a:prstGeom>
+          <a:noFill/>
+        </p:spPr>
+        <p:txBody>
+          <a:bodyPr wrap="none">
+            <a:spAutoFit/>
+          </a:bodyPr>
+          <a:lstStyle/>
+          <a:p>
+            <a:r>
+              <a:rPr sz="1000" b="1">
+                <a:solidFill>
+                  <a:srgbClr val="FF8F00"/>
+                </a:solidFill>
+                <a:latin typeface="Calibri"/>
+              </a:rPr>
+              <a:t>▸ </a:t>
+            </a:r>
+            <a:r>
+              <a:rPr sz="950">
+                <a:solidFill>
+                  <a:srgbClr val="2C3E50"/>
+                </a:solidFill>
+                <a:latin typeface="Calibri"/>
+              </a:rPr>
+              <a:t>Adverse event reporting</a:t>
+            </a:r>
+          </a:p>
+        </p:txBody>
+      </p:sp>
+      <p:sp>
+        <p:nvSpPr>
+          <p:cNvPr id="77" name="Rectangle 76"/>
+          <p:cNvSpPr/>
+          <p:nvPr/>
+        </p:nvSpPr>
+        <p:spPr>
+          <a:xfrm>
+            <a:off x="457200" y="4919472"/>
+            <a:ext cx="11247120" cy="347472"/>
+          </a:xfrm>
+          <a:prstGeom prst="rect">
+            <a:avLst/>
+          </a:prstGeom>
+          <a:solidFill>
+            <a:srgbClr val="2C3E50"/>
+          </a:solidFill>
+          <a:ln>
+            <a:noFill/>
+          </a:ln>
+        </p:spPr>
+        <p:style>
+          <a:lnRef idx="1">
+            <a:schemeClr val="accent1"/>
+          </a:lnRef>
+          <a:fillRef idx="3">
+            <a:schemeClr val="accent1"/>
+          </a:fillRef>
+          <a:effectRef idx="2">
+            <a:schemeClr val="accent1"/>
+          </a:effectRef>
+          <a:fontRef idx="minor">
+            <a:schemeClr val="lt1"/>
+          </a:fontRef>
+        </p:style>
+        <p:txBody>
+          <a:bodyPr rtlCol="0" anchor="ctr"/>
+          <a:lstStyle/>
+          <a:p>
+            <a:pPr algn="ctr"/>
+          </a:p>
+        </p:txBody>
+      </p:sp>
+      <p:sp>
+        <p:nvSpPr>
+          <p:cNvPr id="78" name="TextBox 77"/>
+          <p:cNvSpPr txBox="1"/>
+          <p:nvPr/>
+        </p:nvSpPr>
+        <p:spPr>
+          <a:xfrm>
+            <a:off x="457200" y="4919472"/>
+            <a:ext cx="11247120" cy="347472"/>
+          </a:xfrm>
+          <a:prstGeom prst="rect">
+            <a:avLst/>
+          </a:prstGeom>
+          <a:noFill/>
+        </p:spPr>
+        <p:txBody>
+          <a:bodyPr wrap="square">
+            <a:spAutoFit/>
+          </a:bodyPr>
+          <a:lstStyle/>
+          <a:p>
+            <a:pPr algn="ctr"/>
+            <a:r>
+              <a:rPr sz="1200" b="1" i="0">
+                <a:solidFill>
+                  <a:srgbClr val="FFFFFF"/>
+                </a:solidFill>
+                <a:latin typeface="Calibri"/>
+              </a:rPr>
+              <a:t>Security Controls in the Solution</a:t>
+            </a:r>
+          </a:p>
+        </p:txBody>
+      </p:sp>
+      <p:sp>
+        <p:nvSpPr>
+          <p:cNvPr id="79" name="Rounded Rectangle 78"/>
+          <p:cNvSpPr/>
+          <p:nvPr/>
+        </p:nvSpPr>
+        <p:spPr>
+          <a:xfrm>
+            <a:off x="457200" y="5303520"/>
+            <a:ext cx="1783080" cy="804672"/>
+          </a:xfrm>
+          <a:prstGeom prst="roundRect">
+            <a:avLst>
+              <a:gd name="adj" fmla="val 10000"/>
+            </a:avLst>
+          </a:prstGeom>
+          <a:solidFill>
+            <a:srgbClr val="FFE8DA"/>
+          </a:solidFill>
+          <a:ln w="15240">
+            <a:solidFill>
+              <a:srgbClr val="FF6B35"/>
+            </a:solidFill>
+          </a:ln>
+        </p:spPr>
+        <p:style>
+          <a:lnRef idx="1">
+            <a:schemeClr val="accent1"/>
+          </a:lnRef>
+          <a:fillRef idx="3">
+            <a:schemeClr val="accent1"/>
+          </a:fillRef>
+          <a:effectRef idx="2">
+            <a:schemeClr val="accent1"/>
+          </a:effectRef>
+          <a:fontRef idx="minor">
+            <a:schemeClr val="lt1"/>
+          </a:fontRef>
+        </p:style>
+        <p:txBody>
+          <a:bodyPr rtlCol="0" anchor="ctr"/>
+          <a:lstStyle/>
+          <a:p>
+            <a:pPr algn="ctr"/>
+          </a:p>
+        </p:txBody>
+      </p:sp>
+      <p:sp>
+        <p:nvSpPr>
+          <p:cNvPr id="80" name="TextBox 79"/>
+          <p:cNvSpPr txBox="1"/>
+          <p:nvPr/>
+        </p:nvSpPr>
+        <p:spPr>
+          <a:xfrm>
+            <a:off x="457200" y="5340096"/>
+            <a:ext cx="1783080" cy="347472"/>
+          </a:xfrm>
+          <a:prstGeom prst="rect">
+            <a:avLst/>
+          </a:prstGeom>
+          <a:noFill/>
+        </p:spPr>
+        <p:txBody>
+          <a:bodyPr wrap="none">
+            <a:spAutoFit/>
+          </a:bodyPr>
+          <a:lstStyle/>
+          <a:p>
+            <a:pPr algn="ctr"/>
+            <a:r>
+              <a:rPr sz="2000">
+                <a:latin typeface="Segoe UI Emoji"/>
+              </a:rPr>
+              <a:t>🔒</a:t>
+            </a:r>
+          </a:p>
+        </p:txBody>
+      </p:sp>
+      <p:sp>
+        <p:nvSpPr>
+          <p:cNvPr id="81" name="TextBox 80"/>
+          <p:cNvSpPr txBox="1"/>
+          <p:nvPr/>
+        </p:nvSpPr>
+        <p:spPr>
+          <a:xfrm>
+            <a:off x="457200" y="5687568"/>
+            <a:ext cx="1783080" cy="182880"/>
+          </a:xfrm>
+          <a:prstGeom prst="rect">
+            <a:avLst/>
+          </a:prstGeom>
+          <a:noFill/>
+        </p:spPr>
+        <p:txBody>
+          <a:bodyPr wrap="square">
+            <a:spAutoFit/>
+          </a:bodyPr>
+          <a:lstStyle/>
+          <a:p>
+            <a:pPr algn="ctr"/>
+            <a:r>
+              <a:rPr sz="950" b="1" i="0">
+                <a:solidFill>
+                  <a:srgbClr val="CC4F1F"/>
+                </a:solidFill>
+                <a:latin typeface="Calibri"/>
+              </a:rPr>
+              <a:t>PHI Masking</a:t>
+            </a:r>
+          </a:p>
+        </p:txBody>
+      </p:sp>
+      <p:sp>
+        <p:nvSpPr>
+          <p:cNvPr id="82" name="TextBox 81"/>
+          <p:cNvSpPr txBox="1"/>
+          <p:nvPr/>
+        </p:nvSpPr>
+        <p:spPr>
+          <a:xfrm>
+            <a:off x="457200" y="5870448"/>
+            <a:ext cx="1783080" cy="219456"/>
+          </a:xfrm>
+          <a:prstGeom prst="rect">
+            <a:avLst/>
+          </a:prstGeom>
+          <a:noFill/>
+        </p:spPr>
+        <p:txBody>
+          <a:bodyPr wrap="square">
+            <a:spAutoFit/>
+          </a:bodyPr>
+          <a:lstStyle/>
+          <a:p>
+            <a:pPr algn="ctr"/>
+            <a:r>
+              <a:rPr sz="800" b="0" i="1">
+                <a:solidFill>
+                  <a:srgbClr val="646464"/>
+                </a:solidFill>
+                <a:latin typeface="Calibri"/>
+              </a:rPr>
+              <a:t>Comprehend Medical
+tokenizes before model</a:t>
+            </a:r>
+          </a:p>
+        </p:txBody>
+      </p:sp>
+      <p:sp>
+        <p:nvSpPr>
+          <p:cNvPr id="83" name="Rounded Rectangle 82"/>
+          <p:cNvSpPr/>
+          <p:nvPr/>
+        </p:nvSpPr>
+        <p:spPr>
+          <a:xfrm>
+            <a:off x="2331720" y="5303520"/>
+            <a:ext cx="1783080" cy="804672"/>
+          </a:xfrm>
+          <a:prstGeom prst="roundRect">
+            <a:avLst>
+              <a:gd name="adj" fmla="val 10000"/>
+            </a:avLst>
+          </a:prstGeom>
+          <a:solidFill>
+            <a:srgbClr val="FFFFFF"/>
+          </a:solidFill>
+          <a:ln w="15240">
+            <a:solidFill>
+              <a:srgbClr val="FF6B35"/>
+            </a:solidFill>
+          </a:ln>
+        </p:spPr>
+        <p:style>
+          <a:lnRef idx="1">
+            <a:schemeClr val="accent1"/>
+          </a:lnRef>
+          <a:fillRef idx="3">
+            <a:schemeClr val="accent1"/>
+          </a:fillRef>
+          <a:effectRef idx="2">
+            <a:schemeClr val="accent1"/>
+          </a:effectRef>
+          <a:fontRef idx="minor">
+            <a:schemeClr val="lt1"/>
+          </a:fontRef>
+        </p:style>
+        <p:txBody>
+          <a:bodyPr rtlCol="0" anchor="ctr"/>
+          <a:lstStyle/>
+          <a:p>
+            <a:pPr algn="ctr"/>
+          </a:p>
+        </p:txBody>
+      </p:sp>
+      <p:sp>
+        <p:nvSpPr>
+          <p:cNvPr id="84" name="TextBox 83"/>
+          <p:cNvSpPr txBox="1"/>
+          <p:nvPr/>
+        </p:nvSpPr>
+        <p:spPr>
+          <a:xfrm>
+            <a:off x="2331720" y="5340096"/>
+            <a:ext cx="1783080" cy="347472"/>
+          </a:xfrm>
+          <a:prstGeom prst="rect">
+            <a:avLst/>
+          </a:prstGeom>
+          <a:noFill/>
+        </p:spPr>
+        <p:txBody>
+          <a:bodyPr wrap="none">
+            <a:spAutoFit/>
+          </a:bodyPr>
+          <a:lstStyle/>
+          <a:p>
+            <a:pPr algn="ctr"/>
+            <a:r>
+              <a:rPr sz="2000">
+                <a:latin typeface="Segoe UI Emoji"/>
+              </a:rPr>
+              <a:t>🗝️</a:t>
+            </a:r>
+          </a:p>
+        </p:txBody>
+      </p:sp>
+      <p:sp>
+        <p:nvSpPr>
+          <p:cNvPr id="85" name="TextBox 84"/>
+          <p:cNvSpPr txBox="1"/>
+          <p:nvPr/>
+        </p:nvSpPr>
+        <p:spPr>
+          <a:xfrm>
+            <a:off x="2331720" y="5687568"/>
+            <a:ext cx="1783080" cy="182880"/>
+          </a:xfrm>
+          <a:prstGeom prst="rect">
+            <a:avLst/>
+          </a:prstGeom>
+          <a:noFill/>
+        </p:spPr>
+        <p:txBody>
+          <a:bodyPr wrap="square">
+            <a:spAutoFit/>
+          </a:bodyPr>
+          <a:lstStyle/>
+          <a:p>
+            <a:pPr algn="ctr"/>
+            <a:r>
+              <a:rPr sz="950" b="1" i="0">
+                <a:solidFill>
+                  <a:srgbClr val="CC4F1F"/>
+                </a:solidFill>
+                <a:latin typeface="Calibri"/>
+              </a:rPr>
+              <a:t>KMS BYOK</a:t>
+            </a:r>
+          </a:p>
+        </p:txBody>
+      </p:sp>
+      <p:sp>
+        <p:nvSpPr>
+          <p:cNvPr id="86" name="TextBox 85"/>
+          <p:cNvSpPr txBox="1"/>
+          <p:nvPr/>
+        </p:nvSpPr>
+        <p:spPr>
+          <a:xfrm>
+            <a:off x="2331720" y="5870448"/>
+            <a:ext cx="1783080" cy="219456"/>
+          </a:xfrm>
+          <a:prstGeom prst="rect">
+            <a:avLst/>
+          </a:prstGeom>
+          <a:noFill/>
+        </p:spPr>
+        <p:txBody>
+          <a:bodyPr wrap="square">
+            <a:spAutoFit/>
+          </a:bodyPr>
+          <a:lstStyle/>
+          <a:p>
+            <a:pPr algn="ctr"/>
+            <a:r>
+              <a:rPr sz="800" b="0" i="1">
+                <a:solidFill>
+                  <a:srgbClr val="646464"/>
+                </a:solidFill>
+                <a:latin typeface="Calibri"/>
+              </a:rPr>
+              <a:t>Hospital controls
+encryption keys</a:t>
+            </a:r>
+          </a:p>
+        </p:txBody>
+      </p:sp>
+      <p:sp>
+        <p:nvSpPr>
+          <p:cNvPr id="87" name="Rounded Rectangle 86"/>
+          <p:cNvSpPr/>
+          <p:nvPr/>
+        </p:nvSpPr>
+        <p:spPr>
+          <a:xfrm>
+            <a:off x="4206240" y="5303520"/>
+            <a:ext cx="1783080" cy="804672"/>
+          </a:xfrm>
+          <a:prstGeom prst="roundRect">
+            <a:avLst>
+              <a:gd name="adj" fmla="val 10000"/>
+            </a:avLst>
+          </a:prstGeom>
+          <a:solidFill>
+            <a:srgbClr val="FFE8DA"/>
+          </a:solidFill>
+          <a:ln w="15240">
+            <a:solidFill>
+              <a:srgbClr val="FF6B35"/>
+            </a:solidFill>
+          </a:ln>
+        </p:spPr>
+        <p:style>
+          <a:lnRef idx="1">
+            <a:schemeClr val="accent1"/>
+          </a:lnRef>
+          <a:fillRef idx="3">
+            <a:schemeClr val="accent1"/>
+          </a:fillRef>
+          <a:effectRef idx="2">
+            <a:schemeClr val="accent1"/>
+          </a:effectRef>
+          <a:fontRef idx="minor">
+            <a:schemeClr val="lt1"/>
+          </a:fontRef>
+        </p:style>
+        <p:txBody>
+          <a:bodyPr rtlCol="0" anchor="ctr"/>
+          <a:lstStyle/>
+          <a:p>
+            <a:pPr algn="ctr"/>
+          </a:p>
+        </p:txBody>
+      </p:sp>
+      <p:sp>
+        <p:nvSpPr>
+          <p:cNvPr id="88" name="TextBox 87"/>
+          <p:cNvSpPr txBox="1"/>
+          <p:nvPr/>
+        </p:nvSpPr>
+        <p:spPr>
+          <a:xfrm>
+            <a:off x="4206240" y="5340096"/>
+            <a:ext cx="1783080" cy="347472"/>
+          </a:xfrm>
+          <a:prstGeom prst="rect">
+            <a:avLst/>
+          </a:prstGeom>
+          <a:noFill/>
+        </p:spPr>
+        <p:txBody>
+          <a:bodyPr wrap="none">
+            <a:spAutoFit/>
+          </a:bodyPr>
+          <a:lstStyle/>
+          <a:p>
+            <a:pPr algn="ctr"/>
+            <a:r>
+              <a:rPr sz="2000">
+                <a:latin typeface="Segoe UI Emoji"/>
+              </a:rPr>
+              <a:t>📋</a:t>
+            </a:r>
+          </a:p>
+        </p:txBody>
+      </p:sp>
+      <p:sp>
+        <p:nvSpPr>
+          <p:cNvPr id="89" name="TextBox 88"/>
+          <p:cNvSpPr txBox="1"/>
+          <p:nvPr/>
+        </p:nvSpPr>
+        <p:spPr>
+          <a:xfrm>
+            <a:off x="4206240" y="5687568"/>
+            <a:ext cx="1783080" cy="182880"/>
+          </a:xfrm>
+          <a:prstGeom prst="rect">
+            <a:avLst/>
+          </a:prstGeom>
+          <a:noFill/>
+        </p:spPr>
+        <p:txBody>
+          <a:bodyPr wrap="square">
+            <a:spAutoFit/>
+          </a:bodyPr>
+          <a:lstStyle/>
+          <a:p>
+            <a:pPr algn="ctr"/>
+            <a:r>
+              <a:rPr sz="950" b="1" i="0">
+                <a:solidFill>
+                  <a:srgbClr val="CC4F1F"/>
+                </a:solidFill>
+                <a:latin typeface="Calibri"/>
+              </a:rPr>
+              <a:t>Audit Trail</a:t>
+            </a:r>
+          </a:p>
+        </p:txBody>
+      </p:sp>
+      <p:sp>
+        <p:nvSpPr>
+          <p:cNvPr id="90" name="TextBox 89"/>
+          <p:cNvSpPr txBox="1"/>
+          <p:nvPr/>
+        </p:nvSpPr>
+        <p:spPr>
+          <a:xfrm>
+            <a:off x="4206240" y="5870448"/>
+            <a:ext cx="1783080" cy="219456"/>
+          </a:xfrm>
+          <a:prstGeom prst="rect">
+            <a:avLst/>
+          </a:prstGeom>
+          <a:noFill/>
+        </p:spPr>
+        <p:txBody>
+          <a:bodyPr wrap="square">
+            <a:spAutoFit/>
+          </a:bodyPr>
+          <a:lstStyle/>
+          <a:p>
+            <a:pPr algn="ctr"/>
+            <a:r>
+              <a:rPr sz="800" b="0" i="1">
+                <a:solidFill>
+                  <a:srgbClr val="646464"/>
+                </a:solidFill>
+                <a:latin typeface="Calibri"/>
+              </a:rPr>
+              <a:t>S3 Object Lock
+6-year WORM retention</a:t>
+            </a:r>
+          </a:p>
+        </p:txBody>
+      </p:sp>
+      <p:sp>
+        <p:nvSpPr>
+          <p:cNvPr id="91" name="Rounded Rectangle 90"/>
+          <p:cNvSpPr/>
+          <p:nvPr/>
+        </p:nvSpPr>
+        <p:spPr>
+          <a:xfrm>
+            <a:off x="6080760" y="5303520"/>
+            <a:ext cx="1783080" cy="804672"/>
+          </a:xfrm>
+          <a:prstGeom prst="roundRect">
+            <a:avLst>
+              <a:gd name="adj" fmla="val 10000"/>
+            </a:avLst>
+          </a:prstGeom>
+          <a:solidFill>
+            <a:srgbClr val="FFFFFF"/>
+          </a:solidFill>
+          <a:ln w="15240">
+            <a:solidFill>
+              <a:srgbClr val="FF6B35"/>
+            </a:solidFill>
+          </a:ln>
+        </p:spPr>
+        <p:style>
+          <a:lnRef idx="1">
+            <a:schemeClr val="accent1"/>
+          </a:lnRef>
+          <a:fillRef idx="3">
+            <a:schemeClr val="accent1"/>
+          </a:fillRef>
+          <a:effectRef idx="2">
+            <a:schemeClr val="accent1"/>
+          </a:effectRef>
+          <a:fontRef idx="minor">
+            <a:schemeClr val="lt1"/>
+          </a:fontRef>
+        </p:style>
+        <p:txBody>
+          <a:bodyPr rtlCol="0" anchor="ctr"/>
+          <a:lstStyle/>
+          <a:p>
+            <a:pPr algn="ctr"/>
+          </a:p>
+        </p:txBody>
+      </p:sp>
+      <p:sp>
+        <p:nvSpPr>
+          <p:cNvPr id="92" name="TextBox 91"/>
+          <p:cNvSpPr txBox="1"/>
+          <p:nvPr/>
+        </p:nvSpPr>
+        <p:spPr>
+          <a:xfrm>
+            <a:off x="6080760" y="5340096"/>
+            <a:ext cx="1783080" cy="347472"/>
+          </a:xfrm>
+          <a:prstGeom prst="rect">
+            <a:avLst/>
+          </a:prstGeom>
+          <a:noFill/>
+        </p:spPr>
+        <p:txBody>
+          <a:bodyPr wrap="none">
+            <a:spAutoFit/>
+          </a:bodyPr>
+          <a:lstStyle/>
+          <a:p>
+            <a:pPr algn="ctr"/>
+            <a:r>
+              <a:rPr sz="2000">
+                <a:latin typeface="Segoe UI Emoji"/>
+              </a:rPr>
+              <a:t>🛡️</a:t>
+            </a:r>
+          </a:p>
+        </p:txBody>
+      </p:sp>
+      <p:sp>
+        <p:nvSpPr>
+          <p:cNvPr id="93" name="TextBox 92"/>
+          <p:cNvSpPr txBox="1"/>
+          <p:nvPr/>
+        </p:nvSpPr>
+        <p:spPr>
+          <a:xfrm>
+            <a:off x="6080760" y="5687568"/>
+            <a:ext cx="1783080" cy="182880"/>
+          </a:xfrm>
+          <a:prstGeom prst="rect">
+            <a:avLst/>
+          </a:prstGeom>
+          <a:noFill/>
+        </p:spPr>
+        <p:txBody>
+          <a:bodyPr wrap="square">
+            <a:spAutoFit/>
+          </a:bodyPr>
+          <a:lstStyle/>
+          <a:p>
+            <a:pPr algn="ctr"/>
+            <a:r>
+              <a:rPr sz="950" b="1" i="0">
+                <a:solidFill>
+                  <a:srgbClr val="CC4F1F"/>
+                </a:solidFill>
+                <a:latin typeface="Calibri"/>
+              </a:rPr>
+              <a:t>Guardrails</a:t>
+            </a:r>
+          </a:p>
+        </p:txBody>
+      </p:sp>
+      <p:sp>
+        <p:nvSpPr>
+          <p:cNvPr id="94" name="TextBox 93"/>
+          <p:cNvSpPr txBox="1"/>
+          <p:nvPr/>
+        </p:nvSpPr>
+        <p:spPr>
+          <a:xfrm>
+            <a:off x="6080760" y="5870448"/>
+            <a:ext cx="1783080" cy="219456"/>
+          </a:xfrm>
+          <a:prstGeom prst="rect">
+            <a:avLst/>
+          </a:prstGeom>
+          <a:noFill/>
+        </p:spPr>
+        <p:txBody>
+          <a:bodyPr wrap="square">
+            <a:spAutoFit/>
+          </a:bodyPr>
+          <a:lstStyle/>
+          <a:p>
+            <a:pPr algn="ctr"/>
+            <a:r>
+              <a:rPr sz="800" b="0" i="1">
+                <a:solidFill>
+                  <a:srgbClr val="646464"/>
+                </a:solidFill>
+                <a:latin typeface="Calibri"/>
+              </a:rPr>
+              <a:t>Bedrock Guardrails
+grounding + PHI filter</a:t>
+            </a:r>
+          </a:p>
+        </p:txBody>
+      </p:sp>
+      <p:sp>
+        <p:nvSpPr>
+          <p:cNvPr id="95" name="Rounded Rectangle 94"/>
+          <p:cNvSpPr/>
+          <p:nvPr/>
+        </p:nvSpPr>
+        <p:spPr>
+          <a:xfrm>
+            <a:off x="7955280" y="5303520"/>
+            <a:ext cx="1783080" cy="804672"/>
+          </a:xfrm>
+          <a:prstGeom prst="roundRect">
+            <a:avLst>
+              <a:gd name="adj" fmla="val 10000"/>
+            </a:avLst>
+          </a:prstGeom>
+          <a:solidFill>
+            <a:srgbClr val="FFE8DA"/>
+          </a:solidFill>
+          <a:ln w="15240">
+            <a:solidFill>
+              <a:srgbClr val="FF6B35"/>
+            </a:solidFill>
+          </a:ln>
+        </p:spPr>
+        <p:style>
+          <a:lnRef idx="1">
+            <a:schemeClr val="accent1"/>
+          </a:lnRef>
+          <a:fillRef idx="3">
+            <a:schemeClr val="accent1"/>
+          </a:fillRef>
+          <a:effectRef idx="2">
+            <a:schemeClr val="accent1"/>
+          </a:effectRef>
+          <a:fontRef idx="minor">
+            <a:schemeClr val="lt1"/>
+          </a:fontRef>
+        </p:style>
+        <p:txBody>
+          <a:bodyPr rtlCol="0" anchor="ctr"/>
+          <a:lstStyle/>
+          <a:p>
+            <a:pPr algn="ctr"/>
+          </a:p>
+        </p:txBody>
+      </p:sp>
+      <p:sp>
+        <p:nvSpPr>
+          <p:cNvPr id="96" name="TextBox 95"/>
+          <p:cNvSpPr txBox="1"/>
+          <p:nvPr/>
+        </p:nvSpPr>
+        <p:spPr>
+          <a:xfrm>
+            <a:off x="7955280" y="5340096"/>
+            <a:ext cx="1783080" cy="347472"/>
+          </a:xfrm>
+          <a:prstGeom prst="rect">
+            <a:avLst/>
+          </a:prstGeom>
+          <a:noFill/>
+        </p:spPr>
+        <p:txBody>
+          <a:bodyPr wrap="none">
+            <a:spAutoFit/>
+          </a:bodyPr>
+          <a:lstStyle/>
+          <a:p>
+            <a:pPr algn="ctr"/>
+            <a:r>
+              <a:rPr sz="2000">
+                <a:latin typeface="Segoe UI Emoji"/>
+              </a:rPr>
+              <a:t>🌐</a:t>
+            </a:r>
+          </a:p>
+        </p:txBody>
+      </p:sp>
+      <p:sp>
+        <p:nvSpPr>
+          <p:cNvPr id="97" name="TextBox 96"/>
+          <p:cNvSpPr txBox="1"/>
+          <p:nvPr/>
+        </p:nvSpPr>
+        <p:spPr>
+          <a:xfrm>
+            <a:off x="7955280" y="5687568"/>
+            <a:ext cx="1783080" cy="182880"/>
+          </a:xfrm>
+          <a:prstGeom prst="rect">
+            <a:avLst/>
+          </a:prstGeom>
+          <a:noFill/>
+        </p:spPr>
+        <p:txBody>
+          <a:bodyPr wrap="square">
+            <a:spAutoFit/>
+          </a:bodyPr>
+          <a:lstStyle/>
+          <a:p>
+            <a:pPr algn="ctr"/>
+            <a:r>
+              <a:rPr sz="950" b="1" i="0">
+                <a:solidFill>
+                  <a:srgbClr val="CC4F1F"/>
+                </a:solidFill>
+                <a:latin typeface="Calibri"/>
+              </a:rPr>
+              <a:t>Data Residency</a:t>
+            </a:r>
+          </a:p>
+        </p:txBody>
+      </p:sp>
+      <p:sp>
+        <p:nvSpPr>
+          <p:cNvPr id="98" name="TextBox 97"/>
+          <p:cNvSpPr txBox="1"/>
+          <p:nvPr/>
+        </p:nvSpPr>
+        <p:spPr>
+          <a:xfrm>
+            <a:off x="7955280" y="5870448"/>
+            <a:ext cx="1783080" cy="219456"/>
+          </a:xfrm>
+          <a:prstGeom prst="rect">
+            <a:avLst/>
+          </a:prstGeom>
+          <a:noFill/>
+        </p:spPr>
+        <p:txBody>
+          <a:bodyPr wrap="square">
+            <a:spAutoFit/>
+          </a:bodyPr>
+          <a:lstStyle/>
+          <a:p>
+            <a:pPr algn="ctr"/>
+            <a:r>
+              <a:rPr sz="800" b="0" i="1">
+                <a:solidFill>
+                  <a:srgbClr val="646464"/>
+                </a:solidFill>
+                <a:latin typeface="Calibri"/>
+              </a:rPr>
+              <a:t>100% ap-southeast-1
+zero cross-border</a:t>
+            </a:r>
+          </a:p>
+        </p:txBody>
+      </p:sp>
+      <p:sp>
+        <p:nvSpPr>
+          <p:cNvPr id="99" name="Rounded Rectangle 98"/>
+          <p:cNvSpPr/>
+          <p:nvPr/>
+        </p:nvSpPr>
+        <p:spPr>
+          <a:xfrm>
+            <a:off x="9829800" y="5303520"/>
+            <a:ext cx="1783080" cy="804672"/>
+          </a:xfrm>
+          <a:prstGeom prst="roundRect">
+            <a:avLst>
+              <a:gd name="adj" fmla="val 10000"/>
+            </a:avLst>
+          </a:prstGeom>
+          <a:solidFill>
+            <a:srgbClr val="FFFFFF"/>
+          </a:solidFill>
+          <a:ln w="15240">
+            <a:solidFill>
+              <a:srgbClr val="FF6B35"/>
+            </a:solidFill>
+          </a:ln>
+        </p:spPr>
+        <p:style>
+          <a:lnRef idx="1">
+            <a:schemeClr val="accent1"/>
+          </a:lnRef>
+          <a:fillRef idx="3">
+            <a:schemeClr val="accent1"/>
+          </a:fillRef>
+          <a:effectRef idx="2">
+            <a:schemeClr val="accent1"/>
+          </a:effectRef>
+          <a:fontRef idx="minor">
+            <a:schemeClr val="lt1"/>
+          </a:fontRef>
+        </p:style>
+        <p:txBody>
+          <a:bodyPr rtlCol="0" anchor="ctr"/>
+          <a:lstStyle/>
+          <a:p>
+            <a:pPr algn="ctr"/>
+          </a:p>
+        </p:txBody>
+      </p:sp>
+      <p:sp>
+        <p:nvSpPr>
+          <p:cNvPr id="100" name="TextBox 99"/>
+          <p:cNvSpPr txBox="1"/>
+          <p:nvPr/>
+        </p:nvSpPr>
+        <p:spPr>
+          <a:xfrm>
+            <a:off x="9829800" y="5340096"/>
+            <a:ext cx="1783080" cy="347472"/>
+          </a:xfrm>
+          <a:prstGeom prst="rect">
+            <a:avLst/>
+          </a:prstGeom>
+          <a:noFill/>
+        </p:spPr>
+        <p:txBody>
+          <a:bodyPr wrap="none">
+            <a:spAutoFit/>
+          </a:bodyPr>
+          <a:lstStyle/>
+          <a:p>
+            <a:pPr algn="ctr"/>
+            <a:r>
+              <a:rPr sz="2000">
+                <a:latin typeface="Segoe UI Emoji"/>
+              </a:rPr>
+              <a:t>👥</a:t>
+            </a:r>
+          </a:p>
+        </p:txBody>
+      </p:sp>
+      <p:sp>
+        <p:nvSpPr>
+          <p:cNvPr id="101" name="TextBox 100"/>
+          <p:cNvSpPr txBox="1"/>
+          <p:nvPr/>
+        </p:nvSpPr>
+        <p:spPr>
+          <a:xfrm>
+            <a:off x="9829800" y="5687568"/>
+            <a:ext cx="1783080" cy="182880"/>
+          </a:xfrm>
+          <a:prstGeom prst="rect">
+            <a:avLst/>
+          </a:prstGeom>
+          <a:noFill/>
+        </p:spPr>
+        <p:txBody>
+          <a:bodyPr wrap="square">
+            <a:spAutoFit/>
+          </a:bodyPr>
+          <a:lstStyle/>
+          <a:p>
+            <a:pPr algn="ctr"/>
+            <a:r>
+              <a:rPr sz="950" b="1" i="0">
+                <a:solidFill>
+                  <a:srgbClr val="CC4F1F"/>
+                </a:solidFill>
+                <a:latin typeface="Calibri"/>
+              </a:rPr>
+              <a:t>Access Control</a:t>
+            </a:r>
+          </a:p>
+        </p:txBody>
+      </p:sp>
+      <p:sp>
+        <p:nvSpPr>
+          <p:cNvPr id="102" name="TextBox 101"/>
+          <p:cNvSpPr txBox="1"/>
+          <p:nvPr/>
+        </p:nvSpPr>
+        <p:spPr>
+          <a:xfrm>
+            <a:off x="9829800" y="5870448"/>
+            <a:ext cx="1783080" cy="219456"/>
+          </a:xfrm>
+          <a:prstGeom prst="rect">
+            <a:avLst/>
+          </a:prstGeom>
+          <a:noFill/>
+        </p:spPr>
+        <p:txBody>
+          <a:bodyPr wrap="square">
+            <a:spAutoFit/>
+          </a:bodyPr>
+          <a:lstStyle/>
+          <a:p>
+            <a:pPr algn="ctr"/>
+            <a:r>
+              <a:rPr sz="800" b="0" i="1">
+                <a:solidFill>
+                  <a:srgbClr val="646464"/>
+                </a:solidFill>
+                <a:latin typeface="Calibri"/>
+              </a:rPr>
+              <a:t>Cognito + ABAC
+tenant isolation</a:t>
+            </a:r>
+          </a:p>
+        </p:txBody>
+      </p:sp>
+      <p:sp>
+        <p:nvSpPr>
+          <p:cNvPr id="103" name="Rounded Rectangle 102"/>
+          <p:cNvSpPr/>
+          <p:nvPr/>
+        </p:nvSpPr>
+        <p:spPr>
+          <a:xfrm>
+            <a:off x="457200" y="6080760"/>
+            <a:ext cx="11247120" cy="347472"/>
+          </a:xfrm>
+          <a:prstGeom prst="roundRect">
+            <a:avLst>
+              <a:gd name="adj" fmla="val 20000"/>
+            </a:avLst>
+          </a:prstGeom>
+          <a:solidFill>
+            <a:srgbClr val="FF6B35"/>
+          </a:solidFill>
+          <a:ln>
+            <a:noFill/>
+          </a:ln>
+        </p:spPr>
+        <p:style>
+          <a:lnRef idx="1">
+            <a:schemeClr val="accent1"/>
+          </a:lnRef>
+          <a:fillRef idx="3">
+            <a:schemeClr val="accent1"/>
+          </a:fillRef>
+          <a:effectRef idx="2">
+            <a:schemeClr val="accent1"/>
+          </a:effectRef>
+          <a:fontRef idx="minor">
+            <a:schemeClr val="lt1"/>
+          </a:fontRef>
+        </p:style>
+        <p:txBody>
+          <a:bodyPr rtlCol="0" anchor="ctr"/>
+          <a:lstStyle/>
+          <a:p>
+            <a:pPr algn="ctr"/>
+          </a:p>
+        </p:txBody>
+      </p:sp>
+      <p:sp>
+        <p:nvSpPr>
+          <p:cNvPr id="104" name="TextBox 103"/>
+          <p:cNvSpPr txBox="1"/>
+          <p:nvPr/>
+        </p:nvSpPr>
+        <p:spPr>
+          <a:xfrm>
+            <a:off x="640080" y="6117336"/>
+            <a:ext cx="10881360" cy="292608"/>
+          </a:xfrm>
+          <a:prstGeom prst="rect">
+            <a:avLst/>
+          </a:prstGeom>
+          <a:noFill/>
+        </p:spPr>
+        <p:txBody>
+          <a:bodyPr wrap="square">
+            <a:spAutoFit/>
+          </a:bodyPr>
+          <a:lstStyle/>
+          <a:p>
+            <a:pPr algn="ctr"/>
+            <a:r>
+              <a:rPr sz="1100" b="1" i="0">
+                <a:solidFill>
+                  <a:srgbClr val="FFFFFF"/>
+                </a:solidFill>
+                <a:latin typeface="Calibri"/>
+              </a:rPr>
+              <a:t>AWS secures the cloud infrastructure.  Nova secures the application + data.  Hospital secures clinical decisions + staff.</a:t>
             </a:r>
           </a:p>
         </p:txBody>
